--- a/Curso Gas B/04 - ITC-ICG 07 - Instalaciones receptoras de combustibles gaseosos/04 - ITC-ICG 07 - Instalaciones receptoras de combustibles gaseosos - Vídeo 2.pptx
+++ b/Curso Gas B/04 - ITC-ICG 07 - Instalaciones receptoras de combustibles gaseosos/04 - ITC-ICG 07 - Instalaciones receptoras de combustibles gaseosos - Vídeo 2.pptx
@@ -21,6 +21,10 @@
     <p:sldId id="269" r:id="rId21"/>
     <p:sldId id="270" r:id="rId22"/>
     <p:sldId id="271" r:id="rId23"/>
+    <p:sldId id="272" r:id="rId24"/>
+    <p:sldId id="273" r:id="rId25"/>
+    <p:sldId id="274" r:id="rId26"/>
+    <p:sldId id="275" r:id="rId27"/>
   </p:sldIdLst>
   <p:sldSz cx="12191695" cy="6858000" type="screen4x3"/>
   <p:notesSz cx="6858000" cy="9144000"/>
@@ -517,12 +521,12 @@
           <a:lstStyle/>
           <a:p>
             <a:r>
-              <a:t>N1: Ya sabes montar. ¿Y los papeles y el arranque?</a:t>
-            </a:r>
-          </a:p>
-          <a:p>
-            <a:r>
-              <a:t>N2: Montar la instalación es la mitad del trabajo; la otra mitad son los papeles y el arranque. En este vídeo recorremos toda la parte administrativa de la ITC-ICG cero siete: si hace falta autorización, cuándo se exige proyecto, qué pruebas hay que hacer antes de entregar, qué certificados se emiten y, sobre todo, el procedimiento paso a paso de la puesta en servicio, con contrato y sin contrato de suministro. Aquí caen preguntas de cifras y de quién hace qué, así que fíjate mucho en los agentes: instalador, distribuidor, suministrador y usuario.</a:t>
+              <a:t>N1: ¿Por qué es tan importante toda esta parte de papeles?</a:t>
+            </a:r>
+          </a:p>
+          <a:p>
+            <a:r>
+              <a:t>N2: Porque montar la instalación es solo la mitad del trabajo; la otra mitad son los papeles y el arranque. En este vídeo recorremos toda la parte administrativa de la ITC-ICG cero siete: si hace falta autorización, cuándo se exige proyecto, qué pruebas hay que hacer antes de entregar, qué certificados se emiten y, sobre todo, el procedimiento paso a paso de la puesta en servicio, con contrato y sin contrato. Aquí caen preguntas de cifras, potencias y presiones, y preguntas de quién hace qué, así que fíjate bien en los agentes: instaladora, distribuidor, suministrador y usuario.</a:t>
             </a:r>
           </a:p>
         </p:txBody>
@@ -592,12 +596,12 @@
           <a:lstStyle/>
           <a:p>
             <a:r>
-              <a:t>N1: Antes de dar gas a una tubería que estaba llena de aire, ¿qué toca hacer?</a:t>
-            </a:r>
-          </a:p>
-          <a:p>
-            <a:r>
-              <a:t>N2: Purgarla, es decir, barrer el aire con gas o con un inerte para que dentro no quede una mezcla de aire y gas dentro de los límites de inflamabilidad. Esa mezcla es justo la que puede arder si salta una chispa. Purgar bien es dejar la tubería solo con gas, fuera del rango explosivo. Es una de las operaciones más delicadas del arranque: purgar mal es arriesgar una deflagración al primer chispazo, o un aparato que ni arranca porque le queda aire en la línea. Se hace con cabeza, ventilando y sin fuentes de ignición cerca.</a:t>
+              <a:t>N1: ¿Por qué dices que solo uno de ellos habla de aparatos?</a:t>
+            </a:r>
+          </a:p>
+          <a:p>
+            <a:r>
+              <a:t>N2: Porque de los tres certificados, solo el individual, el uno erre ge guion tres, tiene que listar los aparatos de consumo conectados o previstos, indicando su consumo calorífico nominal, es decir, cuántos kilovatios consume cada uno. Y tiene toda la lógica: es el único tramo que llega de verdad hasta los aparatos, dentro de la vivienda. El de la acometida y el de la común se quedan por el camino, en la entrada y en el montante, así que no tienen aparatos que listar. Truco para el examen: si una pregunta habla de listar aparatos y su potencia, piensa siempre en el individual.</a:t>
             </a:r>
           </a:p>
         </p:txBody>
@@ -667,12 +671,12 @@
           <a:lstStyle/>
           <a:p>
             <a:r>
-              <a:t>N1: ¿Quién ejecuta la puesta en servicio? Depende de una cosa.</a:t>
-            </a:r>
-          </a:p>
-          <a:p>
-            <a:r>
-              <a:t>N2: Depende de si la instalación está alimentada desde una red de distribución. De forma previa, el futuro usuario formaliza la póliza de abono o el contrato de suministro. Luego, si está alimentada desde red, gas natural o gases licuados del petróleo de red, la puesta en servicio la hace el distribuidor, con personal propio o autorizado, a petición del usuario o del suministrador en su nombre. Si no está alimentada desde red, por ejemplo un depósito propio, las mismas pruebas y el certificado los hace el suministrador. Es el mismo procedimiento; solo cambia quién lo ejecuta, y en el examen suelen jugar con ese cambio de agente.</a:t>
+              <a:t>N1: ¿Y las chimeneas de un edificio nuevo hay que certificarlas aparte?</a:t>
+            </a:r>
+          </a:p>
+          <a:p>
+            <a:r>
+              <a:t>N2: Sí. Si la instalación alimenta a un edificio de nueva planta y ese edificio tiene chimeneas para evacuar los humos, antes de la puesta en servicio hace falta una certificación que acredite que esas chimeneas cumplen las normas de diseño y cálculo y las de materiales que ya vimos en el primer vídeo. Ahora, si el certificado de dirección de obra ya incluye esa acreditación, no hace falta nada más. Pero si no la incluye, tiene que extenderla el técnico facultativo competente responsable de la construcción o un organismo de control. En resumen: alguien con autoridad técnica firma que las chimeneas están bien calculadas y son del material correcto, antes de dar gas.</a:t>
             </a:r>
           </a:p>
         </p:txBody>
@@ -742,12 +746,12 @@
           <a:lstStyle/>
           <a:p>
             <a:r>
-              <a:t>N1: Nueve pasos, pero se agrupan en dos bloques. ¿Cuáles?</a:t>
-            </a:r>
-          </a:p>
-          <a:p>
-            <a:r>
-              <a:t>N2: Los pasos del uno al cinco son comprobar: que la documentación está completa, que las partes visibles y accesibles cumplen la norma, que los locales donde van los aparatos y sus conductos de humos son adecuados, que las válvulas maniobran, y si hay estación de regulación, que funcionan los sistemas de regulación y los dispositivos de seguridad. Los pasos del seis al nueve son rematar: precintar el equipo de medida, es decir el contador, que queda oficial; verificar la estanquidad; dejar la instalación en servicio si todo va bien; y extender el certificado de pruebas previas y puesta en servicio, con copia al titular o usuario. Regla mental: primero compruebo, y solo si va bien, doy gas y firmo.</a:t>
+              <a:t>N1: Cuando doy gas al edificio pero hay viviendas sin contrato, ¿qué hago con esas llaves?</a:t>
+            </a:r>
+          </a:p>
+          <a:p>
+            <a:r>
+              <a:t>N2: Muy buena, porque es lo habitual: das gas al montante, pero muchas viviendas todavía no tienen contrato. Esas llaves de inicio hay que dejarlas cerradas, bloqueadas y precintadas, para que nadie las abra por su cuenta; el precinto es como el sello que salta si alguien lo toca. Y si además la instalación individual o el aparato ni siquiera están montados, se taponan, que es poner un tapón físico en la boca de la llave. Es seguridad pura: puede haber gas en el montante, pero tiene que ser imposible que salga por una salida sin terminar. Lo mismo con las llaves de conexión de los aparatos que están pendientes de instalar o de arrancar.</a:t>
             </a:r>
           </a:p>
         </p:txBody>
@@ -817,12 +821,12 @@
           <a:lstStyle/>
           <a:p>
             <a:r>
-              <a:t>N1: Firmados los papeles, ¿dónde acaban y qué pasa si la instalación estuvo mucho tiempo parada?</a:t>
-            </a:r>
-          </a:p>
-          <a:p>
-            <a:r>
-              <a:t>N2: El distribuidor, o el suministrador si no hay red, archiva un ejemplar del certificado de instalación y del certificado de pruebas previas y puesta en servicio, de forma que el órgano competente de la Comunidad Autónoma pueda consultarlos en todo momento. Y la regla del año, la misma que en el articulado: si una instalación estuvo más de un año sin suministro tras resolverse el contrato, al reabrir se trata como nueva. No se reengancha sin más: la distribuidora comprueba que existe el certificado de la instalación individual archivado y rehace el certificado de pruebas previas y puesta en servicio. Más de un año parado, borrón y cuenta nueva.</a:t>
+              <a:t>N1: ¿Qué es eso de purgar la instalación?</a:t>
+            </a:r>
+          </a:p>
+          <a:p>
+            <a:r>
+              <a:t>N2: Purgar es sacar el aire que hay dentro de la tubería antes de dejarla llena de gas. Piénsalo así: la tubería recién montada está llena de aire; si metes gas de golpe, durante un rato dentro se forma una mezcla de aire y gas, y esa mezcla, en cierta proporción, es explosiva; puede arder con una simple chispa. A esa proporción peligrosa se le llama estar dentro de los límites de inflamabilidad. Purgar bien es barrer ese aire, normalmente empujándolo con el propio gas o con un gas inerte, hasta que dentro solo quede gas, ya fuera del rango explosivo. Es una de las operaciones más delicadas del arranque: purgar mal es arriesgar una deflagración al primer chispazo.</a:t>
             </a:r>
           </a:p>
         </p:txBody>
@@ -892,12 +896,12 @@
           <a:lstStyle/>
           <a:p>
             <a:r>
-              <a:t>N1: ¿Y si se deja la instalación acabada pero aún sin dar de alta?</a:t>
-            </a:r>
-          </a:p>
-          <a:p>
-            <a:r>
-              <a:t>N2: Entonces no hay contrato de suministro domiciliario, así que no interviene el distribuidor para la puesta en servicio. Manda la empresa instaladora que hizo el montaje: realiza las pruebas y verificaciones de entrega del apartado tres punto tres, básicamente la estanquidad, y emite en todos los casos el certificado de instalación, del que entrega copia al titular. Fíjate en esa expresión, en todos los casos: ese certificado no es opcional, siempre se entrega. Es el papel que acredita que lo que dejaste hecho está probado y en condiciones, aunque todavía no haya gas circulando.</a:t>
+              <a:t>N1: Si la vivienda va a tener contrato normal, ¿por dónde se empieza?</a:t>
+            </a:r>
+          </a:p>
+          <a:p>
+            <a:r>
+              <a:t>N2: Primero, antes de nada, el futuro usuario tiene que formalizar la póliza de abono o el contrato de suministro con el suministrador, aportando su documentación. Sin contrato no hay puesta en servicio. Una vez firmado, en las instalaciones alimentadas desde una red de distribución, el usuario, o el suministrador en su nombre, solicita al distribuidor la puesta en servicio. Y es el distribuidor, con personal propio o autorizado, quien viene a hacer las pruebas y a dar el gas. Esta misma solicitud vale también cuando se modifica una instalación. Fíjate en el orden: contrato primero, solicitud después, y el distribuidor ejecuta.</a:t>
             </a:r>
           </a:p>
         </p:txBody>
@@ -967,12 +971,12 @@
           <a:lstStyle/>
           <a:p>
             <a:r>
-              <a:t>N1: ¿Cuándo hay que avisar a la Administración de que has montado?</a:t>
-            </a:r>
-          </a:p>
-          <a:p>
-            <a:r>
-              <a:t>N2: La regla es sencilla: si la instalación necesitaba proyecto, por las potencias o la presión del apartado tres punto dos, se comunica a la Administración; si no necesitaba proyecto, no hace falta comunicar nada. Pero ojo con un matiz que confunde: aunque no comuniques, el suministrador debe tener a disposición de la Administración toda la documentación necesaria de esa instalación. No comunicar no es no documentar: los papeles siempre existen y siempre se guardan, por si la Administración los pide.</a:t>
+              <a:t>N1: ¿Y qué hace exactamente el distribuidor, paso a paso?</a:t>
+            </a:r>
+          </a:p>
+          <a:p>
+            <a:r>
+              <a:t>N2: Son nueve pasos que se parten en dos bloques muy fáciles de recordar. Del uno al cinco, comprobar: que la documentación esté completa, que las partes visibles y accesibles cumplan la normativa, que los locales donde van los aparatos y sus conductos de humos estén bien, que las válvulas se maniobren, y, si hay una estación de regulación, que funcionen sus sistemas de regulación y de seguridad. Del seis al nueve, rematar: precintar el equipo de medida, o sea el contador, verificar la estanquidad, dejar la instalación en servicio si todo va favorable, y extender un certificado de pruebas previas y puesta en servicio, con copia para el titular. La regla mental: primero compruebo, y solo si va bien, doy gas y firmo. El paso seis, precintar el contador, es el que lo deja oficial.</a:t>
             </a:r>
           </a:p>
         </p:txBody>
@@ -1042,12 +1046,237 @@
           <a:lstStyle/>
           <a:p>
             <a:r>
-              <a:t>N1: Tres ideas para cerrar la parte administrativa.</a:t>
-            </a:r>
-          </a:p>
-          <a:p>
-            <a:r>
-              <a:t>N2: Primera, para ejecutar una receptora no necesitas autorización: haces las cosas bien, las documentas y, si tocaba proyecto, las comunicas. Segunda, los disparadores del proyecto: individual por encima de setenta kilovatios, común y acometida por encima de dos mil, cualquier instalación a más de cinco bar sea cual sea la potencia, y las ampliaciones que superen el treinta por ciento; y donde hay proyecto hay certificado de dirección de obra. Y tercera, quién da el gas: con red lo hace el distribuidor en nueve pasos, primero comprobar y luego precintar el contador, probar estanquidad, dar servicio y certificar; sin red lo hace el suministrador; y sin contrato manda la instaladora, que siempre entrega el certificado de instalación al titular. La prueba que no falla nunca es la de estanquidad, y purgar bien es lo que evita un susto en el arranque.</a:t>
+              <a:t>N1: ¿Siempre da el gas el distribuidor?</a:t>
+            </a:r>
+          </a:p>
+          <a:p>
+            <a:r>
+              <a:t>N2: No, depende de si hay red por detrás. Si la instalación se alimenta desde una red de distribución, gas natural o gases del petróleo de red, la puesta en servicio la hace el distribuidor, con personal propio o autorizado, a petición del usuario o del suministrador. Pero si la instalación no se alimenta desde red, por ejemplo con un depósito propio, entonces esas mismas pruebas previas y ese mismo certificado los hace el suministrador. Fíjate: el procedimiento es idéntico, lo único que cambia es quién lo ejecuta. En el examen les gusta jugar justo con este cambio de agente, así que quédate con la pregunta clave: ¿hay red o no?</a:t>
+            </a:r>
+          </a:p>
+        </p:txBody>
+      </p:sp>
+      <p:sp>
+        <p:nvSpPr>
+          <p:cNvPr id="4" name="Slide Number Placeholder 3"/>
+          <p:cNvSpPr>
+            <a:spLocks noGrp="1"/>
+          </p:cNvSpPr>
+          <p:nvPr>
+            <p:ph type="sldNum" idx="5" sz="quarter"/>
+          </p:nvPr>
+        </p:nvSpPr>
+        <p:spPr/>
+      </p:sp>
+    </p:spTree>
+  </p:cSld>
+  <p:clrMapOvr>
+    <a:masterClrMapping/>
+  </p:clrMapOvr>
+</p:notes>
+</file>
+
+<file path=ppt/notesSlides/notesSlide17.xml><?xml version="1.0" encoding="utf-8"?>
+<p:notes xmlns:a="http://schemas.openxmlformats.org/drawingml/2006/main" xmlns:p="http://schemas.openxmlformats.org/presentationml/2006/main" xmlns:r="http://schemas.openxmlformats.org/officeDocument/2006/relationships">
+  <p:cSld>
+    <p:spTree>
+      <p:nvGrpSpPr>
+        <p:cNvPr id="1" name=""/>
+        <p:cNvGrpSpPr/>
+        <p:nvPr/>
+      </p:nvGrpSpPr>
+      <p:grpSpPr>
+        <a:xfrm>
+          <a:off x="0" y="0"/>
+          <a:ext cx="0" cy="0"/>
+          <a:chOff x="0" y="0"/>
+          <a:chExt cx="0" cy="0"/>
+        </a:xfrm>
+      </p:grpSpPr>
+      <p:sp>
+        <p:nvSpPr>
+          <p:cNvPr id="2" name="Slide Image Placeholder 1"/>
+          <p:cNvSpPr>
+            <a:spLocks noGrp="1"/>
+          </p:cNvSpPr>
+          <p:nvPr>
+            <p:ph type="sldImg" idx="2"/>
+          </p:nvPr>
+        </p:nvSpPr>
+        <p:spPr/>
+      </p:sp>
+      <p:sp>
+        <p:nvSpPr>
+          <p:cNvPr id="3" name="Notes Placeholder 2"/>
+          <p:cNvSpPr>
+            <a:spLocks noGrp="1"/>
+          </p:cNvSpPr>
+          <p:nvPr>
+            <p:ph type="body" idx="3" sz="quarter"/>
+          </p:nvPr>
+        </p:nvSpPr>
+        <p:spPr/>
+        <p:txBody>
+          <a:bodyPr/>
+          <a:lstStyle/>
+          <a:p>
+            <a:r>
+              <a:t>N1: ¿Y si la instalación se deja acabada pero sin dar de alta el suministro?</a:t>
+            </a:r>
+          </a:p>
+          <a:p>
+            <a:r>
+              <a:t>N2: Ese es el caso sin contrato de suministro domiciliario: la instalación se termina, pero todavía no se contrata el gas. Aquí no interviene el distribuidor para ninguna puesta en servicio. Es la empresa instaladora, la que ha hecho el montaje, quien realiza las pruebas y verificaciones de entrega, básicamente la estanquidad, y emite, en todos los casos, el certificado de instalación, del que entrega copia al titular. Fíjate en la expresión en todos los casos: ese certificado no es opcional, siempre se entrega. Es la garantía en papel de que lo que se ha montado está probado y en condiciones, aunque todavía no tenga gas.</a:t>
+            </a:r>
+          </a:p>
+        </p:txBody>
+      </p:sp>
+      <p:sp>
+        <p:nvSpPr>
+          <p:cNvPr id="4" name="Slide Number Placeholder 3"/>
+          <p:cNvSpPr>
+            <a:spLocks noGrp="1"/>
+          </p:cNvSpPr>
+          <p:nvPr>
+            <p:ph type="sldNum" idx="5" sz="quarter"/>
+          </p:nvPr>
+        </p:nvSpPr>
+        <p:spPr/>
+      </p:sp>
+    </p:spTree>
+  </p:cSld>
+  <p:clrMapOvr>
+    <a:masterClrMapping/>
+  </p:clrMapOvr>
+</p:notes>
+</file>
+
+<file path=ppt/notesSlides/notesSlide18.xml><?xml version="1.0" encoding="utf-8"?>
+<p:notes xmlns:a="http://schemas.openxmlformats.org/drawingml/2006/main" xmlns:p="http://schemas.openxmlformats.org/presentationml/2006/main" xmlns:r="http://schemas.openxmlformats.org/officeDocument/2006/relationships">
+  <p:cSld>
+    <p:spTree>
+      <p:nvGrpSpPr>
+        <p:cNvPr id="1" name=""/>
+        <p:cNvGrpSpPr/>
+        <p:nvPr/>
+      </p:nvGrpSpPr>
+      <p:grpSpPr>
+        <a:xfrm>
+          <a:off x="0" y="0"/>
+          <a:ext cx="0" cy="0"/>
+          <a:chOff x="0" y="0"/>
+          <a:chExt cx="0" cy="0"/>
+        </a:xfrm>
+      </p:grpSpPr>
+      <p:sp>
+        <p:nvSpPr>
+          <p:cNvPr id="2" name="Slide Image Placeholder 1"/>
+          <p:cNvSpPr>
+            <a:spLocks noGrp="1"/>
+          </p:cNvSpPr>
+          <p:nvPr>
+            <p:ph type="sldImg" idx="2"/>
+          </p:nvPr>
+        </p:nvSpPr>
+        <p:spPr/>
+      </p:sp>
+      <p:sp>
+        <p:nvSpPr>
+          <p:cNvPr id="3" name="Notes Placeholder 2"/>
+          <p:cNvSpPr>
+            <a:spLocks noGrp="1"/>
+          </p:cNvSpPr>
+          <p:nvPr>
+            <p:ph type="body" idx="3" sz="quarter"/>
+          </p:nvPr>
+        </p:nvSpPr>
+        <p:spPr/>
+        <p:txBody>
+          <a:bodyPr/>
+          <a:lstStyle/>
+          <a:p>
+            <a:r>
+              <a:t>N1: Si una casa lleva mucho tiempo sin gas, ¿se reengancha sin más?</a:t>
+            </a:r>
+          </a:p>
+          <a:p>
+            <a:r>
+              <a:t>N2: No, y aquí vuelve una regla que ya salió en el articulado del reglamento: la regla del año. Si una instalación estuvo más de un año sin suministro después de haberse resuelto el contrato, al volver a darle gas se trata como si fuera una instalación nueva. No se reengancha y ya está. La distribuidora comprueba que existe el certificado de la instalación individual archivado y, a continuación, rehace el certificado de pruebas previas y puesta en servicio, con todas sus comprobaciones. La idea, fácil de retener: más de un año parada, borrón y cuenta nueva. Es lógico, porque en un año una instalación abandonada puede haberse degradado sin que nadie la mire.</a:t>
+            </a:r>
+          </a:p>
+        </p:txBody>
+      </p:sp>
+      <p:sp>
+        <p:nvSpPr>
+          <p:cNvPr id="4" name="Slide Number Placeholder 3"/>
+          <p:cNvSpPr>
+            <a:spLocks noGrp="1"/>
+          </p:cNvSpPr>
+          <p:nvPr>
+            <p:ph type="sldNum" idx="5" sz="quarter"/>
+          </p:nvPr>
+        </p:nvSpPr>
+        <p:spPr/>
+      </p:sp>
+    </p:spTree>
+  </p:cSld>
+  <p:clrMapOvr>
+    <a:masterClrMapping/>
+  </p:clrMapOvr>
+</p:notes>
+</file>
+
+<file path=ppt/notesSlides/notesSlide19.xml><?xml version="1.0" encoding="utf-8"?>
+<p:notes xmlns:a="http://schemas.openxmlformats.org/drawingml/2006/main" xmlns:p="http://schemas.openxmlformats.org/presentationml/2006/main" xmlns:r="http://schemas.openxmlformats.org/officeDocument/2006/relationships">
+  <p:cSld>
+    <p:spTree>
+      <p:nvGrpSpPr>
+        <p:cNvPr id="1" name=""/>
+        <p:cNvGrpSpPr/>
+        <p:nvPr/>
+      </p:nvGrpSpPr>
+      <p:grpSpPr>
+        <a:xfrm>
+          <a:off x="0" y="0"/>
+          <a:ext cx="0" cy="0"/>
+          <a:chOff x="0" y="0"/>
+          <a:chExt cx="0" cy="0"/>
+        </a:xfrm>
+      </p:grpSpPr>
+      <p:sp>
+        <p:nvSpPr>
+          <p:cNvPr id="2" name="Slide Image Placeholder 1"/>
+          <p:cNvSpPr>
+            <a:spLocks noGrp="1"/>
+          </p:cNvSpPr>
+          <p:nvPr>
+            <p:ph type="sldImg" idx="2"/>
+          </p:nvPr>
+        </p:nvSpPr>
+        <p:spPr/>
+      </p:sp>
+      <p:sp>
+        <p:nvSpPr>
+          <p:cNvPr id="3" name="Notes Placeholder 2"/>
+          <p:cNvSpPr>
+            <a:spLocks noGrp="1"/>
+          </p:cNvSpPr>
+          <p:nvPr>
+            <p:ph type="body" idx="3" sz="quarter"/>
+          </p:nvPr>
+        </p:nvSpPr>
+        <p:spPr/>
+        <p:txBody>
+          <a:bodyPr/>
+          <a:lstStyle/>
+          <a:p>
+            <a:r>
+              <a:t>N1: ¿Tengo que avisar a la Administración cuando acabo?</a:t>
+            </a:r>
+          </a:p>
+          <a:p>
+            <a:r>
+              <a:t>N2: Solo en un caso, y es fácil de recordar: si la instalación necesitaba proyecto, por las potencias o la presión que vimos, entonces se comunica a la Administración. Si no necesitaba proyecto, que es lo normal en lo doméstico, no hace falta comunicar nada. Pero ojo con una trampa: aunque no comuniques, el suministrador tiene que guardar la documentación de la instalación y tenerla lista por si la Administración la pide. O sea, no comunicar no es lo mismo que no documentar. El papel siempre existe y siempre está disponible; lo que cambia es si además hay que enviar el aviso o no.</a:t>
             </a:r>
           </a:p>
         </p:txBody>
@@ -1117,12 +1346,97 @@
           <a:lstStyle/>
           <a:p>
             <a:r>
-              <a:t>N1: Tres números para orientarte antes de empezar.</a:t>
-            </a:r>
-          </a:p>
-          <a:p>
-            <a:r>
-              <a:t>N2: El primero, setenta kilovatios: por encima, una instalación individual ya necesita proyecto. El segundo, dos mil kilovatios: es el umbral para la instalación común y para la acometida interior. Y el tercero, nueve: son los pasos que da el distribuidor en las pruebas previas y la puesta en servicio, cinco de comprobar y cuatro de rematar. Con estos tres números y una regla de presión, que veremos, tienes controlado cuándo hace falta proyecto y cómo se da el gas.</a:t>
+              <a:t>N1: ¿Qué me dicen estos números antes de empezar?</a:t>
+            </a:r>
+          </a:p>
+          <a:p>
+            <a:r>
+              <a:t>N2: Te resumen el vídeo. Setenta kilovatios es la potencia a partir de la cual una instalación individual necesita proyecto; por debajo, con el certificado del instalador basta. Dos mil kilovatios es el listón para las instalaciones comunes y para las acometidas interiores. Y nueve son los pasos que sigue el distribuidor para dejar una instalación en servicio, desde comprobar la documentación hasta firmar el certificado. Si retienes estos tres, ya tienes el esqueleto de todo lo administrativo.</a:t>
+            </a:r>
+          </a:p>
+        </p:txBody>
+      </p:sp>
+      <p:sp>
+        <p:nvSpPr>
+          <p:cNvPr id="4" name="Slide Number Placeholder 3"/>
+          <p:cNvSpPr>
+            <a:spLocks noGrp="1"/>
+          </p:cNvSpPr>
+          <p:nvPr>
+            <p:ph type="sldNum" idx="5" sz="quarter"/>
+          </p:nvPr>
+        </p:nvSpPr>
+        <p:spPr/>
+      </p:sp>
+    </p:spTree>
+  </p:cSld>
+  <p:clrMapOvr>
+    <a:masterClrMapping/>
+  </p:clrMapOvr>
+</p:notes>
+</file>
+
+<file path=ppt/notesSlides/notesSlide20.xml><?xml version="1.0" encoding="utf-8"?>
+<p:notes xmlns:a="http://schemas.openxmlformats.org/drawingml/2006/main" xmlns:p="http://schemas.openxmlformats.org/presentationml/2006/main" xmlns:r="http://schemas.openxmlformats.org/officeDocument/2006/relationships">
+  <p:cSld>
+    <p:spTree>
+      <p:nvGrpSpPr>
+        <p:cNvPr id="1" name=""/>
+        <p:cNvGrpSpPr/>
+        <p:nvPr/>
+      </p:nvGrpSpPr>
+      <p:grpSpPr>
+        <a:xfrm>
+          <a:off x="0" y="0"/>
+          <a:ext cx="0" cy="0"/>
+          <a:chOff x="0" y="0"/>
+          <a:chExt cx="0" cy="0"/>
+        </a:xfrm>
+      </p:grpSpPr>
+      <p:sp>
+        <p:nvSpPr>
+          <p:cNvPr id="2" name="Slide Image Placeholder 1"/>
+          <p:cNvSpPr>
+            <a:spLocks noGrp="1"/>
+          </p:cNvSpPr>
+          <p:nvPr>
+            <p:ph type="sldImg" idx="2"/>
+          </p:nvPr>
+        </p:nvSpPr>
+        <p:spPr/>
+      </p:sp>
+      <p:sp>
+        <p:nvSpPr>
+          <p:cNvPr id="3" name="Notes Placeholder 2"/>
+          <p:cNvSpPr>
+            <a:spLocks noGrp="1"/>
+          </p:cNvSpPr>
+          <p:nvPr>
+            <p:ph type="body" idx="3" sz="quarter"/>
+          </p:nvPr>
+        </p:nvSpPr>
+        <p:spPr/>
+        <p:txBody>
+          <a:bodyPr/>
+          <a:lstStyle/>
+          <a:p>
+            <a:r>
+              <a:t>N1: Recapitulando, ¿qué me llevo de todo lo administrativo?</a:t>
+            </a:r>
+          </a:p>
+          <a:p>
+            <a:r>
+              <a:t>N2: Vamos a reconstruirlo con sentido. Montar es media faena; la otra media son los papeles y el arranque. Para montar no hace falta autorización, pero sí saber cuándo hace falta proyecto: individual por encima de setenta kilovatios, común y acometida por encima de dos mil, y siempre que se pase de cinco bar. Y proyecto arrastra dirección de obra. Antes de entregar, la prueba estrella es la estanquidad, que la hace quien monta y queda en el certificado de instalación. Los certificados son tres, uno por tramo, y solo el individual, el uno erre ge guion tres, lista los aparatos. Y la puesta en servicio sigue un orden sagrado: primero comprobar, y solo si va bien, precintar el contador, probar la estanquidad, dar gas y firmar.</a:t>
+            </a:r>
+          </a:p>
+          <a:p>
+            <a:r>
+              <a:t>N1: ¿Cómo se pregunta esto y para qué me sirve en la obra?</a:t>
+            </a:r>
+          </a:p>
+          <a:p>
+            <a:r>
+              <a:t>N2: En el examen caen las cifras, setenta, dos mil, cinco bar, treinta por ciento, y el juego de quién hace qué: distribuidor con red, suministrador sin red, instaladora sin contrato. En la obra, esto decide si puedes legalizar o no lo que montas y quién firma cada papel; equivocarte aquí es quedarte con una instalación acabada que no se puede poner en servicio. Hoy ya sabes llevar una instalación desde el último tubo hasta tener gas y sello. Eres más gasista que ayer. En el último vídeo cerramos el tema con la vida de la instalación: mantenimiento, inspecciones y revisiones, anomalías y los modelos de impresos. Te espero para el gran final.</a:t>
             </a:r>
           </a:p>
         </p:txBody>
@@ -1192,12 +1506,12 @@
           <a:lstStyle/>
           <a:p>
             <a:r>
-              <a:t>N1: Antes de montar, ¿tienes que pedir permiso y esperar?</a:t>
-            </a:r>
-          </a:p>
-          <a:p>
-            <a:r>
-              <a:t>N2: No. Punto corto pero preguntable: para ejecutar una instalación receptora no necesitas autorización administrativa previa. No hay que pedir un permiso y quedarte parado esperando respuesta. Basta con hacer las cosas bien, documentarlas y, en su caso, comunicarlas, que lo vemos al final. Recuerda del Tema cero cero la diferencia entre autorización, que es un permiso previo para casos gordos, y comunicación, que es avisar después. Para la mera ejecución de la receptora, aquí no toca ni una ni la otra.</a:t>
+              <a:t>N1: ¿Tengo que pedir permiso a la Administración antes de montar?</a:t>
+            </a:r>
+          </a:p>
+          <a:p>
+            <a:r>
+              <a:t>N2: No, y este punto, aunque es corto, se pregunta. Para ejecutar una instalación receptora no necesitas ninguna autorización administrativa previa; no hay que pedir un permiso y quedarte esperando a que te digan que sí. Basta con hacer las cosas bien, documentarlas con sus certificados y, en algún caso concreto, comunicarlas después. Recuerda la diferencia del tema del reglamento: autorización es pedir permiso antes, y se reserva para casos gordos; comunicación es avisar después. Aquí, para el simple hecho de montar, ni una ni la otra. Arrancas la obra sin papeleo previo.</a:t>
             </a:r>
           </a:p>
         </p:txBody>
@@ -1267,12 +1581,12 @@
           <a:lstStyle/>
           <a:p>
             <a:r>
-              <a:t>N1: Cuatro disparadores de proyecto. ¿Te los sabes de memoria?</a:t>
-            </a:r>
-          </a:p>
-          <a:p>
-            <a:r>
-              <a:t>N2: La instalación individual salta antes, con más de setenta kilovatios, porque es la pequeña. La común y la acometida interior aguantan hasta dos mil kilovatios. Y por encima de todo manda la presión: si la red trabaja a más de cinco bar, hay proyecto siempre, sea cual sea el uso y la potencia. El proyecto contiene todas las descripciones, cálculos y planos para ejecutar, más las instrucciones de funcionamiento, mantenimiento y revisión. En obra esto es clave: saberlo te evita arrancar un trabajo que luego no se puede legalizar por no tener proyecto.</a:t>
+              <a:t>N1: ¿Y cuándo me obligan a hacer un proyecto?</a:t>
+            </a:r>
+          </a:p>
+          <a:p>
+            <a:r>
+              <a:t>N2: Aquí tienes que memorizar tres números y una regla de presión. Una instalación individual necesita proyecto si pasa de setenta kilovatios. Una instalación común, si pasa de dos mil. Una acometida interior, también si pasa de dos mil. Y por encima de todo manda la presión: si la instalación se alimenta de una red que trabaja a más de cinco bar, necesita proyecto siempre, sea cual sea el uso y la potencia. El truco: la individual salta antes, con setenta, porque es la pequeña; la común y la acometida aguantan hasta dos mil. Y añade dos casos más: cuando se usan técnicas o materiales nuevos, y cuando por sus características no se puede cumplir algún requisito sin bajar la seguridad. Saber esto te evita arrancar una obra que luego no se puede legalizar.</a:t>
             </a:r>
           </a:p>
         </p:txBody>
@@ -1342,12 +1656,12 @@
           <a:lstStyle/>
           <a:p>
             <a:r>
-              <a:t>N1: ¿Puedes engordar una instalación poco a poco sin proyecto?</a:t>
-            </a:r>
-          </a:p>
-          <a:p>
-            <a:r>
-              <a:t>N2: No sin límite. Si amplías y con la ampliación superas en un treinta por ciento la potencia de diseño original, o entras en cualquiera de los supuestos de potencia y presión de antes, necesitas proyecto. Es la forma que tiene el reglamento de evitar que se engorde una instalación a base de pequeñas ampliaciones sin control. También hace falta proyecto con nuevas técnicas o materiales, siempre que no bajen la seguridad. Y ata este cabo importante: siempre que hay proyecto, hay un técnico competente que dirige la obra y firma el certificado de dirección de obra. Proyecto implica dirección de obra; si no hay proyecto, lo normal en domésticas, no hay ese certificado.</a:t>
+              <a:t>N1: Si amplío una instalación que ya tenía, ¿también necesito proyecto?</a:t>
+            </a:r>
+          </a:p>
+          <a:p>
+            <a:r>
+              <a:t>N2: Depende de cuánto la amplíes. La regla es esta: si al ampliar superas en un treinta por ciento la potencia de diseño que tenía la instalación al proyectarse, entonces sí necesitas proyecto. También si con la ampliación entras en cualquiera de los supuestos que ya vimos, por ejemplo si te pasas de setenta en una individual. La idea de fondo es lógica: una ampliación pequeña no obliga a nada, pero crecer más de un treinta por ciento ya es harina de otro costal. Es la forma que tiene el reglamento de evitar que alguien engorde una instalación poco a poco, a base de ampliaciones sueltas, sin que nadie la controle con un proyecto.</a:t>
             </a:r>
           </a:p>
         </p:txBody>
@@ -1417,12 +1731,12 @@
           <a:lstStyle/>
           <a:p>
             <a:r>
-              <a:t>N1: ¿Qué prueba no puede faltar antes de entregar?</a:t>
-            </a:r>
-          </a:p>
-          <a:p>
-            <a:r>
-              <a:t>N2: La de estanquidad: tú, la empresa instaladora, tienes que demostrar que la instalación no tiene fugas. Se hace según la UNE sesenta mil seiscientos setenta, parte ocho, en baja presión, o la sesenta mil seiscientos veinte en alta. El resultado positivo se hace constar en el certificado de instalación. Recuerda del Tema cero cero: la prueba la hace quien monta; no la confundas con la inspección, que la hace un tercero. Y un detalle de secuencia: si hay acometida interior enterrada, su certificado va al distribuidor antes de la puesta en marcha, porque lo enterrado, una vez tapado, ya no se revisa a ojo.</a:t>
+              <a:t>N1: ¿Y qué papel sale del proyecto?</a:t>
+            </a:r>
+          </a:p>
+          <a:p>
+            <a:r>
+              <a:t>N2: Van siempre de la mano estas dos ideas: proyecto y dirección de obra. Siempre que una instalación necesita proyecto, hay un técnico competente que dirige la obra y que, al acabar, firma un certificado de dirección de obra. Es su forma de decir: yo he vigilado que esto se monte según el proyecto. Y al revés: si no hay proyecto, que es lo normal en las instalaciones domésticas pequeñas, no hay dirección de obra ni ese certificado. Asócialo como una pareja fija: proyecto implica dirección de obra. En el examen te lo pueden preguntar justo así, para ver si sabes que uno arrastra al otro.</a:t>
             </a:r>
           </a:p>
         </p:txBody>
@@ -1492,12 +1806,12 @@
           <a:lstStyle/>
           <a:p>
             <a:r>
-              <a:t>N1: Tres certificados, uno por tramo. ¿Sabes qué distingue a cada uno?</a:t>
-            </a:r>
-          </a:p>
-          <a:p>
-            <a:r>
-              <a:t>N2: El uno es el de acometida interior, el tramo de entrada; su certificado insiste en las pruebas de resistencia mecánica y estanquidad, según la sesenta mil trescientos diez y la trescientos once, y es el único que menciona la servidumbre de paso. El dos es el de la instalación común, el montante compartido del edificio. Y el tres es el de la instalación individual, lo de dentro de la vivienda; es el único que exige listar los aparatos conectados o previstos con su consumo calorífico nominal, porque es el que llega hasta ellos. Truco para el examen: solo el individual habla de aparatos. Y todos llevan croquis con trazado, material, longitudes, diámetros, accesorios y caudales por tramo: el plano de tu trabajo para quien venga detrás.</a:t>
+              <a:t>N1: ¿Qué prueba hay que hacer antes de entregar la instalación?</a:t>
+            </a:r>
+          </a:p>
+          <a:p>
+            <a:r>
+              <a:t>N2: La prueba de estanquidad, que es la más importante. Estanquidad significa que la instalación no tiene fugas, que no se escapa ni una burbuja de gas por ninguna unión. Antes de entregar, tú, la empresa instaladora, tienes que probarlo, siguiendo la UNE sesenta mil seiscientos setenta guion ocho si es baja presión, o la UNE sesenta mil seiscientos veinte si es alta. Y el resultado positivo se hace constar en el certificado de instalación, o sea, queda por escrito y firmado. Recuerda un matiz del tema del reglamento: la prueba la hace quien monta; no la confundas con la inspección, que la hace un tercero distinto. Una estanquidad mal hecha acaba en olor a gas y, en lo grave, en una deflagración.</a:t>
             </a:r>
           </a:p>
         </p:txBody>
@@ -1567,12 +1881,12 @@
           <a:lstStyle/>
           <a:p>
             <a:r>
-              <a:t>N1: En un edificio de nueva planta con chimeneas, ¿basta con el certificado de instalación?</a:t>
-            </a:r>
-          </a:p>
-          <a:p>
-            <a:r>
-              <a:t>N2: No: hace falta además una certificación específica de las chimeneas, previa a la puesta en servicio, que acredite que cumplen con las normas de diseño y cálculo, la ciento veintitrés mil uno y las dos partes de la trece mil trescientos ochenta y cuatro, y en materiales con la mil ochocientos cincuenta y seis si son metálicas o la NTE-ISH setenta y cuatro si no lo son. Si el certificado de dirección de obra ya incluye esa acreditación, vale; si no, la firma el técnico facultativo competente responsable de la construcción o un organismo de control. Es la garantía de que los humos van a salir bien antes de que entre nadie a vivir.</a:t>
+              <a:t>N1: ¿Y con la parte enterrada hay algo especial?</a:t>
+            </a:r>
+          </a:p>
+          <a:p>
+            <a:r>
+              <a:t>N2: Sí, un detalle de orden que conviene tener claro. Si la instalación tiene acometida interior enterrada, la empresa instaladora tiene que entregar al distribuidor el certificado de esa acometida antes de la puesta en marcha, es decir, antes de dar gas. La lógica es de puro sentido común: lo que va enterrado, una vez tapado, ya no se puede revisar a simple vista. Así que el distribuidor quiere en la mano el papel que garantiza que se probó y que quedó bien, antes de permitir que circule el gas. Primero el certificado sobre la mesa; después, el gas. Nunca al revés.</a:t>
             </a:r>
           </a:p>
         </p:txBody>
@@ -1642,12 +1956,12 @@
           <a:lstStyle/>
           <a:p>
             <a:r>
-              <a:t>N1: Das gas a un edificio, pero muchas viviendas aún no tienen contrato. ¿Qué haces con esas llaves?</a:t>
-            </a:r>
-          </a:p>
-          <a:p>
-            <a:r>
-              <a:t>N2: Cuando pones en servicio, las llaves de inicio de las instalaciones individuales que no arrancan todavía, y las llaves de conexión de los aparatos pendientes de instalar, tienen que quedar cerradas, bloqueadas y precintadas, para que nadie las abra por su cuenta. Y si además la instalación o el aparato ni siquiera están montados, se taponan: un tapón físico en la boca de la llave. Es seguridad pura: puede haber gas en el montante del edificio, pero tiene que ser imposible que salga por una salida sin terminar. En obra, saltarse esto es dejar gas suelto en un local a medias, una fuga esperando a pasar.</a:t>
+              <a:t>N1: ¿Cuántos certificados de instalación hay y en qué se diferencian?</a:t>
+            </a:r>
+          </a:p>
+          <a:p>
+            <a:r>
+              <a:t>N2: Hay tres, uno por cada tramo de la receptora, y no conviene mezclarlos. El uno erre ge guion uno es el de la acometida interior, el tramo de entrada; este es el único que insiste en las pruebas de resistencia mecánica y estanquidad según las normas de acometidas, y el único que menciona la servidumbre de paso. El uno erre ge guion dos es el de la instalación común, el montante compartido del edificio. Y el uno erre ge guion tres es el de la instalación individual, lo de dentro de la vivienda. Los tres llevan croquis: trazado, material, longitudes, diámetros, accesorios y caudales por tramo. Piensa en el croquis como el plano de tu trabajo, para que quien venga detrás entienda por dónde va cada tubo sin abrir la pared.</a:t>
             </a:r>
           </a:p>
         </p:txBody>
@@ -4771,7 +5085,7 @@
                 </a:solidFill>
                 <a:latin typeface="Montserrat"/>
               </a:rPr>
-              <a:t>Proyecto, pruebas, certificados y arranque</a:t>
+              <a:t>Proyecto, certificados y arranque de la instalación</a:t>
             </a:r>
           </a:p>
         </p:txBody>
@@ -4902,7 +5216,7 @@
                 </a:solidFill>
                 <a:latin typeface="Montserrat"/>
               </a:rPr>
-              <a:t>010 / 016</a:t>
+              <a:t>010 / 020</a:t>
             </a:r>
           </a:p>
         </p:txBody>
@@ -4970,7 +5284,7 @@
                 </a:solidFill>
                 <a:latin typeface="Montserrat"/>
               </a:rPr>
-              <a:t>APARTADO 3.5 · PURGA</a:t>
+              <a:t>APARTADO 3.4 · CERTIFICADOS</a:t>
             </a:r>
           </a:p>
         </p:txBody>
@@ -5004,7 +5318,7 @@
                 </a:solidFill>
                 <a:latin typeface="Montserrat"/>
               </a:rPr>
-              <a:t>Purgar antes de dar gas</a:t>
+              <a:t>Solo el individual lista aparatos</a:t>
             </a:r>
           </a:p>
         </p:txBody>
@@ -5052,7 +5366,7 @@
                 </a:solidFill>
                 <a:latin typeface="Montserrat"/>
               </a:rPr>
-              <a:t>Barrer el aire de la tubería</a:t>
+              <a:t>IRG-3 incluye los aparatos</a:t>
             </a:r>
           </a:p>
           <a:p>
@@ -5077,7 +5391,7 @@
                 </a:solidFill>
                 <a:latin typeface="Montserrat"/>
               </a:rPr>
-              <a:t>Sin mezcla aire-gas inflamable dentro</a:t>
+              <a:t>con su consumo nominal</a:t>
             </a:r>
           </a:p>
           <a:p>
@@ -5102,14 +5416,14 @@
                 </a:solidFill>
                 <a:latin typeface="Montserrat"/>
               </a:rPr>
-              <a:t>Dejar la tubería solo con gas</a:t>
-            </a:r>
-          </a:p>
-        </p:txBody>
-      </p:sp>
-      <p:sp>
-        <p:nvSpPr>
-          <p:cNvPr id="8" name="imgph" descr="IMGQ:technician purging gas line valve"/>
+              <a:t>Es el que llega hasta ellos</a:t>
+            </a:r>
+          </a:p>
+        </p:txBody>
+      </p:sp>
+      <p:sp>
+        <p:nvSpPr>
+          <p:cNvPr id="8" name="imgph" descr="IMGQ:gas cooktop and boiler in home"/>
           <p:cNvSpPr/>
           <p:nvPr/>
         </p:nvSpPr>
@@ -5195,7 +5509,7 @@
                 </a:solidFill>
                 <a:latin typeface="Montserrat"/>
               </a:rPr>
-              <a:t>technician purging gas line valve</a:t>
+              <a:t>gas cooktop and boiler in home</a:t>
             </a:r>
           </a:p>
         </p:txBody>
@@ -5292,7 +5606,7 @@
                 </a:solidFill>
                 <a:latin typeface="Montserrat"/>
               </a:rPr>
-              <a:t>011 / 016</a:t>
+              <a:t>011 / 020</a:t>
             </a:r>
           </a:p>
         </p:txBody>
@@ -5360,7 +5674,7 @@
                 </a:solidFill>
                 <a:latin typeface="Montserrat"/>
               </a:rPr>
-              <a:t>APARTADO 3.5.1 · CON CONTRATO</a:t>
+              <a:t>APARTADO 3.4 · CHIMENEAS</a:t>
             </a:r>
           </a:p>
         </p:txBody>
@@ -5394,7 +5708,7 @@
                 </a:solidFill>
                 <a:latin typeface="Montserrat"/>
               </a:rPr>
-              <a:t>¿Quién da el gas?</a:t>
+              <a:t>Chimeneas en obra nueva</a:t>
             </a:r>
           </a:p>
         </p:txBody>
@@ -5442,7 +5756,7 @@
                 </a:solidFill>
                 <a:latin typeface="Montserrat"/>
               </a:rPr>
-              <a:t>Primero: contrato o póliza de abono</a:t>
+              <a:t>Edificio de nueva planta con chimeneas</a:t>
             </a:r>
           </a:p>
           <a:p>
@@ -5467,7 +5781,7 @@
                 </a:solidFill>
                 <a:latin typeface="Montserrat"/>
               </a:rPr>
-              <a:t>Con red → lo hace el distribuidor</a:t>
+              <a:t>Certificación previa a la puesta en servicio</a:t>
             </a:r>
           </a:p>
           <a:p>
@@ -5492,39 +5806,14 @@
                 </a:solidFill>
                 <a:latin typeface="Montserrat"/>
               </a:rPr>
-              <a:t>Sin red → lo hace el suministrador</a:t>
-            </a:r>
-          </a:p>
-          <a:p>
-            <a:pPr>
-              <a:spcAft>
-                <a:spcPts val="1000"/>
-              </a:spcAft>
-            </a:pPr>
-            <a:r>
-              <a:rPr sz="1600" b="1" i="0">
-                <a:solidFill>
-                  <a:srgbClr val="2E3A80"/>
-                </a:solidFill>
-                <a:latin typeface="Montserrat"/>
-              </a:rPr>
-              <a:t>•  </a:t>
-            </a:r>
-            <a:r>
-              <a:rPr sz="1600" b="0" i="0">
-                <a:solidFill>
-                  <a:srgbClr val="1B2330"/>
-                </a:solidFill>
-                <a:latin typeface="Montserrat"/>
-              </a:rPr>
-              <a:t>A petición del usuario</a:t>
-            </a:r>
-          </a:p>
-        </p:txBody>
-      </p:sp>
-      <p:sp>
-        <p:nvSpPr>
-          <p:cNvPr id="8" name="imgph" descr="IMGQ:utility technician gas meter reading"/>
+              <a:t>Técnico competente u organismo de control</a:t>
+            </a:r>
+          </a:p>
+        </p:txBody>
+      </p:sp>
+      <p:sp>
+        <p:nvSpPr>
+          <p:cNvPr id="8" name="imgph" descr="IMGQ:new building rooftop with chimney flues"/>
           <p:cNvSpPr/>
           <p:nvPr/>
         </p:nvSpPr>
@@ -5610,7 +5899,7 @@
                 </a:solidFill>
                 <a:latin typeface="Montserrat"/>
               </a:rPr>
-              <a:t>utility technician gas meter reading</a:t>
+              <a:t>new building rooftop with chimney flues</a:t>
             </a:r>
           </a:p>
         </p:txBody>
@@ -5707,7 +5996,7 @@
                 </a:solidFill>
                 <a:latin typeface="Montserrat"/>
               </a:rPr>
-              <a:t>012 / 016</a:t>
+              <a:t>012 / 020</a:t>
             </a:r>
           </a:p>
         </p:txBody>
@@ -5775,7 +6064,7 @@
                 </a:solidFill>
                 <a:latin typeface="Montserrat"/>
               </a:rPr>
-              <a:t>APARTADO 3.5.1 · 9 PASOS</a:t>
+              <a:t>APARTADO 3.5 · PUESTA EN SERVICIO</a:t>
             </a:r>
           </a:p>
         </p:txBody>
@@ -5809,7 +6098,7 @@
                 </a:solidFill>
                 <a:latin typeface="Montserrat"/>
               </a:rPr>
-              <a:t>Pruebas previas y arranque</a:t>
+              <a:t>Cerrar, bloquear, precintar, taponar</a:t>
             </a:r>
           </a:p>
         </p:txBody>
@@ -5857,7 +6146,7 @@
                 </a:solidFill>
                 <a:latin typeface="Montserrat"/>
               </a:rPr>
-              <a:t>1-5: comprobar (docs, locales, válvulas)</a:t>
+              <a:t>Llaves de viviendas sin contrato</a:t>
             </a:r>
           </a:p>
           <a:p>
@@ -5882,7 +6171,7 @@
                 </a:solidFill>
                 <a:latin typeface="Montserrat"/>
               </a:rPr>
-              <a:t>6: precintar el contador</a:t>
+              <a:t>Cerradas, bloqueadas y precintadas</a:t>
             </a:r>
           </a:p>
           <a:p>
@@ -5907,39 +6196,14 @@
                 </a:solidFill>
                 <a:latin typeface="Montserrat"/>
               </a:rPr>
-              <a:t>7-8: estanquidad y dejar en servicio</a:t>
-            </a:r>
-          </a:p>
-          <a:p>
-            <a:pPr>
-              <a:spcAft>
-                <a:spcPts val="1000"/>
-              </a:spcAft>
-            </a:pPr>
-            <a:r>
-              <a:rPr sz="1600" b="1" i="0">
-                <a:solidFill>
-                  <a:srgbClr val="2E3A80"/>
-                </a:solidFill>
-                <a:latin typeface="Montserrat"/>
-              </a:rPr>
-              <a:t>•  </a:t>
-            </a:r>
-            <a:r>
-              <a:rPr sz="1600" b="0" i="0">
-                <a:solidFill>
-                  <a:srgbClr val="1B2330"/>
-                </a:solidFill>
-                <a:latin typeface="Montserrat"/>
-              </a:rPr>
-              <a:t>9: certificado, copia al titular</a:t>
-            </a:r>
-          </a:p>
-        </p:txBody>
-      </p:sp>
-      <p:sp>
-        <p:nvSpPr>
-          <p:cNvPr id="8" name="imgph" descr="IMGQ:gas meter with security seal"/>
+              <a:t>Taponadas si no hay aparato</a:t>
+            </a:r>
+          </a:p>
+        </p:txBody>
+      </p:sp>
+      <p:sp>
+        <p:nvSpPr>
+          <p:cNvPr id="8" name="imgph" descr="IMGQ:gas valve with security seal"/>
           <p:cNvSpPr/>
           <p:nvPr/>
         </p:nvSpPr>
@@ -6025,7 +6289,7 @@
                 </a:solidFill>
                 <a:latin typeface="Montserrat"/>
               </a:rPr>
-              <a:t>gas meter with security seal</a:t>
+              <a:t>gas valve with security seal</a:t>
             </a:r>
           </a:p>
         </p:txBody>
@@ -6122,7 +6386,7 @@
                 </a:solidFill>
                 <a:latin typeface="Montserrat"/>
               </a:rPr>
-              <a:t>013 / 016</a:t>
+              <a:t>013 / 020</a:t>
             </a:r>
           </a:p>
         </p:txBody>
@@ -6190,7 +6454,7 @@
                 </a:solidFill>
                 <a:latin typeface="Montserrat"/>
               </a:rPr>
-              <a:t>APARTADO 3.5.1 · ARCHIVO</a:t>
+              <a:t>APARTADO 3.5 · PUESTA EN SERVICIO</a:t>
             </a:r>
           </a:p>
         </p:txBody>
@@ -6224,7 +6488,7 @@
                 </a:solidFill>
                 <a:latin typeface="Montserrat"/>
               </a:rPr>
-              <a:t>Guardar los papeles y la regla del año</a:t>
+              <a:t>Purgar: sacar el aire</a:t>
             </a:r>
           </a:p>
         </p:txBody>
@@ -6272,7 +6536,7 @@
                 </a:solidFill>
                 <a:latin typeface="Montserrat"/>
               </a:rPr>
-              <a:t>Archivar instalación y puesta en servicio</a:t>
+              <a:t>Barrer el aire de la tubería</a:t>
             </a:r>
           </a:p>
           <a:p>
@@ -6297,7 +6561,7 @@
                 </a:solidFill>
                 <a:latin typeface="Montserrat"/>
               </a:rPr>
-              <a:t>Consultable por la Comunidad Autónoma</a:t>
+              <a:t>Que no quede mezcla aire-gas</a:t>
             </a:r>
           </a:p>
           <a:p>
@@ -6322,14 +6586,14 @@
                 </a:solidFill>
                 <a:latin typeface="Montserrat"/>
               </a:rPr>
-              <a:t>Más de un año parado → como nueva</a:t>
-            </a:r>
-          </a:p>
-        </p:txBody>
-      </p:sp>
-      <p:sp>
-        <p:nvSpPr>
-          <p:cNvPr id="8" name="imgph" descr="IMGQ:office archive folders shelf"/>
+              <a:t>Fuera de los límites de inflamabilidad</a:t>
+            </a:r>
+          </a:p>
+        </p:txBody>
+      </p:sp>
+      <p:sp>
+        <p:nvSpPr>
+          <p:cNvPr id="8" name="imgph" descr="IMGQ:gas technician purging pipe at valve"/>
           <p:cNvSpPr/>
           <p:nvPr/>
         </p:nvSpPr>
@@ -6415,7 +6679,7 @@
                 </a:solidFill>
                 <a:latin typeface="Montserrat"/>
               </a:rPr>
-              <a:t>office archive folders shelf</a:t>
+              <a:t>gas technician purging pipe at valve</a:t>
             </a:r>
           </a:p>
         </p:txBody>
@@ -6512,7 +6776,7 @@
                 </a:solidFill>
                 <a:latin typeface="Montserrat"/>
               </a:rPr>
-              <a:t>014 / 016</a:t>
+              <a:t>014 / 020</a:t>
             </a:r>
           </a:p>
         </p:txBody>
@@ -6580,7 +6844,7 @@
                 </a:solidFill>
                 <a:latin typeface="Montserrat"/>
               </a:rPr>
-              <a:t>APARTADO 3.5.2 · SIN CONTRATO</a:t>
+              <a:t>APARTADO 3.5.1 · CON CONTRATO</a:t>
             </a:r>
           </a:p>
         </p:txBody>
@@ -6614,7 +6878,7 @@
                 </a:solidFill>
                 <a:latin typeface="Montserrat"/>
               </a:rPr>
-              <a:t>Sin contrato: manda la instaladora</a:t>
+              <a:t>Con contrato de suministro</a:t>
             </a:r>
           </a:p>
         </p:txBody>
@@ -6662,7 +6926,7 @@
                 </a:solidFill>
                 <a:latin typeface="Montserrat"/>
               </a:rPr>
-              <a:t>No interviene el distribuidor</a:t>
+              <a:t>El usuario firma la póliza antes</a:t>
             </a:r>
           </a:p>
           <a:p>
@@ -6687,7 +6951,7 @@
                 </a:solidFill>
                 <a:latin typeface="Montserrat"/>
               </a:rPr>
-              <a:t>La instaladora hace las pruebas del 3.3</a:t>
+              <a:t>Se solicita la puesta en servicio</a:t>
             </a:r>
           </a:p>
           <a:p>
@@ -6712,39 +6976,14 @@
                 </a:solidFill>
                 <a:latin typeface="Montserrat"/>
               </a:rPr>
-              <a:t>Certificado de instalación en todos los casos</a:t>
-            </a:r>
-          </a:p>
-          <a:p>
-            <a:pPr>
-              <a:spcAft>
-                <a:spcPts val="1000"/>
-              </a:spcAft>
-            </a:pPr>
-            <a:r>
-              <a:rPr sz="1600" b="1" i="0">
-                <a:solidFill>
-                  <a:srgbClr val="2E3A80"/>
-                </a:solidFill>
-                <a:latin typeface="Montserrat"/>
-              </a:rPr>
-              <a:t>•  </a:t>
-            </a:r>
-            <a:r>
-              <a:rPr sz="1600" b="0" i="0">
-                <a:solidFill>
-                  <a:srgbClr val="1B2330"/>
-                </a:solidFill>
-                <a:latin typeface="Montserrat"/>
-              </a:rPr>
-              <a:t>Copia al titular</a:t>
-            </a:r>
-          </a:p>
-        </p:txBody>
-      </p:sp>
-      <p:sp>
-        <p:nvSpPr>
-          <p:cNvPr id="8" name="imgph" descr="IMGQ:gas installer clipboard house"/>
+              <a:t>La ejecuta el distribuidor</a:t>
+            </a:r>
+          </a:p>
+        </p:txBody>
+      </p:sp>
+      <p:sp>
+        <p:nvSpPr>
+          <p:cNvPr id="8" name="imgph" descr="IMGQ:person signing a contract at a desk"/>
           <p:cNvSpPr/>
           <p:nvPr/>
         </p:nvSpPr>
@@ -6830,7 +7069,7 @@
                 </a:solidFill>
                 <a:latin typeface="Montserrat"/>
               </a:rPr>
-              <a:t>gas installer clipboard house</a:t>
+              <a:t>person signing a contract at a desk</a:t>
             </a:r>
           </a:p>
         </p:txBody>
@@ -6927,7 +7166,7 @@
                 </a:solidFill>
                 <a:latin typeface="Montserrat"/>
               </a:rPr>
-              <a:t>015 / 016</a:t>
+              <a:t>015 / 020</a:t>
             </a:r>
           </a:p>
         </p:txBody>
@@ -6995,7 +7234,7 @@
                 </a:solidFill>
                 <a:latin typeface="Montserrat"/>
               </a:rPr>
-              <a:t>APARTADO 3.6 · COMUNICACIÓN</a:t>
+              <a:t>APARTADO 3.5.1 · LOS 9 PASOS</a:t>
             </a:r>
           </a:p>
         </p:txBody>
@@ -7029,7 +7268,7 @@
                 </a:solidFill>
                 <a:latin typeface="Montserrat"/>
               </a:rPr>
-              <a:t>Comunicar solo si hubo proyecto</a:t>
+              <a:t>Nueve pasos, dos bloques</a:t>
             </a:r>
           </a:p>
         </p:txBody>
@@ -7077,7 +7316,7 @@
                 </a:solidFill>
                 <a:latin typeface="Montserrat"/>
               </a:rPr>
-              <a:t>Sin proyecto → no se comunica</a:t>
+              <a:t>1-5: comprobar todo</a:t>
             </a:r>
           </a:p>
           <a:p>
@@ -7102,7 +7341,7 @@
                 </a:solidFill>
                 <a:latin typeface="Montserrat"/>
               </a:rPr>
-              <a:t>Con proyecto → se comunica</a:t>
+              <a:t>docs, partes visibles, locales, válvulas</a:t>
             </a:r>
           </a:p>
           <a:p>
@@ -7127,14 +7366,39 @@
                 </a:solidFill>
                 <a:latin typeface="Montserrat"/>
               </a:rPr>
-              <a:t>El suministrador guarda la documentación</a:t>
-            </a:r>
-          </a:p>
-        </p:txBody>
-      </p:sp>
-      <p:sp>
-        <p:nvSpPr>
-          <p:cNvPr id="8" name="imgph" descr="IMGQ:administrative office stamp document"/>
+              <a:t>6-9: precintar contador y estanquidad</a:t>
+            </a:r>
+          </a:p>
+          <a:p>
+            <a:pPr>
+              <a:spcAft>
+                <a:spcPts val="1000"/>
+              </a:spcAft>
+            </a:pPr>
+            <a:r>
+              <a:rPr sz="1600" b="1" i="0">
+                <a:solidFill>
+                  <a:srgbClr val="2E3A80"/>
+                </a:solidFill>
+                <a:latin typeface="Montserrat"/>
+              </a:rPr>
+              <a:t>•  </a:t>
+            </a:r>
+            <a:r>
+              <a:rPr sz="1600" b="0" i="0">
+                <a:solidFill>
+                  <a:srgbClr val="1B2330"/>
+                </a:solidFill>
+                <a:latin typeface="Montserrat"/>
+              </a:rPr>
+              <a:t>dejar en servicio y certificar</a:t>
+            </a:r>
+          </a:p>
+        </p:txBody>
+      </p:sp>
+      <p:sp>
+        <p:nvSpPr>
+          <p:cNvPr id="8" name="imgph" descr="IMGQ:gas meter and regulator being inspected"/>
           <p:cNvSpPr/>
           <p:nvPr/>
         </p:nvSpPr>
@@ -7220,7 +7484,7 @@
                 </a:solidFill>
                 <a:latin typeface="Montserrat"/>
               </a:rPr>
-              <a:t>administrative office stamp document</a:t>
+              <a:t>gas meter and regulator being inspected</a:t>
             </a:r>
           </a:p>
         </p:txBody>
@@ -7317,7 +7581,7 @@
                 </a:solidFill>
                 <a:latin typeface="Montserrat"/>
               </a:rPr>
-              <a:t>016 / 016</a:t>
+              <a:t>016 / 020</a:t>
             </a:r>
           </a:p>
         </p:txBody>
@@ -7364,8 +7628,8 @@
         </p:nvSpPr>
         <p:spPr>
           <a:xfrm>
-            <a:off x="822960" y="640080"/>
-            <a:ext cx="10058400" cy="914400"/>
+            <a:off x="822960" y="457200"/>
+            <a:ext cx="8229600" cy="365760"/>
           </a:xfrm>
           <a:prstGeom prst="rect">
             <a:avLst/>
@@ -7379,13 +7643,13 @@
           <a:lstStyle/>
           <a:p>
             <a:r>
-              <a:rPr sz="3000" b="1" i="0">
-                <a:solidFill>
-                  <a:srgbClr val="1E2761"/>
-                </a:solidFill>
-                <a:latin typeface="Montserrat"/>
-              </a:rPr>
-              <a:t>Qué me llevo</a:t>
+              <a:rPr sz="1200" b="1" i="0">
+                <a:solidFill>
+                  <a:srgbClr val="64748B"/>
+                </a:solidFill>
+                <a:latin typeface="Montserrat"/>
+              </a:rPr>
+              <a:t>APARTADO 3.5.1 · QUIÉN ACTÚA</a:t>
             </a:r>
           </a:p>
         </p:txBody>
@@ -7398,8 +7662,8 @@
         </p:nvSpPr>
         <p:spPr>
           <a:xfrm>
-            <a:off x="822960" y="2011680"/>
-            <a:ext cx="10058400" cy="3657600"/>
+            <a:off x="822960" y="868680"/>
+            <a:ext cx="10515600" cy="914400"/>
           </a:xfrm>
           <a:prstGeom prst="rect">
             <a:avLst/>
@@ -7412,78 +7676,1375 @@
           </a:bodyPr>
           <a:lstStyle/>
           <a:p>
+            <a:r>
+              <a:rPr sz="2700" b="1" i="0">
+                <a:solidFill>
+                  <a:srgbClr val="1E2761"/>
+                </a:solidFill>
+                <a:latin typeface="Montserrat"/>
+              </a:rPr>
+              <a:t>¿Quién da el gas?</a:t>
+            </a:r>
+          </a:p>
+        </p:txBody>
+      </p:sp>
+      <p:sp>
+        <p:nvSpPr>
+          <p:cNvPr id="7" name="TextBox 6"/>
+          <p:cNvSpPr txBox="1"/>
+          <p:nvPr/>
+        </p:nvSpPr>
+        <p:spPr>
+          <a:xfrm>
+            <a:off x="822960" y="1920240"/>
+            <a:ext cx="4983480" cy="4206240"/>
+          </a:xfrm>
+          <a:prstGeom prst="rect">
+            <a:avLst/>
+          </a:prstGeom>
+          <a:noFill/>
+        </p:spPr>
+        <p:txBody>
+          <a:bodyPr wrap="square">
+            <a:spAutoFit/>
+          </a:bodyPr>
+          <a:lstStyle/>
+          <a:p>
             <a:pPr>
               <a:spcAft>
-                <a:spcPts val="1400"/>
+                <a:spcPts val="1000"/>
               </a:spcAft>
             </a:pPr>
             <a:r>
-              <a:rPr sz="2000" b="1" i="0">
+              <a:rPr sz="1600" b="1" i="0">
                 <a:solidFill>
                   <a:srgbClr val="2E3A80"/>
                 </a:solidFill>
                 <a:latin typeface="Montserrat"/>
               </a:rPr>
-              <a:t>✓  </a:t>
-            </a:r>
-            <a:r>
-              <a:rPr sz="2000" b="0" i="0">
+              <a:t>•  </a:t>
+            </a:r>
+            <a:r>
+              <a:rPr sz="1600" b="0" i="0">
                 <a:solidFill>
                   <a:srgbClr val="1B2330"/>
                 </a:solidFill>
                 <a:latin typeface="Montserrat"/>
               </a:rPr>
-              <a:t>Ejecutar no precisa autorización</a:t>
+              <a:t>Con red: el distribuidor</a:t>
             </a:r>
           </a:p>
           <a:p>
             <a:pPr>
               <a:spcAft>
-                <a:spcPts val="1400"/>
+                <a:spcPts val="1000"/>
               </a:spcAft>
             </a:pPr>
             <a:r>
-              <a:rPr sz="2000" b="1" i="0">
+              <a:rPr sz="1600" b="1" i="0">
                 <a:solidFill>
                   <a:srgbClr val="2E3A80"/>
                 </a:solidFill>
                 <a:latin typeface="Montserrat"/>
               </a:rPr>
-              <a:t>✓  </a:t>
-            </a:r>
-            <a:r>
-              <a:rPr sz="2000" b="0" i="0">
+              <a:t>•  </a:t>
+            </a:r>
+            <a:r>
+              <a:rPr sz="1600" b="0" i="0">
                 <a:solidFill>
                   <a:srgbClr val="1B2330"/>
                 </a:solidFill>
                 <a:latin typeface="Montserrat"/>
               </a:rPr>
-              <a:t>Proyecto: 70, 2.000 kW y 5 bar</a:t>
+              <a:t>Sin red: el suministrador</a:t>
             </a:r>
           </a:p>
           <a:p>
             <a:pPr>
               <a:spcAft>
-                <a:spcPts val="1400"/>
+                <a:spcPts val="1000"/>
               </a:spcAft>
             </a:pPr>
             <a:r>
-              <a:rPr sz="2000" b="1" i="0">
+              <a:rPr sz="1600" b="1" i="0">
                 <a:solidFill>
                   <a:srgbClr val="2E3A80"/>
                 </a:solidFill>
                 <a:latin typeface="Montserrat"/>
               </a:rPr>
-              <a:t>✓  </a:t>
-            </a:r>
-            <a:r>
-              <a:rPr sz="2000" b="0" i="0">
+              <a:t>•  </a:t>
+            </a:r>
+            <a:r>
+              <a:rPr sz="1600" b="0" i="0">
                 <a:solidFill>
                   <a:srgbClr val="1B2330"/>
                 </a:solidFill>
                 <a:latin typeface="Montserrat"/>
               </a:rPr>
-              <a:t>Con red da el gas el distribuidor; sin red, el suministrador</a:t>
+              <a:t>Mismas pruebas, cambia el agente</a:t>
+            </a:r>
+          </a:p>
+        </p:txBody>
+      </p:sp>
+      <p:sp>
+        <p:nvSpPr>
+          <p:cNvPr id="8" name="imgph" descr="IMGQ:gas distribution technician at meter cabinet"/>
+          <p:cNvSpPr/>
+          <p:nvPr/>
+        </p:nvSpPr>
+        <p:spPr>
+          <a:xfrm>
+            <a:off x="5806440" y="1051560"/>
+            <a:ext cx="5298947" cy="4629150"/>
+          </a:xfrm>
+          <a:prstGeom prst="roundRect">
+            <a:avLst/>
+          </a:prstGeom>
+          <a:solidFill>
+            <a:srgbClr val="F3F6FB"/>
+          </a:solidFill>
+          <a:ln w="12700">
+            <a:solidFill>
+              <a:srgbClr val="C7D2E6"/>
+            </a:solidFill>
+          </a:ln>
+          <a:effectLst/>
+        </p:spPr>
+        <p:style>
+          <a:lnRef idx="1">
+            <a:schemeClr val="accent1"/>
+          </a:lnRef>
+          <a:fillRef idx="3">
+            <a:schemeClr val="accent1"/>
+          </a:fillRef>
+          <a:effectRef idx="2">
+            <a:schemeClr val="accent1"/>
+          </a:effectRef>
+          <a:fontRef idx="minor">
+            <a:schemeClr val="lt1"/>
+          </a:fontRef>
+        </p:style>
+        <p:txBody>
+          <a:bodyPr rtlCol="0" anchor="ctr"/>
+          <a:lstStyle/>
+          <a:p>
+            <a:pPr algn="ctr"/>
+          </a:p>
+        </p:txBody>
+      </p:sp>
+      <p:sp>
+        <p:nvSpPr>
+          <p:cNvPr id="9" name="TextBox 8"/>
+          <p:cNvSpPr txBox="1"/>
+          <p:nvPr/>
+        </p:nvSpPr>
+        <p:spPr>
+          <a:xfrm>
+            <a:off x="6080760" y="2726055"/>
+            <a:ext cx="4750307" cy="1280160"/>
+          </a:xfrm>
+          <a:prstGeom prst="rect">
+            <a:avLst/>
+          </a:prstGeom>
+          <a:noFill/>
+        </p:spPr>
+        <p:txBody>
+          <a:bodyPr wrap="square">
+            <a:spAutoFit/>
+          </a:bodyPr>
+          <a:lstStyle/>
+          <a:p>
+            <a:pPr algn="ctr"/>
+            <a:r>
+              <a:rPr sz="1400" b="1" i="0">
+                <a:solidFill>
+                  <a:srgbClr val="64748B"/>
+                </a:solidFill>
+                <a:latin typeface="Montserrat"/>
+              </a:rPr>
+              <a:t>IMAGEN REALISTA</a:t>
+            </a:r>
+          </a:p>
+          <a:p>
+            <a:pPr algn="ctr"/>
+            <a:r>
+              <a:rPr sz="1100" b="0" i="1">
+                <a:solidFill>
+                  <a:srgbClr val="64748B"/>
+                </a:solidFill>
+                <a:latin typeface="Montserrat"/>
+              </a:rPr>
+              <a:t>gas distribution technician at meter cabinet</a:t>
+            </a:r>
+          </a:p>
+        </p:txBody>
+      </p:sp>
+    </p:spTree>
+  </p:cSld>
+  <p:clrMapOvr>
+    <a:masterClrMapping/>
+  </p:clrMapOvr>
+</p:sld>
+</file>
+
+<file path=ppt/slides/slide17.xml><?xml version="1.0" encoding="utf-8"?>
+<p:sld xmlns:a="http://schemas.openxmlformats.org/drawingml/2006/main" xmlns:p="http://schemas.openxmlformats.org/presentationml/2006/main" xmlns:r="http://schemas.openxmlformats.org/officeDocument/2006/relationships">
+  <p:cSld>
+    <p:spTree>
+      <p:nvGrpSpPr>
+        <p:cNvPr id="1" name=""/>
+        <p:cNvGrpSpPr/>
+        <p:nvPr/>
+      </p:nvGrpSpPr>
+      <p:grpSpPr/>
+      <p:sp>
+        <p:nvSpPr>
+          <p:cNvPr id="2" name="Rectangle 1"/>
+          <p:cNvSpPr/>
+          <p:nvPr/>
+        </p:nvSpPr>
+        <p:spPr>
+          <a:xfrm>
+            <a:off x="0" y="0"/>
+            <a:ext cx="12191695" cy="6858000"/>
+          </a:xfrm>
+          <a:prstGeom prst="rect">
+            <a:avLst/>
+          </a:prstGeom>
+          <a:solidFill>
+            <a:srgbClr val="FFFFFF"/>
+          </a:solidFill>
+          <a:ln>
+            <a:noFill/>
+          </a:ln>
+          <a:effectLst/>
+        </p:spPr>
+        <p:style>
+          <a:lnRef idx="1">
+            <a:schemeClr val="accent1"/>
+          </a:lnRef>
+          <a:fillRef idx="3">
+            <a:schemeClr val="accent1"/>
+          </a:fillRef>
+          <a:effectRef idx="2">
+            <a:schemeClr val="accent1"/>
+          </a:effectRef>
+          <a:fontRef idx="minor">
+            <a:schemeClr val="lt1"/>
+          </a:fontRef>
+        </p:style>
+        <p:txBody>
+          <a:bodyPr rtlCol="0" anchor="ctr"/>
+          <a:lstStyle/>
+          <a:p>
+            <a:pPr algn="ctr"/>
+          </a:p>
+        </p:txBody>
+      </p:sp>
+      <p:sp>
+        <p:nvSpPr>
+          <p:cNvPr id="3" name="TextBox 2"/>
+          <p:cNvSpPr txBox="1"/>
+          <p:nvPr/>
+        </p:nvSpPr>
+        <p:spPr>
+          <a:xfrm>
+            <a:off x="10607040" y="320040"/>
+            <a:ext cx="1371600" cy="365760"/>
+          </a:xfrm>
+          <a:prstGeom prst="rect">
+            <a:avLst/>
+          </a:prstGeom>
+          <a:noFill/>
+        </p:spPr>
+        <p:txBody>
+          <a:bodyPr wrap="square">
+            <a:spAutoFit/>
+          </a:bodyPr>
+          <a:lstStyle/>
+          <a:p>
+            <a:pPr algn="r"/>
+            <a:r>
+              <a:rPr sz="1000" b="1" i="0">
+                <a:solidFill>
+                  <a:srgbClr val="64748B"/>
+                </a:solidFill>
+                <a:latin typeface="Montserrat"/>
+              </a:rPr>
+              <a:t>017 / 020</a:t>
+            </a:r>
+          </a:p>
+        </p:txBody>
+      </p:sp>
+      <p:sp>
+        <p:nvSpPr>
+          <p:cNvPr id="4" name="TextBox 3"/>
+          <p:cNvSpPr txBox="1"/>
+          <p:nvPr/>
+        </p:nvSpPr>
+        <p:spPr>
+          <a:xfrm>
+            <a:off x="457200" y="6419088"/>
+            <a:ext cx="8229600" cy="365760"/>
+          </a:xfrm>
+          <a:prstGeom prst="rect">
+            <a:avLst/>
+          </a:prstGeom>
+          <a:noFill/>
+        </p:spPr>
+        <p:txBody>
+          <a:bodyPr wrap="square">
+            <a:spAutoFit/>
+          </a:bodyPr>
+          <a:lstStyle/>
+          <a:p>
+            <a:r>
+              <a:rPr sz="900" b="0" i="0">
+                <a:solidFill>
+                  <a:srgbClr val="64748B"/>
+                </a:solidFill>
+                <a:latin typeface="Montserrat"/>
+              </a:rPr>
+              <a:t>Curso Gas B · Tema 04 · ITC-ICG 07 · Documentación y puesta en servicio</a:t>
+            </a:r>
+          </a:p>
+        </p:txBody>
+      </p:sp>
+      <p:sp>
+        <p:nvSpPr>
+          <p:cNvPr id="5" name="TextBox 4"/>
+          <p:cNvSpPr txBox="1"/>
+          <p:nvPr/>
+        </p:nvSpPr>
+        <p:spPr>
+          <a:xfrm>
+            <a:off x="822960" y="457200"/>
+            <a:ext cx="8229600" cy="365760"/>
+          </a:xfrm>
+          <a:prstGeom prst="rect">
+            <a:avLst/>
+          </a:prstGeom>
+          <a:noFill/>
+        </p:spPr>
+        <p:txBody>
+          <a:bodyPr wrap="square">
+            <a:spAutoFit/>
+          </a:bodyPr>
+          <a:lstStyle/>
+          <a:p>
+            <a:r>
+              <a:rPr sz="1200" b="1" i="0">
+                <a:solidFill>
+                  <a:srgbClr val="64748B"/>
+                </a:solidFill>
+                <a:latin typeface="Montserrat"/>
+              </a:rPr>
+              <a:t>APARTADO 3.5.2 · SIN CONTRATO</a:t>
+            </a:r>
+          </a:p>
+        </p:txBody>
+      </p:sp>
+      <p:sp>
+        <p:nvSpPr>
+          <p:cNvPr id="6" name="TextBox 5"/>
+          <p:cNvSpPr txBox="1"/>
+          <p:nvPr/>
+        </p:nvSpPr>
+        <p:spPr>
+          <a:xfrm>
+            <a:off x="822960" y="868680"/>
+            <a:ext cx="10515600" cy="914400"/>
+          </a:xfrm>
+          <a:prstGeom prst="rect">
+            <a:avLst/>
+          </a:prstGeom>
+          <a:noFill/>
+        </p:spPr>
+        <p:txBody>
+          <a:bodyPr wrap="square">
+            <a:spAutoFit/>
+          </a:bodyPr>
+          <a:lstStyle/>
+          <a:p>
+            <a:r>
+              <a:rPr sz="2700" b="1" i="0">
+                <a:solidFill>
+                  <a:srgbClr val="1E2761"/>
+                </a:solidFill>
+                <a:latin typeface="Montserrat"/>
+              </a:rPr>
+              <a:t>Sin contrato: manda la instaladora</a:t>
+            </a:r>
+          </a:p>
+        </p:txBody>
+      </p:sp>
+      <p:sp>
+        <p:nvSpPr>
+          <p:cNvPr id="7" name="TextBox 6"/>
+          <p:cNvSpPr txBox="1"/>
+          <p:nvPr/>
+        </p:nvSpPr>
+        <p:spPr>
+          <a:xfrm>
+            <a:off x="822960" y="1920240"/>
+            <a:ext cx="4983480" cy="4206240"/>
+          </a:xfrm>
+          <a:prstGeom prst="rect">
+            <a:avLst/>
+          </a:prstGeom>
+          <a:noFill/>
+        </p:spPr>
+        <p:txBody>
+          <a:bodyPr wrap="square">
+            <a:spAutoFit/>
+          </a:bodyPr>
+          <a:lstStyle/>
+          <a:p>
+            <a:pPr>
+              <a:spcAft>
+                <a:spcPts val="1000"/>
+              </a:spcAft>
+            </a:pPr>
+            <a:r>
+              <a:rPr sz="1600" b="1" i="0">
+                <a:solidFill>
+                  <a:srgbClr val="2E3A80"/>
+                </a:solidFill>
+                <a:latin typeface="Montserrat"/>
+              </a:rPr>
+              <a:t>•  </a:t>
+            </a:r>
+            <a:r>
+              <a:rPr sz="1600" b="0" i="0">
+                <a:solidFill>
+                  <a:srgbClr val="1B2330"/>
+                </a:solidFill>
+                <a:latin typeface="Montserrat"/>
+              </a:rPr>
+              <a:t>No interviene el distribuidor</a:t>
+            </a:r>
+          </a:p>
+          <a:p>
+            <a:pPr>
+              <a:spcAft>
+                <a:spcPts val="1000"/>
+              </a:spcAft>
+            </a:pPr>
+            <a:r>
+              <a:rPr sz="1600" b="1" i="0">
+                <a:solidFill>
+                  <a:srgbClr val="2E3A80"/>
+                </a:solidFill>
+                <a:latin typeface="Montserrat"/>
+              </a:rPr>
+              <a:t>•  </a:t>
+            </a:r>
+            <a:r>
+              <a:rPr sz="1600" b="0" i="0">
+                <a:solidFill>
+                  <a:srgbClr val="1B2330"/>
+                </a:solidFill>
+                <a:latin typeface="Montserrat"/>
+              </a:rPr>
+              <a:t>La instaladora hace las pruebas</a:t>
+            </a:r>
+          </a:p>
+          <a:p>
+            <a:pPr>
+              <a:spcAft>
+                <a:spcPts val="1000"/>
+              </a:spcAft>
+            </a:pPr>
+            <a:r>
+              <a:rPr sz="1600" b="1" i="0">
+                <a:solidFill>
+                  <a:srgbClr val="2E3A80"/>
+                </a:solidFill>
+                <a:latin typeface="Montserrat"/>
+              </a:rPr>
+              <a:t>•  </a:t>
+            </a:r>
+            <a:r>
+              <a:rPr sz="1600" b="0" i="0">
+                <a:solidFill>
+                  <a:srgbClr val="1B2330"/>
+                </a:solidFill>
+                <a:latin typeface="Montserrat"/>
+              </a:rPr>
+              <a:t>Siempre entrega certificado al titular</a:t>
+            </a:r>
+          </a:p>
+        </p:txBody>
+      </p:sp>
+      <p:sp>
+        <p:nvSpPr>
+          <p:cNvPr id="8" name="imgph" descr="IMGQ:installer handing document to homeowner"/>
+          <p:cNvSpPr/>
+          <p:nvPr/>
+        </p:nvSpPr>
+        <p:spPr>
+          <a:xfrm>
+            <a:off x="5806440" y="1051560"/>
+            <a:ext cx="5298947" cy="4629150"/>
+          </a:xfrm>
+          <a:prstGeom prst="roundRect">
+            <a:avLst/>
+          </a:prstGeom>
+          <a:solidFill>
+            <a:srgbClr val="F3F6FB"/>
+          </a:solidFill>
+          <a:ln w="12700">
+            <a:solidFill>
+              <a:srgbClr val="C7D2E6"/>
+            </a:solidFill>
+          </a:ln>
+          <a:effectLst/>
+        </p:spPr>
+        <p:style>
+          <a:lnRef idx="1">
+            <a:schemeClr val="accent1"/>
+          </a:lnRef>
+          <a:fillRef idx="3">
+            <a:schemeClr val="accent1"/>
+          </a:fillRef>
+          <a:effectRef idx="2">
+            <a:schemeClr val="accent1"/>
+          </a:effectRef>
+          <a:fontRef idx="minor">
+            <a:schemeClr val="lt1"/>
+          </a:fontRef>
+        </p:style>
+        <p:txBody>
+          <a:bodyPr rtlCol="0" anchor="ctr"/>
+          <a:lstStyle/>
+          <a:p>
+            <a:pPr algn="ctr"/>
+          </a:p>
+        </p:txBody>
+      </p:sp>
+      <p:sp>
+        <p:nvSpPr>
+          <p:cNvPr id="9" name="TextBox 8"/>
+          <p:cNvSpPr txBox="1"/>
+          <p:nvPr/>
+        </p:nvSpPr>
+        <p:spPr>
+          <a:xfrm>
+            <a:off x="6080760" y="2726055"/>
+            <a:ext cx="4750307" cy="1280160"/>
+          </a:xfrm>
+          <a:prstGeom prst="rect">
+            <a:avLst/>
+          </a:prstGeom>
+          <a:noFill/>
+        </p:spPr>
+        <p:txBody>
+          <a:bodyPr wrap="square">
+            <a:spAutoFit/>
+          </a:bodyPr>
+          <a:lstStyle/>
+          <a:p>
+            <a:pPr algn="ctr"/>
+            <a:r>
+              <a:rPr sz="1400" b="1" i="0">
+                <a:solidFill>
+                  <a:srgbClr val="64748B"/>
+                </a:solidFill>
+                <a:latin typeface="Montserrat"/>
+              </a:rPr>
+              <a:t>IMAGEN REALISTA</a:t>
+            </a:r>
+          </a:p>
+          <a:p>
+            <a:pPr algn="ctr"/>
+            <a:r>
+              <a:rPr sz="1100" b="0" i="1">
+                <a:solidFill>
+                  <a:srgbClr val="64748B"/>
+                </a:solidFill>
+                <a:latin typeface="Montserrat"/>
+              </a:rPr>
+              <a:t>installer handing document to homeowner</a:t>
+            </a:r>
+          </a:p>
+        </p:txBody>
+      </p:sp>
+    </p:spTree>
+  </p:cSld>
+  <p:clrMapOvr>
+    <a:masterClrMapping/>
+  </p:clrMapOvr>
+</p:sld>
+</file>
+
+<file path=ppt/slides/slide18.xml><?xml version="1.0" encoding="utf-8"?>
+<p:sld xmlns:a="http://schemas.openxmlformats.org/drawingml/2006/main" xmlns:p="http://schemas.openxmlformats.org/presentationml/2006/main" xmlns:r="http://schemas.openxmlformats.org/officeDocument/2006/relationships">
+  <p:cSld>
+    <p:spTree>
+      <p:nvGrpSpPr>
+        <p:cNvPr id="1" name=""/>
+        <p:cNvGrpSpPr/>
+        <p:nvPr/>
+      </p:nvGrpSpPr>
+      <p:grpSpPr/>
+      <p:sp>
+        <p:nvSpPr>
+          <p:cNvPr id="2" name="Rectangle 1"/>
+          <p:cNvSpPr/>
+          <p:nvPr/>
+        </p:nvSpPr>
+        <p:spPr>
+          <a:xfrm>
+            <a:off x="0" y="0"/>
+            <a:ext cx="12191695" cy="6858000"/>
+          </a:xfrm>
+          <a:prstGeom prst="rect">
+            <a:avLst/>
+          </a:prstGeom>
+          <a:solidFill>
+            <a:srgbClr val="FFFFFF"/>
+          </a:solidFill>
+          <a:ln>
+            <a:noFill/>
+          </a:ln>
+          <a:effectLst/>
+        </p:spPr>
+        <p:style>
+          <a:lnRef idx="1">
+            <a:schemeClr val="accent1"/>
+          </a:lnRef>
+          <a:fillRef idx="3">
+            <a:schemeClr val="accent1"/>
+          </a:fillRef>
+          <a:effectRef idx="2">
+            <a:schemeClr val="accent1"/>
+          </a:effectRef>
+          <a:fontRef idx="minor">
+            <a:schemeClr val="lt1"/>
+          </a:fontRef>
+        </p:style>
+        <p:txBody>
+          <a:bodyPr rtlCol="0" anchor="ctr"/>
+          <a:lstStyle/>
+          <a:p>
+            <a:pPr algn="ctr"/>
+          </a:p>
+        </p:txBody>
+      </p:sp>
+      <p:sp>
+        <p:nvSpPr>
+          <p:cNvPr id="3" name="TextBox 2"/>
+          <p:cNvSpPr txBox="1"/>
+          <p:nvPr/>
+        </p:nvSpPr>
+        <p:spPr>
+          <a:xfrm>
+            <a:off x="10607040" y="320040"/>
+            <a:ext cx="1371600" cy="365760"/>
+          </a:xfrm>
+          <a:prstGeom prst="rect">
+            <a:avLst/>
+          </a:prstGeom>
+          <a:noFill/>
+        </p:spPr>
+        <p:txBody>
+          <a:bodyPr wrap="square">
+            <a:spAutoFit/>
+          </a:bodyPr>
+          <a:lstStyle/>
+          <a:p>
+            <a:pPr algn="r"/>
+            <a:r>
+              <a:rPr sz="1000" b="1" i="0">
+                <a:solidFill>
+                  <a:srgbClr val="64748B"/>
+                </a:solidFill>
+                <a:latin typeface="Montserrat"/>
+              </a:rPr>
+              <a:t>018 / 020</a:t>
+            </a:r>
+          </a:p>
+        </p:txBody>
+      </p:sp>
+      <p:sp>
+        <p:nvSpPr>
+          <p:cNvPr id="4" name="TextBox 3"/>
+          <p:cNvSpPr txBox="1"/>
+          <p:nvPr/>
+        </p:nvSpPr>
+        <p:spPr>
+          <a:xfrm>
+            <a:off x="457200" y="6419088"/>
+            <a:ext cx="8229600" cy="365760"/>
+          </a:xfrm>
+          <a:prstGeom prst="rect">
+            <a:avLst/>
+          </a:prstGeom>
+          <a:noFill/>
+        </p:spPr>
+        <p:txBody>
+          <a:bodyPr wrap="square">
+            <a:spAutoFit/>
+          </a:bodyPr>
+          <a:lstStyle/>
+          <a:p>
+            <a:r>
+              <a:rPr sz="900" b="0" i="0">
+                <a:solidFill>
+                  <a:srgbClr val="64748B"/>
+                </a:solidFill>
+                <a:latin typeface="Montserrat"/>
+              </a:rPr>
+              <a:t>Curso Gas B · Tema 04 · ITC-ICG 07 · Documentación y puesta en servicio</a:t>
+            </a:r>
+          </a:p>
+        </p:txBody>
+      </p:sp>
+      <p:sp>
+        <p:nvSpPr>
+          <p:cNvPr id="5" name="TextBox 4"/>
+          <p:cNvSpPr txBox="1"/>
+          <p:nvPr/>
+        </p:nvSpPr>
+        <p:spPr>
+          <a:xfrm>
+            <a:off x="822960" y="457200"/>
+            <a:ext cx="8229600" cy="365760"/>
+          </a:xfrm>
+          <a:prstGeom prst="rect">
+            <a:avLst/>
+          </a:prstGeom>
+          <a:noFill/>
+        </p:spPr>
+        <p:txBody>
+          <a:bodyPr wrap="square">
+            <a:spAutoFit/>
+          </a:bodyPr>
+          <a:lstStyle/>
+          <a:p>
+            <a:r>
+              <a:rPr sz="1200" b="1" i="0">
+                <a:solidFill>
+                  <a:srgbClr val="64748B"/>
+                </a:solidFill>
+                <a:latin typeface="Montserrat"/>
+              </a:rPr>
+              <a:t>APARTADO 3.5.1 · REAPERTURA</a:t>
+            </a:r>
+          </a:p>
+        </p:txBody>
+      </p:sp>
+      <p:sp>
+        <p:nvSpPr>
+          <p:cNvPr id="6" name="TextBox 5"/>
+          <p:cNvSpPr txBox="1"/>
+          <p:nvPr/>
+        </p:nvSpPr>
+        <p:spPr>
+          <a:xfrm>
+            <a:off x="822960" y="868680"/>
+            <a:ext cx="10515600" cy="914400"/>
+          </a:xfrm>
+          <a:prstGeom prst="rect">
+            <a:avLst/>
+          </a:prstGeom>
+          <a:noFill/>
+        </p:spPr>
+        <p:txBody>
+          <a:bodyPr wrap="square">
+            <a:spAutoFit/>
+          </a:bodyPr>
+          <a:lstStyle/>
+          <a:p>
+            <a:r>
+              <a:rPr sz="2700" b="1" i="0">
+                <a:solidFill>
+                  <a:srgbClr val="1E2761"/>
+                </a:solidFill>
+                <a:latin typeface="Montserrat"/>
+              </a:rPr>
+              <a:t>La regla del año</a:t>
+            </a:r>
+          </a:p>
+        </p:txBody>
+      </p:sp>
+      <p:sp>
+        <p:nvSpPr>
+          <p:cNvPr id="7" name="TextBox 6"/>
+          <p:cNvSpPr txBox="1"/>
+          <p:nvPr/>
+        </p:nvSpPr>
+        <p:spPr>
+          <a:xfrm>
+            <a:off x="822960" y="1920240"/>
+            <a:ext cx="4983480" cy="4206240"/>
+          </a:xfrm>
+          <a:prstGeom prst="rect">
+            <a:avLst/>
+          </a:prstGeom>
+          <a:noFill/>
+        </p:spPr>
+        <p:txBody>
+          <a:bodyPr wrap="square">
+            <a:spAutoFit/>
+          </a:bodyPr>
+          <a:lstStyle/>
+          <a:p>
+            <a:pPr>
+              <a:spcAft>
+                <a:spcPts val="1000"/>
+              </a:spcAft>
+            </a:pPr>
+            <a:r>
+              <a:rPr sz="1600" b="1" i="0">
+                <a:solidFill>
+                  <a:srgbClr val="2E3A80"/>
+                </a:solidFill>
+                <a:latin typeface="Montserrat"/>
+              </a:rPr>
+              <a:t>•  </a:t>
+            </a:r>
+            <a:r>
+              <a:rPr sz="1600" b="0" i="0">
+                <a:solidFill>
+                  <a:srgbClr val="1B2330"/>
+                </a:solidFill>
+                <a:latin typeface="Montserrat"/>
+              </a:rPr>
+              <a:t>Más de un año sin suministro</a:t>
+            </a:r>
+          </a:p>
+          <a:p>
+            <a:pPr>
+              <a:spcAft>
+                <a:spcPts val="1000"/>
+              </a:spcAft>
+            </a:pPr>
+            <a:r>
+              <a:rPr sz="1600" b="1" i="0">
+                <a:solidFill>
+                  <a:srgbClr val="2E3A80"/>
+                </a:solidFill>
+                <a:latin typeface="Montserrat"/>
+              </a:rPr>
+              <a:t>•  </a:t>
+            </a:r>
+            <a:r>
+              <a:rPr sz="1600" b="0" i="0">
+                <a:solidFill>
+                  <a:srgbClr val="1B2330"/>
+                </a:solidFill>
+                <a:latin typeface="Montserrat"/>
+              </a:rPr>
+              <a:t>tras resolver el contrato</a:t>
+            </a:r>
+          </a:p>
+          <a:p>
+            <a:pPr>
+              <a:spcAft>
+                <a:spcPts val="1000"/>
+              </a:spcAft>
+            </a:pPr>
+            <a:r>
+              <a:rPr sz="1600" b="1" i="0">
+                <a:solidFill>
+                  <a:srgbClr val="2E3A80"/>
+                </a:solidFill>
+                <a:latin typeface="Montserrat"/>
+              </a:rPr>
+              <a:t>•  </a:t>
+            </a:r>
+            <a:r>
+              <a:rPr sz="1600" b="0" i="0">
+                <a:solidFill>
+                  <a:srgbClr val="1B2330"/>
+                </a:solidFill>
+                <a:latin typeface="Montserrat"/>
+              </a:rPr>
+              <a:t>Se trata como instalación nueva</a:t>
+            </a:r>
+          </a:p>
+        </p:txBody>
+      </p:sp>
+      <p:sp>
+        <p:nvSpPr>
+          <p:cNvPr id="8" name="imgph" descr="IMGQ:old closed gas meter in cabinet"/>
+          <p:cNvSpPr/>
+          <p:nvPr/>
+        </p:nvSpPr>
+        <p:spPr>
+          <a:xfrm>
+            <a:off x="5806440" y="1051560"/>
+            <a:ext cx="5298947" cy="4629150"/>
+          </a:xfrm>
+          <a:prstGeom prst="roundRect">
+            <a:avLst/>
+          </a:prstGeom>
+          <a:solidFill>
+            <a:srgbClr val="F3F6FB"/>
+          </a:solidFill>
+          <a:ln w="12700">
+            <a:solidFill>
+              <a:srgbClr val="C7D2E6"/>
+            </a:solidFill>
+          </a:ln>
+          <a:effectLst/>
+        </p:spPr>
+        <p:style>
+          <a:lnRef idx="1">
+            <a:schemeClr val="accent1"/>
+          </a:lnRef>
+          <a:fillRef idx="3">
+            <a:schemeClr val="accent1"/>
+          </a:fillRef>
+          <a:effectRef idx="2">
+            <a:schemeClr val="accent1"/>
+          </a:effectRef>
+          <a:fontRef idx="minor">
+            <a:schemeClr val="lt1"/>
+          </a:fontRef>
+        </p:style>
+        <p:txBody>
+          <a:bodyPr rtlCol="0" anchor="ctr"/>
+          <a:lstStyle/>
+          <a:p>
+            <a:pPr algn="ctr"/>
+          </a:p>
+        </p:txBody>
+      </p:sp>
+      <p:sp>
+        <p:nvSpPr>
+          <p:cNvPr id="9" name="TextBox 8"/>
+          <p:cNvSpPr txBox="1"/>
+          <p:nvPr/>
+        </p:nvSpPr>
+        <p:spPr>
+          <a:xfrm>
+            <a:off x="6080760" y="2726055"/>
+            <a:ext cx="4750307" cy="1280160"/>
+          </a:xfrm>
+          <a:prstGeom prst="rect">
+            <a:avLst/>
+          </a:prstGeom>
+          <a:noFill/>
+        </p:spPr>
+        <p:txBody>
+          <a:bodyPr wrap="square">
+            <a:spAutoFit/>
+          </a:bodyPr>
+          <a:lstStyle/>
+          <a:p>
+            <a:pPr algn="ctr"/>
+            <a:r>
+              <a:rPr sz="1400" b="1" i="0">
+                <a:solidFill>
+                  <a:srgbClr val="64748B"/>
+                </a:solidFill>
+                <a:latin typeface="Montserrat"/>
+              </a:rPr>
+              <a:t>IMAGEN REALISTA</a:t>
+            </a:r>
+          </a:p>
+          <a:p>
+            <a:pPr algn="ctr"/>
+            <a:r>
+              <a:rPr sz="1100" b="0" i="1">
+                <a:solidFill>
+                  <a:srgbClr val="64748B"/>
+                </a:solidFill>
+                <a:latin typeface="Montserrat"/>
+              </a:rPr>
+              <a:t>old closed gas meter in cabinet</a:t>
+            </a:r>
+          </a:p>
+        </p:txBody>
+      </p:sp>
+    </p:spTree>
+  </p:cSld>
+  <p:clrMapOvr>
+    <a:masterClrMapping/>
+  </p:clrMapOvr>
+</p:sld>
+</file>
+
+<file path=ppt/slides/slide19.xml><?xml version="1.0" encoding="utf-8"?>
+<p:sld xmlns:a="http://schemas.openxmlformats.org/drawingml/2006/main" xmlns:p="http://schemas.openxmlformats.org/presentationml/2006/main" xmlns:r="http://schemas.openxmlformats.org/officeDocument/2006/relationships">
+  <p:cSld>
+    <p:spTree>
+      <p:nvGrpSpPr>
+        <p:cNvPr id="1" name=""/>
+        <p:cNvGrpSpPr/>
+        <p:nvPr/>
+      </p:nvGrpSpPr>
+      <p:grpSpPr/>
+      <p:sp>
+        <p:nvSpPr>
+          <p:cNvPr id="2" name="Rectangle 1"/>
+          <p:cNvSpPr/>
+          <p:nvPr/>
+        </p:nvSpPr>
+        <p:spPr>
+          <a:xfrm>
+            <a:off x="0" y="0"/>
+            <a:ext cx="12191695" cy="6858000"/>
+          </a:xfrm>
+          <a:prstGeom prst="rect">
+            <a:avLst/>
+          </a:prstGeom>
+          <a:solidFill>
+            <a:srgbClr val="FFFFFF"/>
+          </a:solidFill>
+          <a:ln>
+            <a:noFill/>
+          </a:ln>
+          <a:effectLst/>
+        </p:spPr>
+        <p:style>
+          <a:lnRef idx="1">
+            <a:schemeClr val="accent1"/>
+          </a:lnRef>
+          <a:fillRef idx="3">
+            <a:schemeClr val="accent1"/>
+          </a:fillRef>
+          <a:effectRef idx="2">
+            <a:schemeClr val="accent1"/>
+          </a:effectRef>
+          <a:fontRef idx="minor">
+            <a:schemeClr val="lt1"/>
+          </a:fontRef>
+        </p:style>
+        <p:txBody>
+          <a:bodyPr rtlCol="0" anchor="ctr"/>
+          <a:lstStyle/>
+          <a:p>
+            <a:pPr algn="ctr"/>
+          </a:p>
+        </p:txBody>
+      </p:sp>
+      <p:sp>
+        <p:nvSpPr>
+          <p:cNvPr id="3" name="TextBox 2"/>
+          <p:cNvSpPr txBox="1"/>
+          <p:nvPr/>
+        </p:nvSpPr>
+        <p:spPr>
+          <a:xfrm>
+            <a:off x="10607040" y="320040"/>
+            <a:ext cx="1371600" cy="365760"/>
+          </a:xfrm>
+          <a:prstGeom prst="rect">
+            <a:avLst/>
+          </a:prstGeom>
+          <a:noFill/>
+        </p:spPr>
+        <p:txBody>
+          <a:bodyPr wrap="square">
+            <a:spAutoFit/>
+          </a:bodyPr>
+          <a:lstStyle/>
+          <a:p>
+            <a:pPr algn="r"/>
+            <a:r>
+              <a:rPr sz="1000" b="1" i="0">
+                <a:solidFill>
+                  <a:srgbClr val="64748B"/>
+                </a:solidFill>
+                <a:latin typeface="Montserrat"/>
+              </a:rPr>
+              <a:t>019 / 020</a:t>
+            </a:r>
+          </a:p>
+        </p:txBody>
+      </p:sp>
+      <p:sp>
+        <p:nvSpPr>
+          <p:cNvPr id="4" name="TextBox 3"/>
+          <p:cNvSpPr txBox="1"/>
+          <p:nvPr/>
+        </p:nvSpPr>
+        <p:spPr>
+          <a:xfrm>
+            <a:off x="457200" y="6419088"/>
+            <a:ext cx="8229600" cy="365760"/>
+          </a:xfrm>
+          <a:prstGeom prst="rect">
+            <a:avLst/>
+          </a:prstGeom>
+          <a:noFill/>
+        </p:spPr>
+        <p:txBody>
+          <a:bodyPr wrap="square">
+            <a:spAutoFit/>
+          </a:bodyPr>
+          <a:lstStyle/>
+          <a:p>
+            <a:r>
+              <a:rPr sz="900" b="0" i="0">
+                <a:solidFill>
+                  <a:srgbClr val="64748B"/>
+                </a:solidFill>
+                <a:latin typeface="Montserrat"/>
+              </a:rPr>
+              <a:t>Curso Gas B · Tema 04 · ITC-ICG 07 · Documentación y puesta en servicio</a:t>
+            </a:r>
+          </a:p>
+        </p:txBody>
+      </p:sp>
+      <p:sp>
+        <p:nvSpPr>
+          <p:cNvPr id="5" name="TextBox 4"/>
+          <p:cNvSpPr txBox="1"/>
+          <p:nvPr/>
+        </p:nvSpPr>
+        <p:spPr>
+          <a:xfrm>
+            <a:off x="822960" y="457200"/>
+            <a:ext cx="8229600" cy="365760"/>
+          </a:xfrm>
+          <a:prstGeom prst="rect">
+            <a:avLst/>
+          </a:prstGeom>
+          <a:noFill/>
+        </p:spPr>
+        <p:txBody>
+          <a:bodyPr wrap="square">
+            <a:spAutoFit/>
+          </a:bodyPr>
+          <a:lstStyle/>
+          <a:p>
+            <a:r>
+              <a:rPr sz="1200" b="1" i="0">
+                <a:solidFill>
+                  <a:srgbClr val="64748B"/>
+                </a:solidFill>
+                <a:latin typeface="Montserrat"/>
+              </a:rPr>
+              <a:t>APARTADO 3.6 · COMUNICACIÓN</a:t>
+            </a:r>
+          </a:p>
+        </p:txBody>
+      </p:sp>
+      <p:sp>
+        <p:nvSpPr>
+          <p:cNvPr id="6" name="TextBox 5"/>
+          <p:cNvSpPr txBox="1"/>
+          <p:nvPr/>
+        </p:nvSpPr>
+        <p:spPr>
+          <a:xfrm>
+            <a:off x="822960" y="868680"/>
+            <a:ext cx="10515600" cy="914400"/>
+          </a:xfrm>
+          <a:prstGeom prst="rect">
+            <a:avLst/>
+          </a:prstGeom>
+          <a:noFill/>
+        </p:spPr>
+        <p:txBody>
+          <a:bodyPr wrap="square">
+            <a:spAutoFit/>
+          </a:bodyPr>
+          <a:lstStyle/>
+          <a:p>
+            <a:r>
+              <a:rPr sz="2700" b="1" i="0">
+                <a:solidFill>
+                  <a:srgbClr val="1E2761"/>
+                </a:solidFill>
+                <a:latin typeface="Montserrat"/>
+              </a:rPr>
+              <a:t>Comunicar solo si hay proyecto</a:t>
+            </a:r>
+          </a:p>
+        </p:txBody>
+      </p:sp>
+      <p:sp>
+        <p:nvSpPr>
+          <p:cNvPr id="7" name="TextBox 6"/>
+          <p:cNvSpPr txBox="1"/>
+          <p:nvPr/>
+        </p:nvSpPr>
+        <p:spPr>
+          <a:xfrm>
+            <a:off x="822960" y="1920240"/>
+            <a:ext cx="4983480" cy="4206240"/>
+          </a:xfrm>
+          <a:prstGeom prst="rect">
+            <a:avLst/>
+          </a:prstGeom>
+          <a:noFill/>
+        </p:spPr>
+        <p:txBody>
+          <a:bodyPr wrap="square">
+            <a:spAutoFit/>
+          </a:bodyPr>
+          <a:lstStyle/>
+          <a:p>
+            <a:pPr>
+              <a:spcAft>
+                <a:spcPts val="1000"/>
+              </a:spcAft>
+            </a:pPr>
+            <a:r>
+              <a:rPr sz="1600" b="1" i="0">
+                <a:solidFill>
+                  <a:srgbClr val="2E3A80"/>
+                </a:solidFill>
+                <a:latin typeface="Montserrat"/>
+              </a:rPr>
+              <a:t>•  </a:t>
+            </a:r>
+            <a:r>
+              <a:rPr sz="1600" b="0" i="0">
+                <a:solidFill>
+                  <a:srgbClr val="1B2330"/>
+                </a:solidFill>
+                <a:latin typeface="Montserrat"/>
+              </a:rPr>
+              <a:t>Con proyecto: se comunica</a:t>
+            </a:r>
+          </a:p>
+          <a:p>
+            <a:pPr>
+              <a:spcAft>
+                <a:spcPts val="1000"/>
+              </a:spcAft>
+            </a:pPr>
+            <a:r>
+              <a:rPr sz="1600" b="1" i="0">
+                <a:solidFill>
+                  <a:srgbClr val="2E3A80"/>
+                </a:solidFill>
+                <a:latin typeface="Montserrat"/>
+              </a:rPr>
+              <a:t>•  </a:t>
+            </a:r>
+            <a:r>
+              <a:rPr sz="1600" b="0" i="0">
+                <a:solidFill>
+                  <a:srgbClr val="1B2330"/>
+                </a:solidFill>
+                <a:latin typeface="Montserrat"/>
+              </a:rPr>
+              <a:t>Sin proyecto: no hace falta</a:t>
+            </a:r>
+          </a:p>
+          <a:p>
+            <a:pPr>
+              <a:spcAft>
+                <a:spcPts val="1000"/>
+              </a:spcAft>
+            </a:pPr>
+            <a:r>
+              <a:rPr sz="1600" b="1" i="0">
+                <a:solidFill>
+                  <a:srgbClr val="2E3A80"/>
+                </a:solidFill>
+                <a:latin typeface="Montserrat"/>
+              </a:rPr>
+              <a:t>•  </a:t>
+            </a:r>
+            <a:r>
+              <a:rPr sz="1600" b="0" i="0">
+                <a:solidFill>
+                  <a:srgbClr val="1B2330"/>
+                </a:solidFill>
+                <a:latin typeface="Montserrat"/>
+              </a:rPr>
+              <a:t>Pero siempre se guarda la documentación</a:t>
+            </a:r>
+          </a:p>
+        </p:txBody>
+      </p:sp>
+      <p:sp>
+        <p:nvSpPr>
+          <p:cNvPr id="8" name="imgph" descr="IMGQ:filing cabinet with documents and folders"/>
+          <p:cNvSpPr/>
+          <p:nvPr/>
+        </p:nvSpPr>
+        <p:spPr>
+          <a:xfrm>
+            <a:off x="5806440" y="1051560"/>
+            <a:ext cx="5298947" cy="4629150"/>
+          </a:xfrm>
+          <a:prstGeom prst="roundRect">
+            <a:avLst/>
+          </a:prstGeom>
+          <a:solidFill>
+            <a:srgbClr val="F3F6FB"/>
+          </a:solidFill>
+          <a:ln w="12700">
+            <a:solidFill>
+              <a:srgbClr val="C7D2E6"/>
+            </a:solidFill>
+          </a:ln>
+          <a:effectLst/>
+        </p:spPr>
+        <p:style>
+          <a:lnRef idx="1">
+            <a:schemeClr val="accent1"/>
+          </a:lnRef>
+          <a:fillRef idx="3">
+            <a:schemeClr val="accent1"/>
+          </a:fillRef>
+          <a:effectRef idx="2">
+            <a:schemeClr val="accent1"/>
+          </a:effectRef>
+          <a:fontRef idx="minor">
+            <a:schemeClr val="lt1"/>
+          </a:fontRef>
+        </p:style>
+        <p:txBody>
+          <a:bodyPr rtlCol="0" anchor="ctr"/>
+          <a:lstStyle/>
+          <a:p>
+            <a:pPr algn="ctr"/>
+          </a:p>
+        </p:txBody>
+      </p:sp>
+      <p:sp>
+        <p:nvSpPr>
+          <p:cNvPr id="9" name="TextBox 8"/>
+          <p:cNvSpPr txBox="1"/>
+          <p:nvPr/>
+        </p:nvSpPr>
+        <p:spPr>
+          <a:xfrm>
+            <a:off x="6080760" y="2726055"/>
+            <a:ext cx="4750307" cy="1280160"/>
+          </a:xfrm>
+          <a:prstGeom prst="rect">
+            <a:avLst/>
+          </a:prstGeom>
+          <a:noFill/>
+        </p:spPr>
+        <p:txBody>
+          <a:bodyPr wrap="square">
+            <a:spAutoFit/>
+          </a:bodyPr>
+          <a:lstStyle/>
+          <a:p>
+            <a:pPr algn="ctr"/>
+            <a:r>
+              <a:rPr sz="1400" b="1" i="0">
+                <a:solidFill>
+                  <a:srgbClr val="64748B"/>
+                </a:solidFill>
+                <a:latin typeface="Montserrat"/>
+              </a:rPr>
+              <a:t>IMAGEN REALISTA</a:t>
+            </a:r>
+          </a:p>
+          <a:p>
+            <a:pPr algn="ctr"/>
+            <a:r>
+              <a:rPr sz="1100" b="0" i="1">
+                <a:solidFill>
+                  <a:srgbClr val="64748B"/>
+                </a:solidFill>
+                <a:latin typeface="Montserrat"/>
+              </a:rPr>
+              <a:t>filing cabinet with documents and folders</a:t>
             </a:r>
           </a:p>
         </p:txBody>
@@ -7580,7 +9141,7 @@
                 </a:solidFill>
                 <a:latin typeface="Montserrat"/>
               </a:rPr>
-              <a:t>002 / 016</a:t>
+              <a:t>002 / 020</a:t>
             </a:r>
           </a:p>
         </p:txBody>
@@ -7729,7 +9290,7 @@
                 </a:solidFill>
                 <a:latin typeface="Montserrat"/>
               </a:rPr>
-              <a:t>70 kW</a:t>
+              <a:t>70</a:t>
             </a:r>
           </a:p>
         </p:txBody>
@@ -7764,7 +9325,7 @@
                 </a:solidFill>
                 <a:latin typeface="Montserrat"/>
               </a:rPr>
-              <a:t>proyecto en instalación individual</a:t>
+              <a:t>kW: proyecto en instalación individual</a:t>
             </a:r>
           </a:p>
         </p:txBody>
@@ -7845,7 +9406,7 @@
                 </a:solidFill>
                 <a:latin typeface="Montserrat"/>
               </a:rPr>
-              <a:t>2.000 kW</a:t>
+              <a:t>2.000</a:t>
             </a:r>
           </a:p>
         </p:txBody>
@@ -7880,7 +9441,7 @@
                 </a:solidFill>
                 <a:latin typeface="Montserrat"/>
               </a:rPr>
-              <a:t>proyecto en común o acometida</a:t>
+              <a:t>kW: proyecto en común y acometida</a:t>
             </a:r>
           </a:p>
         </p:txBody>
@@ -7996,7 +9557,338 @@
                 </a:solidFill>
                 <a:latin typeface="Montserrat"/>
               </a:rPr>
-              <a:t>pasos de las pruebas previas</a:t>
+              <a:t>pasos de la puesta en servicio</a:t>
+            </a:r>
+          </a:p>
+        </p:txBody>
+      </p:sp>
+    </p:spTree>
+  </p:cSld>
+  <p:clrMapOvr>
+    <a:masterClrMapping/>
+  </p:clrMapOvr>
+</p:sld>
+</file>
+
+<file path=ppt/slides/slide20.xml><?xml version="1.0" encoding="utf-8"?>
+<p:sld xmlns:a="http://schemas.openxmlformats.org/drawingml/2006/main" xmlns:p="http://schemas.openxmlformats.org/presentationml/2006/main" xmlns:r="http://schemas.openxmlformats.org/officeDocument/2006/relationships">
+  <p:cSld>
+    <p:spTree>
+      <p:nvGrpSpPr>
+        <p:cNvPr id="1" name=""/>
+        <p:cNvGrpSpPr/>
+        <p:nvPr/>
+      </p:nvGrpSpPr>
+      <p:grpSpPr/>
+      <p:sp>
+        <p:nvSpPr>
+          <p:cNvPr id="2" name="Rectangle 1"/>
+          <p:cNvSpPr/>
+          <p:nvPr/>
+        </p:nvSpPr>
+        <p:spPr>
+          <a:xfrm>
+            <a:off x="0" y="0"/>
+            <a:ext cx="12191695" cy="6858000"/>
+          </a:xfrm>
+          <a:prstGeom prst="rect">
+            <a:avLst/>
+          </a:prstGeom>
+          <a:solidFill>
+            <a:srgbClr val="1E2761"/>
+          </a:solidFill>
+          <a:ln>
+            <a:noFill/>
+          </a:ln>
+          <a:effectLst/>
+        </p:spPr>
+        <p:style>
+          <a:lnRef idx="1">
+            <a:schemeClr val="accent1"/>
+          </a:lnRef>
+          <a:fillRef idx="3">
+            <a:schemeClr val="accent1"/>
+          </a:fillRef>
+          <a:effectRef idx="2">
+            <a:schemeClr val="accent1"/>
+          </a:effectRef>
+          <a:fontRef idx="minor">
+            <a:schemeClr val="lt1"/>
+          </a:fontRef>
+        </p:style>
+        <p:txBody>
+          <a:bodyPr rtlCol="0" anchor="ctr"/>
+          <a:lstStyle/>
+          <a:p>
+            <a:pPr algn="ctr"/>
+          </a:p>
+        </p:txBody>
+      </p:sp>
+      <p:sp>
+        <p:nvSpPr>
+          <p:cNvPr id="3" name="TextBox 2"/>
+          <p:cNvSpPr txBox="1"/>
+          <p:nvPr/>
+        </p:nvSpPr>
+        <p:spPr>
+          <a:xfrm>
+            <a:off x="822960" y="640080"/>
+            <a:ext cx="10515600" cy="457200"/>
+          </a:xfrm>
+          <a:prstGeom prst="rect">
+            <a:avLst/>
+          </a:prstGeom>
+          <a:noFill/>
+        </p:spPr>
+        <p:txBody>
+          <a:bodyPr wrap="square">
+            <a:spAutoFit/>
+          </a:bodyPr>
+          <a:lstStyle/>
+          <a:p>
+            <a:r>
+              <a:rPr sz="1400" b="1" i="0">
+                <a:solidFill>
+                  <a:srgbClr val="CADCFC"/>
+                </a:solidFill>
+                <a:latin typeface="Montserrat"/>
+              </a:rPr>
+              <a:t>LO QUE YA DOMINAS</a:t>
+            </a:r>
+          </a:p>
+        </p:txBody>
+      </p:sp>
+      <p:sp>
+        <p:nvSpPr>
+          <p:cNvPr id="4" name="TextBox 3"/>
+          <p:cNvSpPr txBox="1"/>
+          <p:nvPr/>
+        </p:nvSpPr>
+        <p:spPr>
+          <a:xfrm>
+            <a:off x="822960" y="1143000"/>
+            <a:ext cx="10515600" cy="1097280"/>
+          </a:xfrm>
+          <a:prstGeom prst="rect">
+            <a:avLst/>
+          </a:prstGeom>
+          <a:noFill/>
+        </p:spPr>
+        <p:txBody>
+          <a:bodyPr wrap="square">
+            <a:spAutoFit/>
+          </a:bodyPr>
+          <a:lstStyle/>
+          <a:p>
+            <a:r>
+              <a:rPr sz="3400" b="1" i="0">
+                <a:solidFill>
+                  <a:srgbClr val="FFFFFF"/>
+                </a:solidFill>
+                <a:latin typeface="Montserrat"/>
+              </a:rPr>
+              <a:t>Ya sabes darle papeles y gas a una instalación</a:t>
+            </a:r>
+          </a:p>
+        </p:txBody>
+      </p:sp>
+      <p:sp>
+        <p:nvSpPr>
+          <p:cNvPr id="5" name="TextBox 4"/>
+          <p:cNvSpPr txBox="1"/>
+          <p:nvPr/>
+        </p:nvSpPr>
+        <p:spPr>
+          <a:xfrm>
+            <a:off x="822960" y="2514600"/>
+            <a:ext cx="10515600" cy="2834640"/>
+          </a:xfrm>
+          <a:prstGeom prst="rect">
+            <a:avLst/>
+          </a:prstGeom>
+          <a:noFill/>
+        </p:spPr>
+        <p:txBody>
+          <a:bodyPr wrap="square">
+            <a:spAutoFit/>
+          </a:bodyPr>
+          <a:lstStyle/>
+          <a:p>
+            <a:pPr>
+              <a:spcAft>
+                <a:spcPts val="1200"/>
+              </a:spcAft>
+            </a:pPr>
+            <a:r>
+              <a:rPr sz="2000" b="1" i="0">
+                <a:solidFill>
+                  <a:srgbClr val="CADCFC"/>
+                </a:solidFill>
+                <a:latin typeface="Montserrat"/>
+              </a:rPr>
+              <a:t>✓  </a:t>
+            </a:r>
+            <a:r>
+              <a:rPr sz="1900" b="0" i="0">
+                <a:solidFill>
+                  <a:srgbClr val="FFFFFF"/>
+                </a:solidFill>
+                <a:latin typeface="Montserrat"/>
+              </a:rPr>
+              <a:t>Proyecto: 70 kW, 2.000 kW y más de 5 bar</a:t>
+            </a:r>
+          </a:p>
+          <a:p>
+            <a:pPr>
+              <a:spcAft>
+                <a:spcPts val="1200"/>
+              </a:spcAft>
+            </a:pPr>
+            <a:r>
+              <a:rPr sz="2000" b="1" i="0">
+                <a:solidFill>
+                  <a:srgbClr val="CADCFC"/>
+                </a:solidFill>
+                <a:latin typeface="Montserrat"/>
+              </a:rPr>
+              <a:t>✓  </a:t>
+            </a:r>
+            <a:r>
+              <a:rPr sz="1900" b="0" i="0">
+                <a:solidFill>
+                  <a:srgbClr val="FFFFFF"/>
+                </a:solidFill>
+                <a:latin typeface="Montserrat"/>
+              </a:rPr>
+              <a:t>La estanquidad la hace quien monta</a:t>
+            </a:r>
+          </a:p>
+          <a:p>
+            <a:pPr>
+              <a:spcAft>
+                <a:spcPts val="1200"/>
+              </a:spcAft>
+            </a:pPr>
+            <a:r>
+              <a:rPr sz="2000" b="1" i="0">
+                <a:solidFill>
+                  <a:srgbClr val="CADCFC"/>
+                </a:solidFill>
+                <a:latin typeface="Montserrat"/>
+              </a:rPr>
+              <a:t>✓  </a:t>
+            </a:r>
+            <a:r>
+              <a:rPr sz="1900" b="0" i="0">
+                <a:solidFill>
+                  <a:srgbClr val="FFFFFF"/>
+                </a:solidFill>
+                <a:latin typeface="Montserrat"/>
+              </a:rPr>
+              <a:t>Puesta en servicio: comprobar y luego dar gas</a:t>
+            </a:r>
+          </a:p>
+          <a:p>
+            <a:pPr>
+              <a:spcAft>
+                <a:spcPts val="1200"/>
+              </a:spcAft>
+            </a:pPr>
+            <a:r>
+              <a:rPr sz="2000" b="1" i="0">
+                <a:solidFill>
+                  <a:srgbClr val="CADCFC"/>
+                </a:solidFill>
+                <a:latin typeface="Montserrat"/>
+              </a:rPr>
+              <a:t>✓  </a:t>
+            </a:r>
+            <a:r>
+              <a:rPr sz="1900" b="0" i="0">
+                <a:solidFill>
+                  <a:srgbClr val="FFFFFF"/>
+                </a:solidFill>
+                <a:latin typeface="Montserrat"/>
+              </a:rPr>
+              <a:t>IRG-1, IRG-2, IRG-3, uno por tramo</a:t>
+            </a:r>
+          </a:p>
+        </p:txBody>
+      </p:sp>
+      <p:sp>
+        <p:nvSpPr>
+          <p:cNvPr id="6" name="Rounded Rectangle 5"/>
+          <p:cNvSpPr/>
+          <p:nvPr/>
+        </p:nvSpPr>
+        <p:spPr>
+          <a:xfrm>
+            <a:off x="822960" y="5532120"/>
+            <a:ext cx="10515600" cy="777240"/>
+          </a:xfrm>
+          <a:prstGeom prst="roundRect">
+            <a:avLst/>
+          </a:prstGeom>
+          <a:solidFill>
+            <a:srgbClr val="2E3A80"/>
+          </a:solidFill>
+          <a:ln>
+            <a:noFill/>
+          </a:ln>
+          <a:effectLst/>
+        </p:spPr>
+        <p:style>
+          <a:lnRef idx="1">
+            <a:schemeClr val="accent1"/>
+          </a:lnRef>
+          <a:fillRef idx="3">
+            <a:schemeClr val="accent1"/>
+          </a:fillRef>
+          <a:effectRef idx="2">
+            <a:schemeClr val="accent1"/>
+          </a:effectRef>
+          <a:fontRef idx="minor">
+            <a:schemeClr val="lt1"/>
+          </a:fontRef>
+        </p:style>
+        <p:txBody>
+          <a:bodyPr rtlCol="0" anchor="ctr"/>
+          <a:lstStyle/>
+          <a:p>
+            <a:pPr algn="ctr"/>
+          </a:p>
+        </p:txBody>
+      </p:sp>
+      <p:sp>
+        <p:nvSpPr>
+          <p:cNvPr id="7" name="TextBox 6"/>
+          <p:cNvSpPr txBox="1"/>
+          <p:nvPr/>
+        </p:nvSpPr>
+        <p:spPr>
+          <a:xfrm>
+            <a:off x="1051560" y="5605272"/>
+            <a:ext cx="10058400" cy="640080"/>
+          </a:xfrm>
+          <a:prstGeom prst="rect">
+            <a:avLst/>
+          </a:prstGeom>
+          <a:noFill/>
+        </p:spPr>
+        <p:txBody>
+          <a:bodyPr wrap="square">
+            <a:spAutoFit/>
+          </a:bodyPr>
+          <a:lstStyle/>
+          <a:p>
+            <a:r>
+              <a:rPr sz="1500" b="1" i="1">
+                <a:solidFill>
+                  <a:srgbClr val="CADCFC"/>
+                </a:solidFill>
+                <a:latin typeface="Montserrat"/>
+              </a:rPr>
+              <a:t>Ya dominas el arranque y el papeleo. Vamos a por el mantenimiento y las inspecciones.</a:t>
             </a:r>
           </a:p>
         </p:txBody>
@@ -8093,7 +9985,7 @@
                 </a:solidFill>
                 <a:latin typeface="Montserrat"/>
               </a:rPr>
-              <a:t>003 / 016</a:t>
+              <a:t>003 / 020</a:t>
             </a:r>
           </a:p>
         </p:txBody>
@@ -8195,7 +10087,7 @@
                 </a:solidFill>
                 <a:latin typeface="Montserrat"/>
               </a:rPr>
-              <a:t>¿Hace falta permiso para montar?</a:t>
+              <a:t>¿Necesito permiso para montar?</a:t>
             </a:r>
           </a:p>
         </p:txBody>
@@ -8293,14 +10185,14 @@
                 </a:solidFill>
                 <a:latin typeface="Montserrat"/>
               </a:rPr>
-              <a:t>Comunicar solo si hubo proyecto</a:t>
-            </a:r>
-          </a:p>
-        </p:txBody>
-      </p:sp>
-      <p:sp>
-        <p:nvSpPr>
-          <p:cNvPr id="8" name="imgph" descr="IMGQ:plumber installing gas pipe wall"/>
+              <a:t>Comunicar solo en ciertos casos</a:t>
+            </a:r>
+          </a:p>
+        </p:txBody>
+      </p:sp>
+      <p:sp>
+        <p:nvSpPr>
+          <p:cNvPr id="8" name="imgph" descr="IMGQ:gas installer working on pipe with wrench"/>
           <p:cNvSpPr/>
           <p:nvPr/>
         </p:nvSpPr>
@@ -8386,7 +10278,7 @@
                 </a:solidFill>
                 <a:latin typeface="Montserrat"/>
               </a:rPr>
-              <a:t>plumber installing gas pipe wall</a:t>
+              <a:t>gas installer working on pipe with wrench</a:t>
             </a:r>
           </a:p>
         </p:txBody>
@@ -8483,7 +10375,7 @@
                 </a:solidFill>
                 <a:latin typeface="Montserrat"/>
               </a:rPr>
-              <a:t>004 / 016</a:t>
+              <a:t>004 / 020</a:t>
             </a:r>
           </a:p>
         </p:txBody>
@@ -8585,7 +10477,7 @@
                 </a:solidFill>
                 <a:latin typeface="Montserrat"/>
               </a:rPr>
-              <a:t>Cuándo hace falta proyecto</a:t>
+              <a:t>¿Cuándo hace falta proyecto?</a:t>
             </a:r>
           </a:p>
         </p:txBody>
@@ -8708,7 +10600,7 @@
                 </a:solidFill>
                 <a:latin typeface="Montserrat"/>
               </a:rPr>
-              <a:t>Más de 5 bar: siempre proyecto</a:t>
+              <a:t>Más de 5 bar: siempre</a:t>
             </a:r>
           </a:p>
         </p:txBody>
@@ -8898,7 +10790,7 @@
                 </a:solidFill>
                 <a:latin typeface="Montserrat"/>
               </a:rPr>
-              <a:t>005 / 016</a:t>
+              <a:t>005 / 020</a:t>
             </a:r>
           </a:p>
         </p:txBody>
@@ -9000,7 +10892,7 @@
                 </a:solidFill>
                 <a:latin typeface="Montserrat"/>
               </a:rPr>
-              <a:t>Ampliaciones y dirección de obra</a:t>
+              <a:t>La regla del 30 %</a:t>
             </a:r>
           </a:p>
         </p:txBody>
@@ -9048,7 +10940,7 @@
                 </a:solidFill>
                 <a:latin typeface="Montserrat"/>
               </a:rPr>
-              <a:t>Ampliar &gt; 30 % de la potencia → proyecto</a:t>
+              <a:t>Ampliar y superar el 30 %</a:t>
             </a:r>
           </a:p>
           <a:p>
@@ -9073,7 +10965,7 @@
                 </a:solidFill>
                 <a:latin typeface="Montserrat"/>
               </a:rPr>
-              <a:t>Nuevas técnicas o materiales → proyecto</a:t>
+              <a:t>de la potencia de diseño inicial</a:t>
             </a:r>
           </a:p>
           <a:p>
@@ -9098,14 +10990,14 @@
                 </a:solidFill>
                 <a:latin typeface="Montserrat"/>
               </a:rPr>
-              <a:t>Proyecto ⇒ certificado de dirección de obra</a:t>
-            </a:r>
-          </a:p>
-        </p:txBody>
-      </p:sp>
-      <p:sp>
-        <p:nvSpPr>
-          <p:cNvPr id="8" name="imgph" descr="IMGQ:engineer signing document clipboard"/>
+              <a:t>O entrar en los otros supuestos</a:t>
+            </a:r>
+          </a:p>
+        </p:txBody>
+      </p:sp>
+      <p:sp>
+        <p:nvSpPr>
+          <p:cNvPr id="8" name="imgph" descr="IMGQ:gas pipe network with branches on wall"/>
           <p:cNvSpPr/>
           <p:nvPr/>
         </p:nvSpPr>
@@ -9191,7 +11083,7 @@
                 </a:solidFill>
                 <a:latin typeface="Montserrat"/>
               </a:rPr>
-              <a:t>engineer signing document clipboard</a:t>
+              <a:t>gas pipe network with branches on wall</a:t>
             </a:r>
           </a:p>
         </p:txBody>
@@ -9288,7 +11180,7 @@
                 </a:solidFill>
                 <a:latin typeface="Montserrat"/>
               </a:rPr>
-              <a:t>006 / 016</a:t>
+              <a:t>006 / 020</a:t>
             </a:r>
           </a:p>
         </p:txBody>
@@ -9356,7 +11248,7 @@
                 </a:solidFill>
                 <a:latin typeface="Montserrat"/>
               </a:rPr>
-              <a:t>APARTADO 3.3 · PRUEBAS DE ENTREGA</a:t>
+              <a:t>APARTADO 3.2 · DIRECCIÓN DE OBRA</a:t>
             </a:r>
           </a:p>
         </p:txBody>
@@ -9390,7 +11282,7 @@
                 </a:solidFill>
                 <a:latin typeface="Montserrat"/>
               </a:rPr>
-              <a:t>La prueba estrella: estanquidad</a:t>
+              <a:t>Proyecto = dirección de obra</a:t>
             </a:r>
           </a:p>
         </p:txBody>
@@ -9438,7 +11330,7 @@
                 </a:solidFill>
                 <a:latin typeface="Montserrat"/>
               </a:rPr>
-              <a:t>Prueba de estanquidad antes de entregar</a:t>
+              <a:t>Si hay proyecto, hay técnico</a:t>
             </a:r>
           </a:p>
           <a:p>
@@ -9463,7 +11355,7 @@
                 </a:solidFill>
                 <a:latin typeface="Montserrat"/>
               </a:rPr>
-              <a:t>UNE 60670-8 (baja) o UNE 60620 (alta)</a:t>
+              <a:t>Emite certificado de dirección de obra</a:t>
             </a:r>
           </a:p>
           <a:p>
@@ -9488,39 +11380,14 @@
                 </a:solidFill>
                 <a:latin typeface="Montserrat"/>
               </a:rPr>
-              <a:t>Resultado positivo al certificado</a:t>
-            </a:r>
-          </a:p>
-          <a:p>
-            <a:pPr>
-              <a:spcAft>
-                <a:spcPts val="1000"/>
-              </a:spcAft>
-            </a:pPr>
-            <a:r>
-              <a:rPr sz="1600" b="1" i="0">
-                <a:solidFill>
-                  <a:srgbClr val="2E3A80"/>
-                </a:solidFill>
-                <a:latin typeface="Montserrat"/>
-              </a:rPr>
-              <a:t>•  </a:t>
-            </a:r>
-            <a:r>
-              <a:rPr sz="1600" b="0" i="0">
-                <a:solidFill>
-                  <a:srgbClr val="1B2330"/>
-                </a:solidFill>
-                <a:latin typeface="Montserrat"/>
-              </a:rPr>
-              <a:t>Enterrada: certificado antes del gas</a:t>
-            </a:r>
-          </a:p>
-        </p:txBody>
-      </p:sp>
-      <p:sp>
-        <p:nvSpPr>
-          <p:cNvPr id="8" name="imgph" descr="IMGQ:gas pressure test manometer pipe"/>
+              <a:t>Sin proyecto, no hay dirección</a:t>
+            </a:r>
+          </a:p>
+        </p:txBody>
+      </p:sp>
+      <p:sp>
+        <p:nvSpPr>
+          <p:cNvPr id="8" name="imgph" descr="IMGQ:technical engineer with hard hat on construction site"/>
           <p:cNvSpPr/>
           <p:nvPr/>
         </p:nvSpPr>
@@ -9606,7 +11473,7 @@
                 </a:solidFill>
                 <a:latin typeface="Montserrat"/>
               </a:rPr>
-              <a:t>gas pressure test manometer pipe</a:t>
+              <a:t>technical engineer with hard hat on construction site</a:t>
             </a:r>
           </a:p>
         </p:txBody>
@@ -9703,7 +11570,7 @@
                 </a:solidFill>
                 <a:latin typeface="Montserrat"/>
               </a:rPr>
-              <a:t>007 / 016</a:t>
+              <a:t>007 / 020</a:t>
             </a:r>
           </a:p>
         </p:txBody>
@@ -9771,7 +11638,7 @@
                 </a:solidFill>
                 <a:latin typeface="Montserrat"/>
               </a:rPr>
-              <a:t>APARTADO 3.4 · CERTIFICADOS</a:t>
+              <a:t>APARTADO 3.3 · PRUEBAS DE ENTREGA</a:t>
             </a:r>
           </a:p>
         </p:txBody>
@@ -9805,7 +11672,7 @@
                 </a:solidFill>
                 <a:latin typeface="Montserrat"/>
               </a:rPr>
-              <a:t>Los tres certificados de instalación</a:t>
+              <a:t>La prueba estrella: estanquidad</a:t>
             </a:r>
           </a:p>
         </p:txBody>
@@ -9853,7 +11720,7 @@
                 </a:solidFill>
                 <a:latin typeface="Montserrat"/>
               </a:rPr>
-              <a:t>IRG-1: acometida interior</a:t>
+              <a:t>La hace la empresa instaladora</a:t>
             </a:r>
           </a:p>
           <a:p>
@@ -9878,7 +11745,7 @@
                 </a:solidFill>
                 <a:latin typeface="Montserrat"/>
               </a:rPr>
-              <a:t>IRG-2: instalación común</a:t>
+              <a:t>UNE 60670-8 (baja) o 60620 (alta)</a:t>
             </a:r>
           </a:p>
           <a:p>
@@ -9903,39 +11770,14 @@
                 </a:solidFill>
                 <a:latin typeface="Montserrat"/>
               </a:rPr>
-              <a:t>IRG-3: instalación individual</a:t>
-            </a:r>
-          </a:p>
-          <a:p>
-            <a:pPr>
-              <a:spcAft>
-                <a:spcPts val="1000"/>
-              </a:spcAft>
-            </a:pPr>
-            <a:r>
-              <a:rPr sz="1600" b="1" i="0">
-                <a:solidFill>
-                  <a:srgbClr val="2E3A80"/>
-                </a:solidFill>
-                <a:latin typeface="Montserrat"/>
-              </a:rPr>
-              <a:t>•  </a:t>
-            </a:r>
-            <a:r>
-              <a:rPr sz="1600" b="0" i="0">
-                <a:solidFill>
-                  <a:srgbClr val="1B2330"/>
-                </a:solidFill>
-                <a:latin typeface="Montserrat"/>
-              </a:rPr>
-              <a:t>Solo el IRG-3 lista aparatos</a:t>
-            </a:r>
-          </a:p>
-        </p:txBody>
-      </p:sp>
-      <p:sp>
-        <p:nvSpPr>
-          <p:cNvPr id="8" name="imgph" descr="IMGQ:hand filling paper form desk"/>
+              <a:t>Resultado positivo en el certificado</a:t>
+            </a:r>
+          </a:p>
+        </p:txBody>
+      </p:sp>
+      <p:sp>
+        <p:nvSpPr>
+          <p:cNvPr id="8" name="imgph" descr="IMGQ:pressure gauge manometer on gas pipe test"/>
           <p:cNvSpPr/>
           <p:nvPr/>
         </p:nvSpPr>
@@ -10021,7 +11863,7 @@
                 </a:solidFill>
                 <a:latin typeface="Montserrat"/>
               </a:rPr>
-              <a:t>hand filling paper form desk</a:t>
+              <a:t>pressure gauge manometer on gas pipe test</a:t>
             </a:r>
           </a:p>
         </p:txBody>
@@ -10118,7 +11960,7 @@
                 </a:solidFill>
                 <a:latin typeface="Montserrat"/>
               </a:rPr>
-              <a:t>008 / 016</a:t>
+              <a:t>008 / 020</a:t>
             </a:r>
           </a:p>
         </p:txBody>
@@ -10186,7 +12028,7 @@
                 </a:solidFill>
                 <a:latin typeface="Montserrat"/>
               </a:rPr>
-              <a:t>APARTADO 3.4 · CHIMENEAS</a:t>
+              <a:t>APARTADO 3.3 · ACOMETIDA ENTERRADA</a:t>
             </a:r>
           </a:p>
         </p:txBody>
@@ -10220,7 +12062,7 @@
                 </a:solidFill>
                 <a:latin typeface="Montserrat"/>
               </a:rPr>
-              <a:t>Certificación de chimeneas</a:t>
+              <a:t>Enterrado: el certificado, antes</a:t>
             </a:r>
           </a:p>
         </p:txBody>
@@ -10268,7 +12110,7 @@
                 </a:solidFill>
                 <a:latin typeface="Montserrat"/>
               </a:rPr>
-              <a:t>Obra nueva con chimeneas</a:t>
+              <a:t>Acometida interior enterrada</a:t>
             </a:r>
           </a:p>
           <a:p>
@@ -10293,7 +12135,7 @@
                 </a:solidFill>
                 <a:latin typeface="Montserrat"/>
               </a:rPr>
-              <a:t>Previa a la puesta en servicio</a:t>
+              <a:t>Certificado al distribuidor</a:t>
             </a:r>
           </a:p>
           <a:p>
@@ -10318,14 +12160,14 @@
                 </a:solidFill>
                 <a:latin typeface="Montserrat"/>
               </a:rPr>
-              <a:t>La firma el técnico u organismo de control</a:t>
-            </a:r>
-          </a:p>
-        </p:txBody>
-      </p:sp>
-      <p:sp>
-        <p:nvSpPr>
-          <p:cNvPr id="8" name="imgph" descr="IMGQ:inspector checking building chimney"/>
+              <a:t>Antes de la puesta en marcha</a:t>
+            </a:r>
+          </a:p>
+        </p:txBody>
+      </p:sp>
+      <p:sp>
+        <p:nvSpPr>
+          <p:cNvPr id="8" name="imgph" descr="IMGQ:buried gas pipe connection underground"/>
           <p:cNvSpPr/>
           <p:nvPr/>
         </p:nvSpPr>
@@ -10411,7 +12253,7 @@
                 </a:solidFill>
                 <a:latin typeface="Montserrat"/>
               </a:rPr>
-              <a:t>inspector checking building chimney</a:t>
+              <a:t>buried gas pipe connection underground</a:t>
             </a:r>
           </a:p>
         </p:txBody>
@@ -10508,7 +12350,7 @@
                 </a:solidFill>
                 <a:latin typeface="Montserrat"/>
               </a:rPr>
-              <a:t>009 / 016</a:t>
+              <a:t>009 / 020</a:t>
             </a:r>
           </a:p>
         </p:txBody>
@@ -10576,7 +12418,7 @@
                 </a:solidFill>
                 <a:latin typeface="Montserrat"/>
               </a:rPr>
-              <a:t>APARTADO 3.5 · PUESTA EN SERVICIO</a:t>
+              <a:t>APARTADO 3.4 · CERTIFICADOS</a:t>
             </a:r>
           </a:p>
         </p:txBody>
@@ -10610,7 +12452,7 @@
                 </a:solidFill>
                 <a:latin typeface="Montserrat"/>
               </a:rPr>
-              <a:t>Cerrar, bloquear, precintar, taponar</a:t>
+              <a:t>Tres certificados, uno por tramo</a:t>
             </a:r>
           </a:p>
         </p:txBody>
@@ -10658,7 +12500,7 @@
                 </a:solidFill>
                 <a:latin typeface="Montserrat"/>
               </a:rPr>
-              <a:t>Llaves sin contrato: cerradas y precintadas</a:t>
+              <a:t>IRG-1: acometida interior</a:t>
             </a:r>
           </a:p>
           <a:p>
@@ -10683,7 +12525,7 @@
                 </a:solidFill>
                 <a:latin typeface="Montserrat"/>
               </a:rPr>
-              <a:t>Bloqueadas: que nadie las abra</a:t>
+              <a:t>IRG-2: instalación común</a:t>
             </a:r>
           </a:p>
           <a:p>
@@ -10708,7 +12550,7 @@
                 </a:solidFill>
                 <a:latin typeface="Montserrat"/>
               </a:rPr>
-              <a:t>Taponadas si no hay aparato</a:t>
+              <a:t>IRG-3: instalación individual</a:t>
             </a:r>
           </a:p>
           <a:p>
@@ -10733,14 +12575,14 @@
                 </a:solidFill>
                 <a:latin typeface="Montserrat"/>
               </a:rPr>
-              <a:t>Gas en el montante, nunca suelto</a:t>
-            </a:r>
-          </a:p>
-        </p:txBody>
-      </p:sp>
-      <p:sp>
-        <p:nvSpPr>
-          <p:cNvPr id="8" name="imgph" descr="IMGQ:sealed gas valve meter cabinet"/>
+              <a:t>Todos llevan croquis</a:t>
+            </a:r>
+          </a:p>
+        </p:txBody>
+      </p:sp>
+      <p:sp>
+        <p:nvSpPr>
+          <p:cNvPr id="8" name="imgph" descr="IMGQ:installer filling out paper certificate on clipboard"/>
           <p:cNvSpPr/>
           <p:nvPr/>
         </p:nvSpPr>
@@ -10826,7 +12668,7 @@
                 </a:solidFill>
                 <a:latin typeface="Montserrat"/>
               </a:rPr>
-              <a:t>sealed gas valve meter cabinet</a:t>
+              <a:t>installer filling out paper certificate on clipboard</a:t>
             </a:r>
           </a:p>
         </p:txBody>

--- a/Curso Gas B/04 - ITC-ICG 07 - Instalaciones receptoras de combustibles gaseosos/04 - ITC-ICG 07 - Instalaciones receptoras de combustibles gaseosos - Vídeo 2.pptx
+++ b/Curso Gas B/04 - ITC-ICG 07 - Instalaciones receptoras de combustibles gaseosos/04 - ITC-ICG 07 - Instalaciones receptoras de combustibles gaseosos - Vídeo 2.pptx
@@ -25,6 +25,7 @@
     <p:sldId id="273" r:id="rId25"/>
     <p:sldId id="274" r:id="rId26"/>
     <p:sldId id="275" r:id="rId27"/>
+    <p:sldId id="276" r:id="rId28"/>
   </p:sldIdLst>
   <p:sldSz cx="12191695" cy="6858000" type="screen4x3"/>
   <p:notesSz cx="6858000" cy="9144000"/>
@@ -596,12 +597,12 @@
           <a:lstStyle/>
           <a:p>
             <a:r>
-              <a:t>N1: ¿Por qué dices que solo uno de ellos habla de aparatos?</a:t>
-            </a:r>
-          </a:p>
-          <a:p>
-            <a:r>
-              <a:t>N2: Porque de los tres certificados, solo el individual, el uno erre ge guion tres, tiene que listar los aparatos de consumo conectados o previstos, indicando su consumo calorífico nominal, es decir, cuántos kilovatios consume cada uno. Y tiene toda la lógica: es el único tramo que llega de verdad hasta los aparatos, dentro de la vivienda. El de la acometida y el de la común se quedan por el camino, en la entrada y en el montante, así que no tienen aparatos que listar. Truco para el examen: si una pregunta habla de listar aparatos y su potencia, piensa siempre en el individual.</a:t>
+              <a:t>N1: ¿Cuántos certificados de instalación hay y en qué se diferencian?</a:t>
+            </a:r>
+          </a:p>
+          <a:p>
+            <a:r>
+              <a:t>N2: Hay tres, uno por cada tramo de la receptora, y no conviene mezclarlos. El uno erre ge guion uno es el de la acometida interior, el tramo de entrada; este es el único que insiste en las pruebas de resistencia mecánica y estanquidad según las normas de acometidas, y el único que menciona la servidumbre de paso. El uno erre ge guion dos es el de la instalación común, el montante compartido del edificio. Y el uno erre ge guion tres es el de la instalación individual, lo de dentro de la vivienda. Los tres llevan croquis: trazado, material, longitudes, diámetros, accesorios y caudales por tramo. Piensa en el croquis como el plano de tu trabajo, para que quien venga detrás entienda por dónde va cada tubo sin abrir la pared.</a:t>
             </a:r>
           </a:p>
         </p:txBody>
@@ -671,12 +672,12 @@
           <a:lstStyle/>
           <a:p>
             <a:r>
-              <a:t>N1: ¿Y las chimeneas de un edificio nuevo hay que certificarlas aparte?</a:t>
-            </a:r>
-          </a:p>
-          <a:p>
-            <a:r>
-              <a:t>N2: Sí. Si la instalación alimenta a un edificio de nueva planta y ese edificio tiene chimeneas para evacuar los humos, antes de la puesta en servicio hace falta una certificación que acredite que esas chimeneas cumplen las normas de diseño y cálculo y las de materiales que ya vimos en el primer vídeo. Ahora, si el certificado de dirección de obra ya incluye esa acreditación, no hace falta nada más. Pero si no la incluye, tiene que extenderla el técnico facultativo competente responsable de la construcción o un organismo de control. En resumen: alguien con autoridad técnica firma que las chimeneas están bien calculadas y son del material correcto, antes de dar gas.</a:t>
+              <a:t>N1: ¿Por qué dices que solo uno de ellos habla de aparatos?</a:t>
+            </a:r>
+          </a:p>
+          <a:p>
+            <a:r>
+              <a:t>N2: Porque de los tres certificados, solo el individual, el uno erre ge guion tres, tiene que listar los aparatos de consumo conectados o previstos, indicando su consumo calorífico nominal, es decir, cuántos kilovatios consume cada uno. Y tiene toda la lógica: es el único tramo que llega de verdad hasta los aparatos, dentro de la vivienda. El de la acometida y el de la común se quedan por el camino, en la entrada y en el montante, así que no tienen aparatos que listar. Truco para el examen: si una pregunta habla de listar aparatos y su potencia, piensa siempre en el individual.</a:t>
             </a:r>
           </a:p>
         </p:txBody>
@@ -746,12 +747,12 @@
           <a:lstStyle/>
           <a:p>
             <a:r>
-              <a:t>N1: Cuando doy gas al edificio pero hay viviendas sin contrato, ¿qué hago con esas llaves?</a:t>
-            </a:r>
-          </a:p>
-          <a:p>
-            <a:r>
-              <a:t>N2: Muy buena, porque es lo habitual: das gas al montante, pero muchas viviendas todavía no tienen contrato. Esas llaves de inicio hay que dejarlas cerradas, bloqueadas y precintadas, para que nadie las abra por su cuenta; el precinto es como el sello que salta si alguien lo toca. Y si además la instalación individual o el aparato ni siquiera están montados, se taponan, que es poner un tapón físico en la boca de la llave. Es seguridad pura: puede haber gas en el montante, pero tiene que ser imposible que salga por una salida sin terminar. Lo mismo con las llaves de conexión de los aparatos que están pendientes de instalar o de arrancar.</a:t>
+              <a:t>N1: ¿Y las chimeneas de un edificio nuevo hay que certificarlas aparte?</a:t>
+            </a:r>
+          </a:p>
+          <a:p>
+            <a:r>
+              <a:t>N2: Sí. Si la instalación alimenta a un edificio de nueva planta y ese edificio tiene chimeneas para evacuar los humos, antes de la puesta en servicio hace falta una certificación que acredite que esas chimeneas cumplen las normas de diseño y cálculo y las de materiales que ya vimos en el primer vídeo. Ahora, si el certificado de dirección de obra ya incluye esa acreditación, no hace falta nada más. Pero si no la incluye, tiene que extenderla el técnico facultativo competente responsable de la construcción o un organismo de control. En resumen: alguien con autoridad técnica firma que las chimeneas están bien calculadas y son del material correcto, antes de dar gas.</a:t>
             </a:r>
           </a:p>
         </p:txBody>
@@ -821,12 +822,12 @@
           <a:lstStyle/>
           <a:p>
             <a:r>
-              <a:t>N1: ¿Qué es eso de purgar la instalación?</a:t>
-            </a:r>
-          </a:p>
-          <a:p>
-            <a:r>
-              <a:t>N2: Purgar es sacar el aire que hay dentro de la tubería antes de dejarla llena de gas. Piénsalo así: la tubería recién montada está llena de aire; si metes gas de golpe, durante un rato dentro se forma una mezcla de aire y gas, y esa mezcla, en cierta proporción, es explosiva; puede arder con una simple chispa. A esa proporción peligrosa se le llama estar dentro de los límites de inflamabilidad. Purgar bien es barrer ese aire, normalmente empujándolo con el propio gas o con un gas inerte, hasta que dentro solo quede gas, ya fuera del rango explosivo. Es una de las operaciones más delicadas del arranque: purgar mal es arriesgar una deflagración al primer chispazo.</a:t>
+              <a:t>N1: Cuando doy gas al edificio pero hay viviendas sin contrato, ¿qué hago con esas llaves?</a:t>
+            </a:r>
+          </a:p>
+          <a:p>
+            <a:r>
+              <a:t>N2: Muy buena, porque es lo habitual: das gas al montante, pero muchas viviendas todavía no tienen contrato. Esas llaves de inicio hay que dejarlas cerradas, bloqueadas y precintadas, para que nadie las abra por su cuenta; el precinto es como el sello que salta si alguien lo toca. Y si además la instalación individual o el aparato ni siquiera están montados, se taponan, que es poner un tapón físico en la boca de la llave. Es seguridad pura: puede haber gas en el montante, pero tiene que ser imposible que salga por una salida sin terminar. Lo mismo con las llaves de conexión de los aparatos que están pendientes de instalar o de arrancar.</a:t>
             </a:r>
           </a:p>
         </p:txBody>
@@ -896,12 +897,12 @@
           <a:lstStyle/>
           <a:p>
             <a:r>
-              <a:t>N1: Si la vivienda va a tener contrato normal, ¿por dónde se empieza?</a:t>
-            </a:r>
-          </a:p>
-          <a:p>
-            <a:r>
-              <a:t>N2: Primero, antes de nada, el futuro usuario tiene que formalizar la póliza de abono o el contrato de suministro con el suministrador, aportando su documentación. Sin contrato no hay puesta en servicio. Una vez firmado, en las instalaciones alimentadas desde una red de distribución, el usuario, o el suministrador en su nombre, solicita al distribuidor la puesta en servicio. Y es el distribuidor, con personal propio o autorizado, quien viene a hacer las pruebas y a dar el gas. Esta misma solicitud vale también cuando se modifica una instalación. Fíjate en el orden: contrato primero, solicitud después, y el distribuidor ejecuta.</a:t>
+              <a:t>N1: ¿Qué es eso de purgar la instalación?</a:t>
+            </a:r>
+          </a:p>
+          <a:p>
+            <a:r>
+              <a:t>N2: Purgar es sacar el aire que hay dentro de la tubería antes de dejarla llena de gas. Piénsalo así: la tubería recién montada está llena de aire; si metes gas de golpe, durante un rato dentro se forma una mezcla de aire y gas, y esa mezcla, en cierta proporción, es explosiva; puede arder con una simple chispa. A esa proporción peligrosa se le llama estar dentro de los límites de inflamabilidad. Purgar bien es barrer ese aire, normalmente empujándolo con el propio gas o con un gas inerte, hasta que dentro solo quede gas, ya fuera del rango explosivo. Es una de las operaciones más delicadas del arranque: purgar mal es arriesgar una deflagración al primer chispazo.</a:t>
             </a:r>
           </a:p>
         </p:txBody>
@@ -971,12 +972,12 @@
           <a:lstStyle/>
           <a:p>
             <a:r>
-              <a:t>N1: ¿Y qué hace exactamente el distribuidor, paso a paso?</a:t>
-            </a:r>
-          </a:p>
-          <a:p>
-            <a:r>
-              <a:t>N2: Son nueve pasos que se parten en dos bloques muy fáciles de recordar. Del uno al cinco, comprobar: que la documentación esté completa, que las partes visibles y accesibles cumplan la normativa, que los locales donde van los aparatos y sus conductos de humos estén bien, que las válvulas se maniobren, y, si hay una estación de regulación, que funcionen sus sistemas de regulación y de seguridad. Del seis al nueve, rematar: precintar el equipo de medida, o sea el contador, verificar la estanquidad, dejar la instalación en servicio si todo va favorable, y extender un certificado de pruebas previas y puesta en servicio, con copia para el titular. La regla mental: primero compruebo, y solo si va bien, doy gas y firmo. El paso seis, precintar el contador, es el que lo deja oficial.</a:t>
+              <a:t>N1: Si la vivienda va a tener contrato normal, ¿por dónde se empieza?</a:t>
+            </a:r>
+          </a:p>
+          <a:p>
+            <a:r>
+              <a:t>N2: Primero, antes de nada, el futuro usuario tiene que formalizar la póliza de abono o el contrato de suministro con el suministrador, aportando su documentación. Sin contrato no hay puesta en servicio. Una vez firmado, en las instalaciones alimentadas desde una red de distribución, el usuario, o el suministrador en su nombre, solicita al distribuidor la puesta en servicio. Y es el distribuidor, con personal propio o autorizado, quien viene a hacer las pruebas y a dar el gas. Esta misma solicitud vale también cuando se modifica una instalación. Fíjate en el orden: contrato primero, solicitud después, y el distribuidor ejecuta.</a:t>
             </a:r>
           </a:p>
         </p:txBody>
@@ -1046,12 +1047,12 @@
           <a:lstStyle/>
           <a:p>
             <a:r>
-              <a:t>N1: ¿Siempre da el gas el distribuidor?</a:t>
-            </a:r>
-          </a:p>
-          <a:p>
-            <a:r>
-              <a:t>N2: No, depende de si hay red por detrás. Si la instalación se alimenta desde una red de distribución, gas natural o gases del petróleo de red, la puesta en servicio la hace el distribuidor, con personal propio o autorizado, a petición del usuario o del suministrador. Pero si la instalación no se alimenta desde red, por ejemplo con un depósito propio, entonces esas mismas pruebas previas y ese mismo certificado los hace el suministrador. Fíjate: el procedimiento es idéntico, lo único que cambia es quién lo ejecuta. En el examen les gusta jugar justo con este cambio de agente, así que quédate con la pregunta clave: ¿hay red o no?</a:t>
+              <a:t>N1: ¿Y qué hace exactamente el distribuidor, paso a paso?</a:t>
+            </a:r>
+          </a:p>
+          <a:p>
+            <a:r>
+              <a:t>N2: Son nueve pasos que se parten en dos bloques muy fáciles de recordar. Del uno al cinco, comprobar: que la documentación esté completa, que las partes visibles y accesibles cumplan la normativa, que los locales donde van los aparatos y sus conductos de humos estén bien, que las válvulas se maniobren, y, si hay una estación de regulación, que funcionen sus sistemas de regulación y de seguridad. Del seis al nueve, rematar: precintar el equipo de medida, o sea el contador, verificar la estanquidad, dejar la instalación en servicio si todo va favorable, y extender un certificado de pruebas previas y puesta en servicio, con copia para el titular. La regla mental: primero compruebo, y solo si va bien, doy gas y firmo. El paso seis, precintar el contador, es el que lo deja oficial.</a:t>
             </a:r>
           </a:p>
         </p:txBody>
@@ -1121,12 +1122,12 @@
           <a:lstStyle/>
           <a:p>
             <a:r>
-              <a:t>N1: ¿Y si la instalación se deja acabada pero sin dar de alta el suministro?</a:t>
-            </a:r>
-          </a:p>
-          <a:p>
-            <a:r>
-              <a:t>N2: Ese es el caso sin contrato de suministro domiciliario: la instalación se termina, pero todavía no se contrata el gas. Aquí no interviene el distribuidor para ninguna puesta en servicio. Es la empresa instaladora, la que ha hecho el montaje, quien realiza las pruebas y verificaciones de entrega, básicamente la estanquidad, y emite, en todos los casos, el certificado de instalación, del que entrega copia al titular. Fíjate en la expresión en todos los casos: ese certificado no es opcional, siempre se entrega. Es la garantía en papel de que lo que se ha montado está probado y en condiciones, aunque todavía no tenga gas.</a:t>
+              <a:t>N1: ¿Siempre da el gas el distribuidor?</a:t>
+            </a:r>
+          </a:p>
+          <a:p>
+            <a:r>
+              <a:t>N2: No, depende de si hay red por detrás. Si la instalación se alimenta desde una red de distribución, gas natural o gases del petróleo de red, la puesta en servicio la hace el distribuidor, con personal propio o autorizado, a petición del usuario o del suministrador. Pero si la instalación no se alimenta desde red, por ejemplo con un depósito propio, entonces esas mismas pruebas previas y ese mismo certificado los hace el suministrador. Fíjate: el procedimiento es idéntico, lo único que cambia es quién lo ejecuta. En el examen les gusta jugar justo con este cambio de agente, así que quédate con la pregunta clave: ¿hay red o no?</a:t>
             </a:r>
           </a:p>
         </p:txBody>
@@ -1196,12 +1197,12 @@
           <a:lstStyle/>
           <a:p>
             <a:r>
-              <a:t>N1: Si una casa lleva mucho tiempo sin gas, ¿se reengancha sin más?</a:t>
-            </a:r>
-          </a:p>
-          <a:p>
-            <a:r>
-              <a:t>N2: No, y aquí vuelve una regla que ya salió en el articulado del reglamento: la regla del año. Si una instalación estuvo más de un año sin suministro después de haberse resuelto el contrato, al volver a darle gas se trata como si fuera una instalación nueva. No se reengancha y ya está. La distribuidora comprueba que existe el certificado de la instalación individual archivado y, a continuación, rehace el certificado de pruebas previas y puesta en servicio, con todas sus comprobaciones. La idea, fácil de retener: más de un año parada, borrón y cuenta nueva. Es lógico, porque en un año una instalación abandonada puede haberse degradado sin que nadie la mire.</a:t>
+              <a:t>N1: ¿Y si la instalación se deja acabada pero sin dar de alta el suministro?</a:t>
+            </a:r>
+          </a:p>
+          <a:p>
+            <a:r>
+              <a:t>N2: Ese es el caso sin contrato de suministro domiciliario: la instalación se termina, pero todavía no se contrata el gas. Aquí no interviene el distribuidor para ninguna puesta en servicio. Es la empresa instaladora, la que ha hecho el montaje, quien realiza las pruebas y verificaciones de entrega, básicamente la estanquidad, y emite, en todos los casos, el certificado de instalación, del que entrega copia al titular. Fíjate en la expresión en todos los casos: ese certificado no es opcional, siempre se entrega. Es la garantía en papel de que lo que se ha montado está probado y en condiciones, aunque todavía no tenga gas.</a:t>
             </a:r>
           </a:p>
         </p:txBody>
@@ -1271,12 +1272,12 @@
           <a:lstStyle/>
           <a:p>
             <a:r>
-              <a:t>N1: ¿Tengo que avisar a la Administración cuando acabo?</a:t>
-            </a:r>
-          </a:p>
-          <a:p>
-            <a:r>
-              <a:t>N2: Solo en un caso, y es fácil de recordar: si la instalación necesitaba proyecto, por las potencias o la presión que vimos, entonces se comunica a la Administración. Si no necesitaba proyecto, que es lo normal en lo doméstico, no hace falta comunicar nada. Pero ojo con una trampa: aunque no comuniques, el suministrador tiene que guardar la documentación de la instalación y tenerla lista por si la Administración la pide. O sea, no comunicar no es lo mismo que no documentar. El papel siempre existe y siempre está disponible; lo que cambia es si además hay que enviar el aviso o no.</a:t>
+              <a:t>N1: Si una casa lleva mucho tiempo sin gas, ¿se reengancha sin más?</a:t>
+            </a:r>
+          </a:p>
+          <a:p>
+            <a:r>
+              <a:t>N2: No, y aquí vuelve una regla que ya salió en el articulado del reglamento: la regla del año. Si una instalación estuvo más de un año sin suministro después de haberse resuelto el contrato, al volver a darle gas se trata como si fuera una instalación nueva. No se reengancha y ya está. La distribuidora comprueba que existe el certificado de la instalación individual archivado y, a continuación, rehace el certificado de pruebas previas y puesta en servicio, con todas sus comprobaciones. La idea, fácil de retener: más de un año parada, borrón y cuenta nueva. Es lógico, porque en un año una instalación abandonada puede haberse degradado sin que nadie la mire.</a:t>
             </a:r>
           </a:p>
         </p:txBody>
@@ -1421,6 +1422,81 @@
           <a:lstStyle/>
           <a:p>
             <a:r>
+              <a:t>N1: ¿Tengo que avisar a la Administración cuando acabo?</a:t>
+            </a:r>
+          </a:p>
+          <a:p>
+            <a:r>
+              <a:t>N2: Solo en un caso, y es fácil de recordar: si la instalación necesitaba proyecto, por las potencias o la presión que vimos, entonces se comunica a la Administración. Si no necesitaba proyecto, que es lo normal en lo doméstico, no hace falta comunicar nada. Pero ojo con una trampa: aunque no comuniques, el suministrador tiene que guardar la documentación de la instalación y tenerla lista por si la Administración la pide. O sea, no comunicar no es lo mismo que no documentar. El papel siempre existe y siempre está disponible; lo que cambia es si además hay que enviar el aviso o no.</a:t>
+            </a:r>
+          </a:p>
+        </p:txBody>
+      </p:sp>
+      <p:sp>
+        <p:nvSpPr>
+          <p:cNvPr id="4" name="Slide Number Placeholder 3"/>
+          <p:cNvSpPr>
+            <a:spLocks noGrp="1"/>
+          </p:cNvSpPr>
+          <p:nvPr>
+            <p:ph type="sldNum" idx="5" sz="quarter"/>
+          </p:nvPr>
+        </p:nvSpPr>
+        <p:spPr/>
+      </p:sp>
+    </p:spTree>
+  </p:cSld>
+  <p:clrMapOvr>
+    <a:masterClrMapping/>
+  </p:clrMapOvr>
+</p:notes>
+</file>
+
+<file path=ppt/notesSlides/notesSlide21.xml><?xml version="1.0" encoding="utf-8"?>
+<p:notes xmlns:a="http://schemas.openxmlformats.org/drawingml/2006/main" xmlns:p="http://schemas.openxmlformats.org/presentationml/2006/main" xmlns:r="http://schemas.openxmlformats.org/officeDocument/2006/relationships">
+  <p:cSld>
+    <p:spTree>
+      <p:nvGrpSpPr>
+        <p:cNvPr id="1" name=""/>
+        <p:cNvGrpSpPr/>
+        <p:nvPr/>
+      </p:nvGrpSpPr>
+      <p:grpSpPr>
+        <a:xfrm>
+          <a:off x="0" y="0"/>
+          <a:ext cx="0" cy="0"/>
+          <a:chOff x="0" y="0"/>
+          <a:chExt cx="0" cy="0"/>
+        </a:xfrm>
+      </p:grpSpPr>
+      <p:sp>
+        <p:nvSpPr>
+          <p:cNvPr id="2" name="Slide Image Placeholder 1"/>
+          <p:cNvSpPr>
+            <a:spLocks noGrp="1"/>
+          </p:cNvSpPr>
+          <p:nvPr>
+            <p:ph type="sldImg" idx="2"/>
+          </p:nvPr>
+        </p:nvSpPr>
+        <p:spPr/>
+      </p:sp>
+      <p:sp>
+        <p:nvSpPr>
+          <p:cNvPr id="3" name="Notes Placeholder 2"/>
+          <p:cNvSpPr>
+            <a:spLocks noGrp="1"/>
+          </p:cNvSpPr>
+          <p:nvPr>
+            <p:ph type="body" idx="3" sz="quarter"/>
+          </p:nvPr>
+        </p:nvSpPr>
+        <p:spPr/>
+        <p:txBody>
+          <a:bodyPr/>
+          <a:lstStyle/>
+          <a:p>
+            <a:r>
               <a:t>N1: Recapitulando, ¿qué me llevo de todo lo administrativo?</a:t>
             </a:r>
           </a:p>
@@ -1504,16 +1580,7 @@
         <p:txBody>
           <a:bodyPr/>
           <a:lstStyle/>
-          <a:p>
-            <a:r>
-              <a:t>N1: ¿Tengo que pedir permiso a la Administración antes de montar?</a:t>
-            </a:r>
-          </a:p>
-          <a:p>
-            <a:r>
-              <a:t>N2: No, y este punto, aunque es corto, se pregunta. Para ejecutar una instalación receptora no necesitas ninguna autorización administrativa previa; no hay que pedir un permiso y quedarte esperando a que te digan que sí. Basta con hacer las cosas bien, documentarlas con sus certificados y, en algún caso concreto, comunicarlas después. Recuerda la diferencia del tema del reglamento: autorización es pedir permiso antes, y se reserva para casos gordos; comunicación es avisar después. Aquí, para el simple hecho de montar, ni una ni la otra. Arrancas la obra sin papeleo previo.</a:t>
-            </a:r>
-          </a:p>
+          <a:p/>
         </p:txBody>
       </p:sp>
       <p:sp>
@@ -1581,12 +1648,12 @@
           <a:lstStyle/>
           <a:p>
             <a:r>
-              <a:t>N1: ¿Y cuándo me obligan a hacer un proyecto?</a:t>
-            </a:r>
-          </a:p>
-          <a:p>
-            <a:r>
-              <a:t>N2: Aquí tienes que memorizar tres números y una regla de presión. Una instalación individual necesita proyecto si pasa de setenta kilovatios. Una instalación común, si pasa de dos mil. Una acometida interior, también si pasa de dos mil. Y por encima de todo manda la presión: si la instalación se alimenta de una red que trabaja a más de cinco bar, necesita proyecto siempre, sea cual sea el uso y la potencia. El truco: la individual salta antes, con setenta, porque es la pequeña; la común y la acometida aguantan hasta dos mil. Y añade dos casos más: cuando se usan técnicas o materiales nuevos, y cuando por sus características no se puede cumplir algún requisito sin bajar la seguridad. Saber esto te evita arrancar una obra que luego no se puede legalizar.</a:t>
+              <a:t>N1: ¿Tengo que pedir permiso a la Administración antes de montar?</a:t>
+            </a:r>
+          </a:p>
+          <a:p>
+            <a:r>
+              <a:t>N2: No, y este punto, aunque es corto, se pregunta. Para ejecutar una instalación receptora no necesitas ninguna autorización administrativa previa; no hay que pedir un permiso y quedarte esperando a que te digan que sí. Basta con hacer las cosas bien, documentarlas con sus certificados y, en algún caso concreto, comunicarlas después. Recuerda la diferencia del tema del reglamento: autorización es pedir permiso antes, y se reserva para casos gordos; comunicación es avisar después. Aquí, para el simple hecho de montar, ni una ni la otra. Arrancas la obra sin papeleo previo.</a:t>
             </a:r>
           </a:p>
         </p:txBody>
@@ -1656,12 +1723,12 @@
           <a:lstStyle/>
           <a:p>
             <a:r>
-              <a:t>N1: Si amplío una instalación que ya tenía, ¿también necesito proyecto?</a:t>
-            </a:r>
-          </a:p>
-          <a:p>
-            <a:r>
-              <a:t>N2: Depende de cuánto la amplíes. La regla es esta: si al ampliar superas en un treinta por ciento la potencia de diseño que tenía la instalación al proyectarse, entonces sí necesitas proyecto. También si con la ampliación entras en cualquiera de los supuestos que ya vimos, por ejemplo si te pasas de setenta en una individual. La idea de fondo es lógica: una ampliación pequeña no obliga a nada, pero crecer más de un treinta por ciento ya es harina de otro costal. Es la forma que tiene el reglamento de evitar que alguien engorde una instalación poco a poco, a base de ampliaciones sueltas, sin que nadie la controle con un proyecto.</a:t>
+              <a:t>N1: ¿Y cuándo me obligan a hacer un proyecto?</a:t>
+            </a:r>
+          </a:p>
+          <a:p>
+            <a:r>
+              <a:t>N2: Aquí tienes que memorizar tres números y una regla de presión. Una instalación individual necesita proyecto si pasa de setenta kilovatios. Una instalación común, si pasa de dos mil. Una acometida interior, también si pasa de dos mil. Y por encima de todo manda la presión: si la instalación se alimenta de una red que trabaja a más de cinco bar, necesita proyecto siempre, sea cual sea el uso y la potencia. El truco: la individual salta antes, con setenta, porque es la pequeña; la común y la acometida aguantan hasta dos mil. Y añade dos casos más: cuando se usan técnicas o materiales nuevos, y cuando por sus características no se puede cumplir algún requisito sin bajar la seguridad. Saber esto te evita arrancar una obra que luego no se puede legalizar.</a:t>
             </a:r>
           </a:p>
         </p:txBody>
@@ -1731,12 +1798,12 @@
           <a:lstStyle/>
           <a:p>
             <a:r>
-              <a:t>N1: ¿Y qué papel sale del proyecto?</a:t>
-            </a:r>
-          </a:p>
-          <a:p>
-            <a:r>
-              <a:t>N2: Van siempre de la mano estas dos ideas: proyecto y dirección de obra. Siempre que una instalación necesita proyecto, hay un técnico competente que dirige la obra y que, al acabar, firma un certificado de dirección de obra. Es su forma de decir: yo he vigilado que esto se monte según el proyecto. Y al revés: si no hay proyecto, que es lo normal en las instalaciones domésticas pequeñas, no hay dirección de obra ni ese certificado. Asócialo como una pareja fija: proyecto implica dirección de obra. En el examen te lo pueden preguntar justo así, para ver si sabes que uno arrastra al otro.</a:t>
+              <a:t>N1: Si amplío una instalación que ya tenía, ¿también necesito proyecto?</a:t>
+            </a:r>
+          </a:p>
+          <a:p>
+            <a:r>
+              <a:t>N2: Depende de cuánto la amplíes. La regla es esta: si al ampliar superas en un treinta por ciento la potencia de diseño que tenía la instalación al proyectarse, entonces sí necesitas proyecto. También si con la ampliación entras en cualquiera de los supuestos que ya vimos, por ejemplo si te pasas de setenta en una individual. La idea de fondo es lógica: una ampliación pequeña no obliga a nada, pero crecer más de un treinta por ciento ya es harina de otro costal. Es la forma que tiene el reglamento de evitar que alguien engorde una instalación poco a poco, a base de ampliaciones sueltas, sin que nadie la controle con un proyecto.</a:t>
             </a:r>
           </a:p>
         </p:txBody>
@@ -1806,12 +1873,12 @@
           <a:lstStyle/>
           <a:p>
             <a:r>
-              <a:t>N1: ¿Qué prueba hay que hacer antes de entregar la instalación?</a:t>
-            </a:r>
-          </a:p>
-          <a:p>
-            <a:r>
-              <a:t>N2: La prueba de estanquidad, que es la más importante. Estanquidad significa que la instalación no tiene fugas, que no se escapa ni una burbuja de gas por ninguna unión. Antes de entregar, tú, la empresa instaladora, tienes que probarlo, siguiendo la UNE sesenta mil seiscientos setenta guion ocho si es baja presión, o la UNE sesenta mil seiscientos veinte si es alta. Y el resultado positivo se hace constar en el certificado de instalación, o sea, queda por escrito y firmado. Recuerda un matiz del tema del reglamento: la prueba la hace quien monta; no la confundas con la inspección, que la hace un tercero distinto. Una estanquidad mal hecha acaba en olor a gas y, en lo grave, en una deflagración.</a:t>
+              <a:t>N1: ¿Y qué papel sale del proyecto?</a:t>
+            </a:r>
+          </a:p>
+          <a:p>
+            <a:r>
+              <a:t>N2: Van siempre de la mano estas dos ideas: proyecto y dirección de obra. Siempre que una instalación necesita proyecto, hay un técnico competente que dirige la obra y que, al acabar, firma un certificado de dirección de obra. Es su forma de decir: yo he vigilado que esto se monte según el proyecto. Y al revés: si no hay proyecto, que es lo normal en las instalaciones domésticas pequeñas, no hay dirección de obra ni ese certificado. Asócialo como una pareja fija: proyecto implica dirección de obra. En el examen te lo pueden preguntar justo así, para ver si sabes que uno arrastra al otro.</a:t>
             </a:r>
           </a:p>
         </p:txBody>
@@ -1881,12 +1948,12 @@
           <a:lstStyle/>
           <a:p>
             <a:r>
-              <a:t>N1: ¿Y con la parte enterrada hay algo especial?</a:t>
-            </a:r>
-          </a:p>
-          <a:p>
-            <a:r>
-              <a:t>N2: Sí, un detalle de orden que conviene tener claro. Si la instalación tiene acometida interior enterrada, la empresa instaladora tiene que entregar al distribuidor el certificado de esa acometida antes de la puesta en marcha, es decir, antes de dar gas. La lógica es de puro sentido común: lo que va enterrado, una vez tapado, ya no se puede revisar a simple vista. Así que el distribuidor quiere en la mano el papel que garantiza que se probó y que quedó bien, antes de permitir que circule el gas. Primero el certificado sobre la mesa; después, el gas. Nunca al revés.</a:t>
+              <a:t>N1: ¿Qué prueba hay que hacer antes de entregar la instalación?</a:t>
+            </a:r>
+          </a:p>
+          <a:p>
+            <a:r>
+              <a:t>N2: La prueba de estanquidad, que es la más importante. Estanquidad significa que la instalación no tiene fugas, que no se escapa ni una burbuja de gas por ninguna unión. Antes de entregar, tú, la empresa instaladora, tienes que probarlo, siguiendo la UNE sesenta mil seiscientos setenta guion ocho si es baja presión, o la UNE sesenta mil seiscientos veinte si es alta. Y el resultado positivo se hace constar en el certificado de instalación, o sea, queda por escrito y firmado. Recuerda un matiz del tema del reglamento: la prueba la hace quien monta; no la confundas con la inspección, que la hace un tercero distinto. Una estanquidad mal hecha acaba en olor a gas y, en lo grave, en una deflagración.</a:t>
             </a:r>
           </a:p>
         </p:txBody>
@@ -1956,12 +2023,12 @@
           <a:lstStyle/>
           <a:p>
             <a:r>
-              <a:t>N1: ¿Cuántos certificados de instalación hay y en qué se diferencian?</a:t>
-            </a:r>
-          </a:p>
-          <a:p>
-            <a:r>
-              <a:t>N2: Hay tres, uno por cada tramo de la receptora, y no conviene mezclarlos. El uno erre ge guion uno es el de la acometida interior, el tramo de entrada; este es el único que insiste en las pruebas de resistencia mecánica y estanquidad según las normas de acometidas, y el único que menciona la servidumbre de paso. El uno erre ge guion dos es el de la instalación común, el montante compartido del edificio. Y el uno erre ge guion tres es el de la instalación individual, lo de dentro de la vivienda. Los tres llevan croquis: trazado, material, longitudes, diámetros, accesorios y caudales por tramo. Piensa en el croquis como el plano de tu trabajo, para que quien venga detrás entienda por dónde va cada tubo sin abrir la pared.</a:t>
+              <a:t>N1: ¿Y con la parte enterrada hay algo especial?</a:t>
+            </a:r>
+          </a:p>
+          <a:p>
+            <a:r>
+              <a:t>N2: Sí, un detalle de orden que conviene tener claro. Si la instalación tiene acometida interior enterrada, la empresa instaladora tiene que entregar al distribuidor el certificado de esa acometida antes de la puesta en marcha, es decir, antes de dar gas. La lógica es de puro sentido común: lo que va enterrado, una vez tapado, ya no se puede revisar a simple vista. Así que el distribuidor quiere en la mano el papel que garantiza que se probó y que quedó bien, antes de permitir que circule el gas. Primero el certificado sobre la mesa; después, el gas. Nunca al revés.</a:t>
             </a:r>
           </a:p>
         </p:txBody>
@@ -5036,7 +5103,7 @@
             <a:r>
               <a:rPr sz="1400" b="1" i="0">
                 <a:solidFill>
-                  <a:srgbClr val="CADCFC"/>
+                  <a:srgbClr val="F4A24C"/>
                 </a:solidFill>
                 <a:latin typeface="Montserrat"/>
               </a:rPr>
@@ -5047,13 +5114,57 @@
       </p:sp>
       <p:sp>
         <p:nvSpPr>
-          <p:cNvPr id="4" name="TextBox 3"/>
+          <p:cNvPr id="4" name="Rounded Rectangle 3"/>
+          <p:cNvSpPr/>
+          <p:nvPr/>
+        </p:nvSpPr>
+        <p:spPr>
+          <a:xfrm>
+            <a:off x="868680" y="2057400"/>
+            <a:ext cx="1463040" cy="82296"/>
+          </a:xfrm>
+          <a:prstGeom prst="roundRect">
+            <a:avLst/>
+          </a:prstGeom>
+          <a:solidFill>
+            <a:srgbClr val="E8801A"/>
+          </a:solidFill>
+          <a:ln>
+            <a:noFill/>
+          </a:ln>
+          <a:effectLst/>
+        </p:spPr>
+        <p:style>
+          <a:lnRef idx="1">
+            <a:schemeClr val="accent1"/>
+          </a:lnRef>
+          <a:fillRef idx="3">
+            <a:schemeClr val="accent1"/>
+          </a:fillRef>
+          <a:effectRef idx="2">
+            <a:schemeClr val="accent1"/>
+          </a:effectRef>
+          <a:fontRef idx="minor">
+            <a:schemeClr val="lt1"/>
+          </a:fontRef>
+        </p:style>
+        <p:txBody>
+          <a:bodyPr rtlCol="0" anchor="ctr"/>
+          <a:lstStyle/>
+          <a:p>
+            <a:pPr algn="ctr"/>
+          </a:p>
+        </p:txBody>
+      </p:sp>
+      <p:sp>
+        <p:nvSpPr>
+          <p:cNvPr id="5" name="TextBox 4"/>
           <p:cNvSpPr txBox="1"/>
           <p:nvPr/>
         </p:nvSpPr>
         <p:spPr>
           <a:xfrm>
-            <a:off x="822960" y="2194560"/>
+            <a:off x="822960" y="2286000"/>
             <a:ext cx="10515600" cy="2011680"/>
           </a:xfrm>
           <a:prstGeom prst="rect">
@@ -5092,7 +5203,7 @@
       </p:sp>
       <p:sp>
         <p:nvSpPr>
-          <p:cNvPr id="5" name="TextBox 4"/>
+          <p:cNvPr id="6" name="TextBox 5"/>
           <p:cNvSpPr txBox="1"/>
           <p:nvPr/>
         </p:nvSpPr>
@@ -5216,7 +5327,7 @@
                 </a:solidFill>
                 <a:latin typeface="Montserrat"/>
               </a:rPr>
-              <a:t>010 / 020</a:t>
+              <a:t>010 / 021</a:t>
             </a:r>
           </a:p>
         </p:txBody>
@@ -5264,7 +5375,7 @@
         <p:spPr>
           <a:xfrm>
             <a:off x="822960" y="457200"/>
-            <a:ext cx="8229600" cy="365760"/>
+            <a:ext cx="10058400" cy="365760"/>
           </a:xfrm>
           <a:prstGeom prst="rect">
             <a:avLst/>
@@ -5278,9 +5389,9 @@
           <a:lstStyle/>
           <a:p>
             <a:r>
-              <a:rPr sz="1200" b="1" i="0">
-                <a:solidFill>
-                  <a:srgbClr val="64748B"/>
+              <a:rPr sz="1300" b="1" i="0">
+                <a:solidFill>
+                  <a:srgbClr val="E8801A"/>
                 </a:solidFill>
                 <a:latin typeface="Montserrat"/>
               </a:rPr>
@@ -5312,26 +5423,70 @@
           <a:lstStyle/>
           <a:p>
             <a:r>
-              <a:rPr sz="2700" b="1" i="0">
+              <a:rPr sz="2800" b="1" i="0">
                 <a:solidFill>
                   <a:srgbClr val="1E2761"/>
                 </a:solidFill>
                 <a:latin typeface="Montserrat"/>
               </a:rPr>
-              <a:t>Solo el individual lista aparatos</a:t>
-            </a:r>
-          </a:p>
-        </p:txBody>
-      </p:sp>
-      <p:sp>
-        <p:nvSpPr>
-          <p:cNvPr id="7" name="TextBox 6"/>
+              <a:t>Tres certificados, uno por tramo</a:t>
+            </a:r>
+          </a:p>
+        </p:txBody>
+      </p:sp>
+      <p:sp>
+        <p:nvSpPr>
+          <p:cNvPr id="7" name="Rounded Rectangle 6"/>
+          <p:cNvSpPr/>
+          <p:nvPr/>
+        </p:nvSpPr>
+        <p:spPr>
+          <a:xfrm>
+            <a:off x="868680" y="1627632"/>
+            <a:ext cx="2011680" cy="73152"/>
+          </a:xfrm>
+          <a:prstGeom prst="roundRect">
+            <a:avLst/>
+          </a:prstGeom>
+          <a:solidFill>
+            <a:srgbClr val="E8801A"/>
+          </a:solidFill>
+          <a:ln>
+            <a:noFill/>
+          </a:ln>
+          <a:effectLst/>
+        </p:spPr>
+        <p:style>
+          <a:lnRef idx="1">
+            <a:schemeClr val="accent1"/>
+          </a:lnRef>
+          <a:fillRef idx="3">
+            <a:schemeClr val="accent1"/>
+          </a:fillRef>
+          <a:effectRef idx="2">
+            <a:schemeClr val="accent1"/>
+          </a:effectRef>
+          <a:fontRef idx="minor">
+            <a:schemeClr val="lt1"/>
+          </a:fontRef>
+        </p:style>
+        <p:txBody>
+          <a:bodyPr rtlCol="0" anchor="ctr"/>
+          <a:lstStyle/>
+          <a:p>
+            <a:pPr algn="ctr"/>
+          </a:p>
+        </p:txBody>
+      </p:sp>
+      <p:sp>
+        <p:nvSpPr>
+          <p:cNvPr id="8" name="TextBox 7"/>
           <p:cNvSpPr txBox="1"/>
           <p:nvPr/>
         </p:nvSpPr>
         <p:spPr>
           <a:xfrm>
-            <a:off x="822960" y="1920240"/>
+            <a:off x="822960" y="1965960"/>
             <a:ext cx="4983480" cy="4206240"/>
           </a:xfrm>
           <a:prstGeom prst="rect">
@@ -5347,17 +5502,17 @@
           <a:p>
             <a:pPr>
               <a:spcAft>
-                <a:spcPts val="1000"/>
+                <a:spcPts val="1100"/>
               </a:spcAft>
             </a:pPr>
             <a:r>
               <a:rPr sz="1600" b="1" i="0">
                 <a:solidFill>
-                  <a:srgbClr val="2E3A80"/>
-                </a:solidFill>
-                <a:latin typeface="Montserrat"/>
-              </a:rPr>
-              <a:t>•  </a:t>
+                  <a:srgbClr val="E8801A"/>
+                </a:solidFill>
+                <a:latin typeface="Montserrat"/>
+              </a:rPr>
+              <a:t>▸  </a:t>
             </a:r>
             <a:r>
               <a:rPr sz="1600" b="0" i="0">
@@ -5366,23 +5521,23 @@
                 </a:solidFill>
                 <a:latin typeface="Montserrat"/>
               </a:rPr>
-              <a:t>IRG-3 incluye los aparatos</a:t>
+              <a:t>IRG-1: acometida interior</a:t>
             </a:r>
           </a:p>
           <a:p>
             <a:pPr>
               <a:spcAft>
-                <a:spcPts val="1000"/>
+                <a:spcPts val="1100"/>
               </a:spcAft>
             </a:pPr>
             <a:r>
               <a:rPr sz="1600" b="1" i="0">
                 <a:solidFill>
-                  <a:srgbClr val="2E3A80"/>
-                </a:solidFill>
-                <a:latin typeface="Montserrat"/>
-              </a:rPr>
-              <a:t>•  </a:t>
+                  <a:srgbClr val="E8801A"/>
+                </a:solidFill>
+                <a:latin typeface="Montserrat"/>
+              </a:rPr>
+              <a:t>▸  </a:t>
             </a:r>
             <a:r>
               <a:rPr sz="1600" b="0" i="0">
@@ -5391,23 +5546,23 @@
                 </a:solidFill>
                 <a:latin typeface="Montserrat"/>
               </a:rPr>
-              <a:t>con su consumo nominal</a:t>
+              <a:t>IRG-2: instalación común</a:t>
             </a:r>
           </a:p>
           <a:p>
             <a:pPr>
               <a:spcAft>
-                <a:spcPts val="1000"/>
+                <a:spcPts val="1100"/>
               </a:spcAft>
             </a:pPr>
             <a:r>
               <a:rPr sz="1600" b="1" i="0">
                 <a:solidFill>
-                  <a:srgbClr val="2E3A80"/>
-                </a:solidFill>
-                <a:latin typeface="Montserrat"/>
-              </a:rPr>
-              <a:t>•  </a:t>
+                  <a:srgbClr val="E8801A"/>
+                </a:solidFill>
+                <a:latin typeface="Montserrat"/>
+              </a:rPr>
+              <a:t>▸  </a:t>
             </a:r>
             <a:r>
               <a:rPr sz="1600" b="0" i="0">
@@ -5416,14 +5571,39 @@
                 </a:solidFill>
                 <a:latin typeface="Montserrat"/>
               </a:rPr>
-              <a:t>Es el que llega hasta ellos</a:t>
-            </a:r>
-          </a:p>
-        </p:txBody>
-      </p:sp>
-      <p:sp>
-        <p:nvSpPr>
-          <p:cNvPr id="8" name="imgph" descr="IMGQ:gas cooktop and boiler in home"/>
+              <a:t>IRG-3: instalación individual</a:t>
+            </a:r>
+          </a:p>
+          <a:p>
+            <a:pPr>
+              <a:spcAft>
+                <a:spcPts val="1100"/>
+              </a:spcAft>
+            </a:pPr>
+            <a:r>
+              <a:rPr sz="1600" b="1" i="0">
+                <a:solidFill>
+                  <a:srgbClr val="E8801A"/>
+                </a:solidFill>
+                <a:latin typeface="Montserrat"/>
+              </a:rPr>
+              <a:t>▸  </a:t>
+            </a:r>
+            <a:r>
+              <a:rPr sz="1600" b="0" i="0">
+                <a:solidFill>
+                  <a:srgbClr val="1B2330"/>
+                </a:solidFill>
+                <a:latin typeface="Montserrat"/>
+              </a:rPr>
+              <a:t>Todos llevan croquis</a:t>
+            </a:r>
+          </a:p>
+        </p:txBody>
+      </p:sp>
+      <p:sp>
+        <p:nvSpPr>
+          <p:cNvPr id="9" name="imgph" descr="IMGQ:installer filling out paper certificate on clipboard"/>
           <p:cNvSpPr/>
           <p:nvPr/>
         </p:nvSpPr>
@@ -5469,7 +5649,7 @@
       </p:sp>
       <p:sp>
         <p:nvSpPr>
-          <p:cNvPr id="9" name="TextBox 8"/>
+          <p:cNvPr id="10" name="TextBox 9"/>
           <p:cNvSpPr txBox="1"/>
           <p:nvPr/>
         </p:nvSpPr>
@@ -5509,7 +5689,7 @@
                 </a:solidFill>
                 <a:latin typeface="Montserrat"/>
               </a:rPr>
-              <a:t>gas cooktop and boiler in home</a:t>
+              <a:t>installer filling out paper certificate on clipboard</a:t>
             </a:r>
           </a:p>
         </p:txBody>
@@ -5606,7 +5786,7 @@
                 </a:solidFill>
                 <a:latin typeface="Montserrat"/>
               </a:rPr>
-              <a:t>011 / 020</a:t>
+              <a:t>011 / 021</a:t>
             </a:r>
           </a:p>
         </p:txBody>
@@ -5654,7 +5834,7 @@
         <p:spPr>
           <a:xfrm>
             <a:off x="822960" y="457200"/>
-            <a:ext cx="8229600" cy="365760"/>
+            <a:ext cx="10058400" cy="365760"/>
           </a:xfrm>
           <a:prstGeom prst="rect">
             <a:avLst/>
@@ -5668,13 +5848,13 @@
           <a:lstStyle/>
           <a:p>
             <a:r>
-              <a:rPr sz="1200" b="1" i="0">
-                <a:solidFill>
-                  <a:srgbClr val="64748B"/>
-                </a:solidFill>
-                <a:latin typeface="Montserrat"/>
-              </a:rPr>
-              <a:t>APARTADO 3.4 · CHIMENEAS</a:t>
+              <a:rPr sz="1300" b="1" i="0">
+                <a:solidFill>
+                  <a:srgbClr val="E8801A"/>
+                </a:solidFill>
+                <a:latin typeface="Montserrat"/>
+              </a:rPr>
+              <a:t>APARTADO 3.4 · CERTIFICADOS</a:t>
             </a:r>
           </a:p>
         </p:txBody>
@@ -5702,26 +5882,70 @@
           <a:lstStyle/>
           <a:p>
             <a:r>
-              <a:rPr sz="2700" b="1" i="0">
+              <a:rPr sz="2800" b="1" i="0">
                 <a:solidFill>
                   <a:srgbClr val="1E2761"/>
                 </a:solidFill>
                 <a:latin typeface="Montserrat"/>
               </a:rPr>
-              <a:t>Chimeneas en obra nueva</a:t>
-            </a:r>
-          </a:p>
-        </p:txBody>
-      </p:sp>
-      <p:sp>
-        <p:nvSpPr>
-          <p:cNvPr id="7" name="TextBox 6"/>
+              <a:t>Solo el individual lista aparatos</a:t>
+            </a:r>
+          </a:p>
+        </p:txBody>
+      </p:sp>
+      <p:sp>
+        <p:nvSpPr>
+          <p:cNvPr id="7" name="Rounded Rectangle 6"/>
+          <p:cNvSpPr/>
+          <p:nvPr/>
+        </p:nvSpPr>
+        <p:spPr>
+          <a:xfrm>
+            <a:off x="868680" y="1627632"/>
+            <a:ext cx="2011680" cy="73152"/>
+          </a:xfrm>
+          <a:prstGeom prst="roundRect">
+            <a:avLst/>
+          </a:prstGeom>
+          <a:solidFill>
+            <a:srgbClr val="E8801A"/>
+          </a:solidFill>
+          <a:ln>
+            <a:noFill/>
+          </a:ln>
+          <a:effectLst/>
+        </p:spPr>
+        <p:style>
+          <a:lnRef idx="1">
+            <a:schemeClr val="accent1"/>
+          </a:lnRef>
+          <a:fillRef idx="3">
+            <a:schemeClr val="accent1"/>
+          </a:fillRef>
+          <a:effectRef idx="2">
+            <a:schemeClr val="accent1"/>
+          </a:effectRef>
+          <a:fontRef idx="minor">
+            <a:schemeClr val="lt1"/>
+          </a:fontRef>
+        </p:style>
+        <p:txBody>
+          <a:bodyPr rtlCol="0" anchor="ctr"/>
+          <a:lstStyle/>
+          <a:p>
+            <a:pPr algn="ctr"/>
+          </a:p>
+        </p:txBody>
+      </p:sp>
+      <p:sp>
+        <p:nvSpPr>
+          <p:cNvPr id="8" name="TextBox 7"/>
           <p:cNvSpPr txBox="1"/>
           <p:nvPr/>
         </p:nvSpPr>
         <p:spPr>
           <a:xfrm>
-            <a:off x="822960" y="1920240"/>
+            <a:off x="822960" y="1965960"/>
             <a:ext cx="4983480" cy="4206240"/>
           </a:xfrm>
           <a:prstGeom prst="rect">
@@ -5737,17 +5961,17 @@
           <a:p>
             <a:pPr>
               <a:spcAft>
-                <a:spcPts val="1000"/>
+                <a:spcPts val="1100"/>
               </a:spcAft>
             </a:pPr>
             <a:r>
               <a:rPr sz="1600" b="1" i="0">
                 <a:solidFill>
-                  <a:srgbClr val="2E3A80"/>
-                </a:solidFill>
-                <a:latin typeface="Montserrat"/>
-              </a:rPr>
-              <a:t>•  </a:t>
+                  <a:srgbClr val="E8801A"/>
+                </a:solidFill>
+                <a:latin typeface="Montserrat"/>
+              </a:rPr>
+              <a:t>▸  </a:t>
             </a:r>
             <a:r>
               <a:rPr sz="1600" b="0" i="0">
@@ -5756,23 +5980,23 @@
                 </a:solidFill>
                 <a:latin typeface="Montserrat"/>
               </a:rPr>
-              <a:t>Edificio de nueva planta con chimeneas</a:t>
+              <a:t>IRG-3 incluye los aparatos</a:t>
             </a:r>
           </a:p>
           <a:p>
             <a:pPr>
               <a:spcAft>
-                <a:spcPts val="1000"/>
+                <a:spcPts val="1100"/>
               </a:spcAft>
             </a:pPr>
             <a:r>
               <a:rPr sz="1600" b="1" i="0">
                 <a:solidFill>
-                  <a:srgbClr val="2E3A80"/>
-                </a:solidFill>
-                <a:latin typeface="Montserrat"/>
-              </a:rPr>
-              <a:t>•  </a:t>
+                  <a:srgbClr val="E8801A"/>
+                </a:solidFill>
+                <a:latin typeface="Montserrat"/>
+              </a:rPr>
+              <a:t>▸  </a:t>
             </a:r>
             <a:r>
               <a:rPr sz="1600" b="0" i="0">
@@ -5781,23 +6005,23 @@
                 </a:solidFill>
                 <a:latin typeface="Montserrat"/>
               </a:rPr>
-              <a:t>Certificación previa a la puesta en servicio</a:t>
+              <a:t>con su consumo nominal</a:t>
             </a:r>
           </a:p>
           <a:p>
             <a:pPr>
               <a:spcAft>
-                <a:spcPts val="1000"/>
+                <a:spcPts val="1100"/>
               </a:spcAft>
             </a:pPr>
             <a:r>
               <a:rPr sz="1600" b="1" i="0">
                 <a:solidFill>
-                  <a:srgbClr val="2E3A80"/>
-                </a:solidFill>
-                <a:latin typeface="Montserrat"/>
-              </a:rPr>
-              <a:t>•  </a:t>
+                  <a:srgbClr val="E8801A"/>
+                </a:solidFill>
+                <a:latin typeface="Montserrat"/>
+              </a:rPr>
+              <a:t>▸  </a:t>
             </a:r>
             <a:r>
               <a:rPr sz="1600" b="0" i="0">
@@ -5806,14 +6030,14 @@
                 </a:solidFill>
                 <a:latin typeface="Montserrat"/>
               </a:rPr>
-              <a:t>Técnico competente u organismo de control</a:t>
-            </a:r>
-          </a:p>
-        </p:txBody>
-      </p:sp>
-      <p:sp>
-        <p:nvSpPr>
-          <p:cNvPr id="8" name="imgph" descr="IMGQ:new building rooftop with chimney flues"/>
+              <a:t>Es el que llega hasta ellos</a:t>
+            </a:r>
+          </a:p>
+        </p:txBody>
+      </p:sp>
+      <p:sp>
+        <p:nvSpPr>
+          <p:cNvPr id="9" name="imgph" descr="IMGQ:gas cooktop and boiler in home"/>
           <p:cNvSpPr/>
           <p:nvPr/>
         </p:nvSpPr>
@@ -5859,7 +6083,7 @@
       </p:sp>
       <p:sp>
         <p:nvSpPr>
-          <p:cNvPr id="9" name="TextBox 8"/>
+          <p:cNvPr id="10" name="TextBox 9"/>
           <p:cNvSpPr txBox="1"/>
           <p:nvPr/>
         </p:nvSpPr>
@@ -5899,7 +6123,7 @@
                 </a:solidFill>
                 <a:latin typeface="Montserrat"/>
               </a:rPr>
-              <a:t>new building rooftop with chimney flues</a:t>
+              <a:t>gas cooktop and boiler in home</a:t>
             </a:r>
           </a:p>
         </p:txBody>
@@ -5996,7 +6220,7 @@
                 </a:solidFill>
                 <a:latin typeface="Montserrat"/>
               </a:rPr>
-              <a:t>012 / 020</a:t>
+              <a:t>012 / 021</a:t>
             </a:r>
           </a:p>
         </p:txBody>
@@ -6044,7 +6268,7 @@
         <p:spPr>
           <a:xfrm>
             <a:off x="822960" y="457200"/>
-            <a:ext cx="8229600" cy="365760"/>
+            <a:ext cx="10058400" cy="365760"/>
           </a:xfrm>
           <a:prstGeom prst="rect">
             <a:avLst/>
@@ -6058,13 +6282,13 @@
           <a:lstStyle/>
           <a:p>
             <a:r>
-              <a:rPr sz="1200" b="1" i="0">
-                <a:solidFill>
-                  <a:srgbClr val="64748B"/>
-                </a:solidFill>
-                <a:latin typeface="Montserrat"/>
-              </a:rPr>
-              <a:t>APARTADO 3.5 · PUESTA EN SERVICIO</a:t>
+              <a:rPr sz="1300" b="1" i="0">
+                <a:solidFill>
+                  <a:srgbClr val="E8801A"/>
+                </a:solidFill>
+                <a:latin typeface="Montserrat"/>
+              </a:rPr>
+              <a:t>APARTADO 3.4 · CHIMENEAS</a:t>
             </a:r>
           </a:p>
         </p:txBody>
@@ -6092,26 +6316,70 @@
           <a:lstStyle/>
           <a:p>
             <a:r>
-              <a:rPr sz="2700" b="1" i="0">
+              <a:rPr sz="2800" b="1" i="0">
                 <a:solidFill>
                   <a:srgbClr val="1E2761"/>
                 </a:solidFill>
                 <a:latin typeface="Montserrat"/>
               </a:rPr>
-              <a:t>Cerrar, bloquear, precintar, taponar</a:t>
-            </a:r>
-          </a:p>
-        </p:txBody>
-      </p:sp>
-      <p:sp>
-        <p:nvSpPr>
-          <p:cNvPr id="7" name="TextBox 6"/>
+              <a:t>Chimeneas en obra nueva</a:t>
+            </a:r>
+          </a:p>
+        </p:txBody>
+      </p:sp>
+      <p:sp>
+        <p:nvSpPr>
+          <p:cNvPr id="7" name="Rounded Rectangle 6"/>
+          <p:cNvSpPr/>
+          <p:nvPr/>
+        </p:nvSpPr>
+        <p:spPr>
+          <a:xfrm>
+            <a:off x="868680" y="1627632"/>
+            <a:ext cx="2011680" cy="73152"/>
+          </a:xfrm>
+          <a:prstGeom prst="roundRect">
+            <a:avLst/>
+          </a:prstGeom>
+          <a:solidFill>
+            <a:srgbClr val="E8801A"/>
+          </a:solidFill>
+          <a:ln>
+            <a:noFill/>
+          </a:ln>
+          <a:effectLst/>
+        </p:spPr>
+        <p:style>
+          <a:lnRef idx="1">
+            <a:schemeClr val="accent1"/>
+          </a:lnRef>
+          <a:fillRef idx="3">
+            <a:schemeClr val="accent1"/>
+          </a:fillRef>
+          <a:effectRef idx="2">
+            <a:schemeClr val="accent1"/>
+          </a:effectRef>
+          <a:fontRef idx="minor">
+            <a:schemeClr val="lt1"/>
+          </a:fontRef>
+        </p:style>
+        <p:txBody>
+          <a:bodyPr rtlCol="0" anchor="ctr"/>
+          <a:lstStyle/>
+          <a:p>
+            <a:pPr algn="ctr"/>
+          </a:p>
+        </p:txBody>
+      </p:sp>
+      <p:sp>
+        <p:nvSpPr>
+          <p:cNvPr id="8" name="TextBox 7"/>
           <p:cNvSpPr txBox="1"/>
           <p:nvPr/>
         </p:nvSpPr>
         <p:spPr>
           <a:xfrm>
-            <a:off x="822960" y="1920240"/>
+            <a:off x="822960" y="1965960"/>
             <a:ext cx="4983480" cy="4206240"/>
           </a:xfrm>
           <a:prstGeom prst="rect">
@@ -6127,17 +6395,17 @@
           <a:p>
             <a:pPr>
               <a:spcAft>
-                <a:spcPts val="1000"/>
+                <a:spcPts val="1100"/>
               </a:spcAft>
             </a:pPr>
             <a:r>
               <a:rPr sz="1600" b="1" i="0">
                 <a:solidFill>
-                  <a:srgbClr val="2E3A80"/>
-                </a:solidFill>
-                <a:latin typeface="Montserrat"/>
-              </a:rPr>
-              <a:t>•  </a:t>
+                  <a:srgbClr val="E8801A"/>
+                </a:solidFill>
+                <a:latin typeface="Montserrat"/>
+              </a:rPr>
+              <a:t>▸  </a:t>
             </a:r>
             <a:r>
               <a:rPr sz="1600" b="0" i="0">
@@ -6146,23 +6414,23 @@
                 </a:solidFill>
                 <a:latin typeface="Montserrat"/>
               </a:rPr>
-              <a:t>Llaves de viviendas sin contrato</a:t>
+              <a:t>Edificio de nueva planta con chimeneas</a:t>
             </a:r>
           </a:p>
           <a:p>
             <a:pPr>
               <a:spcAft>
-                <a:spcPts val="1000"/>
+                <a:spcPts val="1100"/>
               </a:spcAft>
             </a:pPr>
             <a:r>
               <a:rPr sz="1600" b="1" i="0">
                 <a:solidFill>
-                  <a:srgbClr val="2E3A80"/>
-                </a:solidFill>
-                <a:latin typeface="Montserrat"/>
-              </a:rPr>
-              <a:t>•  </a:t>
+                  <a:srgbClr val="E8801A"/>
+                </a:solidFill>
+                <a:latin typeface="Montserrat"/>
+              </a:rPr>
+              <a:t>▸  </a:t>
             </a:r>
             <a:r>
               <a:rPr sz="1600" b="0" i="0">
@@ -6171,23 +6439,23 @@
                 </a:solidFill>
                 <a:latin typeface="Montserrat"/>
               </a:rPr>
-              <a:t>Cerradas, bloqueadas y precintadas</a:t>
+              <a:t>Certificación previa a la puesta en servicio</a:t>
             </a:r>
           </a:p>
           <a:p>
             <a:pPr>
               <a:spcAft>
-                <a:spcPts val="1000"/>
+                <a:spcPts val="1100"/>
               </a:spcAft>
             </a:pPr>
             <a:r>
               <a:rPr sz="1600" b="1" i="0">
                 <a:solidFill>
-                  <a:srgbClr val="2E3A80"/>
-                </a:solidFill>
-                <a:latin typeface="Montserrat"/>
-              </a:rPr>
-              <a:t>•  </a:t>
+                  <a:srgbClr val="E8801A"/>
+                </a:solidFill>
+                <a:latin typeface="Montserrat"/>
+              </a:rPr>
+              <a:t>▸  </a:t>
             </a:r>
             <a:r>
               <a:rPr sz="1600" b="0" i="0">
@@ -6196,14 +6464,14 @@
                 </a:solidFill>
                 <a:latin typeface="Montserrat"/>
               </a:rPr>
-              <a:t>Taponadas si no hay aparato</a:t>
-            </a:r>
-          </a:p>
-        </p:txBody>
-      </p:sp>
-      <p:sp>
-        <p:nvSpPr>
-          <p:cNvPr id="8" name="imgph" descr="IMGQ:gas valve with security seal"/>
+              <a:t>Técnico competente u organismo de control</a:t>
+            </a:r>
+          </a:p>
+        </p:txBody>
+      </p:sp>
+      <p:sp>
+        <p:nvSpPr>
+          <p:cNvPr id="9" name="imgph" descr="IMGQ:new building rooftop with chimney flues"/>
           <p:cNvSpPr/>
           <p:nvPr/>
         </p:nvSpPr>
@@ -6249,7 +6517,7 @@
       </p:sp>
       <p:sp>
         <p:nvSpPr>
-          <p:cNvPr id="9" name="TextBox 8"/>
+          <p:cNvPr id="10" name="TextBox 9"/>
           <p:cNvSpPr txBox="1"/>
           <p:nvPr/>
         </p:nvSpPr>
@@ -6289,7 +6557,7 @@
                 </a:solidFill>
                 <a:latin typeface="Montserrat"/>
               </a:rPr>
-              <a:t>gas valve with security seal</a:t>
+              <a:t>new building rooftop with chimney flues</a:t>
             </a:r>
           </a:p>
         </p:txBody>
@@ -6386,7 +6654,7 @@
                 </a:solidFill>
                 <a:latin typeface="Montserrat"/>
               </a:rPr>
-              <a:t>013 / 020</a:t>
+              <a:t>013 / 021</a:t>
             </a:r>
           </a:p>
         </p:txBody>
@@ -6434,7 +6702,7 @@
         <p:spPr>
           <a:xfrm>
             <a:off x="822960" y="457200"/>
-            <a:ext cx="8229600" cy="365760"/>
+            <a:ext cx="10058400" cy="365760"/>
           </a:xfrm>
           <a:prstGeom prst="rect">
             <a:avLst/>
@@ -6448,9 +6716,9 @@
           <a:lstStyle/>
           <a:p>
             <a:r>
-              <a:rPr sz="1200" b="1" i="0">
-                <a:solidFill>
-                  <a:srgbClr val="64748B"/>
+              <a:rPr sz="1300" b="1" i="0">
+                <a:solidFill>
+                  <a:srgbClr val="E8801A"/>
                 </a:solidFill>
                 <a:latin typeface="Montserrat"/>
               </a:rPr>
@@ -6482,26 +6750,70 @@
           <a:lstStyle/>
           <a:p>
             <a:r>
-              <a:rPr sz="2700" b="1" i="0">
+              <a:rPr sz="2800" b="1" i="0">
                 <a:solidFill>
                   <a:srgbClr val="1E2761"/>
                 </a:solidFill>
                 <a:latin typeface="Montserrat"/>
               </a:rPr>
-              <a:t>Purgar: sacar el aire</a:t>
-            </a:r>
-          </a:p>
-        </p:txBody>
-      </p:sp>
-      <p:sp>
-        <p:nvSpPr>
-          <p:cNvPr id="7" name="TextBox 6"/>
+              <a:t>Cerrar, bloquear, precintar, taponar</a:t>
+            </a:r>
+          </a:p>
+        </p:txBody>
+      </p:sp>
+      <p:sp>
+        <p:nvSpPr>
+          <p:cNvPr id="7" name="Rounded Rectangle 6"/>
+          <p:cNvSpPr/>
+          <p:nvPr/>
+        </p:nvSpPr>
+        <p:spPr>
+          <a:xfrm>
+            <a:off x="868680" y="1627632"/>
+            <a:ext cx="2011680" cy="73152"/>
+          </a:xfrm>
+          <a:prstGeom prst="roundRect">
+            <a:avLst/>
+          </a:prstGeom>
+          <a:solidFill>
+            <a:srgbClr val="E8801A"/>
+          </a:solidFill>
+          <a:ln>
+            <a:noFill/>
+          </a:ln>
+          <a:effectLst/>
+        </p:spPr>
+        <p:style>
+          <a:lnRef idx="1">
+            <a:schemeClr val="accent1"/>
+          </a:lnRef>
+          <a:fillRef idx="3">
+            <a:schemeClr val="accent1"/>
+          </a:fillRef>
+          <a:effectRef idx="2">
+            <a:schemeClr val="accent1"/>
+          </a:effectRef>
+          <a:fontRef idx="minor">
+            <a:schemeClr val="lt1"/>
+          </a:fontRef>
+        </p:style>
+        <p:txBody>
+          <a:bodyPr rtlCol="0" anchor="ctr"/>
+          <a:lstStyle/>
+          <a:p>
+            <a:pPr algn="ctr"/>
+          </a:p>
+        </p:txBody>
+      </p:sp>
+      <p:sp>
+        <p:nvSpPr>
+          <p:cNvPr id="8" name="TextBox 7"/>
           <p:cNvSpPr txBox="1"/>
           <p:nvPr/>
         </p:nvSpPr>
         <p:spPr>
           <a:xfrm>
-            <a:off x="822960" y="1920240"/>
+            <a:off x="822960" y="1965960"/>
             <a:ext cx="4983480" cy="4206240"/>
           </a:xfrm>
           <a:prstGeom prst="rect">
@@ -6517,17 +6829,17 @@
           <a:p>
             <a:pPr>
               <a:spcAft>
-                <a:spcPts val="1000"/>
+                <a:spcPts val="1100"/>
               </a:spcAft>
             </a:pPr>
             <a:r>
               <a:rPr sz="1600" b="1" i="0">
                 <a:solidFill>
-                  <a:srgbClr val="2E3A80"/>
-                </a:solidFill>
-                <a:latin typeface="Montserrat"/>
-              </a:rPr>
-              <a:t>•  </a:t>
+                  <a:srgbClr val="E8801A"/>
+                </a:solidFill>
+                <a:latin typeface="Montserrat"/>
+              </a:rPr>
+              <a:t>▸  </a:t>
             </a:r>
             <a:r>
               <a:rPr sz="1600" b="0" i="0">
@@ -6536,23 +6848,23 @@
                 </a:solidFill>
                 <a:latin typeface="Montserrat"/>
               </a:rPr>
-              <a:t>Barrer el aire de la tubería</a:t>
+              <a:t>Llaves de viviendas sin contrato</a:t>
             </a:r>
           </a:p>
           <a:p>
             <a:pPr>
               <a:spcAft>
-                <a:spcPts val="1000"/>
+                <a:spcPts val="1100"/>
               </a:spcAft>
             </a:pPr>
             <a:r>
               <a:rPr sz="1600" b="1" i="0">
                 <a:solidFill>
-                  <a:srgbClr val="2E3A80"/>
-                </a:solidFill>
-                <a:latin typeface="Montserrat"/>
-              </a:rPr>
-              <a:t>•  </a:t>
+                  <a:srgbClr val="E8801A"/>
+                </a:solidFill>
+                <a:latin typeface="Montserrat"/>
+              </a:rPr>
+              <a:t>▸  </a:t>
             </a:r>
             <a:r>
               <a:rPr sz="1600" b="0" i="0">
@@ -6561,23 +6873,23 @@
                 </a:solidFill>
                 <a:latin typeface="Montserrat"/>
               </a:rPr>
-              <a:t>Que no quede mezcla aire-gas</a:t>
+              <a:t>Cerradas, bloqueadas y precintadas</a:t>
             </a:r>
           </a:p>
           <a:p>
             <a:pPr>
               <a:spcAft>
-                <a:spcPts val="1000"/>
+                <a:spcPts val="1100"/>
               </a:spcAft>
             </a:pPr>
             <a:r>
               <a:rPr sz="1600" b="1" i="0">
                 <a:solidFill>
-                  <a:srgbClr val="2E3A80"/>
-                </a:solidFill>
-                <a:latin typeface="Montserrat"/>
-              </a:rPr>
-              <a:t>•  </a:t>
+                  <a:srgbClr val="E8801A"/>
+                </a:solidFill>
+                <a:latin typeface="Montserrat"/>
+              </a:rPr>
+              <a:t>▸  </a:t>
             </a:r>
             <a:r>
               <a:rPr sz="1600" b="0" i="0">
@@ -6586,14 +6898,14 @@
                 </a:solidFill>
                 <a:latin typeface="Montserrat"/>
               </a:rPr>
-              <a:t>Fuera de los límites de inflamabilidad</a:t>
-            </a:r>
-          </a:p>
-        </p:txBody>
-      </p:sp>
-      <p:sp>
-        <p:nvSpPr>
-          <p:cNvPr id="8" name="imgph" descr="IMGQ:gas technician purging pipe at valve"/>
+              <a:t>Taponadas si no hay aparato</a:t>
+            </a:r>
+          </a:p>
+        </p:txBody>
+      </p:sp>
+      <p:sp>
+        <p:nvSpPr>
+          <p:cNvPr id="9" name="imgph" descr="IMGQ:gas valve with security seal"/>
           <p:cNvSpPr/>
           <p:nvPr/>
         </p:nvSpPr>
@@ -6639,7 +6951,7 @@
       </p:sp>
       <p:sp>
         <p:nvSpPr>
-          <p:cNvPr id="9" name="TextBox 8"/>
+          <p:cNvPr id="10" name="TextBox 9"/>
           <p:cNvSpPr txBox="1"/>
           <p:nvPr/>
         </p:nvSpPr>
@@ -6679,7 +6991,7 @@
                 </a:solidFill>
                 <a:latin typeface="Montserrat"/>
               </a:rPr>
-              <a:t>gas technician purging pipe at valve</a:t>
+              <a:t>gas valve with security seal</a:t>
             </a:r>
           </a:p>
         </p:txBody>
@@ -6776,7 +7088,7 @@
                 </a:solidFill>
                 <a:latin typeface="Montserrat"/>
               </a:rPr>
-              <a:t>014 / 020</a:t>
+              <a:t>014 / 021</a:t>
             </a:r>
           </a:p>
         </p:txBody>
@@ -6824,7 +7136,7 @@
         <p:spPr>
           <a:xfrm>
             <a:off x="822960" y="457200"/>
-            <a:ext cx="8229600" cy="365760"/>
+            <a:ext cx="10058400" cy="365760"/>
           </a:xfrm>
           <a:prstGeom prst="rect">
             <a:avLst/>
@@ -6838,13 +7150,13 @@
           <a:lstStyle/>
           <a:p>
             <a:r>
-              <a:rPr sz="1200" b="1" i="0">
-                <a:solidFill>
-                  <a:srgbClr val="64748B"/>
-                </a:solidFill>
-                <a:latin typeface="Montserrat"/>
-              </a:rPr>
-              <a:t>APARTADO 3.5.1 · CON CONTRATO</a:t>
+              <a:rPr sz="1300" b="1" i="0">
+                <a:solidFill>
+                  <a:srgbClr val="E8801A"/>
+                </a:solidFill>
+                <a:latin typeface="Montserrat"/>
+              </a:rPr>
+              <a:t>APARTADO 3.5 · PUESTA EN SERVICIO</a:t>
             </a:r>
           </a:p>
         </p:txBody>
@@ -6872,26 +7184,70 @@
           <a:lstStyle/>
           <a:p>
             <a:r>
-              <a:rPr sz="2700" b="1" i="0">
+              <a:rPr sz="2800" b="1" i="0">
                 <a:solidFill>
                   <a:srgbClr val="1E2761"/>
                 </a:solidFill>
                 <a:latin typeface="Montserrat"/>
               </a:rPr>
-              <a:t>Con contrato de suministro</a:t>
-            </a:r>
-          </a:p>
-        </p:txBody>
-      </p:sp>
-      <p:sp>
-        <p:nvSpPr>
-          <p:cNvPr id="7" name="TextBox 6"/>
+              <a:t>Purgar: sacar el aire</a:t>
+            </a:r>
+          </a:p>
+        </p:txBody>
+      </p:sp>
+      <p:sp>
+        <p:nvSpPr>
+          <p:cNvPr id="7" name="Rounded Rectangle 6"/>
+          <p:cNvSpPr/>
+          <p:nvPr/>
+        </p:nvSpPr>
+        <p:spPr>
+          <a:xfrm>
+            <a:off x="868680" y="1627632"/>
+            <a:ext cx="2011680" cy="73152"/>
+          </a:xfrm>
+          <a:prstGeom prst="roundRect">
+            <a:avLst/>
+          </a:prstGeom>
+          <a:solidFill>
+            <a:srgbClr val="E8801A"/>
+          </a:solidFill>
+          <a:ln>
+            <a:noFill/>
+          </a:ln>
+          <a:effectLst/>
+        </p:spPr>
+        <p:style>
+          <a:lnRef idx="1">
+            <a:schemeClr val="accent1"/>
+          </a:lnRef>
+          <a:fillRef idx="3">
+            <a:schemeClr val="accent1"/>
+          </a:fillRef>
+          <a:effectRef idx="2">
+            <a:schemeClr val="accent1"/>
+          </a:effectRef>
+          <a:fontRef idx="minor">
+            <a:schemeClr val="lt1"/>
+          </a:fontRef>
+        </p:style>
+        <p:txBody>
+          <a:bodyPr rtlCol="0" anchor="ctr"/>
+          <a:lstStyle/>
+          <a:p>
+            <a:pPr algn="ctr"/>
+          </a:p>
+        </p:txBody>
+      </p:sp>
+      <p:sp>
+        <p:nvSpPr>
+          <p:cNvPr id="8" name="TextBox 7"/>
           <p:cNvSpPr txBox="1"/>
           <p:nvPr/>
         </p:nvSpPr>
         <p:spPr>
           <a:xfrm>
-            <a:off x="822960" y="1920240"/>
+            <a:off x="822960" y="1965960"/>
             <a:ext cx="4983480" cy="4206240"/>
           </a:xfrm>
           <a:prstGeom prst="rect">
@@ -6907,17 +7263,17 @@
           <a:p>
             <a:pPr>
               <a:spcAft>
-                <a:spcPts val="1000"/>
+                <a:spcPts val="1100"/>
               </a:spcAft>
             </a:pPr>
             <a:r>
               <a:rPr sz="1600" b="1" i="0">
                 <a:solidFill>
-                  <a:srgbClr val="2E3A80"/>
-                </a:solidFill>
-                <a:latin typeface="Montserrat"/>
-              </a:rPr>
-              <a:t>•  </a:t>
+                  <a:srgbClr val="E8801A"/>
+                </a:solidFill>
+                <a:latin typeface="Montserrat"/>
+              </a:rPr>
+              <a:t>▸  </a:t>
             </a:r>
             <a:r>
               <a:rPr sz="1600" b="0" i="0">
@@ -6926,23 +7282,23 @@
                 </a:solidFill>
                 <a:latin typeface="Montserrat"/>
               </a:rPr>
-              <a:t>El usuario firma la póliza antes</a:t>
+              <a:t>Barrer el aire de la tubería</a:t>
             </a:r>
           </a:p>
           <a:p>
             <a:pPr>
               <a:spcAft>
-                <a:spcPts val="1000"/>
+                <a:spcPts val="1100"/>
               </a:spcAft>
             </a:pPr>
             <a:r>
               <a:rPr sz="1600" b="1" i="0">
                 <a:solidFill>
-                  <a:srgbClr val="2E3A80"/>
-                </a:solidFill>
-                <a:latin typeface="Montserrat"/>
-              </a:rPr>
-              <a:t>•  </a:t>
+                  <a:srgbClr val="E8801A"/>
+                </a:solidFill>
+                <a:latin typeface="Montserrat"/>
+              </a:rPr>
+              <a:t>▸  </a:t>
             </a:r>
             <a:r>
               <a:rPr sz="1600" b="0" i="0">
@@ -6951,23 +7307,23 @@
                 </a:solidFill>
                 <a:latin typeface="Montserrat"/>
               </a:rPr>
-              <a:t>Se solicita la puesta en servicio</a:t>
+              <a:t>Que no quede mezcla aire-gas</a:t>
             </a:r>
           </a:p>
           <a:p>
             <a:pPr>
               <a:spcAft>
-                <a:spcPts val="1000"/>
+                <a:spcPts val="1100"/>
               </a:spcAft>
             </a:pPr>
             <a:r>
               <a:rPr sz="1600" b="1" i="0">
                 <a:solidFill>
-                  <a:srgbClr val="2E3A80"/>
-                </a:solidFill>
-                <a:latin typeface="Montserrat"/>
-              </a:rPr>
-              <a:t>•  </a:t>
+                  <a:srgbClr val="E8801A"/>
+                </a:solidFill>
+                <a:latin typeface="Montserrat"/>
+              </a:rPr>
+              <a:t>▸  </a:t>
             </a:r>
             <a:r>
               <a:rPr sz="1600" b="0" i="0">
@@ -6976,14 +7332,14 @@
                 </a:solidFill>
                 <a:latin typeface="Montserrat"/>
               </a:rPr>
-              <a:t>La ejecuta el distribuidor</a:t>
-            </a:r>
-          </a:p>
-        </p:txBody>
-      </p:sp>
-      <p:sp>
-        <p:nvSpPr>
-          <p:cNvPr id="8" name="imgph" descr="IMGQ:person signing a contract at a desk"/>
+              <a:t>Fuera de los límites de inflamabilidad</a:t>
+            </a:r>
+          </a:p>
+        </p:txBody>
+      </p:sp>
+      <p:sp>
+        <p:nvSpPr>
+          <p:cNvPr id="9" name="imgph" descr="IMGQ:gas technician purging pipe at valve"/>
           <p:cNvSpPr/>
           <p:nvPr/>
         </p:nvSpPr>
@@ -7029,7 +7385,7 @@
       </p:sp>
       <p:sp>
         <p:nvSpPr>
-          <p:cNvPr id="9" name="TextBox 8"/>
+          <p:cNvPr id="10" name="TextBox 9"/>
           <p:cNvSpPr txBox="1"/>
           <p:nvPr/>
         </p:nvSpPr>
@@ -7069,7 +7425,7 @@
                 </a:solidFill>
                 <a:latin typeface="Montserrat"/>
               </a:rPr>
-              <a:t>person signing a contract at a desk</a:t>
+              <a:t>gas technician purging pipe at valve</a:t>
             </a:r>
           </a:p>
         </p:txBody>
@@ -7166,7 +7522,7 @@
                 </a:solidFill>
                 <a:latin typeface="Montserrat"/>
               </a:rPr>
-              <a:t>015 / 020</a:t>
+              <a:t>015 / 021</a:t>
             </a:r>
           </a:p>
         </p:txBody>
@@ -7214,7 +7570,7 @@
         <p:spPr>
           <a:xfrm>
             <a:off x="822960" y="457200"/>
-            <a:ext cx="8229600" cy="365760"/>
+            <a:ext cx="10058400" cy="365760"/>
           </a:xfrm>
           <a:prstGeom prst="rect">
             <a:avLst/>
@@ -7228,13 +7584,13 @@
           <a:lstStyle/>
           <a:p>
             <a:r>
-              <a:rPr sz="1200" b="1" i="0">
-                <a:solidFill>
-                  <a:srgbClr val="64748B"/>
-                </a:solidFill>
-                <a:latin typeface="Montserrat"/>
-              </a:rPr>
-              <a:t>APARTADO 3.5.1 · LOS 9 PASOS</a:t>
+              <a:rPr sz="1300" b="1" i="0">
+                <a:solidFill>
+                  <a:srgbClr val="E8801A"/>
+                </a:solidFill>
+                <a:latin typeface="Montserrat"/>
+              </a:rPr>
+              <a:t>APARTADO 3.5.1 · CON CONTRATO</a:t>
             </a:r>
           </a:p>
         </p:txBody>
@@ -7262,26 +7618,70 @@
           <a:lstStyle/>
           <a:p>
             <a:r>
-              <a:rPr sz="2700" b="1" i="0">
+              <a:rPr sz="2800" b="1" i="0">
                 <a:solidFill>
                   <a:srgbClr val="1E2761"/>
                 </a:solidFill>
                 <a:latin typeface="Montserrat"/>
               </a:rPr>
-              <a:t>Nueve pasos, dos bloques</a:t>
-            </a:r>
-          </a:p>
-        </p:txBody>
-      </p:sp>
-      <p:sp>
-        <p:nvSpPr>
-          <p:cNvPr id="7" name="TextBox 6"/>
+              <a:t>Con contrato de suministro</a:t>
+            </a:r>
+          </a:p>
+        </p:txBody>
+      </p:sp>
+      <p:sp>
+        <p:nvSpPr>
+          <p:cNvPr id="7" name="Rounded Rectangle 6"/>
+          <p:cNvSpPr/>
+          <p:nvPr/>
+        </p:nvSpPr>
+        <p:spPr>
+          <a:xfrm>
+            <a:off x="868680" y="1627632"/>
+            <a:ext cx="2011680" cy="73152"/>
+          </a:xfrm>
+          <a:prstGeom prst="roundRect">
+            <a:avLst/>
+          </a:prstGeom>
+          <a:solidFill>
+            <a:srgbClr val="E8801A"/>
+          </a:solidFill>
+          <a:ln>
+            <a:noFill/>
+          </a:ln>
+          <a:effectLst/>
+        </p:spPr>
+        <p:style>
+          <a:lnRef idx="1">
+            <a:schemeClr val="accent1"/>
+          </a:lnRef>
+          <a:fillRef idx="3">
+            <a:schemeClr val="accent1"/>
+          </a:fillRef>
+          <a:effectRef idx="2">
+            <a:schemeClr val="accent1"/>
+          </a:effectRef>
+          <a:fontRef idx="minor">
+            <a:schemeClr val="lt1"/>
+          </a:fontRef>
+        </p:style>
+        <p:txBody>
+          <a:bodyPr rtlCol="0" anchor="ctr"/>
+          <a:lstStyle/>
+          <a:p>
+            <a:pPr algn="ctr"/>
+          </a:p>
+        </p:txBody>
+      </p:sp>
+      <p:sp>
+        <p:nvSpPr>
+          <p:cNvPr id="8" name="TextBox 7"/>
           <p:cNvSpPr txBox="1"/>
           <p:nvPr/>
         </p:nvSpPr>
         <p:spPr>
           <a:xfrm>
-            <a:off x="822960" y="1920240"/>
+            <a:off x="822960" y="1965960"/>
             <a:ext cx="4983480" cy="4206240"/>
           </a:xfrm>
           <a:prstGeom prst="rect">
@@ -7297,17 +7697,17 @@
           <a:p>
             <a:pPr>
               <a:spcAft>
-                <a:spcPts val="1000"/>
+                <a:spcPts val="1100"/>
               </a:spcAft>
             </a:pPr>
             <a:r>
               <a:rPr sz="1600" b="1" i="0">
                 <a:solidFill>
-                  <a:srgbClr val="2E3A80"/>
-                </a:solidFill>
-                <a:latin typeface="Montserrat"/>
-              </a:rPr>
-              <a:t>•  </a:t>
+                  <a:srgbClr val="E8801A"/>
+                </a:solidFill>
+                <a:latin typeface="Montserrat"/>
+              </a:rPr>
+              <a:t>▸  </a:t>
             </a:r>
             <a:r>
               <a:rPr sz="1600" b="0" i="0">
@@ -7316,23 +7716,23 @@
                 </a:solidFill>
                 <a:latin typeface="Montserrat"/>
               </a:rPr>
-              <a:t>1-5: comprobar todo</a:t>
+              <a:t>El usuario firma la póliza antes</a:t>
             </a:r>
           </a:p>
           <a:p>
             <a:pPr>
               <a:spcAft>
-                <a:spcPts val="1000"/>
+                <a:spcPts val="1100"/>
               </a:spcAft>
             </a:pPr>
             <a:r>
               <a:rPr sz="1600" b="1" i="0">
                 <a:solidFill>
-                  <a:srgbClr val="2E3A80"/>
-                </a:solidFill>
-                <a:latin typeface="Montserrat"/>
-              </a:rPr>
-              <a:t>•  </a:t>
+                  <a:srgbClr val="E8801A"/>
+                </a:solidFill>
+                <a:latin typeface="Montserrat"/>
+              </a:rPr>
+              <a:t>▸  </a:t>
             </a:r>
             <a:r>
               <a:rPr sz="1600" b="0" i="0">
@@ -7341,23 +7741,23 @@
                 </a:solidFill>
                 <a:latin typeface="Montserrat"/>
               </a:rPr>
-              <a:t>docs, partes visibles, locales, válvulas</a:t>
+              <a:t>Se solicita la puesta en servicio</a:t>
             </a:r>
           </a:p>
           <a:p>
             <a:pPr>
               <a:spcAft>
-                <a:spcPts val="1000"/>
+                <a:spcPts val="1100"/>
               </a:spcAft>
             </a:pPr>
             <a:r>
               <a:rPr sz="1600" b="1" i="0">
                 <a:solidFill>
-                  <a:srgbClr val="2E3A80"/>
-                </a:solidFill>
-                <a:latin typeface="Montserrat"/>
-              </a:rPr>
-              <a:t>•  </a:t>
+                  <a:srgbClr val="E8801A"/>
+                </a:solidFill>
+                <a:latin typeface="Montserrat"/>
+              </a:rPr>
+              <a:t>▸  </a:t>
             </a:r>
             <a:r>
               <a:rPr sz="1600" b="0" i="0">
@@ -7366,39 +7766,14 @@
                 </a:solidFill>
                 <a:latin typeface="Montserrat"/>
               </a:rPr>
-              <a:t>6-9: precintar contador y estanquidad</a:t>
-            </a:r>
-          </a:p>
-          <a:p>
-            <a:pPr>
-              <a:spcAft>
-                <a:spcPts val="1000"/>
-              </a:spcAft>
-            </a:pPr>
-            <a:r>
-              <a:rPr sz="1600" b="1" i="0">
-                <a:solidFill>
-                  <a:srgbClr val="2E3A80"/>
-                </a:solidFill>
-                <a:latin typeface="Montserrat"/>
-              </a:rPr>
-              <a:t>•  </a:t>
-            </a:r>
-            <a:r>
-              <a:rPr sz="1600" b="0" i="0">
-                <a:solidFill>
-                  <a:srgbClr val="1B2330"/>
-                </a:solidFill>
-                <a:latin typeface="Montserrat"/>
-              </a:rPr>
-              <a:t>dejar en servicio y certificar</a:t>
-            </a:r>
-          </a:p>
-        </p:txBody>
-      </p:sp>
-      <p:sp>
-        <p:nvSpPr>
-          <p:cNvPr id="8" name="imgph" descr="IMGQ:gas meter and regulator being inspected"/>
+              <a:t>La ejecuta el distribuidor</a:t>
+            </a:r>
+          </a:p>
+        </p:txBody>
+      </p:sp>
+      <p:sp>
+        <p:nvSpPr>
+          <p:cNvPr id="9" name="imgph" descr="IMGQ:person signing a contract at a desk"/>
           <p:cNvSpPr/>
           <p:nvPr/>
         </p:nvSpPr>
@@ -7444,7 +7819,7 @@
       </p:sp>
       <p:sp>
         <p:nvSpPr>
-          <p:cNvPr id="9" name="TextBox 8"/>
+          <p:cNvPr id="10" name="TextBox 9"/>
           <p:cNvSpPr txBox="1"/>
           <p:nvPr/>
         </p:nvSpPr>
@@ -7484,7 +7859,7 @@
                 </a:solidFill>
                 <a:latin typeface="Montserrat"/>
               </a:rPr>
-              <a:t>gas meter and regulator being inspected</a:t>
+              <a:t>person signing a contract at a desk</a:t>
             </a:r>
           </a:p>
         </p:txBody>
@@ -7581,7 +7956,7 @@
                 </a:solidFill>
                 <a:latin typeface="Montserrat"/>
               </a:rPr>
-              <a:t>016 / 020</a:t>
+              <a:t>016 / 021</a:t>
             </a:r>
           </a:p>
         </p:txBody>
@@ -7629,7 +8004,7 @@
         <p:spPr>
           <a:xfrm>
             <a:off x="822960" y="457200"/>
-            <a:ext cx="8229600" cy="365760"/>
+            <a:ext cx="10058400" cy="365760"/>
           </a:xfrm>
           <a:prstGeom prst="rect">
             <a:avLst/>
@@ -7643,13 +8018,13 @@
           <a:lstStyle/>
           <a:p>
             <a:r>
-              <a:rPr sz="1200" b="1" i="0">
-                <a:solidFill>
-                  <a:srgbClr val="64748B"/>
-                </a:solidFill>
-                <a:latin typeface="Montserrat"/>
-              </a:rPr>
-              <a:t>APARTADO 3.5.1 · QUIÉN ACTÚA</a:t>
+              <a:rPr sz="1300" b="1" i="0">
+                <a:solidFill>
+                  <a:srgbClr val="E8801A"/>
+                </a:solidFill>
+                <a:latin typeface="Montserrat"/>
+              </a:rPr>
+              <a:t>APARTADO 3.5.1 · LOS 9 PASOS</a:t>
             </a:r>
           </a:p>
         </p:txBody>
@@ -7677,26 +8052,70 @@
           <a:lstStyle/>
           <a:p>
             <a:r>
-              <a:rPr sz="2700" b="1" i="0">
+              <a:rPr sz="2800" b="1" i="0">
                 <a:solidFill>
                   <a:srgbClr val="1E2761"/>
                 </a:solidFill>
                 <a:latin typeface="Montserrat"/>
               </a:rPr>
-              <a:t>¿Quién da el gas?</a:t>
-            </a:r>
-          </a:p>
-        </p:txBody>
-      </p:sp>
-      <p:sp>
-        <p:nvSpPr>
-          <p:cNvPr id="7" name="TextBox 6"/>
+              <a:t>Nueve pasos, dos bloques</a:t>
+            </a:r>
+          </a:p>
+        </p:txBody>
+      </p:sp>
+      <p:sp>
+        <p:nvSpPr>
+          <p:cNvPr id="7" name="Rounded Rectangle 6"/>
+          <p:cNvSpPr/>
+          <p:nvPr/>
+        </p:nvSpPr>
+        <p:spPr>
+          <a:xfrm>
+            <a:off x="868680" y="1627632"/>
+            <a:ext cx="2011680" cy="73152"/>
+          </a:xfrm>
+          <a:prstGeom prst="roundRect">
+            <a:avLst/>
+          </a:prstGeom>
+          <a:solidFill>
+            <a:srgbClr val="E8801A"/>
+          </a:solidFill>
+          <a:ln>
+            <a:noFill/>
+          </a:ln>
+          <a:effectLst/>
+        </p:spPr>
+        <p:style>
+          <a:lnRef idx="1">
+            <a:schemeClr val="accent1"/>
+          </a:lnRef>
+          <a:fillRef idx="3">
+            <a:schemeClr val="accent1"/>
+          </a:fillRef>
+          <a:effectRef idx="2">
+            <a:schemeClr val="accent1"/>
+          </a:effectRef>
+          <a:fontRef idx="minor">
+            <a:schemeClr val="lt1"/>
+          </a:fontRef>
+        </p:style>
+        <p:txBody>
+          <a:bodyPr rtlCol="0" anchor="ctr"/>
+          <a:lstStyle/>
+          <a:p>
+            <a:pPr algn="ctr"/>
+          </a:p>
+        </p:txBody>
+      </p:sp>
+      <p:sp>
+        <p:nvSpPr>
+          <p:cNvPr id="8" name="TextBox 7"/>
           <p:cNvSpPr txBox="1"/>
           <p:nvPr/>
         </p:nvSpPr>
         <p:spPr>
           <a:xfrm>
-            <a:off x="822960" y="1920240"/>
+            <a:off x="822960" y="1965960"/>
             <a:ext cx="4983480" cy="4206240"/>
           </a:xfrm>
           <a:prstGeom prst="rect">
@@ -7712,17 +8131,17 @@
           <a:p>
             <a:pPr>
               <a:spcAft>
-                <a:spcPts val="1000"/>
+                <a:spcPts val="1100"/>
               </a:spcAft>
             </a:pPr>
             <a:r>
               <a:rPr sz="1600" b="1" i="0">
                 <a:solidFill>
-                  <a:srgbClr val="2E3A80"/>
-                </a:solidFill>
-                <a:latin typeface="Montserrat"/>
-              </a:rPr>
-              <a:t>•  </a:t>
+                  <a:srgbClr val="E8801A"/>
+                </a:solidFill>
+                <a:latin typeface="Montserrat"/>
+              </a:rPr>
+              <a:t>▸  </a:t>
             </a:r>
             <a:r>
               <a:rPr sz="1600" b="0" i="0">
@@ -7731,23 +8150,23 @@
                 </a:solidFill>
                 <a:latin typeface="Montserrat"/>
               </a:rPr>
-              <a:t>Con red: el distribuidor</a:t>
+              <a:t>1-5: comprobar todo</a:t>
             </a:r>
           </a:p>
           <a:p>
             <a:pPr>
               <a:spcAft>
-                <a:spcPts val="1000"/>
+                <a:spcPts val="1100"/>
               </a:spcAft>
             </a:pPr>
             <a:r>
               <a:rPr sz="1600" b="1" i="0">
                 <a:solidFill>
-                  <a:srgbClr val="2E3A80"/>
-                </a:solidFill>
-                <a:latin typeface="Montserrat"/>
-              </a:rPr>
-              <a:t>•  </a:t>
+                  <a:srgbClr val="E8801A"/>
+                </a:solidFill>
+                <a:latin typeface="Montserrat"/>
+              </a:rPr>
+              <a:t>▸  </a:t>
             </a:r>
             <a:r>
               <a:rPr sz="1600" b="0" i="0">
@@ -7756,23 +8175,23 @@
                 </a:solidFill>
                 <a:latin typeface="Montserrat"/>
               </a:rPr>
-              <a:t>Sin red: el suministrador</a:t>
+              <a:t>docs, partes visibles, locales, válvulas</a:t>
             </a:r>
           </a:p>
           <a:p>
             <a:pPr>
               <a:spcAft>
-                <a:spcPts val="1000"/>
+                <a:spcPts val="1100"/>
               </a:spcAft>
             </a:pPr>
             <a:r>
               <a:rPr sz="1600" b="1" i="0">
                 <a:solidFill>
-                  <a:srgbClr val="2E3A80"/>
-                </a:solidFill>
-                <a:latin typeface="Montserrat"/>
-              </a:rPr>
-              <a:t>•  </a:t>
+                  <a:srgbClr val="E8801A"/>
+                </a:solidFill>
+                <a:latin typeface="Montserrat"/>
+              </a:rPr>
+              <a:t>▸  </a:t>
             </a:r>
             <a:r>
               <a:rPr sz="1600" b="0" i="0">
@@ -7781,14 +8200,39 @@
                 </a:solidFill>
                 <a:latin typeface="Montserrat"/>
               </a:rPr>
-              <a:t>Mismas pruebas, cambia el agente</a:t>
-            </a:r>
-          </a:p>
-        </p:txBody>
-      </p:sp>
-      <p:sp>
-        <p:nvSpPr>
-          <p:cNvPr id="8" name="imgph" descr="IMGQ:gas distribution technician at meter cabinet"/>
+              <a:t>6-9: precintar contador y estanquidad</a:t>
+            </a:r>
+          </a:p>
+          <a:p>
+            <a:pPr>
+              <a:spcAft>
+                <a:spcPts val="1100"/>
+              </a:spcAft>
+            </a:pPr>
+            <a:r>
+              <a:rPr sz="1600" b="1" i="0">
+                <a:solidFill>
+                  <a:srgbClr val="E8801A"/>
+                </a:solidFill>
+                <a:latin typeface="Montserrat"/>
+              </a:rPr>
+              <a:t>▸  </a:t>
+            </a:r>
+            <a:r>
+              <a:rPr sz="1600" b="0" i="0">
+                <a:solidFill>
+                  <a:srgbClr val="1B2330"/>
+                </a:solidFill>
+                <a:latin typeface="Montserrat"/>
+              </a:rPr>
+              <a:t>dejar en servicio y certificar</a:t>
+            </a:r>
+          </a:p>
+        </p:txBody>
+      </p:sp>
+      <p:sp>
+        <p:nvSpPr>
+          <p:cNvPr id="9" name="imgph" descr="IMGQ:gas meter and regulator being inspected"/>
           <p:cNvSpPr/>
           <p:nvPr/>
         </p:nvSpPr>
@@ -7834,7 +8278,7 @@
       </p:sp>
       <p:sp>
         <p:nvSpPr>
-          <p:cNvPr id="9" name="TextBox 8"/>
+          <p:cNvPr id="10" name="TextBox 9"/>
           <p:cNvSpPr txBox="1"/>
           <p:nvPr/>
         </p:nvSpPr>
@@ -7874,7 +8318,7 @@
                 </a:solidFill>
                 <a:latin typeface="Montserrat"/>
               </a:rPr>
-              <a:t>gas distribution technician at meter cabinet</a:t>
+              <a:t>gas meter and regulator being inspected</a:t>
             </a:r>
           </a:p>
         </p:txBody>
@@ -7971,7 +8415,7 @@
                 </a:solidFill>
                 <a:latin typeface="Montserrat"/>
               </a:rPr>
-              <a:t>017 / 020</a:t>
+              <a:t>017 / 021</a:t>
             </a:r>
           </a:p>
         </p:txBody>
@@ -8019,7 +8463,7 @@
         <p:spPr>
           <a:xfrm>
             <a:off x="822960" y="457200"/>
-            <a:ext cx="8229600" cy="365760"/>
+            <a:ext cx="10058400" cy="365760"/>
           </a:xfrm>
           <a:prstGeom prst="rect">
             <a:avLst/>
@@ -8033,13 +8477,13 @@
           <a:lstStyle/>
           <a:p>
             <a:r>
-              <a:rPr sz="1200" b="1" i="0">
-                <a:solidFill>
-                  <a:srgbClr val="64748B"/>
-                </a:solidFill>
-                <a:latin typeface="Montserrat"/>
-              </a:rPr>
-              <a:t>APARTADO 3.5.2 · SIN CONTRATO</a:t>
+              <a:rPr sz="1300" b="1" i="0">
+                <a:solidFill>
+                  <a:srgbClr val="E8801A"/>
+                </a:solidFill>
+                <a:latin typeface="Montserrat"/>
+              </a:rPr>
+              <a:t>APARTADO 3.5.1 · QUIÉN ACTÚA</a:t>
             </a:r>
           </a:p>
         </p:txBody>
@@ -8067,26 +8511,70 @@
           <a:lstStyle/>
           <a:p>
             <a:r>
-              <a:rPr sz="2700" b="1" i="0">
+              <a:rPr sz="2800" b="1" i="0">
                 <a:solidFill>
                   <a:srgbClr val="1E2761"/>
                 </a:solidFill>
                 <a:latin typeface="Montserrat"/>
               </a:rPr>
-              <a:t>Sin contrato: manda la instaladora</a:t>
-            </a:r>
-          </a:p>
-        </p:txBody>
-      </p:sp>
-      <p:sp>
-        <p:nvSpPr>
-          <p:cNvPr id="7" name="TextBox 6"/>
+              <a:t>¿Quién da el gas?</a:t>
+            </a:r>
+          </a:p>
+        </p:txBody>
+      </p:sp>
+      <p:sp>
+        <p:nvSpPr>
+          <p:cNvPr id="7" name="Rounded Rectangle 6"/>
+          <p:cNvSpPr/>
+          <p:nvPr/>
+        </p:nvSpPr>
+        <p:spPr>
+          <a:xfrm>
+            <a:off x="868680" y="1627632"/>
+            <a:ext cx="2011680" cy="73152"/>
+          </a:xfrm>
+          <a:prstGeom prst="roundRect">
+            <a:avLst/>
+          </a:prstGeom>
+          <a:solidFill>
+            <a:srgbClr val="E8801A"/>
+          </a:solidFill>
+          <a:ln>
+            <a:noFill/>
+          </a:ln>
+          <a:effectLst/>
+        </p:spPr>
+        <p:style>
+          <a:lnRef idx="1">
+            <a:schemeClr val="accent1"/>
+          </a:lnRef>
+          <a:fillRef idx="3">
+            <a:schemeClr val="accent1"/>
+          </a:fillRef>
+          <a:effectRef idx="2">
+            <a:schemeClr val="accent1"/>
+          </a:effectRef>
+          <a:fontRef idx="minor">
+            <a:schemeClr val="lt1"/>
+          </a:fontRef>
+        </p:style>
+        <p:txBody>
+          <a:bodyPr rtlCol="0" anchor="ctr"/>
+          <a:lstStyle/>
+          <a:p>
+            <a:pPr algn="ctr"/>
+          </a:p>
+        </p:txBody>
+      </p:sp>
+      <p:sp>
+        <p:nvSpPr>
+          <p:cNvPr id="8" name="TextBox 7"/>
           <p:cNvSpPr txBox="1"/>
           <p:nvPr/>
         </p:nvSpPr>
         <p:spPr>
           <a:xfrm>
-            <a:off x="822960" y="1920240"/>
+            <a:off x="822960" y="1965960"/>
             <a:ext cx="4983480" cy="4206240"/>
           </a:xfrm>
           <a:prstGeom prst="rect">
@@ -8102,17 +8590,17 @@
           <a:p>
             <a:pPr>
               <a:spcAft>
-                <a:spcPts val="1000"/>
+                <a:spcPts val="1100"/>
               </a:spcAft>
             </a:pPr>
             <a:r>
               <a:rPr sz="1600" b="1" i="0">
                 <a:solidFill>
-                  <a:srgbClr val="2E3A80"/>
-                </a:solidFill>
-                <a:latin typeface="Montserrat"/>
-              </a:rPr>
-              <a:t>•  </a:t>
+                  <a:srgbClr val="E8801A"/>
+                </a:solidFill>
+                <a:latin typeface="Montserrat"/>
+              </a:rPr>
+              <a:t>▸  </a:t>
             </a:r>
             <a:r>
               <a:rPr sz="1600" b="0" i="0">
@@ -8121,23 +8609,23 @@
                 </a:solidFill>
                 <a:latin typeface="Montserrat"/>
               </a:rPr>
-              <a:t>No interviene el distribuidor</a:t>
+              <a:t>Con red: el distribuidor</a:t>
             </a:r>
           </a:p>
           <a:p>
             <a:pPr>
               <a:spcAft>
-                <a:spcPts val="1000"/>
+                <a:spcPts val="1100"/>
               </a:spcAft>
             </a:pPr>
             <a:r>
               <a:rPr sz="1600" b="1" i="0">
                 <a:solidFill>
-                  <a:srgbClr val="2E3A80"/>
-                </a:solidFill>
-                <a:latin typeface="Montserrat"/>
-              </a:rPr>
-              <a:t>•  </a:t>
+                  <a:srgbClr val="E8801A"/>
+                </a:solidFill>
+                <a:latin typeface="Montserrat"/>
+              </a:rPr>
+              <a:t>▸  </a:t>
             </a:r>
             <a:r>
               <a:rPr sz="1600" b="0" i="0">
@@ -8146,23 +8634,23 @@
                 </a:solidFill>
                 <a:latin typeface="Montserrat"/>
               </a:rPr>
-              <a:t>La instaladora hace las pruebas</a:t>
+              <a:t>Sin red: el suministrador</a:t>
             </a:r>
           </a:p>
           <a:p>
             <a:pPr>
               <a:spcAft>
-                <a:spcPts val="1000"/>
+                <a:spcPts val="1100"/>
               </a:spcAft>
             </a:pPr>
             <a:r>
               <a:rPr sz="1600" b="1" i="0">
                 <a:solidFill>
-                  <a:srgbClr val="2E3A80"/>
-                </a:solidFill>
-                <a:latin typeface="Montserrat"/>
-              </a:rPr>
-              <a:t>•  </a:t>
+                  <a:srgbClr val="E8801A"/>
+                </a:solidFill>
+                <a:latin typeface="Montserrat"/>
+              </a:rPr>
+              <a:t>▸  </a:t>
             </a:r>
             <a:r>
               <a:rPr sz="1600" b="0" i="0">
@@ -8171,14 +8659,14 @@
                 </a:solidFill>
                 <a:latin typeface="Montserrat"/>
               </a:rPr>
-              <a:t>Siempre entrega certificado al titular</a:t>
-            </a:r>
-          </a:p>
-        </p:txBody>
-      </p:sp>
-      <p:sp>
-        <p:nvSpPr>
-          <p:cNvPr id="8" name="imgph" descr="IMGQ:installer handing document to homeowner"/>
+              <a:t>Mismas pruebas, cambia el agente</a:t>
+            </a:r>
+          </a:p>
+        </p:txBody>
+      </p:sp>
+      <p:sp>
+        <p:nvSpPr>
+          <p:cNvPr id="9" name="imgph" descr="IMGQ:gas distribution technician at meter cabinet"/>
           <p:cNvSpPr/>
           <p:nvPr/>
         </p:nvSpPr>
@@ -8224,7 +8712,7 @@
       </p:sp>
       <p:sp>
         <p:nvSpPr>
-          <p:cNvPr id="9" name="TextBox 8"/>
+          <p:cNvPr id="10" name="TextBox 9"/>
           <p:cNvSpPr txBox="1"/>
           <p:nvPr/>
         </p:nvSpPr>
@@ -8264,7 +8752,7 @@
                 </a:solidFill>
                 <a:latin typeface="Montserrat"/>
               </a:rPr>
-              <a:t>installer handing document to homeowner</a:t>
+              <a:t>gas distribution technician at meter cabinet</a:t>
             </a:r>
           </a:p>
         </p:txBody>
@@ -8361,7 +8849,7 @@
                 </a:solidFill>
                 <a:latin typeface="Montserrat"/>
               </a:rPr>
-              <a:t>018 / 020</a:t>
+              <a:t>018 / 021</a:t>
             </a:r>
           </a:p>
         </p:txBody>
@@ -8409,7 +8897,7 @@
         <p:spPr>
           <a:xfrm>
             <a:off x="822960" y="457200"/>
-            <a:ext cx="8229600" cy="365760"/>
+            <a:ext cx="10058400" cy="365760"/>
           </a:xfrm>
           <a:prstGeom prst="rect">
             <a:avLst/>
@@ -8423,13 +8911,13 @@
           <a:lstStyle/>
           <a:p>
             <a:r>
-              <a:rPr sz="1200" b="1" i="0">
-                <a:solidFill>
-                  <a:srgbClr val="64748B"/>
-                </a:solidFill>
-                <a:latin typeface="Montserrat"/>
-              </a:rPr>
-              <a:t>APARTADO 3.5.1 · REAPERTURA</a:t>
+              <a:rPr sz="1300" b="1" i="0">
+                <a:solidFill>
+                  <a:srgbClr val="E8801A"/>
+                </a:solidFill>
+                <a:latin typeface="Montserrat"/>
+              </a:rPr>
+              <a:t>APARTADO 3.5.2 · SIN CONTRATO</a:t>
             </a:r>
           </a:p>
         </p:txBody>
@@ -8457,26 +8945,70 @@
           <a:lstStyle/>
           <a:p>
             <a:r>
-              <a:rPr sz="2700" b="1" i="0">
+              <a:rPr sz="2800" b="1" i="0">
                 <a:solidFill>
                   <a:srgbClr val="1E2761"/>
                 </a:solidFill>
                 <a:latin typeface="Montserrat"/>
               </a:rPr>
-              <a:t>La regla del año</a:t>
-            </a:r>
-          </a:p>
-        </p:txBody>
-      </p:sp>
-      <p:sp>
-        <p:nvSpPr>
-          <p:cNvPr id="7" name="TextBox 6"/>
+              <a:t>Sin contrato: manda la instaladora</a:t>
+            </a:r>
+          </a:p>
+        </p:txBody>
+      </p:sp>
+      <p:sp>
+        <p:nvSpPr>
+          <p:cNvPr id="7" name="Rounded Rectangle 6"/>
+          <p:cNvSpPr/>
+          <p:nvPr/>
+        </p:nvSpPr>
+        <p:spPr>
+          <a:xfrm>
+            <a:off x="868680" y="1627632"/>
+            <a:ext cx="2011680" cy="73152"/>
+          </a:xfrm>
+          <a:prstGeom prst="roundRect">
+            <a:avLst/>
+          </a:prstGeom>
+          <a:solidFill>
+            <a:srgbClr val="E8801A"/>
+          </a:solidFill>
+          <a:ln>
+            <a:noFill/>
+          </a:ln>
+          <a:effectLst/>
+        </p:spPr>
+        <p:style>
+          <a:lnRef idx="1">
+            <a:schemeClr val="accent1"/>
+          </a:lnRef>
+          <a:fillRef idx="3">
+            <a:schemeClr val="accent1"/>
+          </a:fillRef>
+          <a:effectRef idx="2">
+            <a:schemeClr val="accent1"/>
+          </a:effectRef>
+          <a:fontRef idx="minor">
+            <a:schemeClr val="lt1"/>
+          </a:fontRef>
+        </p:style>
+        <p:txBody>
+          <a:bodyPr rtlCol="0" anchor="ctr"/>
+          <a:lstStyle/>
+          <a:p>
+            <a:pPr algn="ctr"/>
+          </a:p>
+        </p:txBody>
+      </p:sp>
+      <p:sp>
+        <p:nvSpPr>
+          <p:cNvPr id="8" name="TextBox 7"/>
           <p:cNvSpPr txBox="1"/>
           <p:nvPr/>
         </p:nvSpPr>
         <p:spPr>
           <a:xfrm>
-            <a:off x="822960" y="1920240"/>
+            <a:off x="822960" y="1965960"/>
             <a:ext cx="4983480" cy="4206240"/>
           </a:xfrm>
           <a:prstGeom prst="rect">
@@ -8492,17 +9024,17 @@
           <a:p>
             <a:pPr>
               <a:spcAft>
-                <a:spcPts val="1000"/>
+                <a:spcPts val="1100"/>
               </a:spcAft>
             </a:pPr>
             <a:r>
               <a:rPr sz="1600" b="1" i="0">
                 <a:solidFill>
-                  <a:srgbClr val="2E3A80"/>
-                </a:solidFill>
-                <a:latin typeface="Montserrat"/>
-              </a:rPr>
-              <a:t>•  </a:t>
+                  <a:srgbClr val="E8801A"/>
+                </a:solidFill>
+                <a:latin typeface="Montserrat"/>
+              </a:rPr>
+              <a:t>▸  </a:t>
             </a:r>
             <a:r>
               <a:rPr sz="1600" b="0" i="0">
@@ -8511,23 +9043,23 @@
                 </a:solidFill>
                 <a:latin typeface="Montserrat"/>
               </a:rPr>
-              <a:t>Más de un año sin suministro</a:t>
+              <a:t>No interviene el distribuidor</a:t>
             </a:r>
           </a:p>
           <a:p>
             <a:pPr>
               <a:spcAft>
-                <a:spcPts val="1000"/>
+                <a:spcPts val="1100"/>
               </a:spcAft>
             </a:pPr>
             <a:r>
               <a:rPr sz="1600" b="1" i="0">
                 <a:solidFill>
-                  <a:srgbClr val="2E3A80"/>
-                </a:solidFill>
-                <a:latin typeface="Montserrat"/>
-              </a:rPr>
-              <a:t>•  </a:t>
+                  <a:srgbClr val="E8801A"/>
+                </a:solidFill>
+                <a:latin typeface="Montserrat"/>
+              </a:rPr>
+              <a:t>▸  </a:t>
             </a:r>
             <a:r>
               <a:rPr sz="1600" b="0" i="0">
@@ -8536,23 +9068,23 @@
                 </a:solidFill>
                 <a:latin typeface="Montserrat"/>
               </a:rPr>
-              <a:t>tras resolver el contrato</a:t>
+              <a:t>La instaladora hace las pruebas</a:t>
             </a:r>
           </a:p>
           <a:p>
             <a:pPr>
               <a:spcAft>
-                <a:spcPts val="1000"/>
+                <a:spcPts val="1100"/>
               </a:spcAft>
             </a:pPr>
             <a:r>
               <a:rPr sz="1600" b="1" i="0">
                 <a:solidFill>
-                  <a:srgbClr val="2E3A80"/>
-                </a:solidFill>
-                <a:latin typeface="Montserrat"/>
-              </a:rPr>
-              <a:t>•  </a:t>
+                  <a:srgbClr val="E8801A"/>
+                </a:solidFill>
+                <a:latin typeface="Montserrat"/>
+              </a:rPr>
+              <a:t>▸  </a:t>
             </a:r>
             <a:r>
               <a:rPr sz="1600" b="0" i="0">
@@ -8561,14 +9093,14 @@
                 </a:solidFill>
                 <a:latin typeface="Montserrat"/>
               </a:rPr>
-              <a:t>Se trata como instalación nueva</a:t>
-            </a:r>
-          </a:p>
-        </p:txBody>
-      </p:sp>
-      <p:sp>
-        <p:nvSpPr>
-          <p:cNvPr id="8" name="imgph" descr="IMGQ:old closed gas meter in cabinet"/>
+              <a:t>Siempre entrega certificado al titular</a:t>
+            </a:r>
+          </a:p>
+        </p:txBody>
+      </p:sp>
+      <p:sp>
+        <p:nvSpPr>
+          <p:cNvPr id="9" name="imgph" descr="IMGQ:installer handing document to homeowner"/>
           <p:cNvSpPr/>
           <p:nvPr/>
         </p:nvSpPr>
@@ -8614,7 +9146,7 @@
       </p:sp>
       <p:sp>
         <p:nvSpPr>
-          <p:cNvPr id="9" name="TextBox 8"/>
+          <p:cNvPr id="10" name="TextBox 9"/>
           <p:cNvSpPr txBox="1"/>
           <p:nvPr/>
         </p:nvSpPr>
@@ -8654,7 +9186,7 @@
                 </a:solidFill>
                 <a:latin typeface="Montserrat"/>
               </a:rPr>
-              <a:t>old closed gas meter in cabinet</a:t>
+              <a:t>installer handing document to homeowner</a:t>
             </a:r>
           </a:p>
         </p:txBody>
@@ -8751,7 +9283,7 @@
                 </a:solidFill>
                 <a:latin typeface="Montserrat"/>
               </a:rPr>
-              <a:t>019 / 020</a:t>
+              <a:t>019 / 021</a:t>
             </a:r>
           </a:p>
         </p:txBody>
@@ -8799,7 +9331,7 @@
         <p:spPr>
           <a:xfrm>
             <a:off x="822960" y="457200"/>
-            <a:ext cx="8229600" cy="365760"/>
+            <a:ext cx="10058400" cy="365760"/>
           </a:xfrm>
           <a:prstGeom prst="rect">
             <a:avLst/>
@@ -8813,13 +9345,13 @@
           <a:lstStyle/>
           <a:p>
             <a:r>
-              <a:rPr sz="1200" b="1" i="0">
-                <a:solidFill>
-                  <a:srgbClr val="64748B"/>
-                </a:solidFill>
-                <a:latin typeface="Montserrat"/>
-              </a:rPr>
-              <a:t>APARTADO 3.6 · COMUNICACIÓN</a:t>
+              <a:rPr sz="1300" b="1" i="0">
+                <a:solidFill>
+                  <a:srgbClr val="E8801A"/>
+                </a:solidFill>
+                <a:latin typeface="Montserrat"/>
+              </a:rPr>
+              <a:t>APARTADO 3.5.1 · REAPERTURA</a:t>
             </a:r>
           </a:p>
         </p:txBody>
@@ -8847,26 +9379,70 @@
           <a:lstStyle/>
           <a:p>
             <a:r>
-              <a:rPr sz="2700" b="1" i="0">
+              <a:rPr sz="2800" b="1" i="0">
                 <a:solidFill>
                   <a:srgbClr val="1E2761"/>
                 </a:solidFill>
                 <a:latin typeface="Montserrat"/>
               </a:rPr>
-              <a:t>Comunicar solo si hay proyecto</a:t>
-            </a:r>
-          </a:p>
-        </p:txBody>
-      </p:sp>
-      <p:sp>
-        <p:nvSpPr>
-          <p:cNvPr id="7" name="TextBox 6"/>
+              <a:t>La regla del año</a:t>
+            </a:r>
+          </a:p>
+        </p:txBody>
+      </p:sp>
+      <p:sp>
+        <p:nvSpPr>
+          <p:cNvPr id="7" name="Rounded Rectangle 6"/>
+          <p:cNvSpPr/>
+          <p:nvPr/>
+        </p:nvSpPr>
+        <p:spPr>
+          <a:xfrm>
+            <a:off x="868680" y="1627632"/>
+            <a:ext cx="2011680" cy="73152"/>
+          </a:xfrm>
+          <a:prstGeom prst="roundRect">
+            <a:avLst/>
+          </a:prstGeom>
+          <a:solidFill>
+            <a:srgbClr val="E8801A"/>
+          </a:solidFill>
+          <a:ln>
+            <a:noFill/>
+          </a:ln>
+          <a:effectLst/>
+        </p:spPr>
+        <p:style>
+          <a:lnRef idx="1">
+            <a:schemeClr val="accent1"/>
+          </a:lnRef>
+          <a:fillRef idx="3">
+            <a:schemeClr val="accent1"/>
+          </a:fillRef>
+          <a:effectRef idx="2">
+            <a:schemeClr val="accent1"/>
+          </a:effectRef>
+          <a:fontRef idx="minor">
+            <a:schemeClr val="lt1"/>
+          </a:fontRef>
+        </p:style>
+        <p:txBody>
+          <a:bodyPr rtlCol="0" anchor="ctr"/>
+          <a:lstStyle/>
+          <a:p>
+            <a:pPr algn="ctr"/>
+          </a:p>
+        </p:txBody>
+      </p:sp>
+      <p:sp>
+        <p:nvSpPr>
+          <p:cNvPr id="8" name="TextBox 7"/>
           <p:cNvSpPr txBox="1"/>
           <p:nvPr/>
         </p:nvSpPr>
         <p:spPr>
           <a:xfrm>
-            <a:off x="822960" y="1920240"/>
+            <a:off x="822960" y="1965960"/>
             <a:ext cx="4983480" cy="4206240"/>
           </a:xfrm>
           <a:prstGeom prst="rect">
@@ -8882,17 +9458,17 @@
           <a:p>
             <a:pPr>
               <a:spcAft>
-                <a:spcPts val="1000"/>
+                <a:spcPts val="1100"/>
               </a:spcAft>
             </a:pPr>
             <a:r>
               <a:rPr sz="1600" b="1" i="0">
                 <a:solidFill>
-                  <a:srgbClr val="2E3A80"/>
-                </a:solidFill>
-                <a:latin typeface="Montserrat"/>
-              </a:rPr>
-              <a:t>•  </a:t>
+                  <a:srgbClr val="E8801A"/>
+                </a:solidFill>
+                <a:latin typeface="Montserrat"/>
+              </a:rPr>
+              <a:t>▸  </a:t>
             </a:r>
             <a:r>
               <a:rPr sz="1600" b="0" i="0">
@@ -8901,23 +9477,23 @@
                 </a:solidFill>
                 <a:latin typeface="Montserrat"/>
               </a:rPr>
-              <a:t>Con proyecto: se comunica</a:t>
+              <a:t>Más de un año sin suministro</a:t>
             </a:r>
           </a:p>
           <a:p>
             <a:pPr>
               <a:spcAft>
-                <a:spcPts val="1000"/>
+                <a:spcPts val="1100"/>
               </a:spcAft>
             </a:pPr>
             <a:r>
               <a:rPr sz="1600" b="1" i="0">
                 <a:solidFill>
-                  <a:srgbClr val="2E3A80"/>
-                </a:solidFill>
-                <a:latin typeface="Montserrat"/>
-              </a:rPr>
-              <a:t>•  </a:t>
+                  <a:srgbClr val="E8801A"/>
+                </a:solidFill>
+                <a:latin typeface="Montserrat"/>
+              </a:rPr>
+              <a:t>▸  </a:t>
             </a:r>
             <a:r>
               <a:rPr sz="1600" b="0" i="0">
@@ -8926,23 +9502,23 @@
                 </a:solidFill>
                 <a:latin typeface="Montserrat"/>
               </a:rPr>
-              <a:t>Sin proyecto: no hace falta</a:t>
+              <a:t>tras resolver el contrato</a:t>
             </a:r>
           </a:p>
           <a:p>
             <a:pPr>
               <a:spcAft>
-                <a:spcPts val="1000"/>
+                <a:spcPts val="1100"/>
               </a:spcAft>
             </a:pPr>
             <a:r>
               <a:rPr sz="1600" b="1" i="0">
                 <a:solidFill>
-                  <a:srgbClr val="2E3A80"/>
-                </a:solidFill>
-                <a:latin typeface="Montserrat"/>
-              </a:rPr>
-              <a:t>•  </a:t>
+                  <a:srgbClr val="E8801A"/>
+                </a:solidFill>
+                <a:latin typeface="Montserrat"/>
+              </a:rPr>
+              <a:t>▸  </a:t>
             </a:r>
             <a:r>
               <a:rPr sz="1600" b="0" i="0">
@@ -8951,14 +9527,14 @@
                 </a:solidFill>
                 <a:latin typeface="Montserrat"/>
               </a:rPr>
-              <a:t>Pero siempre se guarda la documentación</a:t>
-            </a:r>
-          </a:p>
-        </p:txBody>
-      </p:sp>
-      <p:sp>
-        <p:nvSpPr>
-          <p:cNvPr id="8" name="imgph" descr="IMGQ:filing cabinet with documents and folders"/>
+              <a:t>Se trata como instalación nueva</a:t>
+            </a:r>
+          </a:p>
+        </p:txBody>
+      </p:sp>
+      <p:sp>
+        <p:nvSpPr>
+          <p:cNvPr id="9" name="imgph" descr="IMGQ:old closed gas meter in cabinet"/>
           <p:cNvSpPr/>
           <p:nvPr/>
         </p:nvSpPr>
@@ -9004,7 +9580,7 @@
       </p:sp>
       <p:sp>
         <p:nvSpPr>
-          <p:cNvPr id="9" name="TextBox 8"/>
+          <p:cNvPr id="10" name="TextBox 9"/>
           <p:cNvSpPr txBox="1"/>
           <p:nvPr/>
         </p:nvSpPr>
@@ -9044,7 +9620,7 @@
                 </a:solidFill>
                 <a:latin typeface="Montserrat"/>
               </a:rPr>
-              <a:t>filing cabinet with documents and folders</a:t>
+              <a:t>old closed gas meter in cabinet</a:t>
             </a:r>
           </a:p>
         </p:txBody>
@@ -9141,7 +9717,7 @@
                 </a:solidFill>
                 <a:latin typeface="Montserrat"/>
               </a:rPr>
-              <a:t>002 / 020</a:t>
+              <a:t>002 / 021</a:t>
             </a:r>
           </a:p>
         </p:txBody>
@@ -9205,7 +9781,7 @@
             <a:r>
               <a:rPr sz="2700" b="1" i="0">
                 <a:solidFill>
-                  <a:srgbClr val="1E2761"/>
+                  <a:srgbClr val="E8801A"/>
                 </a:solidFill>
                 <a:latin typeface="Montserrat"/>
               </a:rPr>
@@ -9217,6 +9793,50 @@
       <p:sp>
         <p:nvSpPr>
           <p:cNvPr id="6" name="Rounded Rectangle 5"/>
+          <p:cNvSpPr/>
+          <p:nvPr/>
+        </p:nvSpPr>
+        <p:spPr>
+          <a:xfrm>
+            <a:off x="868680" y="1234440"/>
+            <a:ext cx="1463040" cy="73152"/>
+          </a:xfrm>
+          <a:prstGeom prst="roundRect">
+            <a:avLst/>
+          </a:prstGeom>
+          <a:solidFill>
+            <a:srgbClr val="1E2761"/>
+          </a:solidFill>
+          <a:ln>
+            <a:noFill/>
+          </a:ln>
+          <a:effectLst/>
+        </p:spPr>
+        <p:style>
+          <a:lnRef idx="1">
+            <a:schemeClr val="accent1"/>
+          </a:lnRef>
+          <a:fillRef idx="3">
+            <a:schemeClr val="accent1"/>
+          </a:fillRef>
+          <a:effectRef idx="2">
+            <a:schemeClr val="accent1"/>
+          </a:effectRef>
+          <a:fontRef idx="minor">
+            <a:schemeClr val="lt1"/>
+          </a:fontRef>
+        </p:style>
+        <p:txBody>
+          <a:bodyPr rtlCol="0" anchor="ctr"/>
+          <a:lstStyle/>
+          <a:p>
+            <a:pPr algn="ctr"/>
+          </a:p>
+        </p:txBody>
+      </p:sp>
+      <p:sp>
+        <p:nvSpPr>
+          <p:cNvPr id="7" name="Rounded Rectangle 6"/>
           <p:cNvSpPr/>
           <p:nvPr/>
         </p:nvSpPr>
@@ -9262,7 +9882,7 @@
       </p:sp>
       <p:sp>
         <p:nvSpPr>
-          <p:cNvPr id="7" name="TextBox 6"/>
+          <p:cNvPr id="8" name="TextBox 7"/>
           <p:cNvSpPr txBox="1"/>
           <p:nvPr/>
         </p:nvSpPr>
@@ -9297,7 +9917,7 @@
       </p:sp>
       <p:sp>
         <p:nvSpPr>
-          <p:cNvPr id="8" name="TextBox 7"/>
+          <p:cNvPr id="9" name="TextBox 8"/>
           <p:cNvSpPr txBox="1"/>
           <p:nvPr/>
         </p:nvSpPr>
@@ -9332,7 +9952,7 @@
       </p:sp>
       <p:sp>
         <p:nvSpPr>
-          <p:cNvPr id="9" name="Rounded Rectangle 8"/>
+          <p:cNvPr id="10" name="Rounded Rectangle 9"/>
           <p:cNvSpPr/>
           <p:nvPr/>
         </p:nvSpPr>
@@ -9378,7 +9998,7 @@
       </p:sp>
       <p:sp>
         <p:nvSpPr>
-          <p:cNvPr id="10" name="TextBox 9"/>
+          <p:cNvPr id="11" name="TextBox 10"/>
           <p:cNvSpPr txBox="1"/>
           <p:nvPr/>
         </p:nvSpPr>
@@ -9413,7 +10033,7 @@
       </p:sp>
       <p:sp>
         <p:nvSpPr>
-          <p:cNvPr id="11" name="TextBox 10"/>
+          <p:cNvPr id="12" name="TextBox 11"/>
           <p:cNvSpPr txBox="1"/>
           <p:nvPr/>
         </p:nvSpPr>
@@ -9448,7 +10068,7 @@
       </p:sp>
       <p:sp>
         <p:nvSpPr>
-          <p:cNvPr id="12" name="Rounded Rectangle 11"/>
+          <p:cNvPr id="13" name="Rounded Rectangle 12"/>
           <p:cNvSpPr/>
           <p:nvPr/>
         </p:nvSpPr>
@@ -9494,7 +10114,7 @@
       </p:sp>
       <p:sp>
         <p:nvSpPr>
-          <p:cNvPr id="13" name="TextBox 12"/>
+          <p:cNvPr id="14" name="TextBox 13"/>
           <p:cNvSpPr txBox="1"/>
           <p:nvPr/>
         </p:nvSpPr>
@@ -9529,7 +10149,7 @@
       </p:sp>
       <p:sp>
         <p:nvSpPr>
-          <p:cNvPr id="14" name="TextBox 13"/>
+          <p:cNvPr id="15" name="TextBox 14"/>
           <p:cNvSpPr txBox="1"/>
           <p:nvPr/>
         </p:nvSpPr>
@@ -9595,6 +10215,440 @@
             <a:avLst/>
           </a:prstGeom>
           <a:solidFill>
+            <a:srgbClr val="FFFFFF"/>
+          </a:solidFill>
+          <a:ln>
+            <a:noFill/>
+          </a:ln>
+          <a:effectLst/>
+        </p:spPr>
+        <p:style>
+          <a:lnRef idx="1">
+            <a:schemeClr val="accent1"/>
+          </a:lnRef>
+          <a:fillRef idx="3">
+            <a:schemeClr val="accent1"/>
+          </a:fillRef>
+          <a:effectRef idx="2">
+            <a:schemeClr val="accent1"/>
+          </a:effectRef>
+          <a:fontRef idx="minor">
+            <a:schemeClr val="lt1"/>
+          </a:fontRef>
+        </p:style>
+        <p:txBody>
+          <a:bodyPr rtlCol="0" anchor="ctr"/>
+          <a:lstStyle/>
+          <a:p>
+            <a:pPr algn="ctr"/>
+          </a:p>
+        </p:txBody>
+      </p:sp>
+      <p:sp>
+        <p:nvSpPr>
+          <p:cNvPr id="3" name="TextBox 2"/>
+          <p:cNvSpPr txBox="1"/>
+          <p:nvPr/>
+        </p:nvSpPr>
+        <p:spPr>
+          <a:xfrm>
+            <a:off x="10607040" y="320040"/>
+            <a:ext cx="1371600" cy="365760"/>
+          </a:xfrm>
+          <a:prstGeom prst="rect">
+            <a:avLst/>
+          </a:prstGeom>
+          <a:noFill/>
+        </p:spPr>
+        <p:txBody>
+          <a:bodyPr wrap="square">
+            <a:spAutoFit/>
+          </a:bodyPr>
+          <a:lstStyle/>
+          <a:p>
+            <a:pPr algn="r"/>
+            <a:r>
+              <a:rPr sz="1000" b="1" i="0">
+                <a:solidFill>
+                  <a:srgbClr val="64748B"/>
+                </a:solidFill>
+                <a:latin typeface="Montserrat"/>
+              </a:rPr>
+              <a:t>020 / 021</a:t>
+            </a:r>
+          </a:p>
+        </p:txBody>
+      </p:sp>
+      <p:sp>
+        <p:nvSpPr>
+          <p:cNvPr id="4" name="TextBox 3"/>
+          <p:cNvSpPr txBox="1"/>
+          <p:nvPr/>
+        </p:nvSpPr>
+        <p:spPr>
+          <a:xfrm>
+            <a:off x="457200" y="6419088"/>
+            <a:ext cx="8229600" cy="365760"/>
+          </a:xfrm>
+          <a:prstGeom prst="rect">
+            <a:avLst/>
+          </a:prstGeom>
+          <a:noFill/>
+        </p:spPr>
+        <p:txBody>
+          <a:bodyPr wrap="square">
+            <a:spAutoFit/>
+          </a:bodyPr>
+          <a:lstStyle/>
+          <a:p>
+            <a:r>
+              <a:rPr sz="900" b="0" i="0">
+                <a:solidFill>
+                  <a:srgbClr val="64748B"/>
+                </a:solidFill>
+                <a:latin typeface="Montserrat"/>
+              </a:rPr>
+              <a:t>Curso Gas B · Tema 04 · ITC-ICG 07 · Documentación y puesta en servicio</a:t>
+            </a:r>
+          </a:p>
+        </p:txBody>
+      </p:sp>
+      <p:sp>
+        <p:nvSpPr>
+          <p:cNvPr id="5" name="TextBox 4"/>
+          <p:cNvSpPr txBox="1"/>
+          <p:nvPr/>
+        </p:nvSpPr>
+        <p:spPr>
+          <a:xfrm>
+            <a:off x="822960" y="457200"/>
+            <a:ext cx="10058400" cy="365760"/>
+          </a:xfrm>
+          <a:prstGeom prst="rect">
+            <a:avLst/>
+          </a:prstGeom>
+          <a:noFill/>
+        </p:spPr>
+        <p:txBody>
+          <a:bodyPr wrap="square">
+            <a:spAutoFit/>
+          </a:bodyPr>
+          <a:lstStyle/>
+          <a:p>
+            <a:r>
+              <a:rPr sz="1300" b="1" i="0">
+                <a:solidFill>
+                  <a:srgbClr val="E8801A"/>
+                </a:solidFill>
+                <a:latin typeface="Montserrat"/>
+              </a:rPr>
+              <a:t>APARTADO 3.6 · COMUNICACIÓN</a:t>
+            </a:r>
+          </a:p>
+        </p:txBody>
+      </p:sp>
+      <p:sp>
+        <p:nvSpPr>
+          <p:cNvPr id="6" name="TextBox 5"/>
+          <p:cNvSpPr txBox="1"/>
+          <p:nvPr/>
+        </p:nvSpPr>
+        <p:spPr>
+          <a:xfrm>
+            <a:off x="822960" y="868680"/>
+            <a:ext cx="10515600" cy="914400"/>
+          </a:xfrm>
+          <a:prstGeom prst="rect">
+            <a:avLst/>
+          </a:prstGeom>
+          <a:noFill/>
+        </p:spPr>
+        <p:txBody>
+          <a:bodyPr wrap="square">
+            <a:spAutoFit/>
+          </a:bodyPr>
+          <a:lstStyle/>
+          <a:p>
+            <a:r>
+              <a:rPr sz="2800" b="1" i="0">
+                <a:solidFill>
+                  <a:srgbClr val="1E2761"/>
+                </a:solidFill>
+                <a:latin typeface="Montserrat"/>
+              </a:rPr>
+              <a:t>Comunicar solo si hay proyecto</a:t>
+            </a:r>
+          </a:p>
+        </p:txBody>
+      </p:sp>
+      <p:sp>
+        <p:nvSpPr>
+          <p:cNvPr id="7" name="Rounded Rectangle 6"/>
+          <p:cNvSpPr/>
+          <p:nvPr/>
+        </p:nvSpPr>
+        <p:spPr>
+          <a:xfrm>
+            <a:off x="868680" y="1627632"/>
+            <a:ext cx="2011680" cy="73152"/>
+          </a:xfrm>
+          <a:prstGeom prst="roundRect">
+            <a:avLst/>
+          </a:prstGeom>
+          <a:solidFill>
+            <a:srgbClr val="E8801A"/>
+          </a:solidFill>
+          <a:ln>
+            <a:noFill/>
+          </a:ln>
+          <a:effectLst/>
+        </p:spPr>
+        <p:style>
+          <a:lnRef idx="1">
+            <a:schemeClr val="accent1"/>
+          </a:lnRef>
+          <a:fillRef idx="3">
+            <a:schemeClr val="accent1"/>
+          </a:fillRef>
+          <a:effectRef idx="2">
+            <a:schemeClr val="accent1"/>
+          </a:effectRef>
+          <a:fontRef idx="minor">
+            <a:schemeClr val="lt1"/>
+          </a:fontRef>
+        </p:style>
+        <p:txBody>
+          <a:bodyPr rtlCol="0" anchor="ctr"/>
+          <a:lstStyle/>
+          <a:p>
+            <a:pPr algn="ctr"/>
+          </a:p>
+        </p:txBody>
+      </p:sp>
+      <p:sp>
+        <p:nvSpPr>
+          <p:cNvPr id="8" name="TextBox 7"/>
+          <p:cNvSpPr txBox="1"/>
+          <p:nvPr/>
+        </p:nvSpPr>
+        <p:spPr>
+          <a:xfrm>
+            <a:off x="822960" y="1965960"/>
+            <a:ext cx="4983480" cy="4206240"/>
+          </a:xfrm>
+          <a:prstGeom prst="rect">
+            <a:avLst/>
+          </a:prstGeom>
+          <a:noFill/>
+        </p:spPr>
+        <p:txBody>
+          <a:bodyPr wrap="square">
+            <a:spAutoFit/>
+          </a:bodyPr>
+          <a:lstStyle/>
+          <a:p>
+            <a:pPr>
+              <a:spcAft>
+                <a:spcPts val="1100"/>
+              </a:spcAft>
+            </a:pPr>
+            <a:r>
+              <a:rPr sz="1600" b="1" i="0">
+                <a:solidFill>
+                  <a:srgbClr val="E8801A"/>
+                </a:solidFill>
+                <a:latin typeface="Montserrat"/>
+              </a:rPr>
+              <a:t>▸  </a:t>
+            </a:r>
+            <a:r>
+              <a:rPr sz="1600" b="0" i="0">
+                <a:solidFill>
+                  <a:srgbClr val="1B2330"/>
+                </a:solidFill>
+                <a:latin typeface="Montserrat"/>
+              </a:rPr>
+              <a:t>Con proyecto: se comunica</a:t>
+            </a:r>
+          </a:p>
+          <a:p>
+            <a:pPr>
+              <a:spcAft>
+                <a:spcPts val="1100"/>
+              </a:spcAft>
+            </a:pPr>
+            <a:r>
+              <a:rPr sz="1600" b="1" i="0">
+                <a:solidFill>
+                  <a:srgbClr val="E8801A"/>
+                </a:solidFill>
+                <a:latin typeface="Montserrat"/>
+              </a:rPr>
+              <a:t>▸  </a:t>
+            </a:r>
+            <a:r>
+              <a:rPr sz="1600" b="0" i="0">
+                <a:solidFill>
+                  <a:srgbClr val="1B2330"/>
+                </a:solidFill>
+                <a:latin typeface="Montserrat"/>
+              </a:rPr>
+              <a:t>Sin proyecto: no hace falta</a:t>
+            </a:r>
+          </a:p>
+          <a:p>
+            <a:pPr>
+              <a:spcAft>
+                <a:spcPts val="1100"/>
+              </a:spcAft>
+            </a:pPr>
+            <a:r>
+              <a:rPr sz="1600" b="1" i="0">
+                <a:solidFill>
+                  <a:srgbClr val="E8801A"/>
+                </a:solidFill>
+                <a:latin typeface="Montserrat"/>
+              </a:rPr>
+              <a:t>▸  </a:t>
+            </a:r>
+            <a:r>
+              <a:rPr sz="1600" b="0" i="0">
+                <a:solidFill>
+                  <a:srgbClr val="1B2330"/>
+                </a:solidFill>
+                <a:latin typeface="Montserrat"/>
+              </a:rPr>
+              <a:t>Pero siempre se guarda la documentación</a:t>
+            </a:r>
+          </a:p>
+        </p:txBody>
+      </p:sp>
+      <p:sp>
+        <p:nvSpPr>
+          <p:cNvPr id="9" name="imgph" descr="IMGQ:filing cabinet with documents and folders"/>
+          <p:cNvSpPr/>
+          <p:nvPr/>
+        </p:nvSpPr>
+        <p:spPr>
+          <a:xfrm>
+            <a:off x="5806440" y="1051560"/>
+            <a:ext cx="5298947" cy="4629150"/>
+          </a:xfrm>
+          <a:prstGeom prst="roundRect">
+            <a:avLst/>
+          </a:prstGeom>
+          <a:solidFill>
+            <a:srgbClr val="F3F6FB"/>
+          </a:solidFill>
+          <a:ln w="12700">
+            <a:solidFill>
+              <a:srgbClr val="C7D2E6"/>
+            </a:solidFill>
+          </a:ln>
+          <a:effectLst/>
+        </p:spPr>
+        <p:style>
+          <a:lnRef idx="1">
+            <a:schemeClr val="accent1"/>
+          </a:lnRef>
+          <a:fillRef idx="3">
+            <a:schemeClr val="accent1"/>
+          </a:fillRef>
+          <a:effectRef idx="2">
+            <a:schemeClr val="accent1"/>
+          </a:effectRef>
+          <a:fontRef idx="minor">
+            <a:schemeClr val="lt1"/>
+          </a:fontRef>
+        </p:style>
+        <p:txBody>
+          <a:bodyPr rtlCol="0" anchor="ctr"/>
+          <a:lstStyle/>
+          <a:p>
+            <a:pPr algn="ctr"/>
+          </a:p>
+        </p:txBody>
+      </p:sp>
+      <p:sp>
+        <p:nvSpPr>
+          <p:cNvPr id="10" name="TextBox 9"/>
+          <p:cNvSpPr txBox="1"/>
+          <p:nvPr/>
+        </p:nvSpPr>
+        <p:spPr>
+          <a:xfrm>
+            <a:off x="6080760" y="2726055"/>
+            <a:ext cx="4750307" cy="1280160"/>
+          </a:xfrm>
+          <a:prstGeom prst="rect">
+            <a:avLst/>
+          </a:prstGeom>
+          <a:noFill/>
+        </p:spPr>
+        <p:txBody>
+          <a:bodyPr wrap="square">
+            <a:spAutoFit/>
+          </a:bodyPr>
+          <a:lstStyle/>
+          <a:p>
+            <a:pPr algn="ctr"/>
+            <a:r>
+              <a:rPr sz="1400" b="1" i="0">
+                <a:solidFill>
+                  <a:srgbClr val="64748B"/>
+                </a:solidFill>
+                <a:latin typeface="Montserrat"/>
+              </a:rPr>
+              <a:t>IMAGEN REALISTA</a:t>
+            </a:r>
+          </a:p>
+          <a:p>
+            <a:pPr algn="ctr"/>
+            <a:r>
+              <a:rPr sz="1100" b="0" i="1">
+                <a:solidFill>
+                  <a:srgbClr val="64748B"/>
+                </a:solidFill>
+                <a:latin typeface="Montserrat"/>
+              </a:rPr>
+              <a:t>filing cabinet with documents and folders</a:t>
+            </a:r>
+          </a:p>
+        </p:txBody>
+      </p:sp>
+    </p:spTree>
+  </p:cSld>
+  <p:clrMapOvr>
+    <a:masterClrMapping/>
+  </p:clrMapOvr>
+</p:sld>
+</file>
+
+<file path=ppt/slides/slide21.xml><?xml version="1.0" encoding="utf-8"?>
+<p:sld xmlns:a="http://schemas.openxmlformats.org/drawingml/2006/main" xmlns:p="http://schemas.openxmlformats.org/presentationml/2006/main" xmlns:r="http://schemas.openxmlformats.org/officeDocument/2006/relationships">
+  <p:cSld>
+    <p:spTree>
+      <p:nvGrpSpPr>
+        <p:cNvPr id="1" name=""/>
+        <p:cNvGrpSpPr/>
+        <p:nvPr/>
+      </p:nvGrpSpPr>
+      <p:grpSpPr/>
+      <p:sp>
+        <p:nvSpPr>
+          <p:cNvPr id="2" name="Rectangle 1"/>
+          <p:cNvSpPr/>
+          <p:nvPr/>
+        </p:nvSpPr>
+        <p:spPr>
+          <a:xfrm>
+            <a:off x="0" y="0"/>
+            <a:ext cx="12191695" cy="6858000"/>
+          </a:xfrm>
+          <a:prstGeom prst="rect">
+            <a:avLst/>
+          </a:prstGeom>
+          <a:solidFill>
             <a:srgbClr val="1E2761"/>
           </a:solidFill>
           <a:ln>
@@ -9649,7 +10703,7 @@
             <a:r>
               <a:rPr sz="1400" b="1" i="0">
                 <a:solidFill>
-                  <a:srgbClr val="CADCFC"/>
+                  <a:srgbClr val="F4A24C"/>
                 </a:solidFill>
                 <a:latin typeface="Montserrat"/>
               </a:rPr>
@@ -9660,13 +10714,57 @@
       </p:sp>
       <p:sp>
         <p:nvSpPr>
-          <p:cNvPr id="4" name="TextBox 3"/>
+          <p:cNvPr id="4" name="Rounded Rectangle 3"/>
+          <p:cNvSpPr/>
+          <p:nvPr/>
+        </p:nvSpPr>
+        <p:spPr>
+          <a:xfrm>
+            <a:off x="868680" y="1051560"/>
+            <a:ext cx="1463040" cy="82296"/>
+          </a:xfrm>
+          <a:prstGeom prst="roundRect">
+            <a:avLst/>
+          </a:prstGeom>
+          <a:solidFill>
+            <a:srgbClr val="E8801A"/>
+          </a:solidFill>
+          <a:ln>
+            <a:noFill/>
+          </a:ln>
+          <a:effectLst/>
+        </p:spPr>
+        <p:style>
+          <a:lnRef idx="1">
+            <a:schemeClr val="accent1"/>
+          </a:lnRef>
+          <a:fillRef idx="3">
+            <a:schemeClr val="accent1"/>
+          </a:fillRef>
+          <a:effectRef idx="2">
+            <a:schemeClr val="accent1"/>
+          </a:effectRef>
+          <a:fontRef idx="minor">
+            <a:schemeClr val="lt1"/>
+          </a:fontRef>
+        </p:style>
+        <p:txBody>
+          <a:bodyPr rtlCol="0" anchor="ctr"/>
+          <a:lstStyle/>
+          <a:p>
+            <a:pPr algn="ctr"/>
+          </a:p>
+        </p:txBody>
+      </p:sp>
+      <p:sp>
+        <p:nvSpPr>
+          <p:cNvPr id="5" name="TextBox 4"/>
           <p:cNvSpPr txBox="1"/>
           <p:nvPr/>
         </p:nvSpPr>
         <p:spPr>
           <a:xfrm>
-            <a:off x="822960" y="1143000"/>
+            <a:off x="822960" y="1234440"/>
             <a:ext cx="10515600" cy="1097280"/>
           </a:xfrm>
           <a:prstGeom prst="rect">
@@ -9694,14 +10792,14 @@
       </p:sp>
       <p:sp>
         <p:nvSpPr>
-          <p:cNvPr id="5" name="TextBox 4"/>
+          <p:cNvPr id="6" name="TextBox 5"/>
           <p:cNvSpPr txBox="1"/>
           <p:nvPr/>
         </p:nvSpPr>
         <p:spPr>
           <a:xfrm>
-            <a:off x="822960" y="2514600"/>
-            <a:ext cx="10515600" cy="2834640"/>
+            <a:off x="822960" y="2606040"/>
+            <a:ext cx="10515600" cy="2743200"/>
           </a:xfrm>
           <a:prstGeom prst="rect">
             <a:avLst/>
@@ -9722,7 +10820,7 @@
             <a:r>
               <a:rPr sz="2000" b="1" i="0">
                 <a:solidFill>
-                  <a:srgbClr val="CADCFC"/>
+                  <a:srgbClr val="F4A24C"/>
                 </a:solidFill>
                 <a:latin typeface="Montserrat"/>
               </a:rPr>
@@ -9747,7 +10845,7 @@
             <a:r>
               <a:rPr sz="2000" b="1" i="0">
                 <a:solidFill>
-                  <a:srgbClr val="CADCFC"/>
+                  <a:srgbClr val="F4A24C"/>
                 </a:solidFill>
                 <a:latin typeface="Montserrat"/>
               </a:rPr>
@@ -9772,7 +10870,7 @@
             <a:r>
               <a:rPr sz="2000" b="1" i="0">
                 <a:solidFill>
-                  <a:srgbClr val="CADCFC"/>
+                  <a:srgbClr val="F4A24C"/>
                 </a:solidFill>
                 <a:latin typeface="Montserrat"/>
               </a:rPr>
@@ -9797,7 +10895,7 @@
             <a:r>
               <a:rPr sz="2000" b="1" i="0">
                 <a:solidFill>
-                  <a:srgbClr val="CADCFC"/>
+                  <a:srgbClr val="F4A24C"/>
                 </a:solidFill>
                 <a:latin typeface="Montserrat"/>
               </a:rPr>
@@ -9817,20 +10915,20 @@
       </p:sp>
       <p:sp>
         <p:nvSpPr>
-          <p:cNvPr id="6" name="Rounded Rectangle 5"/>
+          <p:cNvPr id="7" name="Rounded Rectangle 6"/>
           <p:cNvSpPr/>
           <p:nvPr/>
         </p:nvSpPr>
         <p:spPr>
           <a:xfrm>
             <a:off x="822960" y="5532120"/>
-            <a:ext cx="10515600" cy="777240"/>
+            <a:ext cx="10515600" cy="822960"/>
           </a:xfrm>
           <a:prstGeom prst="roundRect">
             <a:avLst/>
           </a:prstGeom>
           <a:solidFill>
-            <a:srgbClr val="2E3A80"/>
+            <a:srgbClr val="E8801A"/>
           </a:solidFill>
           <a:ln>
             <a:noFill/>
@@ -9861,13 +10959,13 @@
       </p:sp>
       <p:sp>
         <p:nvSpPr>
-          <p:cNvPr id="7" name="TextBox 6"/>
+          <p:cNvPr id="8" name="TextBox 7"/>
           <p:cNvSpPr txBox="1"/>
           <p:nvPr/>
         </p:nvSpPr>
         <p:spPr>
           <a:xfrm>
-            <a:off x="1051560" y="5605272"/>
+            <a:off x="1051560" y="5623560"/>
             <a:ext cx="10058400" cy="640080"/>
           </a:xfrm>
           <a:prstGeom prst="rect">
@@ -9884,7 +10982,7 @@
             <a:r>
               <a:rPr sz="1500" b="1" i="1">
                 <a:solidFill>
-                  <a:srgbClr val="CADCFC"/>
+                  <a:srgbClr val="1E2761"/>
                 </a:solidFill>
                 <a:latin typeface="Montserrat"/>
               </a:rPr>
@@ -9985,7 +11083,7 @@
                 </a:solidFill>
                 <a:latin typeface="Montserrat"/>
               </a:rPr>
-              <a:t>003 / 020</a:t>
+              <a:t>003 / 021</a:t>
             </a:r>
           </a:p>
         </p:txBody>
@@ -10032,7 +11130,7 @@
         </p:nvSpPr>
         <p:spPr>
           <a:xfrm>
-            <a:off x="822960" y="457200"/>
+            <a:off x="822960" y="502920"/>
             <a:ext cx="8229600" cy="365760"/>
           </a:xfrm>
           <a:prstGeom prst="rect">
@@ -10047,13 +11145,13 @@
           <a:lstStyle/>
           <a:p>
             <a:r>
-              <a:rPr sz="1200" b="1" i="0">
-                <a:solidFill>
-                  <a:srgbClr val="64748B"/>
-                </a:solidFill>
-                <a:latin typeface="Montserrat"/>
-              </a:rPr>
-              <a:t>APARTADO 3.1 · AUTORIZACIÓN</a:t>
+              <a:rPr sz="1300" b="1" i="0">
+                <a:solidFill>
+                  <a:srgbClr val="E8801A"/>
+                </a:solidFill>
+                <a:latin typeface="Montserrat"/>
+              </a:rPr>
+              <a:t>PARTES DE ESTE VÍDEO</a:t>
             </a:r>
           </a:p>
         </p:txBody>
@@ -10066,7 +11164,7 @@
         </p:nvSpPr>
         <p:spPr>
           <a:xfrm>
-            <a:off x="822960" y="868680"/>
+            <a:off x="822960" y="914400"/>
             <a:ext cx="10515600" cy="914400"/>
           </a:xfrm>
           <a:prstGeom prst="rect">
@@ -10087,130 +11185,30 @@
                 </a:solidFill>
                 <a:latin typeface="Montserrat"/>
               </a:rPr>
-              <a:t>¿Necesito permiso para montar?</a:t>
-            </a:r>
-          </a:p>
-        </p:txBody>
-      </p:sp>
-      <p:sp>
-        <p:nvSpPr>
-          <p:cNvPr id="7" name="TextBox 6"/>
-          <p:cNvSpPr txBox="1"/>
-          <p:nvPr/>
-        </p:nvSpPr>
-        <p:spPr>
-          <a:xfrm>
-            <a:off x="822960" y="1920240"/>
-            <a:ext cx="4983480" cy="4206240"/>
-          </a:xfrm>
-          <a:prstGeom prst="rect">
-            <a:avLst/>
-          </a:prstGeom>
-          <a:noFill/>
-        </p:spPr>
-        <p:txBody>
-          <a:bodyPr wrap="square">
-            <a:spAutoFit/>
-          </a:bodyPr>
-          <a:lstStyle/>
-          <a:p>
-            <a:pPr>
-              <a:spcAft>
-                <a:spcPts val="1000"/>
-              </a:spcAft>
-            </a:pPr>
-            <a:r>
-              <a:rPr sz="1600" b="1" i="0">
-                <a:solidFill>
-                  <a:srgbClr val="2E3A80"/>
-                </a:solidFill>
-                <a:latin typeface="Montserrat"/>
-              </a:rPr>
-              <a:t>•  </a:t>
-            </a:r>
-            <a:r>
-              <a:rPr sz="1600" b="0" i="0">
-                <a:solidFill>
-                  <a:srgbClr val="1B2330"/>
-                </a:solidFill>
-                <a:latin typeface="Montserrat"/>
-              </a:rPr>
-              <a:t>No precisa autorización administrativa</a:t>
-            </a:r>
-          </a:p>
-          <a:p>
-            <a:pPr>
-              <a:spcAft>
-                <a:spcPts val="1000"/>
-              </a:spcAft>
-            </a:pPr>
-            <a:r>
-              <a:rPr sz="1600" b="1" i="0">
-                <a:solidFill>
-                  <a:srgbClr val="2E3A80"/>
-                </a:solidFill>
-                <a:latin typeface="Montserrat"/>
-              </a:rPr>
-              <a:t>•  </a:t>
-            </a:r>
-            <a:r>
-              <a:rPr sz="1600" b="0" i="0">
-                <a:solidFill>
-                  <a:srgbClr val="1B2330"/>
-                </a:solidFill>
-                <a:latin typeface="Montserrat"/>
-              </a:rPr>
-              <a:t>Basta hacerlo bien y documentarlo</a:t>
-            </a:r>
-          </a:p>
-          <a:p>
-            <a:pPr>
-              <a:spcAft>
-                <a:spcPts val="1000"/>
-              </a:spcAft>
-            </a:pPr>
-            <a:r>
-              <a:rPr sz="1600" b="1" i="0">
-                <a:solidFill>
-                  <a:srgbClr val="2E3A80"/>
-                </a:solidFill>
-                <a:latin typeface="Montserrat"/>
-              </a:rPr>
-              <a:t>•  </a:t>
-            </a:r>
-            <a:r>
-              <a:rPr sz="1600" b="0" i="0">
-                <a:solidFill>
-                  <a:srgbClr val="1B2330"/>
-                </a:solidFill>
-                <a:latin typeface="Montserrat"/>
-              </a:rPr>
-              <a:t>Comunicar solo en ciertos casos</a:t>
-            </a:r>
-          </a:p>
-        </p:txBody>
-      </p:sp>
-      <p:sp>
-        <p:nvSpPr>
-          <p:cNvPr id="8" name="imgph" descr="IMGQ:gas installer working on pipe with wrench"/>
+              <a:t>En este vídeo</a:t>
+            </a:r>
+          </a:p>
+        </p:txBody>
+      </p:sp>
+      <p:sp>
+        <p:nvSpPr>
+          <p:cNvPr id="7" name="Rounded Rectangle 6"/>
           <p:cNvSpPr/>
           <p:nvPr/>
         </p:nvSpPr>
         <p:spPr>
           <a:xfrm>
-            <a:off x="5806440" y="1051560"/>
-            <a:ext cx="5298947" cy="4629150"/>
+            <a:off x="868680" y="1673352"/>
+            <a:ext cx="2011680" cy="73152"/>
           </a:xfrm>
           <a:prstGeom prst="roundRect">
             <a:avLst/>
           </a:prstGeom>
           <a:solidFill>
-            <a:srgbClr val="F3F6FB"/>
+            <a:srgbClr val="E8801A"/>
           </a:solidFill>
-          <a:ln w="12700">
-            <a:solidFill>
-              <a:srgbClr val="C7D2E6"/>
-            </a:solidFill>
+          <a:ln>
+            <a:noFill/>
           </a:ln>
           <a:effectLst/>
         </p:spPr>
@@ -10238,14 +11236,14 @@
       </p:sp>
       <p:sp>
         <p:nvSpPr>
-          <p:cNvPr id="9" name="TextBox 8"/>
+          <p:cNvPr id="8" name="TextBox 7"/>
           <p:cNvSpPr txBox="1"/>
           <p:nvPr/>
         </p:nvSpPr>
         <p:spPr>
           <a:xfrm>
-            <a:off x="6080760" y="2726055"/>
-            <a:ext cx="4750307" cy="1280160"/>
+            <a:off x="822960" y="2103120"/>
+            <a:ext cx="10515600" cy="4023360"/>
           </a:xfrm>
           <a:prstGeom prst="rect">
             <a:avLst/>
@@ -10258,27 +11256,203 @@
           </a:bodyPr>
           <a:lstStyle/>
           <a:p>
-            <a:pPr algn="ctr"/>
-            <a:r>
-              <a:rPr sz="1400" b="1" i="0">
-                <a:solidFill>
-                  <a:srgbClr val="64748B"/>
-                </a:solidFill>
-                <a:latin typeface="Montserrat"/>
-              </a:rPr>
-              <a:t>IMAGEN REALISTA</a:t>
-            </a:r>
-          </a:p>
-          <a:p>
-            <a:pPr algn="ctr"/>
-            <a:r>
-              <a:rPr sz="1100" b="0" i="1">
-                <a:solidFill>
-                  <a:srgbClr val="64748B"/>
-                </a:solidFill>
-                <a:latin typeface="Montserrat"/>
-              </a:rPr>
-              <a:t>gas installer working on pipe with wrench</a:t>
+            <a:pPr>
+              <a:spcAft>
+                <a:spcPts val="900"/>
+              </a:spcAft>
+            </a:pPr>
+            <a:r>
+              <a:rPr sz="1800" b="1" i="0">
+                <a:solidFill>
+                  <a:srgbClr val="E8801A"/>
+                </a:solidFill>
+                <a:latin typeface="Montserrat"/>
+              </a:rPr>
+              <a:t>01   </a:t>
+            </a:r>
+            <a:r>
+              <a:rPr sz="1700" b="0" i="0">
+                <a:solidFill>
+                  <a:srgbClr val="1B2330"/>
+                </a:solidFill>
+                <a:latin typeface="Montserrat"/>
+              </a:rPr>
+              <a:t>Apartado 3.1</a:t>
+            </a:r>
+          </a:p>
+          <a:p>
+            <a:pPr>
+              <a:spcAft>
+                <a:spcPts val="900"/>
+              </a:spcAft>
+            </a:pPr>
+            <a:r>
+              <a:rPr sz="1800" b="1" i="0">
+                <a:solidFill>
+                  <a:srgbClr val="E8801A"/>
+                </a:solidFill>
+                <a:latin typeface="Montserrat"/>
+              </a:rPr>
+              <a:t>02   </a:t>
+            </a:r>
+            <a:r>
+              <a:rPr sz="1700" b="0" i="0">
+                <a:solidFill>
+                  <a:srgbClr val="1B2330"/>
+                </a:solidFill>
+                <a:latin typeface="Montserrat"/>
+              </a:rPr>
+              <a:t>Apartado 3.2</a:t>
+            </a:r>
+          </a:p>
+          <a:p>
+            <a:pPr>
+              <a:spcAft>
+                <a:spcPts val="900"/>
+              </a:spcAft>
+            </a:pPr>
+            <a:r>
+              <a:rPr sz="1800" b="1" i="0">
+                <a:solidFill>
+                  <a:srgbClr val="E8801A"/>
+                </a:solidFill>
+                <a:latin typeface="Montserrat"/>
+              </a:rPr>
+              <a:t>03   </a:t>
+            </a:r>
+            <a:r>
+              <a:rPr sz="1700" b="0" i="0">
+                <a:solidFill>
+                  <a:srgbClr val="1B2330"/>
+                </a:solidFill>
+                <a:latin typeface="Montserrat"/>
+              </a:rPr>
+              <a:t>Apartado 3.3</a:t>
+            </a:r>
+          </a:p>
+          <a:p>
+            <a:pPr>
+              <a:spcAft>
+                <a:spcPts val="900"/>
+              </a:spcAft>
+            </a:pPr>
+            <a:r>
+              <a:rPr sz="1800" b="1" i="0">
+                <a:solidFill>
+                  <a:srgbClr val="E8801A"/>
+                </a:solidFill>
+                <a:latin typeface="Montserrat"/>
+              </a:rPr>
+              <a:t>04   </a:t>
+            </a:r>
+            <a:r>
+              <a:rPr sz="1700" b="0" i="0">
+                <a:solidFill>
+                  <a:srgbClr val="1B2330"/>
+                </a:solidFill>
+                <a:latin typeface="Montserrat"/>
+              </a:rPr>
+              <a:t>Apartado 3.4</a:t>
+            </a:r>
+          </a:p>
+          <a:p>
+            <a:pPr>
+              <a:spcAft>
+                <a:spcPts val="900"/>
+              </a:spcAft>
+            </a:pPr>
+            <a:r>
+              <a:rPr sz="1800" b="1" i="0">
+                <a:solidFill>
+                  <a:srgbClr val="E8801A"/>
+                </a:solidFill>
+                <a:latin typeface="Montserrat"/>
+              </a:rPr>
+              <a:t>05   </a:t>
+            </a:r>
+            <a:r>
+              <a:rPr sz="1700" b="0" i="0">
+                <a:solidFill>
+                  <a:srgbClr val="1B2330"/>
+                </a:solidFill>
+                <a:latin typeface="Montserrat"/>
+              </a:rPr>
+              <a:t>Apartado 3.5</a:t>
+            </a:r>
+          </a:p>
+          <a:p>
+            <a:pPr>
+              <a:spcAft>
+                <a:spcPts val="900"/>
+              </a:spcAft>
+            </a:pPr>
+            <a:r>
+              <a:rPr sz="1800" b="1" i="0">
+                <a:solidFill>
+                  <a:srgbClr val="E8801A"/>
+                </a:solidFill>
+                <a:latin typeface="Montserrat"/>
+              </a:rPr>
+              <a:t>06   </a:t>
+            </a:r>
+            <a:r>
+              <a:rPr sz="1700" b="0" i="0">
+                <a:solidFill>
+                  <a:srgbClr val="1B2330"/>
+                </a:solidFill>
+                <a:latin typeface="Montserrat"/>
+              </a:rPr>
+              <a:t>Apartado 3.5.1</a:t>
+            </a:r>
+          </a:p>
+          <a:p>
+            <a:pPr>
+              <a:spcAft>
+                <a:spcPts val="900"/>
+              </a:spcAft>
+            </a:pPr>
+            <a:r>
+              <a:rPr sz="1800" b="1" i="0">
+                <a:solidFill>
+                  <a:srgbClr val="E8801A"/>
+                </a:solidFill>
+                <a:latin typeface="Montserrat"/>
+              </a:rPr>
+              <a:t>07   </a:t>
+            </a:r>
+            <a:r>
+              <a:rPr sz="1700" b="0" i="0">
+                <a:solidFill>
+                  <a:srgbClr val="1B2330"/>
+                </a:solidFill>
+                <a:latin typeface="Montserrat"/>
+              </a:rPr>
+              <a:t>Apartado 3.5.2</a:t>
+            </a:r>
+          </a:p>
+          <a:p>
+            <a:pPr>
+              <a:spcAft>
+                <a:spcPts val="900"/>
+              </a:spcAft>
+            </a:pPr>
+            <a:r>
+              <a:rPr sz="1800" b="1" i="0">
+                <a:solidFill>
+                  <a:srgbClr val="E8801A"/>
+                </a:solidFill>
+                <a:latin typeface="Montserrat"/>
+              </a:rPr>
+              <a:t>08   </a:t>
+            </a:r>
+            <a:r>
+              <a:rPr sz="1700" b="0" i="0">
+                <a:solidFill>
+                  <a:srgbClr val="1B2330"/>
+                </a:solidFill>
+                <a:latin typeface="Montserrat"/>
+              </a:rPr>
+              <a:t>Apartado 3.6</a:t>
             </a:r>
           </a:p>
         </p:txBody>
@@ -10375,7 +11549,7 @@
                 </a:solidFill>
                 <a:latin typeface="Montserrat"/>
               </a:rPr>
-              <a:t>004 / 020</a:t>
+              <a:t>004 / 021</a:t>
             </a:r>
           </a:p>
         </p:txBody>
@@ -10423,7 +11597,7 @@
         <p:spPr>
           <a:xfrm>
             <a:off x="822960" y="457200"/>
-            <a:ext cx="8229600" cy="365760"/>
+            <a:ext cx="10058400" cy="365760"/>
           </a:xfrm>
           <a:prstGeom prst="rect">
             <a:avLst/>
@@ -10437,13 +11611,13 @@
           <a:lstStyle/>
           <a:p>
             <a:r>
-              <a:rPr sz="1200" b="1" i="0">
-                <a:solidFill>
-                  <a:srgbClr val="64748B"/>
-                </a:solidFill>
-                <a:latin typeface="Montserrat"/>
-              </a:rPr>
-              <a:t>APARTADO 3.2 · PROYECTO</a:t>
+              <a:rPr sz="1300" b="1" i="0">
+                <a:solidFill>
+                  <a:srgbClr val="E8801A"/>
+                </a:solidFill>
+                <a:latin typeface="Montserrat"/>
+              </a:rPr>
+              <a:t>APARTADO 3.1 · AUTORIZACIÓN</a:t>
             </a:r>
           </a:p>
         </p:txBody>
@@ -10471,26 +11645,70 @@
           <a:lstStyle/>
           <a:p>
             <a:r>
-              <a:rPr sz="2700" b="1" i="0">
+              <a:rPr sz="2800" b="1" i="0">
                 <a:solidFill>
                   <a:srgbClr val="1E2761"/>
                 </a:solidFill>
                 <a:latin typeface="Montserrat"/>
               </a:rPr>
-              <a:t>¿Cuándo hace falta proyecto?</a:t>
-            </a:r>
-          </a:p>
-        </p:txBody>
-      </p:sp>
-      <p:sp>
-        <p:nvSpPr>
-          <p:cNvPr id="7" name="TextBox 6"/>
+              <a:t>¿Necesito permiso para montar?</a:t>
+            </a:r>
+          </a:p>
+        </p:txBody>
+      </p:sp>
+      <p:sp>
+        <p:nvSpPr>
+          <p:cNvPr id="7" name="Rounded Rectangle 6"/>
+          <p:cNvSpPr/>
+          <p:nvPr/>
+        </p:nvSpPr>
+        <p:spPr>
+          <a:xfrm>
+            <a:off x="868680" y="1627632"/>
+            <a:ext cx="2011680" cy="73152"/>
+          </a:xfrm>
+          <a:prstGeom prst="roundRect">
+            <a:avLst/>
+          </a:prstGeom>
+          <a:solidFill>
+            <a:srgbClr val="E8801A"/>
+          </a:solidFill>
+          <a:ln>
+            <a:noFill/>
+          </a:ln>
+          <a:effectLst/>
+        </p:spPr>
+        <p:style>
+          <a:lnRef idx="1">
+            <a:schemeClr val="accent1"/>
+          </a:lnRef>
+          <a:fillRef idx="3">
+            <a:schemeClr val="accent1"/>
+          </a:fillRef>
+          <a:effectRef idx="2">
+            <a:schemeClr val="accent1"/>
+          </a:effectRef>
+          <a:fontRef idx="minor">
+            <a:schemeClr val="lt1"/>
+          </a:fontRef>
+        </p:style>
+        <p:txBody>
+          <a:bodyPr rtlCol="0" anchor="ctr"/>
+          <a:lstStyle/>
+          <a:p>
+            <a:pPr algn="ctr"/>
+          </a:p>
+        </p:txBody>
+      </p:sp>
+      <p:sp>
+        <p:nvSpPr>
+          <p:cNvPr id="8" name="TextBox 7"/>
           <p:cNvSpPr txBox="1"/>
           <p:nvPr/>
         </p:nvSpPr>
         <p:spPr>
           <a:xfrm>
-            <a:off x="822960" y="1920240"/>
+            <a:off x="822960" y="1965960"/>
             <a:ext cx="4983480" cy="4206240"/>
           </a:xfrm>
           <a:prstGeom prst="rect">
@@ -10506,17 +11724,17 @@
           <a:p>
             <a:pPr>
               <a:spcAft>
-                <a:spcPts val="1000"/>
+                <a:spcPts val="1100"/>
               </a:spcAft>
             </a:pPr>
             <a:r>
               <a:rPr sz="1600" b="1" i="0">
                 <a:solidFill>
-                  <a:srgbClr val="2E3A80"/>
-                </a:solidFill>
-                <a:latin typeface="Montserrat"/>
-              </a:rPr>
-              <a:t>•  </a:t>
+                  <a:srgbClr val="E8801A"/>
+                </a:solidFill>
+                <a:latin typeface="Montserrat"/>
+              </a:rPr>
+              <a:t>▸  </a:t>
             </a:r>
             <a:r>
               <a:rPr sz="1600" b="0" i="0">
@@ -10525,23 +11743,23 @@
                 </a:solidFill>
                 <a:latin typeface="Montserrat"/>
               </a:rPr>
-              <a:t>Individual &gt; 70 kW</a:t>
+              <a:t>No precisa autorización administrativa</a:t>
             </a:r>
           </a:p>
           <a:p>
             <a:pPr>
               <a:spcAft>
-                <a:spcPts val="1000"/>
+                <a:spcPts val="1100"/>
               </a:spcAft>
             </a:pPr>
             <a:r>
               <a:rPr sz="1600" b="1" i="0">
                 <a:solidFill>
-                  <a:srgbClr val="2E3A80"/>
-                </a:solidFill>
-                <a:latin typeface="Montserrat"/>
-              </a:rPr>
-              <a:t>•  </a:t>
+                  <a:srgbClr val="E8801A"/>
+                </a:solidFill>
+                <a:latin typeface="Montserrat"/>
+              </a:rPr>
+              <a:t>▸  </a:t>
             </a:r>
             <a:r>
               <a:rPr sz="1600" b="0" i="0">
@@ -10550,23 +11768,23 @@
                 </a:solidFill>
                 <a:latin typeface="Montserrat"/>
               </a:rPr>
-              <a:t>Común &gt; 2.000 kW</a:t>
+              <a:t>Basta hacerlo bien y documentarlo</a:t>
             </a:r>
           </a:p>
           <a:p>
             <a:pPr>
               <a:spcAft>
-                <a:spcPts val="1000"/>
+                <a:spcPts val="1100"/>
               </a:spcAft>
             </a:pPr>
             <a:r>
               <a:rPr sz="1600" b="1" i="0">
                 <a:solidFill>
-                  <a:srgbClr val="2E3A80"/>
-                </a:solidFill>
-                <a:latin typeface="Montserrat"/>
-              </a:rPr>
-              <a:t>•  </a:t>
+                  <a:srgbClr val="E8801A"/>
+                </a:solidFill>
+                <a:latin typeface="Montserrat"/>
+              </a:rPr>
+              <a:t>▸  </a:t>
             </a:r>
             <a:r>
               <a:rPr sz="1600" b="0" i="0">
@@ -10575,39 +11793,14 @@
                 </a:solidFill>
                 <a:latin typeface="Montserrat"/>
               </a:rPr>
-              <a:t>Acometida interior &gt; 2.000 kW</a:t>
-            </a:r>
-          </a:p>
-          <a:p>
-            <a:pPr>
-              <a:spcAft>
-                <a:spcPts val="1000"/>
-              </a:spcAft>
-            </a:pPr>
-            <a:r>
-              <a:rPr sz="1600" b="1" i="0">
-                <a:solidFill>
-                  <a:srgbClr val="2E3A80"/>
-                </a:solidFill>
-                <a:latin typeface="Montserrat"/>
-              </a:rPr>
-              <a:t>•  </a:t>
-            </a:r>
-            <a:r>
-              <a:rPr sz="1600" b="0" i="0">
-                <a:solidFill>
-                  <a:srgbClr val="1B2330"/>
-                </a:solidFill>
-                <a:latin typeface="Montserrat"/>
-              </a:rPr>
-              <a:t>Más de 5 bar: siempre</a:t>
-            </a:r>
-          </a:p>
-        </p:txBody>
-      </p:sp>
-      <p:sp>
-        <p:nvSpPr>
-          <p:cNvPr id="8" name="imgph" descr="IMGQ:engineer reviewing technical drawings"/>
+              <a:t>Comunicar solo en ciertos casos</a:t>
+            </a:r>
+          </a:p>
+        </p:txBody>
+      </p:sp>
+      <p:sp>
+        <p:nvSpPr>
+          <p:cNvPr id="9" name="imgph" descr="IMGQ:gas installer working on pipe with wrench"/>
           <p:cNvSpPr/>
           <p:nvPr/>
         </p:nvSpPr>
@@ -10653,7 +11846,7 @@
       </p:sp>
       <p:sp>
         <p:nvSpPr>
-          <p:cNvPr id="9" name="TextBox 8"/>
+          <p:cNvPr id="10" name="TextBox 9"/>
           <p:cNvSpPr txBox="1"/>
           <p:nvPr/>
         </p:nvSpPr>
@@ -10693,7 +11886,7 @@
                 </a:solidFill>
                 <a:latin typeface="Montserrat"/>
               </a:rPr>
-              <a:t>engineer reviewing technical drawings</a:t>
+              <a:t>gas installer working on pipe with wrench</a:t>
             </a:r>
           </a:p>
         </p:txBody>
@@ -10790,7 +11983,7 @@
                 </a:solidFill>
                 <a:latin typeface="Montserrat"/>
               </a:rPr>
-              <a:t>005 / 020</a:t>
+              <a:t>005 / 021</a:t>
             </a:r>
           </a:p>
         </p:txBody>
@@ -10838,7 +12031,7 @@
         <p:spPr>
           <a:xfrm>
             <a:off x="822960" y="457200"/>
-            <a:ext cx="8229600" cy="365760"/>
+            <a:ext cx="10058400" cy="365760"/>
           </a:xfrm>
           <a:prstGeom prst="rect">
             <a:avLst/>
@@ -10852,13 +12045,13 @@
           <a:lstStyle/>
           <a:p>
             <a:r>
-              <a:rPr sz="1200" b="1" i="0">
-                <a:solidFill>
-                  <a:srgbClr val="64748B"/>
-                </a:solidFill>
-                <a:latin typeface="Montserrat"/>
-              </a:rPr>
-              <a:t>APARTADO 3.2 · AMPLIACIONES</a:t>
+              <a:rPr sz="1300" b="1" i="0">
+                <a:solidFill>
+                  <a:srgbClr val="E8801A"/>
+                </a:solidFill>
+                <a:latin typeface="Montserrat"/>
+              </a:rPr>
+              <a:t>APARTADO 3.2 · PROYECTO</a:t>
             </a:r>
           </a:p>
         </p:txBody>
@@ -10886,26 +12079,70 @@
           <a:lstStyle/>
           <a:p>
             <a:r>
-              <a:rPr sz="2700" b="1" i="0">
+              <a:rPr sz="2800" b="1" i="0">
                 <a:solidFill>
                   <a:srgbClr val="1E2761"/>
                 </a:solidFill>
                 <a:latin typeface="Montserrat"/>
               </a:rPr>
-              <a:t>La regla del 30 %</a:t>
-            </a:r>
-          </a:p>
-        </p:txBody>
-      </p:sp>
-      <p:sp>
-        <p:nvSpPr>
-          <p:cNvPr id="7" name="TextBox 6"/>
+              <a:t>¿Cuándo hace falta proyecto?</a:t>
+            </a:r>
+          </a:p>
+        </p:txBody>
+      </p:sp>
+      <p:sp>
+        <p:nvSpPr>
+          <p:cNvPr id="7" name="Rounded Rectangle 6"/>
+          <p:cNvSpPr/>
+          <p:nvPr/>
+        </p:nvSpPr>
+        <p:spPr>
+          <a:xfrm>
+            <a:off x="868680" y="1627632"/>
+            <a:ext cx="2011680" cy="73152"/>
+          </a:xfrm>
+          <a:prstGeom prst="roundRect">
+            <a:avLst/>
+          </a:prstGeom>
+          <a:solidFill>
+            <a:srgbClr val="E8801A"/>
+          </a:solidFill>
+          <a:ln>
+            <a:noFill/>
+          </a:ln>
+          <a:effectLst/>
+        </p:spPr>
+        <p:style>
+          <a:lnRef idx="1">
+            <a:schemeClr val="accent1"/>
+          </a:lnRef>
+          <a:fillRef idx="3">
+            <a:schemeClr val="accent1"/>
+          </a:fillRef>
+          <a:effectRef idx="2">
+            <a:schemeClr val="accent1"/>
+          </a:effectRef>
+          <a:fontRef idx="minor">
+            <a:schemeClr val="lt1"/>
+          </a:fontRef>
+        </p:style>
+        <p:txBody>
+          <a:bodyPr rtlCol="0" anchor="ctr"/>
+          <a:lstStyle/>
+          <a:p>
+            <a:pPr algn="ctr"/>
+          </a:p>
+        </p:txBody>
+      </p:sp>
+      <p:sp>
+        <p:nvSpPr>
+          <p:cNvPr id="8" name="TextBox 7"/>
           <p:cNvSpPr txBox="1"/>
           <p:nvPr/>
         </p:nvSpPr>
         <p:spPr>
           <a:xfrm>
-            <a:off x="822960" y="1920240"/>
+            <a:off x="822960" y="1965960"/>
             <a:ext cx="4983480" cy="4206240"/>
           </a:xfrm>
           <a:prstGeom prst="rect">
@@ -10921,17 +12158,17 @@
           <a:p>
             <a:pPr>
               <a:spcAft>
-                <a:spcPts val="1000"/>
+                <a:spcPts val="1100"/>
               </a:spcAft>
             </a:pPr>
             <a:r>
               <a:rPr sz="1600" b="1" i="0">
                 <a:solidFill>
-                  <a:srgbClr val="2E3A80"/>
-                </a:solidFill>
-                <a:latin typeface="Montserrat"/>
-              </a:rPr>
-              <a:t>•  </a:t>
+                  <a:srgbClr val="E8801A"/>
+                </a:solidFill>
+                <a:latin typeface="Montserrat"/>
+              </a:rPr>
+              <a:t>▸  </a:t>
             </a:r>
             <a:r>
               <a:rPr sz="1600" b="0" i="0">
@@ -10940,23 +12177,23 @@
                 </a:solidFill>
                 <a:latin typeface="Montserrat"/>
               </a:rPr>
-              <a:t>Ampliar y superar el 30 %</a:t>
+              <a:t>Individual &gt; 70 kW</a:t>
             </a:r>
           </a:p>
           <a:p>
             <a:pPr>
               <a:spcAft>
-                <a:spcPts val="1000"/>
+                <a:spcPts val="1100"/>
               </a:spcAft>
             </a:pPr>
             <a:r>
               <a:rPr sz="1600" b="1" i="0">
                 <a:solidFill>
-                  <a:srgbClr val="2E3A80"/>
-                </a:solidFill>
-                <a:latin typeface="Montserrat"/>
-              </a:rPr>
-              <a:t>•  </a:t>
+                  <a:srgbClr val="E8801A"/>
+                </a:solidFill>
+                <a:latin typeface="Montserrat"/>
+              </a:rPr>
+              <a:t>▸  </a:t>
             </a:r>
             <a:r>
               <a:rPr sz="1600" b="0" i="0">
@@ -10965,23 +12202,23 @@
                 </a:solidFill>
                 <a:latin typeface="Montserrat"/>
               </a:rPr>
-              <a:t>de la potencia de diseño inicial</a:t>
+              <a:t>Común &gt; 2.000 kW</a:t>
             </a:r>
           </a:p>
           <a:p>
             <a:pPr>
               <a:spcAft>
-                <a:spcPts val="1000"/>
+                <a:spcPts val="1100"/>
               </a:spcAft>
             </a:pPr>
             <a:r>
               <a:rPr sz="1600" b="1" i="0">
                 <a:solidFill>
-                  <a:srgbClr val="2E3A80"/>
-                </a:solidFill>
-                <a:latin typeface="Montserrat"/>
-              </a:rPr>
-              <a:t>•  </a:t>
+                  <a:srgbClr val="E8801A"/>
+                </a:solidFill>
+                <a:latin typeface="Montserrat"/>
+              </a:rPr>
+              <a:t>▸  </a:t>
             </a:r>
             <a:r>
               <a:rPr sz="1600" b="0" i="0">
@@ -10990,14 +12227,39 @@
                 </a:solidFill>
                 <a:latin typeface="Montserrat"/>
               </a:rPr>
-              <a:t>O entrar en los otros supuestos</a:t>
-            </a:r>
-          </a:p>
-        </p:txBody>
-      </p:sp>
-      <p:sp>
-        <p:nvSpPr>
-          <p:cNvPr id="8" name="imgph" descr="IMGQ:gas pipe network with branches on wall"/>
+              <a:t>Acometida interior &gt; 2.000 kW</a:t>
+            </a:r>
+          </a:p>
+          <a:p>
+            <a:pPr>
+              <a:spcAft>
+                <a:spcPts val="1100"/>
+              </a:spcAft>
+            </a:pPr>
+            <a:r>
+              <a:rPr sz="1600" b="1" i="0">
+                <a:solidFill>
+                  <a:srgbClr val="E8801A"/>
+                </a:solidFill>
+                <a:latin typeface="Montserrat"/>
+              </a:rPr>
+              <a:t>▸  </a:t>
+            </a:r>
+            <a:r>
+              <a:rPr sz="1600" b="0" i="0">
+                <a:solidFill>
+                  <a:srgbClr val="1B2330"/>
+                </a:solidFill>
+                <a:latin typeface="Montserrat"/>
+              </a:rPr>
+              <a:t>Más de 5 bar: siempre</a:t>
+            </a:r>
+          </a:p>
+        </p:txBody>
+      </p:sp>
+      <p:sp>
+        <p:nvSpPr>
+          <p:cNvPr id="9" name="imgph" descr="IMGQ:engineer reviewing technical drawings"/>
           <p:cNvSpPr/>
           <p:nvPr/>
         </p:nvSpPr>
@@ -11043,7 +12305,7 @@
       </p:sp>
       <p:sp>
         <p:nvSpPr>
-          <p:cNvPr id="9" name="TextBox 8"/>
+          <p:cNvPr id="10" name="TextBox 9"/>
           <p:cNvSpPr txBox="1"/>
           <p:nvPr/>
         </p:nvSpPr>
@@ -11083,7 +12345,7 @@
                 </a:solidFill>
                 <a:latin typeface="Montserrat"/>
               </a:rPr>
-              <a:t>gas pipe network with branches on wall</a:t>
+              <a:t>engineer reviewing technical drawings</a:t>
             </a:r>
           </a:p>
         </p:txBody>
@@ -11180,7 +12442,7 @@
                 </a:solidFill>
                 <a:latin typeface="Montserrat"/>
               </a:rPr>
-              <a:t>006 / 020</a:t>
+              <a:t>006 / 021</a:t>
             </a:r>
           </a:p>
         </p:txBody>
@@ -11228,7 +12490,7 @@
         <p:spPr>
           <a:xfrm>
             <a:off x="822960" y="457200"/>
-            <a:ext cx="8229600" cy="365760"/>
+            <a:ext cx="10058400" cy="365760"/>
           </a:xfrm>
           <a:prstGeom prst="rect">
             <a:avLst/>
@@ -11242,13 +12504,13 @@
           <a:lstStyle/>
           <a:p>
             <a:r>
-              <a:rPr sz="1200" b="1" i="0">
-                <a:solidFill>
-                  <a:srgbClr val="64748B"/>
-                </a:solidFill>
-                <a:latin typeface="Montserrat"/>
-              </a:rPr>
-              <a:t>APARTADO 3.2 · DIRECCIÓN DE OBRA</a:t>
+              <a:rPr sz="1300" b="1" i="0">
+                <a:solidFill>
+                  <a:srgbClr val="E8801A"/>
+                </a:solidFill>
+                <a:latin typeface="Montserrat"/>
+              </a:rPr>
+              <a:t>APARTADO 3.2 · AMPLIACIONES</a:t>
             </a:r>
           </a:p>
         </p:txBody>
@@ -11276,26 +12538,70 @@
           <a:lstStyle/>
           <a:p>
             <a:r>
-              <a:rPr sz="2700" b="1" i="0">
+              <a:rPr sz="2800" b="1" i="0">
                 <a:solidFill>
                   <a:srgbClr val="1E2761"/>
                 </a:solidFill>
                 <a:latin typeface="Montserrat"/>
               </a:rPr>
-              <a:t>Proyecto = dirección de obra</a:t>
-            </a:r>
-          </a:p>
-        </p:txBody>
-      </p:sp>
-      <p:sp>
-        <p:nvSpPr>
-          <p:cNvPr id="7" name="TextBox 6"/>
+              <a:t>La regla del 30 %</a:t>
+            </a:r>
+          </a:p>
+        </p:txBody>
+      </p:sp>
+      <p:sp>
+        <p:nvSpPr>
+          <p:cNvPr id="7" name="Rounded Rectangle 6"/>
+          <p:cNvSpPr/>
+          <p:nvPr/>
+        </p:nvSpPr>
+        <p:spPr>
+          <a:xfrm>
+            <a:off x="868680" y="1627632"/>
+            <a:ext cx="2011680" cy="73152"/>
+          </a:xfrm>
+          <a:prstGeom prst="roundRect">
+            <a:avLst/>
+          </a:prstGeom>
+          <a:solidFill>
+            <a:srgbClr val="E8801A"/>
+          </a:solidFill>
+          <a:ln>
+            <a:noFill/>
+          </a:ln>
+          <a:effectLst/>
+        </p:spPr>
+        <p:style>
+          <a:lnRef idx="1">
+            <a:schemeClr val="accent1"/>
+          </a:lnRef>
+          <a:fillRef idx="3">
+            <a:schemeClr val="accent1"/>
+          </a:fillRef>
+          <a:effectRef idx="2">
+            <a:schemeClr val="accent1"/>
+          </a:effectRef>
+          <a:fontRef idx="minor">
+            <a:schemeClr val="lt1"/>
+          </a:fontRef>
+        </p:style>
+        <p:txBody>
+          <a:bodyPr rtlCol="0" anchor="ctr"/>
+          <a:lstStyle/>
+          <a:p>
+            <a:pPr algn="ctr"/>
+          </a:p>
+        </p:txBody>
+      </p:sp>
+      <p:sp>
+        <p:nvSpPr>
+          <p:cNvPr id="8" name="TextBox 7"/>
           <p:cNvSpPr txBox="1"/>
           <p:nvPr/>
         </p:nvSpPr>
         <p:spPr>
           <a:xfrm>
-            <a:off x="822960" y="1920240"/>
+            <a:off x="822960" y="1965960"/>
             <a:ext cx="4983480" cy="4206240"/>
           </a:xfrm>
           <a:prstGeom prst="rect">
@@ -11311,17 +12617,17 @@
           <a:p>
             <a:pPr>
               <a:spcAft>
-                <a:spcPts val="1000"/>
+                <a:spcPts val="1100"/>
               </a:spcAft>
             </a:pPr>
             <a:r>
               <a:rPr sz="1600" b="1" i="0">
                 <a:solidFill>
-                  <a:srgbClr val="2E3A80"/>
-                </a:solidFill>
-                <a:latin typeface="Montserrat"/>
-              </a:rPr>
-              <a:t>•  </a:t>
+                  <a:srgbClr val="E8801A"/>
+                </a:solidFill>
+                <a:latin typeface="Montserrat"/>
+              </a:rPr>
+              <a:t>▸  </a:t>
             </a:r>
             <a:r>
               <a:rPr sz="1600" b="0" i="0">
@@ -11330,23 +12636,23 @@
                 </a:solidFill>
                 <a:latin typeface="Montserrat"/>
               </a:rPr>
-              <a:t>Si hay proyecto, hay técnico</a:t>
+              <a:t>Ampliar y superar el 30 %</a:t>
             </a:r>
           </a:p>
           <a:p>
             <a:pPr>
               <a:spcAft>
-                <a:spcPts val="1000"/>
+                <a:spcPts val="1100"/>
               </a:spcAft>
             </a:pPr>
             <a:r>
               <a:rPr sz="1600" b="1" i="0">
                 <a:solidFill>
-                  <a:srgbClr val="2E3A80"/>
-                </a:solidFill>
-                <a:latin typeface="Montserrat"/>
-              </a:rPr>
-              <a:t>•  </a:t>
+                  <a:srgbClr val="E8801A"/>
+                </a:solidFill>
+                <a:latin typeface="Montserrat"/>
+              </a:rPr>
+              <a:t>▸  </a:t>
             </a:r>
             <a:r>
               <a:rPr sz="1600" b="0" i="0">
@@ -11355,23 +12661,23 @@
                 </a:solidFill>
                 <a:latin typeface="Montserrat"/>
               </a:rPr>
-              <a:t>Emite certificado de dirección de obra</a:t>
+              <a:t>de la potencia de diseño inicial</a:t>
             </a:r>
           </a:p>
           <a:p>
             <a:pPr>
               <a:spcAft>
-                <a:spcPts val="1000"/>
+                <a:spcPts val="1100"/>
               </a:spcAft>
             </a:pPr>
             <a:r>
               <a:rPr sz="1600" b="1" i="0">
                 <a:solidFill>
-                  <a:srgbClr val="2E3A80"/>
-                </a:solidFill>
-                <a:latin typeface="Montserrat"/>
-              </a:rPr>
-              <a:t>•  </a:t>
+                  <a:srgbClr val="E8801A"/>
+                </a:solidFill>
+                <a:latin typeface="Montserrat"/>
+              </a:rPr>
+              <a:t>▸  </a:t>
             </a:r>
             <a:r>
               <a:rPr sz="1600" b="0" i="0">
@@ -11380,14 +12686,14 @@
                 </a:solidFill>
                 <a:latin typeface="Montserrat"/>
               </a:rPr>
-              <a:t>Sin proyecto, no hay dirección</a:t>
-            </a:r>
-          </a:p>
-        </p:txBody>
-      </p:sp>
-      <p:sp>
-        <p:nvSpPr>
-          <p:cNvPr id="8" name="imgph" descr="IMGQ:technical engineer with hard hat on construction site"/>
+              <a:t>O entrar en los otros supuestos</a:t>
+            </a:r>
+          </a:p>
+        </p:txBody>
+      </p:sp>
+      <p:sp>
+        <p:nvSpPr>
+          <p:cNvPr id="9" name="imgph" descr="IMGQ:gas pipe network with branches on wall"/>
           <p:cNvSpPr/>
           <p:nvPr/>
         </p:nvSpPr>
@@ -11433,7 +12739,7 @@
       </p:sp>
       <p:sp>
         <p:nvSpPr>
-          <p:cNvPr id="9" name="TextBox 8"/>
+          <p:cNvPr id="10" name="TextBox 9"/>
           <p:cNvSpPr txBox="1"/>
           <p:nvPr/>
         </p:nvSpPr>
@@ -11473,7 +12779,7 @@
                 </a:solidFill>
                 <a:latin typeface="Montserrat"/>
               </a:rPr>
-              <a:t>technical engineer with hard hat on construction site</a:t>
+              <a:t>gas pipe network with branches on wall</a:t>
             </a:r>
           </a:p>
         </p:txBody>
@@ -11570,7 +12876,7 @@
                 </a:solidFill>
                 <a:latin typeface="Montserrat"/>
               </a:rPr>
-              <a:t>007 / 020</a:t>
+              <a:t>007 / 021</a:t>
             </a:r>
           </a:p>
         </p:txBody>
@@ -11618,7 +12924,7 @@
         <p:spPr>
           <a:xfrm>
             <a:off x="822960" y="457200"/>
-            <a:ext cx="8229600" cy="365760"/>
+            <a:ext cx="10058400" cy="365760"/>
           </a:xfrm>
           <a:prstGeom prst="rect">
             <a:avLst/>
@@ -11632,13 +12938,13 @@
           <a:lstStyle/>
           <a:p>
             <a:r>
-              <a:rPr sz="1200" b="1" i="0">
-                <a:solidFill>
-                  <a:srgbClr val="64748B"/>
-                </a:solidFill>
-                <a:latin typeface="Montserrat"/>
-              </a:rPr>
-              <a:t>APARTADO 3.3 · PRUEBAS DE ENTREGA</a:t>
+              <a:rPr sz="1300" b="1" i="0">
+                <a:solidFill>
+                  <a:srgbClr val="E8801A"/>
+                </a:solidFill>
+                <a:latin typeface="Montserrat"/>
+              </a:rPr>
+              <a:t>APARTADO 3.2 · DIRECCIÓN DE OBRA</a:t>
             </a:r>
           </a:p>
         </p:txBody>
@@ -11666,26 +12972,70 @@
           <a:lstStyle/>
           <a:p>
             <a:r>
-              <a:rPr sz="2700" b="1" i="0">
+              <a:rPr sz="2800" b="1" i="0">
                 <a:solidFill>
                   <a:srgbClr val="1E2761"/>
                 </a:solidFill>
                 <a:latin typeface="Montserrat"/>
               </a:rPr>
-              <a:t>La prueba estrella: estanquidad</a:t>
-            </a:r>
-          </a:p>
-        </p:txBody>
-      </p:sp>
-      <p:sp>
-        <p:nvSpPr>
-          <p:cNvPr id="7" name="TextBox 6"/>
+              <a:t>Proyecto = dirección de obra</a:t>
+            </a:r>
+          </a:p>
+        </p:txBody>
+      </p:sp>
+      <p:sp>
+        <p:nvSpPr>
+          <p:cNvPr id="7" name="Rounded Rectangle 6"/>
+          <p:cNvSpPr/>
+          <p:nvPr/>
+        </p:nvSpPr>
+        <p:spPr>
+          <a:xfrm>
+            <a:off x="868680" y="1627632"/>
+            <a:ext cx="2011680" cy="73152"/>
+          </a:xfrm>
+          <a:prstGeom prst="roundRect">
+            <a:avLst/>
+          </a:prstGeom>
+          <a:solidFill>
+            <a:srgbClr val="E8801A"/>
+          </a:solidFill>
+          <a:ln>
+            <a:noFill/>
+          </a:ln>
+          <a:effectLst/>
+        </p:spPr>
+        <p:style>
+          <a:lnRef idx="1">
+            <a:schemeClr val="accent1"/>
+          </a:lnRef>
+          <a:fillRef idx="3">
+            <a:schemeClr val="accent1"/>
+          </a:fillRef>
+          <a:effectRef idx="2">
+            <a:schemeClr val="accent1"/>
+          </a:effectRef>
+          <a:fontRef idx="minor">
+            <a:schemeClr val="lt1"/>
+          </a:fontRef>
+        </p:style>
+        <p:txBody>
+          <a:bodyPr rtlCol="0" anchor="ctr"/>
+          <a:lstStyle/>
+          <a:p>
+            <a:pPr algn="ctr"/>
+          </a:p>
+        </p:txBody>
+      </p:sp>
+      <p:sp>
+        <p:nvSpPr>
+          <p:cNvPr id="8" name="TextBox 7"/>
           <p:cNvSpPr txBox="1"/>
           <p:nvPr/>
         </p:nvSpPr>
         <p:spPr>
           <a:xfrm>
-            <a:off x="822960" y="1920240"/>
+            <a:off x="822960" y="1965960"/>
             <a:ext cx="4983480" cy="4206240"/>
           </a:xfrm>
           <a:prstGeom prst="rect">
@@ -11701,17 +13051,17 @@
           <a:p>
             <a:pPr>
               <a:spcAft>
-                <a:spcPts val="1000"/>
+                <a:spcPts val="1100"/>
               </a:spcAft>
             </a:pPr>
             <a:r>
               <a:rPr sz="1600" b="1" i="0">
                 <a:solidFill>
-                  <a:srgbClr val="2E3A80"/>
-                </a:solidFill>
-                <a:latin typeface="Montserrat"/>
-              </a:rPr>
-              <a:t>•  </a:t>
+                  <a:srgbClr val="E8801A"/>
+                </a:solidFill>
+                <a:latin typeface="Montserrat"/>
+              </a:rPr>
+              <a:t>▸  </a:t>
             </a:r>
             <a:r>
               <a:rPr sz="1600" b="0" i="0">
@@ -11720,23 +13070,23 @@
                 </a:solidFill>
                 <a:latin typeface="Montserrat"/>
               </a:rPr>
-              <a:t>La hace la empresa instaladora</a:t>
+              <a:t>Si hay proyecto, hay técnico</a:t>
             </a:r>
           </a:p>
           <a:p>
             <a:pPr>
               <a:spcAft>
-                <a:spcPts val="1000"/>
+                <a:spcPts val="1100"/>
               </a:spcAft>
             </a:pPr>
             <a:r>
               <a:rPr sz="1600" b="1" i="0">
                 <a:solidFill>
-                  <a:srgbClr val="2E3A80"/>
-                </a:solidFill>
-                <a:latin typeface="Montserrat"/>
-              </a:rPr>
-              <a:t>•  </a:t>
+                  <a:srgbClr val="E8801A"/>
+                </a:solidFill>
+                <a:latin typeface="Montserrat"/>
+              </a:rPr>
+              <a:t>▸  </a:t>
             </a:r>
             <a:r>
               <a:rPr sz="1600" b="0" i="0">
@@ -11745,23 +13095,23 @@
                 </a:solidFill>
                 <a:latin typeface="Montserrat"/>
               </a:rPr>
-              <a:t>UNE 60670-8 (baja) o 60620 (alta)</a:t>
+              <a:t>Emite certificado de dirección de obra</a:t>
             </a:r>
           </a:p>
           <a:p>
             <a:pPr>
               <a:spcAft>
-                <a:spcPts val="1000"/>
+                <a:spcPts val="1100"/>
               </a:spcAft>
             </a:pPr>
             <a:r>
               <a:rPr sz="1600" b="1" i="0">
                 <a:solidFill>
-                  <a:srgbClr val="2E3A80"/>
-                </a:solidFill>
-                <a:latin typeface="Montserrat"/>
-              </a:rPr>
-              <a:t>•  </a:t>
+                  <a:srgbClr val="E8801A"/>
+                </a:solidFill>
+                <a:latin typeface="Montserrat"/>
+              </a:rPr>
+              <a:t>▸  </a:t>
             </a:r>
             <a:r>
               <a:rPr sz="1600" b="0" i="0">
@@ -11770,14 +13120,14 @@
                 </a:solidFill>
                 <a:latin typeface="Montserrat"/>
               </a:rPr>
-              <a:t>Resultado positivo en el certificado</a:t>
-            </a:r>
-          </a:p>
-        </p:txBody>
-      </p:sp>
-      <p:sp>
-        <p:nvSpPr>
-          <p:cNvPr id="8" name="imgph" descr="IMGQ:pressure gauge manometer on gas pipe test"/>
+              <a:t>Sin proyecto, no hay dirección</a:t>
+            </a:r>
+          </a:p>
+        </p:txBody>
+      </p:sp>
+      <p:sp>
+        <p:nvSpPr>
+          <p:cNvPr id="9" name="imgph" descr="IMGQ:technical engineer with hard hat on construction site"/>
           <p:cNvSpPr/>
           <p:nvPr/>
         </p:nvSpPr>
@@ -11823,7 +13173,7 @@
       </p:sp>
       <p:sp>
         <p:nvSpPr>
-          <p:cNvPr id="9" name="TextBox 8"/>
+          <p:cNvPr id="10" name="TextBox 9"/>
           <p:cNvSpPr txBox="1"/>
           <p:nvPr/>
         </p:nvSpPr>
@@ -11863,7 +13213,7 @@
                 </a:solidFill>
                 <a:latin typeface="Montserrat"/>
               </a:rPr>
-              <a:t>pressure gauge manometer on gas pipe test</a:t>
+              <a:t>technical engineer with hard hat on construction site</a:t>
             </a:r>
           </a:p>
         </p:txBody>
@@ -11960,7 +13310,7 @@
                 </a:solidFill>
                 <a:latin typeface="Montserrat"/>
               </a:rPr>
-              <a:t>008 / 020</a:t>
+              <a:t>008 / 021</a:t>
             </a:r>
           </a:p>
         </p:txBody>
@@ -12008,7 +13358,7 @@
         <p:spPr>
           <a:xfrm>
             <a:off x="822960" y="457200"/>
-            <a:ext cx="8229600" cy="365760"/>
+            <a:ext cx="10058400" cy="365760"/>
           </a:xfrm>
           <a:prstGeom prst="rect">
             <a:avLst/>
@@ -12022,13 +13372,13 @@
           <a:lstStyle/>
           <a:p>
             <a:r>
-              <a:rPr sz="1200" b="1" i="0">
-                <a:solidFill>
-                  <a:srgbClr val="64748B"/>
-                </a:solidFill>
-                <a:latin typeface="Montserrat"/>
-              </a:rPr>
-              <a:t>APARTADO 3.3 · ACOMETIDA ENTERRADA</a:t>
+              <a:rPr sz="1300" b="1" i="0">
+                <a:solidFill>
+                  <a:srgbClr val="E8801A"/>
+                </a:solidFill>
+                <a:latin typeface="Montserrat"/>
+              </a:rPr>
+              <a:t>APARTADO 3.3 · PRUEBAS DE ENTREGA</a:t>
             </a:r>
           </a:p>
         </p:txBody>
@@ -12056,26 +13406,70 @@
           <a:lstStyle/>
           <a:p>
             <a:r>
-              <a:rPr sz="2700" b="1" i="0">
+              <a:rPr sz="2800" b="1" i="0">
                 <a:solidFill>
                   <a:srgbClr val="1E2761"/>
                 </a:solidFill>
                 <a:latin typeface="Montserrat"/>
               </a:rPr>
-              <a:t>Enterrado: el certificado, antes</a:t>
-            </a:r>
-          </a:p>
-        </p:txBody>
-      </p:sp>
-      <p:sp>
-        <p:nvSpPr>
-          <p:cNvPr id="7" name="TextBox 6"/>
+              <a:t>La prueba estrella: estanquidad</a:t>
+            </a:r>
+          </a:p>
+        </p:txBody>
+      </p:sp>
+      <p:sp>
+        <p:nvSpPr>
+          <p:cNvPr id="7" name="Rounded Rectangle 6"/>
+          <p:cNvSpPr/>
+          <p:nvPr/>
+        </p:nvSpPr>
+        <p:spPr>
+          <a:xfrm>
+            <a:off x="868680" y="1627632"/>
+            <a:ext cx="2011680" cy="73152"/>
+          </a:xfrm>
+          <a:prstGeom prst="roundRect">
+            <a:avLst/>
+          </a:prstGeom>
+          <a:solidFill>
+            <a:srgbClr val="E8801A"/>
+          </a:solidFill>
+          <a:ln>
+            <a:noFill/>
+          </a:ln>
+          <a:effectLst/>
+        </p:spPr>
+        <p:style>
+          <a:lnRef idx="1">
+            <a:schemeClr val="accent1"/>
+          </a:lnRef>
+          <a:fillRef idx="3">
+            <a:schemeClr val="accent1"/>
+          </a:fillRef>
+          <a:effectRef idx="2">
+            <a:schemeClr val="accent1"/>
+          </a:effectRef>
+          <a:fontRef idx="minor">
+            <a:schemeClr val="lt1"/>
+          </a:fontRef>
+        </p:style>
+        <p:txBody>
+          <a:bodyPr rtlCol="0" anchor="ctr"/>
+          <a:lstStyle/>
+          <a:p>
+            <a:pPr algn="ctr"/>
+          </a:p>
+        </p:txBody>
+      </p:sp>
+      <p:sp>
+        <p:nvSpPr>
+          <p:cNvPr id="8" name="TextBox 7"/>
           <p:cNvSpPr txBox="1"/>
           <p:nvPr/>
         </p:nvSpPr>
         <p:spPr>
           <a:xfrm>
-            <a:off x="822960" y="1920240"/>
+            <a:off x="822960" y="1965960"/>
             <a:ext cx="4983480" cy="4206240"/>
           </a:xfrm>
           <a:prstGeom prst="rect">
@@ -12091,17 +13485,17 @@
           <a:p>
             <a:pPr>
               <a:spcAft>
-                <a:spcPts val="1000"/>
+                <a:spcPts val="1100"/>
               </a:spcAft>
             </a:pPr>
             <a:r>
               <a:rPr sz="1600" b="1" i="0">
                 <a:solidFill>
-                  <a:srgbClr val="2E3A80"/>
-                </a:solidFill>
-                <a:latin typeface="Montserrat"/>
-              </a:rPr>
-              <a:t>•  </a:t>
+                  <a:srgbClr val="E8801A"/>
+                </a:solidFill>
+                <a:latin typeface="Montserrat"/>
+              </a:rPr>
+              <a:t>▸  </a:t>
             </a:r>
             <a:r>
               <a:rPr sz="1600" b="0" i="0">
@@ -12110,23 +13504,23 @@
                 </a:solidFill>
                 <a:latin typeface="Montserrat"/>
               </a:rPr>
-              <a:t>Acometida interior enterrada</a:t>
+              <a:t>La hace la empresa instaladora</a:t>
             </a:r>
           </a:p>
           <a:p>
             <a:pPr>
               <a:spcAft>
-                <a:spcPts val="1000"/>
+                <a:spcPts val="1100"/>
               </a:spcAft>
             </a:pPr>
             <a:r>
               <a:rPr sz="1600" b="1" i="0">
                 <a:solidFill>
-                  <a:srgbClr val="2E3A80"/>
-                </a:solidFill>
-                <a:latin typeface="Montserrat"/>
-              </a:rPr>
-              <a:t>•  </a:t>
+                  <a:srgbClr val="E8801A"/>
+                </a:solidFill>
+                <a:latin typeface="Montserrat"/>
+              </a:rPr>
+              <a:t>▸  </a:t>
             </a:r>
             <a:r>
               <a:rPr sz="1600" b="0" i="0">
@@ -12135,23 +13529,23 @@
                 </a:solidFill>
                 <a:latin typeface="Montserrat"/>
               </a:rPr>
-              <a:t>Certificado al distribuidor</a:t>
+              <a:t>UNE 60670-8 (baja) o 60620 (alta)</a:t>
             </a:r>
           </a:p>
           <a:p>
             <a:pPr>
               <a:spcAft>
-                <a:spcPts val="1000"/>
+                <a:spcPts val="1100"/>
               </a:spcAft>
             </a:pPr>
             <a:r>
               <a:rPr sz="1600" b="1" i="0">
                 <a:solidFill>
-                  <a:srgbClr val="2E3A80"/>
-                </a:solidFill>
-                <a:latin typeface="Montserrat"/>
-              </a:rPr>
-              <a:t>•  </a:t>
+                  <a:srgbClr val="E8801A"/>
+                </a:solidFill>
+                <a:latin typeface="Montserrat"/>
+              </a:rPr>
+              <a:t>▸  </a:t>
             </a:r>
             <a:r>
               <a:rPr sz="1600" b="0" i="0">
@@ -12160,14 +13554,14 @@
                 </a:solidFill>
                 <a:latin typeface="Montserrat"/>
               </a:rPr>
-              <a:t>Antes de la puesta en marcha</a:t>
-            </a:r>
-          </a:p>
-        </p:txBody>
-      </p:sp>
-      <p:sp>
-        <p:nvSpPr>
-          <p:cNvPr id="8" name="imgph" descr="IMGQ:buried gas pipe connection underground"/>
+              <a:t>Resultado positivo en el certificado</a:t>
+            </a:r>
+          </a:p>
+        </p:txBody>
+      </p:sp>
+      <p:sp>
+        <p:nvSpPr>
+          <p:cNvPr id="9" name="imgph" descr="IMGQ:pressure gauge manometer on gas pipe test"/>
           <p:cNvSpPr/>
           <p:nvPr/>
         </p:nvSpPr>
@@ -12213,7 +13607,7 @@
       </p:sp>
       <p:sp>
         <p:nvSpPr>
-          <p:cNvPr id="9" name="TextBox 8"/>
+          <p:cNvPr id="10" name="TextBox 9"/>
           <p:cNvSpPr txBox="1"/>
           <p:nvPr/>
         </p:nvSpPr>
@@ -12253,7 +13647,7 @@
                 </a:solidFill>
                 <a:latin typeface="Montserrat"/>
               </a:rPr>
-              <a:t>buried gas pipe connection underground</a:t>
+              <a:t>pressure gauge manometer on gas pipe test</a:t>
             </a:r>
           </a:p>
         </p:txBody>
@@ -12350,7 +13744,7 @@
                 </a:solidFill>
                 <a:latin typeface="Montserrat"/>
               </a:rPr>
-              <a:t>009 / 020</a:t>
+              <a:t>009 / 021</a:t>
             </a:r>
           </a:p>
         </p:txBody>
@@ -12398,7 +13792,7 @@
         <p:spPr>
           <a:xfrm>
             <a:off x="822960" y="457200"/>
-            <a:ext cx="8229600" cy="365760"/>
+            <a:ext cx="10058400" cy="365760"/>
           </a:xfrm>
           <a:prstGeom prst="rect">
             <a:avLst/>
@@ -12412,13 +13806,13 @@
           <a:lstStyle/>
           <a:p>
             <a:r>
-              <a:rPr sz="1200" b="1" i="0">
-                <a:solidFill>
-                  <a:srgbClr val="64748B"/>
-                </a:solidFill>
-                <a:latin typeface="Montserrat"/>
-              </a:rPr>
-              <a:t>APARTADO 3.4 · CERTIFICADOS</a:t>
+              <a:rPr sz="1300" b="1" i="0">
+                <a:solidFill>
+                  <a:srgbClr val="E8801A"/>
+                </a:solidFill>
+                <a:latin typeface="Montserrat"/>
+              </a:rPr>
+              <a:t>APARTADO 3.3 · ACOMETIDA ENTERRADA</a:t>
             </a:r>
           </a:p>
         </p:txBody>
@@ -12446,26 +13840,70 @@
           <a:lstStyle/>
           <a:p>
             <a:r>
-              <a:rPr sz="2700" b="1" i="0">
+              <a:rPr sz="2800" b="1" i="0">
                 <a:solidFill>
                   <a:srgbClr val="1E2761"/>
                 </a:solidFill>
                 <a:latin typeface="Montserrat"/>
               </a:rPr>
-              <a:t>Tres certificados, uno por tramo</a:t>
-            </a:r>
-          </a:p>
-        </p:txBody>
-      </p:sp>
-      <p:sp>
-        <p:nvSpPr>
-          <p:cNvPr id="7" name="TextBox 6"/>
+              <a:t>Enterrado: el certificado, antes</a:t>
+            </a:r>
+          </a:p>
+        </p:txBody>
+      </p:sp>
+      <p:sp>
+        <p:nvSpPr>
+          <p:cNvPr id="7" name="Rounded Rectangle 6"/>
+          <p:cNvSpPr/>
+          <p:nvPr/>
+        </p:nvSpPr>
+        <p:spPr>
+          <a:xfrm>
+            <a:off x="868680" y="1627632"/>
+            <a:ext cx="2011680" cy="73152"/>
+          </a:xfrm>
+          <a:prstGeom prst="roundRect">
+            <a:avLst/>
+          </a:prstGeom>
+          <a:solidFill>
+            <a:srgbClr val="E8801A"/>
+          </a:solidFill>
+          <a:ln>
+            <a:noFill/>
+          </a:ln>
+          <a:effectLst/>
+        </p:spPr>
+        <p:style>
+          <a:lnRef idx="1">
+            <a:schemeClr val="accent1"/>
+          </a:lnRef>
+          <a:fillRef idx="3">
+            <a:schemeClr val="accent1"/>
+          </a:fillRef>
+          <a:effectRef idx="2">
+            <a:schemeClr val="accent1"/>
+          </a:effectRef>
+          <a:fontRef idx="minor">
+            <a:schemeClr val="lt1"/>
+          </a:fontRef>
+        </p:style>
+        <p:txBody>
+          <a:bodyPr rtlCol="0" anchor="ctr"/>
+          <a:lstStyle/>
+          <a:p>
+            <a:pPr algn="ctr"/>
+          </a:p>
+        </p:txBody>
+      </p:sp>
+      <p:sp>
+        <p:nvSpPr>
+          <p:cNvPr id="8" name="TextBox 7"/>
           <p:cNvSpPr txBox="1"/>
           <p:nvPr/>
         </p:nvSpPr>
         <p:spPr>
           <a:xfrm>
-            <a:off x="822960" y="1920240"/>
+            <a:off x="822960" y="1965960"/>
             <a:ext cx="4983480" cy="4206240"/>
           </a:xfrm>
           <a:prstGeom prst="rect">
@@ -12481,17 +13919,17 @@
           <a:p>
             <a:pPr>
               <a:spcAft>
-                <a:spcPts val="1000"/>
+                <a:spcPts val="1100"/>
               </a:spcAft>
             </a:pPr>
             <a:r>
               <a:rPr sz="1600" b="1" i="0">
                 <a:solidFill>
-                  <a:srgbClr val="2E3A80"/>
-                </a:solidFill>
-                <a:latin typeface="Montserrat"/>
-              </a:rPr>
-              <a:t>•  </a:t>
+                  <a:srgbClr val="E8801A"/>
+                </a:solidFill>
+                <a:latin typeface="Montserrat"/>
+              </a:rPr>
+              <a:t>▸  </a:t>
             </a:r>
             <a:r>
               <a:rPr sz="1600" b="0" i="0">
@@ -12500,23 +13938,23 @@
                 </a:solidFill>
                 <a:latin typeface="Montserrat"/>
               </a:rPr>
-              <a:t>IRG-1: acometida interior</a:t>
+              <a:t>Acometida interior enterrada</a:t>
             </a:r>
           </a:p>
           <a:p>
             <a:pPr>
               <a:spcAft>
-                <a:spcPts val="1000"/>
+                <a:spcPts val="1100"/>
               </a:spcAft>
             </a:pPr>
             <a:r>
               <a:rPr sz="1600" b="1" i="0">
                 <a:solidFill>
-                  <a:srgbClr val="2E3A80"/>
-                </a:solidFill>
-                <a:latin typeface="Montserrat"/>
-              </a:rPr>
-              <a:t>•  </a:t>
+                  <a:srgbClr val="E8801A"/>
+                </a:solidFill>
+                <a:latin typeface="Montserrat"/>
+              </a:rPr>
+              <a:t>▸  </a:t>
             </a:r>
             <a:r>
               <a:rPr sz="1600" b="0" i="0">
@@ -12525,23 +13963,23 @@
                 </a:solidFill>
                 <a:latin typeface="Montserrat"/>
               </a:rPr>
-              <a:t>IRG-2: instalación común</a:t>
+              <a:t>Certificado al distribuidor</a:t>
             </a:r>
           </a:p>
           <a:p>
             <a:pPr>
               <a:spcAft>
-                <a:spcPts val="1000"/>
+                <a:spcPts val="1100"/>
               </a:spcAft>
             </a:pPr>
             <a:r>
               <a:rPr sz="1600" b="1" i="0">
                 <a:solidFill>
-                  <a:srgbClr val="2E3A80"/>
-                </a:solidFill>
-                <a:latin typeface="Montserrat"/>
-              </a:rPr>
-              <a:t>•  </a:t>
+                  <a:srgbClr val="E8801A"/>
+                </a:solidFill>
+                <a:latin typeface="Montserrat"/>
+              </a:rPr>
+              <a:t>▸  </a:t>
             </a:r>
             <a:r>
               <a:rPr sz="1600" b="0" i="0">
@@ -12550,39 +13988,14 @@
                 </a:solidFill>
                 <a:latin typeface="Montserrat"/>
               </a:rPr>
-              <a:t>IRG-3: instalación individual</a:t>
-            </a:r>
-          </a:p>
-          <a:p>
-            <a:pPr>
-              <a:spcAft>
-                <a:spcPts val="1000"/>
-              </a:spcAft>
-            </a:pPr>
-            <a:r>
-              <a:rPr sz="1600" b="1" i="0">
-                <a:solidFill>
-                  <a:srgbClr val="2E3A80"/>
-                </a:solidFill>
-                <a:latin typeface="Montserrat"/>
-              </a:rPr>
-              <a:t>•  </a:t>
-            </a:r>
-            <a:r>
-              <a:rPr sz="1600" b="0" i="0">
-                <a:solidFill>
-                  <a:srgbClr val="1B2330"/>
-                </a:solidFill>
-                <a:latin typeface="Montserrat"/>
-              </a:rPr>
-              <a:t>Todos llevan croquis</a:t>
-            </a:r>
-          </a:p>
-        </p:txBody>
-      </p:sp>
-      <p:sp>
-        <p:nvSpPr>
-          <p:cNvPr id="8" name="imgph" descr="IMGQ:installer filling out paper certificate on clipboard"/>
+              <a:t>Antes de la puesta en marcha</a:t>
+            </a:r>
+          </a:p>
+        </p:txBody>
+      </p:sp>
+      <p:sp>
+        <p:nvSpPr>
+          <p:cNvPr id="9" name="imgph" descr="IMGQ:buried gas pipe connection underground"/>
           <p:cNvSpPr/>
           <p:nvPr/>
         </p:nvSpPr>
@@ -12628,7 +14041,7 @@
       </p:sp>
       <p:sp>
         <p:nvSpPr>
-          <p:cNvPr id="9" name="TextBox 8"/>
+          <p:cNvPr id="10" name="TextBox 9"/>
           <p:cNvSpPr txBox="1"/>
           <p:nvPr/>
         </p:nvSpPr>
@@ -12668,7 +14081,7 @@
                 </a:solidFill>
                 <a:latin typeface="Montserrat"/>
               </a:rPr>
-              <a:t>installer filling out paper certificate on clipboard</a:t>
+              <a:t>buried gas pipe connection underground</a:t>
             </a:r>
           </a:p>
         </p:txBody>

--- a/Curso Gas B/04 - ITC-ICG 07 - Instalaciones receptoras de combustibles gaseosos/04 - ITC-ICG 07 - Instalaciones receptoras de combustibles gaseosos - Vídeo 2.pptx
+++ b/Curso Gas B/04 - ITC-ICG 07 - Instalaciones receptoras de combustibles gaseosos/04 - ITC-ICG 07 - Instalaciones receptoras de combustibles gaseosos - Vídeo 2.pptx
@@ -26,6 +26,12 @@
     <p:sldId id="274" r:id="rId26"/>
     <p:sldId id="275" r:id="rId27"/>
     <p:sldId id="276" r:id="rId28"/>
+    <p:sldId id="277" r:id="rId29"/>
+    <p:sldId id="278" r:id="rId30"/>
+    <p:sldId id="279" r:id="rId31"/>
+    <p:sldId id="280" r:id="rId32"/>
+    <p:sldId id="281" r:id="rId33"/>
+    <p:sldId id="282" r:id="rId34"/>
   </p:sldIdLst>
   <p:sldSz cx="12191695" cy="6858000" type="screen4x3"/>
   <p:notesSz cx="6858000" cy="9144000"/>
@@ -597,12 +603,12 @@
           <a:lstStyle/>
           <a:p>
             <a:r>
-              <a:t>N1: ¿Cuántos certificados de instalación hay y en qué se diferencian?</a:t>
-            </a:r>
-          </a:p>
-          <a:p>
-            <a:r>
-              <a:t>N2: Hay tres, uno por cada tramo de la receptora, y no conviene mezclarlos. El uno erre ge guion uno es el de la acometida interior, el tramo de entrada; este es el único que insiste en las pruebas de resistencia mecánica y estanquidad según las normas de acometidas, y el único que menciona la servidumbre de paso. El uno erre ge guion dos es el de la instalación común, el montante compartido del edificio. Y el uno erre ge guion tres es el de la instalación individual, lo de dentro de la vivienda. Los tres llevan croquis: trazado, material, longitudes, diámetros, accesorios y caudales por tramo. Piensa en el croquis como el plano de tu trabajo, para que quien venga detrás entienda por dónde va cada tubo sin abrir la pared.</a:t>
+              <a:t>N1: ¿Qué prueba hay que hacer antes de entregar la instalación?</a:t>
+            </a:r>
+          </a:p>
+          <a:p>
+            <a:r>
+              <a:t>N2: La prueba de estanquidad, que es la más importante. Estanquidad significa que la instalación no tiene fugas, que no se escapa ni una burbuja de gas por ninguna unión. Antes de entregar, tú, la empresa instaladora, tienes que probarlo, siguiendo la UNE sesenta mil seiscientos setenta guion ocho si es baja presión, o la UNE sesenta mil seiscientos veinte si es alta. Y el resultado positivo se hace constar en el certificado de instalación, o sea, queda por escrito y firmado. Recuerda un matiz del tema del reglamento: la prueba la hace quien monta; no la confundas con la inspección, que la hace un tercero distinto. Una estanquidad mal hecha acaba en olor a gas y, en lo grave, en una deflagración.</a:t>
             </a:r>
           </a:p>
         </p:txBody>
@@ -672,12 +678,12 @@
           <a:lstStyle/>
           <a:p>
             <a:r>
-              <a:t>N1: ¿Por qué dices que solo uno de ellos habla de aparatos?</a:t>
-            </a:r>
-          </a:p>
-          <a:p>
-            <a:r>
-              <a:t>N2: Porque de los tres certificados, solo el individual, el uno erre ge guion tres, tiene que listar los aparatos de consumo conectados o previstos, indicando su consumo calorífico nominal, es decir, cuántos kilovatios consume cada uno. Y tiene toda la lógica: es el único tramo que llega de verdad hasta los aparatos, dentro de la vivienda. El de la acometida y el de la común se quedan por el camino, en la entrada y en el montante, así que no tienen aparatos que listar. Truco para el examen: si una pregunta habla de listar aparatos y su potencia, piensa siempre en el individual.</a:t>
+              <a:t>N1: Antes de entregar la instalación hay que probar que no tiene fugas. ¿Quién hace esa prueba de estanquidad?</a:t>
+            </a:r>
+          </a:p>
+          <a:p>
+            <a:r>
+              <a:t>N2: Piensa en el matiz del reglamento entre probar e inspeccionar. La prueba de entrega la hace quien ha montado; la inspección, en cambio, la hace un tercero. No mezcles los dos papeles.</a:t>
             </a:r>
           </a:p>
         </p:txBody>
@@ -747,12 +753,12 @@
           <a:lstStyle/>
           <a:p>
             <a:r>
-              <a:t>N1: ¿Y las chimeneas de un edificio nuevo hay que certificarlas aparte?</a:t>
-            </a:r>
-          </a:p>
-          <a:p>
-            <a:r>
-              <a:t>N2: Sí. Si la instalación alimenta a un edificio de nueva planta y ese edificio tiene chimeneas para evacuar los humos, antes de la puesta en servicio hace falta una certificación que acredite que esas chimeneas cumplen las normas de diseño y cálculo y las de materiales que ya vimos en el primer vídeo. Ahora, si el certificado de dirección de obra ya incluye esa acreditación, no hace falta nada más. Pero si no la incluye, tiene que extenderla el técnico facultativo competente responsable de la construcción o un organismo de control. En resumen: alguien con autoridad técnica firma que las chimeneas están bien calculadas y son del material correcto, antes de dar gas.</a:t>
+              <a:t>N1: ¿Por qué la instaladora?</a:t>
+            </a:r>
+          </a:p>
+          <a:p>
+            <a:r>
+              <a:t>N2: Porque la prueba de estanquidad de entrega la realiza la propia empresa instaladora, la que ha montado, siguiendo la UNE sesenta mil seiscientos setenta guion ocho en baja o la seiscientos veinte en alta, y el resultado favorable se hace constar en el certificado de instalación. El distribuidor aparece después, en la puesta en servicio; no lo confundas con la prueba de entrega. Truco: quien monta, prueba.</a:t>
             </a:r>
           </a:p>
         </p:txBody>
@@ -822,12 +828,12 @@
           <a:lstStyle/>
           <a:p>
             <a:r>
-              <a:t>N1: Cuando doy gas al edificio pero hay viviendas sin contrato, ¿qué hago con esas llaves?</a:t>
-            </a:r>
-          </a:p>
-          <a:p>
-            <a:r>
-              <a:t>N2: Muy buena, porque es lo habitual: das gas al montante, pero muchas viviendas todavía no tienen contrato. Esas llaves de inicio hay que dejarlas cerradas, bloqueadas y precintadas, para que nadie las abra por su cuenta; el precinto es como el sello que salta si alguien lo toca. Y si además la instalación individual o el aparato ni siquiera están montados, se taponan, que es poner un tapón físico en la boca de la llave. Es seguridad pura: puede haber gas en el montante, pero tiene que ser imposible que salga por una salida sin terminar. Lo mismo con las llaves de conexión de los aparatos que están pendientes de instalar o de arrancar.</a:t>
+              <a:t>N1: ¿Y con la parte enterrada hay algo especial?</a:t>
+            </a:r>
+          </a:p>
+          <a:p>
+            <a:r>
+              <a:t>N2: Sí, un detalle de orden que conviene tener claro. Si la instalación tiene acometida interior enterrada, la empresa instaladora tiene que entregar al distribuidor el certificado de esa acometida antes de la puesta en marcha, es decir, antes de dar gas. La lógica es de puro sentido común: lo que va enterrado, una vez tapado, ya no se puede revisar a simple vista. Así que el distribuidor quiere en la mano el papel que garantiza que se probó y que quedó bien, antes de permitir que circule el gas. Primero el certificado sobre la mesa; después, el gas. Nunca al revés.</a:t>
             </a:r>
           </a:p>
         </p:txBody>
@@ -897,12 +903,12 @@
           <a:lstStyle/>
           <a:p>
             <a:r>
-              <a:t>N1: ¿Qué es eso de purgar la instalación?</a:t>
-            </a:r>
-          </a:p>
-          <a:p>
-            <a:r>
-              <a:t>N2: Purgar es sacar el aire que hay dentro de la tubería antes de dejarla llena de gas. Piénsalo así: la tubería recién montada está llena de aire; si metes gas de golpe, durante un rato dentro se forma una mezcla de aire y gas, y esa mezcla, en cierta proporción, es explosiva; puede arder con una simple chispa. A esa proporción peligrosa se le llama estar dentro de los límites de inflamabilidad. Purgar bien es barrer ese aire, normalmente empujándolo con el propio gas o con un gas inerte, hasta que dentro solo quede gas, ya fuera del rango explosivo. Es una de las operaciones más delicadas del arranque: purgar mal es arriesgar una deflagración al primer chispazo.</a:t>
+              <a:t>N1: ¿Cuántos certificados de instalación hay y en qué se diferencian?</a:t>
+            </a:r>
+          </a:p>
+          <a:p>
+            <a:r>
+              <a:t>N2: Hay tres, uno por cada tramo de la receptora, y no conviene mezclarlos. El uno erre ge guion uno es el de la acometida interior, el tramo de entrada; este es el único que insiste en las pruebas de resistencia mecánica y estanquidad según las normas de acometidas, y el único que menciona la servidumbre de paso. El uno erre ge guion dos es el de la instalación común, el montante compartido del edificio. Y el uno erre ge guion tres es el de la instalación individual, lo de dentro de la vivienda. Los tres llevan croquis: trazado, material, longitudes, diámetros, accesorios y caudales por tramo. Piensa en el croquis como el plano de tu trabajo, para que quien venga detrás entienda por dónde va cada tubo sin abrir la pared.</a:t>
             </a:r>
           </a:p>
         </p:txBody>
@@ -972,12 +978,12 @@
           <a:lstStyle/>
           <a:p>
             <a:r>
-              <a:t>N1: Si la vivienda va a tener contrato normal, ¿por dónde se empieza?</a:t>
-            </a:r>
-          </a:p>
-          <a:p>
-            <a:r>
-              <a:t>N2: Primero, antes de nada, el futuro usuario tiene que formalizar la póliza de abono o el contrato de suministro con el suministrador, aportando su documentación. Sin contrato no hay puesta en servicio. Una vez firmado, en las instalaciones alimentadas desde una red de distribución, el usuario, o el suministrador en su nombre, solicita al distribuidor la puesta en servicio. Y es el distribuidor, con personal propio o autorizado, quien viene a hacer las pruebas y a dar el gas. Esta misma solicitud vale también cuando se modifica una instalación. Fíjate en el orden: contrato primero, solicitud después, y el distribuidor ejecuta.</a:t>
+              <a:t>N1: ¿Por qué dices que solo uno de ellos habla de aparatos?</a:t>
+            </a:r>
+          </a:p>
+          <a:p>
+            <a:r>
+              <a:t>N2: Porque de los tres certificados, solo el individual, el uno erre ge guion tres, tiene que listar los aparatos de consumo conectados o previstos, indicando su consumo calorífico nominal, es decir, cuántos kilovatios consume cada uno. Y tiene toda la lógica: es el único tramo que llega de verdad hasta los aparatos, dentro de la vivienda. El de la acometida y el de la común se quedan por el camino, en la entrada y en el montante, así que no tienen aparatos que listar. Truco para el examen: si una pregunta habla de listar aparatos y su potencia, piensa siempre en el individual.</a:t>
             </a:r>
           </a:p>
         </p:txBody>
@@ -1047,12 +1053,12 @@
           <a:lstStyle/>
           <a:p>
             <a:r>
-              <a:t>N1: ¿Y qué hace exactamente el distribuidor, paso a paso?</a:t>
-            </a:r>
-          </a:p>
-          <a:p>
-            <a:r>
-              <a:t>N2: Son nueve pasos que se parten en dos bloques muy fáciles de recordar. Del uno al cinco, comprobar: que la documentación esté completa, que las partes visibles y accesibles cumplan la normativa, que los locales donde van los aparatos y sus conductos de humos estén bien, que las válvulas se maniobren, y, si hay una estación de regulación, que funcionen sus sistemas de regulación y de seguridad. Del seis al nueve, rematar: precintar el equipo de medida, o sea el contador, verificar la estanquidad, dejar la instalación en servicio si todo va favorable, y extender un certificado de pruebas previas y puesta en servicio, con copia para el titular. La regla mental: primero compruebo, y solo si va bien, doy gas y firmo. El paso seis, precintar el contador, es el que lo deja oficial.</a:t>
+              <a:t>N1: Tres certificados, uno por tramo. ¿Cuál es el que tiene que listar los aparatos de consumo con sus kilovatios?</a:t>
+            </a:r>
+          </a:p>
+          <a:p>
+            <a:r>
+              <a:t>N2: Piensa en cuál de los tres tramos llega de verdad hasta los aparatos dentro de la casa. Los otros dos se quedan por el camino, en la entrada y en el montante.</a:t>
             </a:r>
           </a:p>
         </p:txBody>
@@ -1122,12 +1128,12 @@
           <a:lstStyle/>
           <a:p>
             <a:r>
-              <a:t>N1: ¿Siempre da el gas el distribuidor?</a:t>
-            </a:r>
-          </a:p>
-          <a:p>
-            <a:r>
-              <a:t>N2: No, depende de si hay red por detrás. Si la instalación se alimenta desde una red de distribución, gas natural o gases del petróleo de red, la puesta en servicio la hace el distribuidor, con personal propio o autorizado, a petición del usuario o del suministrador. Pero si la instalación no se alimenta desde red, por ejemplo con un depósito propio, entonces esas mismas pruebas previas y ese mismo certificado los hace el suministrador. Fíjate: el procedimiento es idéntico, lo único que cambia es quién lo ejecuta. En el examen les gusta jugar justo con este cambio de agente, así que quédate con la pregunta clave: ¿hay red o no?</a:t>
+              <a:t>N1: ¿Por qué el individual?</a:t>
+            </a:r>
+          </a:p>
+          <a:p>
+            <a:r>
+              <a:t>N2: Porque el uno erre ge guion tres, el de la instalación individual, es el único tramo que llega hasta los aparatos dentro de la vivienda; por eso es el único que los lista con su consumo calorífico nominal. El de la acometida y el de la común se quedan en la entrada y en el montante, sin aparatos que anotar. Truco: si la pregunta habla de listar aparatos y potencias, piensa siempre en el individual.</a:t>
             </a:r>
           </a:p>
         </p:txBody>
@@ -1197,12 +1203,12 @@
           <a:lstStyle/>
           <a:p>
             <a:r>
-              <a:t>N1: ¿Y si la instalación se deja acabada pero sin dar de alta el suministro?</a:t>
-            </a:r>
-          </a:p>
-          <a:p>
-            <a:r>
-              <a:t>N2: Ese es el caso sin contrato de suministro domiciliario: la instalación se termina, pero todavía no se contrata el gas. Aquí no interviene el distribuidor para ninguna puesta en servicio. Es la empresa instaladora, la que ha hecho el montaje, quien realiza las pruebas y verificaciones de entrega, básicamente la estanquidad, y emite, en todos los casos, el certificado de instalación, del que entrega copia al titular. Fíjate en la expresión en todos los casos: ese certificado no es opcional, siempre se entrega. Es la garantía en papel de que lo que se ha montado está probado y en condiciones, aunque todavía no tenga gas.</a:t>
+              <a:t>N1: ¿Y las chimeneas de un edificio nuevo hay que certificarlas aparte?</a:t>
+            </a:r>
+          </a:p>
+          <a:p>
+            <a:r>
+              <a:t>N2: Sí. Si la instalación alimenta a un edificio de nueva planta y ese edificio tiene chimeneas para evacuar los humos, antes de la puesta en servicio hace falta una certificación que acredite que esas chimeneas cumplen las normas de diseño y cálculo y las de materiales que ya vimos en el primer vídeo. Ahora, si el certificado de dirección de obra ya incluye esa acreditación, no hace falta nada más. Pero si no la incluye, tiene que extenderla el técnico facultativo competente responsable de la construcción o un organismo de control. En resumen: alguien con autoridad técnica firma que las chimeneas están bien calculadas y son del material correcto, antes de dar gas.</a:t>
             </a:r>
           </a:p>
         </p:txBody>
@@ -1272,12 +1278,12 @@
           <a:lstStyle/>
           <a:p>
             <a:r>
-              <a:t>N1: Si una casa lleva mucho tiempo sin gas, ¿se reengancha sin más?</a:t>
-            </a:r>
-          </a:p>
-          <a:p>
-            <a:r>
-              <a:t>N2: No, y aquí vuelve una regla que ya salió en el articulado del reglamento: la regla del año. Si una instalación estuvo más de un año sin suministro después de haberse resuelto el contrato, al volver a darle gas se trata como si fuera una instalación nueva. No se reengancha y ya está. La distribuidora comprueba que existe el certificado de la instalación individual archivado y, a continuación, rehace el certificado de pruebas previas y puesta en servicio, con todas sus comprobaciones. La idea, fácil de retener: más de un año parada, borrón y cuenta nueva. Es lógico, porque en un año una instalación abandonada puede haberse degradado sin que nadie la mire.</a:t>
+              <a:t>N1: Cuando doy gas al edificio pero hay viviendas sin contrato, ¿qué hago con esas llaves?</a:t>
+            </a:r>
+          </a:p>
+          <a:p>
+            <a:r>
+              <a:t>N2: Muy buena, porque es lo habitual: das gas al montante, pero muchas viviendas todavía no tienen contrato. Esas llaves de inicio hay que dejarlas cerradas, bloqueadas y precintadas, para que nadie las abra por su cuenta; el precinto es como el sello que salta si alguien lo toca. Y si además la instalación individual o el aparato ni siquiera están montados, se taponan, que es poner un tapón físico en la boca de la llave. Es seguridad pura: puede haber gas en el montante, pero tiene que ser imposible que salga por una salida sin terminar. Lo mismo con las llaves de conexión de los aparatos que están pendientes de instalar o de arrancar.</a:t>
             </a:r>
           </a:p>
         </p:txBody>
@@ -1422,12 +1428,12 @@
           <a:lstStyle/>
           <a:p>
             <a:r>
-              <a:t>N1: ¿Tengo que avisar a la Administración cuando acabo?</a:t>
-            </a:r>
-          </a:p>
-          <a:p>
-            <a:r>
-              <a:t>N2: Solo en un caso, y es fácil de recordar: si la instalación necesitaba proyecto, por las potencias o la presión que vimos, entonces se comunica a la Administración. Si no necesitaba proyecto, que es lo normal en lo doméstico, no hace falta comunicar nada. Pero ojo con una trampa: aunque no comuniques, el suministrador tiene que guardar la documentación de la instalación y tenerla lista por si la Administración la pide. O sea, no comunicar no es lo mismo que no documentar. El papel siempre existe y siempre está disponible; lo que cambia es si además hay que enviar el aviso o no.</a:t>
+              <a:t>N1: ¿Qué es eso de purgar la instalación?</a:t>
+            </a:r>
+          </a:p>
+          <a:p>
+            <a:r>
+              <a:t>N2: Purgar es sacar el aire que hay dentro de la tubería antes de dejarla llena de gas. Piénsalo así: la tubería recién montada está llena de aire; si metes gas de golpe, durante un rato dentro se forma una mezcla de aire y gas, y esa mezcla, en cierta proporción, es explosiva; puede arder con una simple chispa. A esa proporción peligrosa se le llama estar dentro de los límites de inflamabilidad. Purgar bien es barrer ese aire, normalmente empujándolo con el propio gas o con un gas inerte, hasta que dentro solo quede gas, ya fuera del rango explosivo. Es una de las operaciones más delicadas del arranque: purgar mal es arriesgar una deflagración al primer chispazo.</a:t>
             </a:r>
           </a:p>
         </p:txBody>
@@ -1497,6 +1503,456 @@
           <a:lstStyle/>
           <a:p>
             <a:r>
+              <a:t>N1: Si la vivienda va a tener contrato normal, ¿por dónde se empieza?</a:t>
+            </a:r>
+          </a:p>
+          <a:p>
+            <a:r>
+              <a:t>N2: Primero, antes de nada, el futuro usuario tiene que formalizar la póliza de abono o el contrato de suministro con el suministrador, aportando su documentación. Sin contrato no hay puesta en servicio. Una vez firmado, en las instalaciones alimentadas desde una red de distribución, el usuario, o el suministrador en su nombre, solicita al distribuidor la puesta en servicio. Y es el distribuidor, con personal propio o autorizado, quien viene a hacer las pruebas y a dar el gas. Esta misma solicitud vale también cuando se modifica una instalación. Fíjate en el orden: contrato primero, solicitud después, y el distribuidor ejecuta.</a:t>
+            </a:r>
+          </a:p>
+        </p:txBody>
+      </p:sp>
+      <p:sp>
+        <p:nvSpPr>
+          <p:cNvPr id="4" name="Slide Number Placeholder 3"/>
+          <p:cNvSpPr>
+            <a:spLocks noGrp="1"/>
+          </p:cNvSpPr>
+          <p:nvPr>
+            <p:ph type="sldNum" idx="5" sz="quarter"/>
+          </p:nvPr>
+        </p:nvSpPr>
+        <p:spPr/>
+      </p:sp>
+    </p:spTree>
+  </p:cSld>
+  <p:clrMapOvr>
+    <a:masterClrMapping/>
+  </p:clrMapOvr>
+</p:notes>
+</file>
+
+<file path=ppt/notesSlides/notesSlide22.xml><?xml version="1.0" encoding="utf-8"?>
+<p:notes xmlns:a="http://schemas.openxmlformats.org/drawingml/2006/main" xmlns:p="http://schemas.openxmlformats.org/presentationml/2006/main" xmlns:r="http://schemas.openxmlformats.org/officeDocument/2006/relationships">
+  <p:cSld>
+    <p:spTree>
+      <p:nvGrpSpPr>
+        <p:cNvPr id="1" name=""/>
+        <p:cNvGrpSpPr/>
+        <p:nvPr/>
+      </p:nvGrpSpPr>
+      <p:grpSpPr>
+        <a:xfrm>
+          <a:off x="0" y="0"/>
+          <a:ext cx="0" cy="0"/>
+          <a:chOff x="0" y="0"/>
+          <a:chExt cx="0" cy="0"/>
+        </a:xfrm>
+      </p:grpSpPr>
+      <p:sp>
+        <p:nvSpPr>
+          <p:cNvPr id="2" name="Slide Image Placeholder 1"/>
+          <p:cNvSpPr>
+            <a:spLocks noGrp="1"/>
+          </p:cNvSpPr>
+          <p:nvPr>
+            <p:ph type="sldImg" idx="2"/>
+          </p:nvPr>
+        </p:nvSpPr>
+        <p:spPr/>
+      </p:sp>
+      <p:sp>
+        <p:nvSpPr>
+          <p:cNvPr id="3" name="Notes Placeholder 2"/>
+          <p:cNvSpPr>
+            <a:spLocks noGrp="1"/>
+          </p:cNvSpPr>
+          <p:nvPr>
+            <p:ph type="body" idx="3" sz="quarter"/>
+          </p:nvPr>
+        </p:nvSpPr>
+        <p:spPr/>
+        <p:txBody>
+          <a:bodyPr/>
+          <a:lstStyle/>
+          <a:p>
+            <a:r>
+              <a:t>N1: ¿Y qué hace exactamente el distribuidor, paso a paso?</a:t>
+            </a:r>
+          </a:p>
+          <a:p>
+            <a:r>
+              <a:t>N2: Son nueve pasos que se parten en dos bloques muy fáciles de recordar. Del uno al cinco, comprobar: que la documentación esté completa, que las partes visibles y accesibles cumplan la normativa, que los locales donde van los aparatos y sus conductos de humos estén bien, que las válvulas se maniobren, y, si hay una estación de regulación, que funcionen sus sistemas de regulación y de seguridad. Del seis al nueve, rematar: precintar el equipo de medida, o sea el contador, verificar la estanquidad, dejar la instalación en servicio si todo va favorable, y extender un certificado de pruebas previas y puesta en servicio, con copia para el titular. La regla mental: primero compruebo, y solo si va bien, doy gas y firmo. El paso seis, precintar el contador, es el que lo deja oficial.</a:t>
+            </a:r>
+          </a:p>
+        </p:txBody>
+      </p:sp>
+      <p:sp>
+        <p:nvSpPr>
+          <p:cNvPr id="4" name="Slide Number Placeholder 3"/>
+          <p:cNvSpPr>
+            <a:spLocks noGrp="1"/>
+          </p:cNvSpPr>
+          <p:nvPr>
+            <p:ph type="sldNum" idx="5" sz="quarter"/>
+          </p:nvPr>
+        </p:nvSpPr>
+        <p:spPr/>
+      </p:sp>
+    </p:spTree>
+  </p:cSld>
+  <p:clrMapOvr>
+    <a:masterClrMapping/>
+  </p:clrMapOvr>
+</p:notes>
+</file>
+
+<file path=ppt/notesSlides/notesSlide23.xml><?xml version="1.0" encoding="utf-8"?>
+<p:notes xmlns:a="http://schemas.openxmlformats.org/drawingml/2006/main" xmlns:p="http://schemas.openxmlformats.org/presentationml/2006/main" xmlns:r="http://schemas.openxmlformats.org/officeDocument/2006/relationships">
+  <p:cSld>
+    <p:spTree>
+      <p:nvGrpSpPr>
+        <p:cNvPr id="1" name=""/>
+        <p:cNvGrpSpPr/>
+        <p:nvPr/>
+      </p:nvGrpSpPr>
+      <p:grpSpPr>
+        <a:xfrm>
+          <a:off x="0" y="0"/>
+          <a:ext cx="0" cy="0"/>
+          <a:chOff x="0" y="0"/>
+          <a:chExt cx="0" cy="0"/>
+        </a:xfrm>
+      </p:grpSpPr>
+      <p:sp>
+        <p:nvSpPr>
+          <p:cNvPr id="2" name="Slide Image Placeholder 1"/>
+          <p:cNvSpPr>
+            <a:spLocks noGrp="1"/>
+          </p:cNvSpPr>
+          <p:nvPr>
+            <p:ph type="sldImg" idx="2"/>
+          </p:nvPr>
+        </p:nvSpPr>
+        <p:spPr/>
+      </p:sp>
+      <p:sp>
+        <p:nvSpPr>
+          <p:cNvPr id="3" name="Notes Placeholder 2"/>
+          <p:cNvSpPr>
+            <a:spLocks noGrp="1"/>
+          </p:cNvSpPr>
+          <p:nvPr>
+            <p:ph type="body" idx="3" sz="quarter"/>
+          </p:nvPr>
+        </p:nvSpPr>
+        <p:spPr/>
+        <p:txBody>
+          <a:bodyPr/>
+          <a:lstStyle/>
+          <a:p>
+            <a:r>
+              <a:t>N1: ¿Siempre da el gas el distribuidor?</a:t>
+            </a:r>
+          </a:p>
+          <a:p>
+            <a:r>
+              <a:t>N2: No, depende de si hay red por detrás. Si la instalación se alimenta desde una red de distribución, gas natural o gases del petróleo de red, la puesta en servicio la hace el distribuidor, con personal propio o autorizado, a petición del usuario o del suministrador. Pero si la instalación no se alimenta desde red, por ejemplo con un depósito propio, entonces esas mismas pruebas previas y ese mismo certificado los hace el suministrador. Fíjate: el procedimiento es idéntico, lo único que cambia es quién lo ejecuta. En el examen les gusta jugar justo con este cambio de agente, así que quédate con la pregunta clave: ¿hay red o no?</a:t>
+            </a:r>
+          </a:p>
+        </p:txBody>
+      </p:sp>
+      <p:sp>
+        <p:nvSpPr>
+          <p:cNvPr id="4" name="Slide Number Placeholder 3"/>
+          <p:cNvSpPr>
+            <a:spLocks noGrp="1"/>
+          </p:cNvSpPr>
+          <p:nvPr>
+            <p:ph type="sldNum" idx="5" sz="quarter"/>
+          </p:nvPr>
+        </p:nvSpPr>
+        <p:spPr/>
+      </p:sp>
+    </p:spTree>
+  </p:cSld>
+  <p:clrMapOvr>
+    <a:masterClrMapping/>
+  </p:clrMapOvr>
+</p:notes>
+</file>
+
+<file path=ppt/notesSlides/notesSlide24.xml><?xml version="1.0" encoding="utf-8"?>
+<p:notes xmlns:a="http://schemas.openxmlformats.org/drawingml/2006/main" xmlns:p="http://schemas.openxmlformats.org/presentationml/2006/main" xmlns:r="http://schemas.openxmlformats.org/officeDocument/2006/relationships">
+  <p:cSld>
+    <p:spTree>
+      <p:nvGrpSpPr>
+        <p:cNvPr id="1" name=""/>
+        <p:cNvGrpSpPr/>
+        <p:nvPr/>
+      </p:nvGrpSpPr>
+      <p:grpSpPr>
+        <a:xfrm>
+          <a:off x="0" y="0"/>
+          <a:ext cx="0" cy="0"/>
+          <a:chOff x="0" y="0"/>
+          <a:chExt cx="0" cy="0"/>
+        </a:xfrm>
+      </p:grpSpPr>
+      <p:sp>
+        <p:nvSpPr>
+          <p:cNvPr id="2" name="Slide Image Placeholder 1"/>
+          <p:cNvSpPr>
+            <a:spLocks noGrp="1"/>
+          </p:cNvSpPr>
+          <p:nvPr>
+            <p:ph type="sldImg" idx="2"/>
+          </p:nvPr>
+        </p:nvSpPr>
+        <p:spPr/>
+      </p:sp>
+      <p:sp>
+        <p:nvSpPr>
+          <p:cNvPr id="3" name="Notes Placeholder 2"/>
+          <p:cNvSpPr>
+            <a:spLocks noGrp="1"/>
+          </p:cNvSpPr>
+          <p:nvPr>
+            <p:ph type="body" idx="3" sz="quarter"/>
+          </p:nvPr>
+        </p:nvSpPr>
+        <p:spPr/>
+        <p:txBody>
+          <a:bodyPr/>
+          <a:lstStyle/>
+          <a:p>
+            <a:r>
+              <a:t>N1: ¿Y si la instalación se deja acabada pero sin dar de alta el suministro?</a:t>
+            </a:r>
+          </a:p>
+          <a:p>
+            <a:r>
+              <a:t>N2: Ese es el caso sin contrato de suministro domiciliario: la instalación se termina, pero todavía no se contrata el gas. Aquí no interviene el distribuidor para ninguna puesta en servicio. Es la empresa instaladora, la que ha hecho el montaje, quien realiza las pruebas y verificaciones de entrega, básicamente la estanquidad, y emite, en todos los casos, el certificado de instalación, del que entrega copia al titular. Fíjate en la expresión en todos los casos: ese certificado no es opcional, siempre se entrega. Es la garantía en papel de que lo que se ha montado está probado y en condiciones, aunque todavía no tenga gas.</a:t>
+            </a:r>
+          </a:p>
+        </p:txBody>
+      </p:sp>
+      <p:sp>
+        <p:nvSpPr>
+          <p:cNvPr id="4" name="Slide Number Placeholder 3"/>
+          <p:cNvSpPr>
+            <a:spLocks noGrp="1"/>
+          </p:cNvSpPr>
+          <p:nvPr>
+            <p:ph type="sldNum" idx="5" sz="quarter"/>
+          </p:nvPr>
+        </p:nvSpPr>
+        <p:spPr/>
+      </p:sp>
+    </p:spTree>
+  </p:cSld>
+  <p:clrMapOvr>
+    <a:masterClrMapping/>
+  </p:clrMapOvr>
+</p:notes>
+</file>
+
+<file path=ppt/notesSlides/notesSlide25.xml><?xml version="1.0" encoding="utf-8"?>
+<p:notes xmlns:a="http://schemas.openxmlformats.org/drawingml/2006/main" xmlns:p="http://schemas.openxmlformats.org/presentationml/2006/main" xmlns:r="http://schemas.openxmlformats.org/officeDocument/2006/relationships">
+  <p:cSld>
+    <p:spTree>
+      <p:nvGrpSpPr>
+        <p:cNvPr id="1" name=""/>
+        <p:cNvGrpSpPr/>
+        <p:nvPr/>
+      </p:nvGrpSpPr>
+      <p:grpSpPr>
+        <a:xfrm>
+          <a:off x="0" y="0"/>
+          <a:ext cx="0" cy="0"/>
+          <a:chOff x="0" y="0"/>
+          <a:chExt cx="0" cy="0"/>
+        </a:xfrm>
+      </p:grpSpPr>
+      <p:sp>
+        <p:nvSpPr>
+          <p:cNvPr id="2" name="Slide Image Placeholder 1"/>
+          <p:cNvSpPr>
+            <a:spLocks noGrp="1"/>
+          </p:cNvSpPr>
+          <p:nvPr>
+            <p:ph type="sldImg" idx="2"/>
+          </p:nvPr>
+        </p:nvSpPr>
+        <p:spPr/>
+      </p:sp>
+      <p:sp>
+        <p:nvSpPr>
+          <p:cNvPr id="3" name="Notes Placeholder 2"/>
+          <p:cNvSpPr>
+            <a:spLocks noGrp="1"/>
+          </p:cNvSpPr>
+          <p:nvPr>
+            <p:ph type="body" idx="3" sz="quarter"/>
+          </p:nvPr>
+        </p:nvSpPr>
+        <p:spPr/>
+        <p:txBody>
+          <a:bodyPr/>
+          <a:lstStyle/>
+          <a:p>
+            <a:r>
+              <a:t>N1: Si una casa lleva mucho tiempo sin gas, ¿se reengancha sin más?</a:t>
+            </a:r>
+          </a:p>
+          <a:p>
+            <a:r>
+              <a:t>N2: No, y aquí vuelve una regla que ya salió en el articulado del reglamento: la regla del año. Si una instalación estuvo más de un año sin suministro después de haberse resuelto el contrato, al volver a darle gas se trata como si fuera una instalación nueva. No se reengancha y ya está. La distribuidora comprueba que existe el certificado de la instalación individual archivado y, a continuación, rehace el certificado de pruebas previas y puesta en servicio, con todas sus comprobaciones. La idea, fácil de retener: más de un año parada, borrón y cuenta nueva. Es lógico, porque en un año una instalación abandonada puede haberse degradado sin que nadie la mire.</a:t>
+            </a:r>
+          </a:p>
+        </p:txBody>
+      </p:sp>
+      <p:sp>
+        <p:nvSpPr>
+          <p:cNvPr id="4" name="Slide Number Placeholder 3"/>
+          <p:cNvSpPr>
+            <a:spLocks noGrp="1"/>
+          </p:cNvSpPr>
+          <p:nvPr>
+            <p:ph type="sldNum" idx="5" sz="quarter"/>
+          </p:nvPr>
+        </p:nvSpPr>
+        <p:spPr/>
+      </p:sp>
+    </p:spTree>
+  </p:cSld>
+  <p:clrMapOvr>
+    <a:masterClrMapping/>
+  </p:clrMapOvr>
+</p:notes>
+</file>
+
+<file path=ppt/notesSlides/notesSlide26.xml><?xml version="1.0" encoding="utf-8"?>
+<p:notes xmlns:a="http://schemas.openxmlformats.org/drawingml/2006/main" xmlns:p="http://schemas.openxmlformats.org/presentationml/2006/main" xmlns:r="http://schemas.openxmlformats.org/officeDocument/2006/relationships">
+  <p:cSld>
+    <p:spTree>
+      <p:nvGrpSpPr>
+        <p:cNvPr id="1" name=""/>
+        <p:cNvGrpSpPr/>
+        <p:nvPr/>
+      </p:nvGrpSpPr>
+      <p:grpSpPr>
+        <a:xfrm>
+          <a:off x="0" y="0"/>
+          <a:ext cx="0" cy="0"/>
+          <a:chOff x="0" y="0"/>
+          <a:chExt cx="0" cy="0"/>
+        </a:xfrm>
+      </p:grpSpPr>
+      <p:sp>
+        <p:nvSpPr>
+          <p:cNvPr id="2" name="Slide Image Placeholder 1"/>
+          <p:cNvSpPr>
+            <a:spLocks noGrp="1"/>
+          </p:cNvSpPr>
+          <p:nvPr>
+            <p:ph type="sldImg" idx="2"/>
+          </p:nvPr>
+        </p:nvSpPr>
+        <p:spPr/>
+      </p:sp>
+      <p:sp>
+        <p:nvSpPr>
+          <p:cNvPr id="3" name="Notes Placeholder 2"/>
+          <p:cNvSpPr>
+            <a:spLocks noGrp="1"/>
+          </p:cNvSpPr>
+          <p:nvPr>
+            <p:ph type="body" idx="3" sz="quarter"/>
+          </p:nvPr>
+        </p:nvSpPr>
+        <p:spPr/>
+        <p:txBody>
+          <a:bodyPr/>
+          <a:lstStyle/>
+          <a:p>
+            <a:r>
+              <a:t>N1: ¿Tengo que avisar a la Administración cuando acabo?</a:t>
+            </a:r>
+          </a:p>
+          <a:p>
+            <a:r>
+              <a:t>N2: Solo en un caso, y es fácil de recordar: si la instalación necesitaba proyecto, por las potencias o la presión que vimos, entonces se comunica a la Administración. Si no necesitaba proyecto, que es lo normal en lo doméstico, no hace falta comunicar nada. Pero ojo con una trampa: aunque no comuniques, el suministrador tiene que guardar la documentación de la instalación y tenerla lista por si la Administración la pide. O sea, no comunicar no es lo mismo que no documentar. El papel siempre existe y siempre está disponible; lo que cambia es si además hay que enviar el aviso o no.</a:t>
+            </a:r>
+          </a:p>
+        </p:txBody>
+      </p:sp>
+      <p:sp>
+        <p:nvSpPr>
+          <p:cNvPr id="4" name="Slide Number Placeholder 3"/>
+          <p:cNvSpPr>
+            <a:spLocks noGrp="1"/>
+          </p:cNvSpPr>
+          <p:nvPr>
+            <p:ph type="sldNum" idx="5" sz="quarter"/>
+          </p:nvPr>
+        </p:nvSpPr>
+        <p:spPr/>
+      </p:sp>
+    </p:spTree>
+  </p:cSld>
+  <p:clrMapOvr>
+    <a:masterClrMapping/>
+  </p:clrMapOvr>
+</p:notes>
+</file>
+
+<file path=ppt/notesSlides/notesSlide27.xml><?xml version="1.0" encoding="utf-8"?>
+<p:notes xmlns:a="http://schemas.openxmlformats.org/drawingml/2006/main" xmlns:p="http://schemas.openxmlformats.org/presentationml/2006/main" xmlns:r="http://schemas.openxmlformats.org/officeDocument/2006/relationships">
+  <p:cSld>
+    <p:spTree>
+      <p:nvGrpSpPr>
+        <p:cNvPr id="1" name=""/>
+        <p:cNvGrpSpPr/>
+        <p:nvPr/>
+      </p:nvGrpSpPr>
+      <p:grpSpPr>
+        <a:xfrm>
+          <a:off x="0" y="0"/>
+          <a:ext cx="0" cy="0"/>
+          <a:chOff x="0" y="0"/>
+          <a:chExt cx="0" cy="0"/>
+        </a:xfrm>
+      </p:grpSpPr>
+      <p:sp>
+        <p:nvSpPr>
+          <p:cNvPr id="2" name="Slide Image Placeholder 1"/>
+          <p:cNvSpPr>
+            <a:spLocks noGrp="1"/>
+          </p:cNvSpPr>
+          <p:nvPr>
+            <p:ph type="sldImg" idx="2"/>
+          </p:nvPr>
+        </p:nvSpPr>
+        <p:spPr/>
+      </p:sp>
+      <p:sp>
+        <p:nvSpPr>
+          <p:cNvPr id="3" name="Notes Placeholder 2"/>
+          <p:cNvSpPr>
+            <a:spLocks noGrp="1"/>
+          </p:cNvSpPr>
+          <p:nvPr>
+            <p:ph type="body" idx="3" sz="quarter"/>
+          </p:nvPr>
+        </p:nvSpPr>
+        <p:spPr/>
+        <p:txBody>
+          <a:bodyPr/>
+          <a:lstStyle/>
+          <a:p>
+            <a:r>
               <a:t>N1: Recapitulando, ¿qué me llevo de todo lo administrativo?</a:t>
             </a:r>
           </a:p>
@@ -1798,12 +2254,12 @@
           <a:lstStyle/>
           <a:p>
             <a:r>
-              <a:t>N1: Si amplío una instalación que ya tenía, ¿también necesito proyecto?</a:t>
-            </a:r>
-          </a:p>
-          <a:p>
-            <a:r>
-              <a:t>N2: Depende de cuánto la amplíes. La regla es esta: si al ampliar superas en un treinta por ciento la potencia de diseño que tenía la instalación al proyectarse, entonces sí necesitas proyecto. También si con la ampliación entras en cualquiera de los supuestos que ya vimos, por ejemplo si te pasas de setenta en una individual. La idea de fondo es lógica: una ampliación pequeña no obliga a nada, pero crecer más de un treinta por ciento ya es harina de otro costal. Es la forma que tiene el reglamento de evitar que alguien engorde una instalación poco a poco, a base de ampliaciones sueltas, sin que nadie la controle con un proyecto.</a:t>
+              <a:t>N1: Instalación individual. ¿Cuántos kilovatios tiene que superar para obligarte a hacer proyecto?</a:t>
+            </a:r>
+          </a:p>
+          <a:p>
+            <a:r>
+              <a:t>N2: Recuerda que la individual es la pequeña de la familia, así que salta antes que la común y la acometida. Una de las opciones es justo el listón de esas dos grandes, no las confundas.</a:t>
             </a:r>
           </a:p>
         </p:txBody>
@@ -1873,12 +2329,12 @@
           <a:lstStyle/>
           <a:p>
             <a:r>
-              <a:t>N1: ¿Y qué papel sale del proyecto?</a:t>
-            </a:r>
-          </a:p>
-          <a:p>
-            <a:r>
-              <a:t>N2: Van siempre de la mano estas dos ideas: proyecto y dirección de obra. Siempre que una instalación necesita proyecto, hay un técnico competente que dirige la obra y que, al acabar, firma un certificado de dirección de obra. Es su forma de decir: yo he vigilado que esto se monte según el proyecto. Y al revés: si no hay proyecto, que es lo normal en las instalaciones domésticas pequeñas, no hay dirección de obra ni ese certificado. Asócialo como una pareja fija: proyecto implica dirección de obra. En el examen te lo pueden preguntar justo así, para ver si sabes que uno arrastra al otro.</a:t>
+              <a:t>N1: ¿Por qué setenta?</a:t>
+            </a:r>
+          </a:p>
+          <a:p>
+            <a:r>
+              <a:t>N2: Porque una instalación individual necesita proyecto en cuanto pasa de setenta kilovatios. Los dos mil son el listón de la común y de la acometida interior, que son mayores. La lógica: la pequeña salta antes. Y por encima de todo, si la red da más de cinco bar, siempre hay proyecto, sea cual sea la potencia.</a:t>
             </a:r>
           </a:p>
         </p:txBody>
@@ -1948,12 +2404,12 @@
           <a:lstStyle/>
           <a:p>
             <a:r>
-              <a:t>N1: ¿Qué prueba hay que hacer antes de entregar la instalación?</a:t>
-            </a:r>
-          </a:p>
-          <a:p>
-            <a:r>
-              <a:t>N2: La prueba de estanquidad, que es la más importante. Estanquidad significa que la instalación no tiene fugas, que no se escapa ni una burbuja de gas por ninguna unión. Antes de entregar, tú, la empresa instaladora, tienes que probarlo, siguiendo la UNE sesenta mil seiscientos setenta guion ocho si es baja presión, o la UNE sesenta mil seiscientos veinte si es alta. Y el resultado positivo se hace constar en el certificado de instalación, o sea, queda por escrito y firmado. Recuerda un matiz del tema del reglamento: la prueba la hace quien monta; no la confundas con la inspección, que la hace un tercero distinto. Una estanquidad mal hecha acaba en olor a gas y, en lo grave, en una deflagración.</a:t>
+              <a:t>N1: Si amplío una instalación que ya tenía, ¿también necesito proyecto?</a:t>
+            </a:r>
+          </a:p>
+          <a:p>
+            <a:r>
+              <a:t>N2: Depende de cuánto la amplíes. La regla es esta: si al ampliar superas en un treinta por ciento la potencia de diseño que tenía la instalación al proyectarse, entonces sí necesitas proyecto. También si con la ampliación entras en cualquiera de los supuestos que ya vimos, por ejemplo si te pasas de setenta en una individual. La idea de fondo es lógica: una ampliación pequeña no obliga a nada, pero crecer más de un treinta por ciento ya es harina de otro costal. Es la forma que tiene el reglamento de evitar que alguien engorde una instalación poco a poco, a base de ampliaciones sueltas, sin que nadie la controle con un proyecto.</a:t>
             </a:r>
           </a:p>
         </p:txBody>
@@ -2023,12 +2479,12 @@
           <a:lstStyle/>
           <a:p>
             <a:r>
-              <a:t>N1: ¿Y con la parte enterrada hay algo especial?</a:t>
-            </a:r>
-          </a:p>
-          <a:p>
-            <a:r>
-              <a:t>N2: Sí, un detalle de orden que conviene tener claro. Si la instalación tiene acometida interior enterrada, la empresa instaladora tiene que entregar al distribuidor el certificado de esa acometida antes de la puesta en marcha, es decir, antes de dar gas. La lógica es de puro sentido común: lo que va enterrado, una vez tapado, ya no se puede revisar a simple vista. Así que el distribuidor quiere en la mano el papel que garantiza que se probó y que quedó bien, antes de permitir que circule el gas. Primero el certificado sobre la mesa; después, el gas. Nunca al revés.</a:t>
+              <a:t>N1: ¿Y qué papel sale del proyecto?</a:t>
+            </a:r>
+          </a:p>
+          <a:p>
+            <a:r>
+              <a:t>N2: Van siempre de la mano estas dos ideas: proyecto y dirección de obra. Siempre que una instalación necesita proyecto, hay un técnico competente que dirige la obra y que, al acabar, firma un certificado de dirección de obra. Es su forma de decir: yo he vigilado que esto se monte según el proyecto. Y al revés: si no hay proyecto, que es lo normal en las instalaciones domésticas pequeñas, no hay dirección de obra ni ese certificado. Asócialo como una pareja fija: proyecto implica dirección de obra. En el examen te lo pueden preguntar justo así, para ver si sabes que uno arrastra al otro.</a:t>
             </a:r>
           </a:p>
         </p:txBody>
@@ -5114,7 +5570,7 @@
       </p:sp>
       <p:sp>
         <p:nvSpPr>
-          <p:cNvPr id="4" name="Rounded Rectangle 3"/>
+          <p:cNvPr id="4" name="Rectangle 3"/>
           <p:cNvSpPr/>
           <p:nvPr/>
         </p:nvSpPr>
@@ -5123,7 +5579,7 @@
             <a:off x="868680" y="2057400"/>
             <a:ext cx="1463040" cy="82296"/>
           </a:xfrm>
-          <a:prstGeom prst="roundRect">
+          <a:prstGeom prst="rect">
             <a:avLst/>
           </a:prstGeom>
           <a:solidFill>
@@ -5240,6 +5696,18 @@
   <p:clrMapOvr>
     <a:masterClrMapping/>
   </p:clrMapOvr>
+  <mc:AlternateContent xmlns:mc="http://schemas.openxmlformats.org/markup-compatibility/2006">
+    <mc:Choice xmlns:p14="http://schemas.microsoft.com/office/powerpoint/2010/main" Requires="p14">
+      <p:transition spd="med" p14:dur="700">
+        <p14:cube dir="l"/>
+      </p:transition>
+    </mc:Choice>
+    <mc:Fallback>
+      <p:transition spd="med">
+        <p:push dir="l"/>
+      </p:transition>
+    </mc:Fallback>
+  </mc:AlternateContent>
 </p:sld>
 </file>
 
@@ -5327,7 +5795,7 @@
                 </a:solidFill>
                 <a:latin typeface="Montserrat"/>
               </a:rPr>
-              <a:t>010 / 021</a:t>
+              <a:t>010 / 027</a:t>
             </a:r>
           </a:p>
         </p:txBody>
@@ -5395,7 +5863,7 @@
                 </a:solidFill>
                 <a:latin typeface="Montserrat"/>
               </a:rPr>
-              <a:t>APARTADO 3.4 · CERTIFICADOS</a:t>
+              <a:t>APARTADO 3.3 · PRUEBAS DE ENTREGA</a:t>
             </a:r>
           </a:p>
         </p:txBody>
@@ -5429,14 +5897,14 @@
                 </a:solidFill>
                 <a:latin typeface="Montserrat"/>
               </a:rPr>
-              <a:t>Tres certificados, uno por tramo</a:t>
-            </a:r>
-          </a:p>
-        </p:txBody>
-      </p:sp>
-      <p:sp>
-        <p:nvSpPr>
-          <p:cNvPr id="7" name="Rounded Rectangle 6"/>
+              <a:t>La prueba estrella: estanquidad</a:t>
+            </a:r>
+          </a:p>
+        </p:txBody>
+      </p:sp>
+      <p:sp>
+        <p:nvSpPr>
+          <p:cNvPr id="7" name="Rectangle 6"/>
           <p:cNvSpPr/>
           <p:nvPr/>
         </p:nvSpPr>
@@ -5445,7 +5913,7 @@
             <a:off x="868680" y="1627632"/>
             <a:ext cx="2011680" cy="73152"/>
           </a:xfrm>
-          <a:prstGeom prst="roundRect">
+          <a:prstGeom prst="rect">
             <a:avLst/>
           </a:prstGeom>
           <a:solidFill>
@@ -5487,7 +5955,7 @@
         <p:spPr>
           <a:xfrm>
             <a:off x="822960" y="1965960"/>
-            <a:ext cx="4983480" cy="4206240"/>
+            <a:ext cx="5029200" cy="4206240"/>
           </a:xfrm>
           <a:prstGeom prst="rect">
             <a:avLst/>
@@ -5521,7 +5989,7 @@
                 </a:solidFill>
                 <a:latin typeface="Montserrat"/>
               </a:rPr>
-              <a:t>IRG-1: acometida interior</a:t>
+              <a:t>La hace la empresa instaladora</a:t>
             </a:r>
           </a:p>
           <a:p>
@@ -5546,7 +6014,7 @@
                 </a:solidFill>
                 <a:latin typeface="Montserrat"/>
               </a:rPr>
-              <a:t>IRG-2: instalación común</a:t>
+              <a:t>UNE 60670-8 (baja) o 60620 (alta)</a:t>
             </a:r>
           </a:p>
           <a:p>
@@ -5571,46 +6039,21 @@
                 </a:solidFill>
                 <a:latin typeface="Montserrat"/>
               </a:rPr>
-              <a:t>IRG-3: instalación individual</a:t>
-            </a:r>
-          </a:p>
-          <a:p>
-            <a:pPr>
-              <a:spcAft>
-                <a:spcPts val="1100"/>
-              </a:spcAft>
-            </a:pPr>
-            <a:r>
-              <a:rPr sz="1600" b="1" i="0">
-                <a:solidFill>
-                  <a:srgbClr val="E8801A"/>
-                </a:solidFill>
-                <a:latin typeface="Montserrat"/>
-              </a:rPr>
-              <a:t>▸  </a:t>
-            </a:r>
-            <a:r>
-              <a:rPr sz="1600" b="0" i="0">
-                <a:solidFill>
-                  <a:srgbClr val="1B2330"/>
-                </a:solidFill>
-                <a:latin typeface="Montserrat"/>
-              </a:rPr>
-              <a:t>Todos llevan croquis</a:t>
-            </a:r>
-          </a:p>
-        </p:txBody>
-      </p:sp>
-      <p:sp>
-        <p:nvSpPr>
-          <p:cNvPr id="9" name="imgph" descr="IMGQ:installer filling out paper certificate on clipboard"/>
+              <a:t>Resultado positivo en el certificado</a:t>
+            </a:r>
+          </a:p>
+        </p:txBody>
+      </p:sp>
+      <p:sp>
+        <p:nvSpPr>
+          <p:cNvPr id="9" name="imgph" descr="IMGQ:pressure gauge manometer on gas pipe test"/>
           <p:cNvSpPr/>
           <p:nvPr/>
         </p:nvSpPr>
         <p:spPr>
           <a:xfrm>
-            <a:off x="5806440" y="1051560"/>
-            <a:ext cx="5298947" cy="4629150"/>
+            <a:off x="6080760" y="1965960"/>
+            <a:ext cx="5303520" cy="4572000"/>
           </a:xfrm>
           <a:prstGeom prst="roundRect">
             <a:avLst/>
@@ -5655,8 +6098,8 @@
         </p:nvSpPr>
         <p:spPr>
           <a:xfrm>
-            <a:off x="6080760" y="2726055"/>
-            <a:ext cx="4750307" cy="1280160"/>
+            <a:off x="6355080" y="3611880"/>
+            <a:ext cx="4754880" cy="1280160"/>
           </a:xfrm>
           <a:prstGeom prst="rect">
             <a:avLst/>
@@ -5677,7 +6120,7 @@
                 </a:solidFill>
                 <a:latin typeface="Montserrat"/>
               </a:rPr>
-              <a:t>IMAGEN REALISTA</a:t>
+              <a:t>IMAGEN</a:t>
             </a:r>
           </a:p>
           <a:p>
@@ -5689,7 +6132,7 @@
                 </a:solidFill>
                 <a:latin typeface="Montserrat"/>
               </a:rPr>
-              <a:t>installer filling out paper certificate on clipboard</a:t>
+              <a:t>pressure gauge manometer on gas pipe test</a:t>
             </a:r>
           </a:p>
         </p:txBody>
@@ -5699,6 +6142,18 @@
   <p:clrMapOvr>
     <a:masterClrMapping/>
   </p:clrMapOvr>
+  <mc:AlternateContent xmlns:mc="http://schemas.openxmlformats.org/markup-compatibility/2006">
+    <mc:Choice xmlns:p14="http://schemas.microsoft.com/office/powerpoint/2010/main" Requires="p14">
+      <p:transition spd="med" p14:dur="700">
+        <p14:cube dir="r"/>
+      </p:transition>
+    </mc:Choice>
+    <mc:Fallback>
+      <p:transition spd="med">
+        <p:push dir="r"/>
+      </p:transition>
+    </mc:Fallback>
+  </mc:AlternateContent>
 </p:sld>
 </file>
 
@@ -5786,7 +6241,7 @@
                 </a:solidFill>
                 <a:latin typeface="Montserrat"/>
               </a:rPr>
-              <a:t>011 / 021</a:t>
+              <a:t>011 / 027</a:t>
             </a:r>
           </a:p>
         </p:txBody>
@@ -5827,84 +6282,16 @@
       </p:sp>
       <p:sp>
         <p:nvSpPr>
-          <p:cNvPr id="5" name="TextBox 4"/>
-          <p:cNvSpPr txBox="1"/>
-          <p:nvPr/>
-        </p:nvSpPr>
-        <p:spPr>
-          <a:xfrm>
-            <a:off x="822960" y="457200"/>
-            <a:ext cx="10058400" cy="365760"/>
-          </a:xfrm>
-          <a:prstGeom prst="rect">
-            <a:avLst/>
-          </a:prstGeom>
-          <a:noFill/>
-        </p:spPr>
-        <p:txBody>
-          <a:bodyPr wrap="square">
-            <a:spAutoFit/>
-          </a:bodyPr>
-          <a:lstStyle/>
-          <a:p>
-            <a:r>
-              <a:rPr sz="1300" b="1" i="0">
-                <a:solidFill>
-                  <a:srgbClr val="E8801A"/>
-                </a:solidFill>
-                <a:latin typeface="Montserrat"/>
-              </a:rPr>
-              <a:t>APARTADO 3.4 · CERTIFICADOS</a:t>
-            </a:r>
-          </a:p>
-        </p:txBody>
-      </p:sp>
-      <p:sp>
-        <p:nvSpPr>
-          <p:cNvPr id="6" name="TextBox 5"/>
-          <p:cNvSpPr txBox="1"/>
-          <p:nvPr/>
-        </p:nvSpPr>
-        <p:spPr>
-          <a:xfrm>
-            <a:off x="822960" y="868680"/>
-            <a:ext cx="10515600" cy="914400"/>
-          </a:xfrm>
-          <a:prstGeom prst="rect">
-            <a:avLst/>
-          </a:prstGeom>
-          <a:noFill/>
-        </p:spPr>
-        <p:txBody>
-          <a:bodyPr wrap="square">
-            <a:spAutoFit/>
-          </a:bodyPr>
-          <a:lstStyle/>
-          <a:p>
-            <a:r>
-              <a:rPr sz="2800" b="1" i="0">
-                <a:solidFill>
-                  <a:srgbClr val="1E2761"/>
-                </a:solidFill>
-                <a:latin typeface="Montserrat"/>
-              </a:rPr>
-              <a:t>Solo el individual lista aparatos</a:t>
-            </a:r>
-          </a:p>
-        </p:txBody>
-      </p:sp>
-      <p:sp>
-        <p:nvSpPr>
-          <p:cNvPr id="7" name="Rounded Rectangle 6"/>
+          <p:cNvPr id="5" name="Rectangle 4"/>
           <p:cNvSpPr/>
           <p:nvPr/>
         </p:nvSpPr>
         <p:spPr>
           <a:xfrm>
-            <a:off x="868680" y="1627632"/>
-            <a:ext cx="2011680" cy="73152"/>
-          </a:xfrm>
-          <a:prstGeom prst="roundRect">
+            <a:off x="0" y="0"/>
+            <a:ext cx="12191695" cy="1143000"/>
+          </a:xfrm>
+          <a:prstGeom prst="rect">
             <a:avLst/>
           </a:prstGeom>
           <a:solidFill>
@@ -5939,14 +6326,14 @@
       </p:sp>
       <p:sp>
         <p:nvSpPr>
-          <p:cNvPr id="8" name="TextBox 7"/>
+          <p:cNvPr id="6" name="TextBox 5"/>
           <p:cNvSpPr txBox="1"/>
           <p:nvPr/>
         </p:nvSpPr>
         <p:spPr>
           <a:xfrm>
-            <a:off x="822960" y="1965960"/>
-            <a:ext cx="4983480" cy="4206240"/>
+            <a:off x="822960" y="274320"/>
+            <a:ext cx="10515600" cy="640080"/>
           </a:xfrm>
           <a:prstGeom prst="rect">
             <a:avLst/>
@@ -5959,92 +6346,62 @@
           </a:bodyPr>
           <a:lstStyle/>
           <a:p>
-            <a:pPr>
-              <a:spcAft>
-                <a:spcPts val="1100"/>
-              </a:spcAft>
-            </a:pPr>
-            <a:r>
-              <a:rPr sz="1600" b="1" i="0">
-                <a:solidFill>
-                  <a:srgbClr val="E8801A"/>
-                </a:solidFill>
-                <a:latin typeface="Montserrat"/>
-              </a:rPr>
-              <a:t>▸  </a:t>
-            </a:r>
-            <a:r>
-              <a:rPr sz="1600" b="0" i="0">
-                <a:solidFill>
-                  <a:srgbClr val="1B2330"/>
-                </a:solidFill>
-                <a:latin typeface="Montserrat"/>
-              </a:rPr>
-              <a:t>IRG-3 incluye los aparatos</a:t>
-            </a:r>
-          </a:p>
-          <a:p>
-            <a:pPr>
-              <a:spcAft>
-                <a:spcPts val="1100"/>
-              </a:spcAft>
-            </a:pPr>
-            <a:r>
-              <a:rPr sz="1600" b="1" i="0">
-                <a:solidFill>
-                  <a:srgbClr val="E8801A"/>
-                </a:solidFill>
-                <a:latin typeface="Montserrat"/>
-              </a:rPr>
-              <a:t>▸  </a:t>
-            </a:r>
-            <a:r>
-              <a:rPr sz="1600" b="0" i="0">
-                <a:solidFill>
-                  <a:srgbClr val="1B2330"/>
-                </a:solidFill>
-                <a:latin typeface="Montserrat"/>
-              </a:rPr>
-              <a:t>con su consumo nominal</a:t>
-            </a:r>
-          </a:p>
-          <a:p>
-            <a:pPr>
-              <a:spcAft>
-                <a:spcPts val="1100"/>
-              </a:spcAft>
-            </a:pPr>
-            <a:r>
-              <a:rPr sz="1600" b="1" i="0">
-                <a:solidFill>
-                  <a:srgbClr val="E8801A"/>
-                </a:solidFill>
-                <a:latin typeface="Montserrat"/>
-              </a:rPr>
-              <a:t>▸  </a:t>
-            </a:r>
-            <a:r>
-              <a:rPr sz="1600" b="0" i="0">
-                <a:solidFill>
-                  <a:srgbClr val="1B2330"/>
-                </a:solidFill>
-                <a:latin typeface="Montserrat"/>
-              </a:rPr>
-              <a:t>Es el que llega hasta ellos</a:t>
-            </a:r>
-          </a:p>
-        </p:txBody>
-      </p:sp>
-      <p:sp>
-        <p:nvSpPr>
-          <p:cNvPr id="9" name="imgph" descr="IMGQ:gas cooktop and boiler in home"/>
+            <a:r>
+              <a:rPr sz="2400" b="1" i="0">
+                <a:solidFill>
+                  <a:srgbClr val="FFFFFF"/>
+                </a:solidFill>
+                <a:latin typeface="Montserrat"/>
+              </a:rPr>
+              <a:t>⚡  PREGUNTA RÁPIDA</a:t>
+            </a:r>
+          </a:p>
+        </p:txBody>
+      </p:sp>
+      <p:sp>
+        <p:nvSpPr>
+          <p:cNvPr id="7" name="TextBox 6"/>
+          <p:cNvSpPr txBox="1"/>
+          <p:nvPr/>
+        </p:nvSpPr>
+        <p:spPr>
+          <a:xfrm>
+            <a:off x="822960" y="1508760"/>
+            <a:ext cx="10515600" cy="1371600"/>
+          </a:xfrm>
+          <a:prstGeom prst="rect">
+            <a:avLst/>
+          </a:prstGeom>
+          <a:noFill/>
+        </p:spPr>
+        <p:txBody>
+          <a:bodyPr wrap="square">
+            <a:spAutoFit/>
+          </a:bodyPr>
+          <a:lstStyle/>
+          <a:p>
+            <a:r>
+              <a:rPr sz="2400" b="1" i="0">
+                <a:solidFill>
+                  <a:srgbClr val="1E2761"/>
+                </a:solidFill>
+                <a:latin typeface="Montserrat"/>
+              </a:rPr>
+              <a:t>¿Quién realiza la prueba de estanquidad antes de entregar la instalación?</a:t>
+            </a:r>
+          </a:p>
+        </p:txBody>
+      </p:sp>
+      <p:sp>
+        <p:nvSpPr>
+          <p:cNvPr id="8" name="Rounded Rectangle 7"/>
           <p:cNvSpPr/>
           <p:nvPr/>
         </p:nvSpPr>
         <p:spPr>
           <a:xfrm>
-            <a:off x="5806440" y="1051560"/>
-            <a:ext cx="5298947" cy="4629150"/>
+            <a:off x="822960" y="3291840"/>
+            <a:ext cx="4983480" cy="1143000"/>
           </a:xfrm>
           <a:prstGeom prst="roundRect">
             <a:avLst/>
@@ -6083,14 +6440,58 @@
       </p:sp>
       <p:sp>
         <p:nvSpPr>
+          <p:cNvPr id="9" name="Rectangle 8"/>
+          <p:cNvSpPr/>
+          <p:nvPr/>
+        </p:nvSpPr>
+        <p:spPr>
+          <a:xfrm>
+            <a:off x="822960" y="3291840"/>
+            <a:ext cx="640080" cy="1143000"/>
+          </a:xfrm>
+          <a:prstGeom prst="rect">
+            <a:avLst/>
+          </a:prstGeom>
+          <a:solidFill>
+            <a:srgbClr val="1E2761"/>
+          </a:solidFill>
+          <a:ln>
+            <a:noFill/>
+          </a:ln>
+          <a:effectLst/>
+        </p:spPr>
+        <p:style>
+          <a:lnRef idx="1">
+            <a:schemeClr val="accent1"/>
+          </a:lnRef>
+          <a:fillRef idx="3">
+            <a:schemeClr val="accent1"/>
+          </a:fillRef>
+          <a:effectRef idx="2">
+            <a:schemeClr val="accent1"/>
+          </a:effectRef>
+          <a:fontRef idx="minor">
+            <a:schemeClr val="lt1"/>
+          </a:fontRef>
+        </p:style>
+        <p:txBody>
+          <a:bodyPr rtlCol="0" anchor="ctr"/>
+          <a:lstStyle/>
+          <a:p>
+            <a:pPr algn="ctr"/>
+          </a:p>
+        </p:txBody>
+      </p:sp>
+      <p:sp>
+        <p:nvSpPr>
           <p:cNvPr id="10" name="TextBox 9"/>
           <p:cNvSpPr txBox="1"/>
           <p:nvPr/>
         </p:nvSpPr>
         <p:spPr>
           <a:xfrm>
-            <a:off x="6080760" y="2726055"/>
-            <a:ext cx="4750307" cy="1280160"/>
+            <a:off x="822960" y="3611880"/>
+            <a:ext cx="640080" cy="548640"/>
           </a:xfrm>
           <a:prstGeom prst="rect">
             <a:avLst/>
@@ -6105,25 +6506,524 @@
           <a:p>
             <a:pPr algn="ctr"/>
             <a:r>
-              <a:rPr sz="1400" b="1" i="0">
-                <a:solidFill>
-                  <a:srgbClr val="64748B"/>
-                </a:solidFill>
-                <a:latin typeface="Montserrat"/>
-              </a:rPr>
-              <a:t>IMAGEN REALISTA</a:t>
-            </a:r>
-          </a:p>
+              <a:rPr sz="2200" b="1" i="0">
+                <a:solidFill>
+                  <a:srgbClr val="FFFFFF"/>
+                </a:solidFill>
+                <a:latin typeface="Montserrat"/>
+              </a:rPr>
+              <a:t>A</a:t>
+            </a:r>
+          </a:p>
+        </p:txBody>
+      </p:sp>
+      <p:sp>
+        <p:nvSpPr>
+          <p:cNvPr id="11" name="TextBox 10"/>
+          <p:cNvSpPr txBox="1"/>
+          <p:nvPr/>
+        </p:nvSpPr>
+        <p:spPr>
+          <a:xfrm>
+            <a:off x="1600200" y="3474720"/>
+            <a:ext cx="4114800" cy="868680"/>
+          </a:xfrm>
+          <a:prstGeom prst="rect">
+            <a:avLst/>
+          </a:prstGeom>
+          <a:noFill/>
+        </p:spPr>
+        <p:txBody>
+          <a:bodyPr wrap="square">
+            <a:spAutoFit/>
+          </a:bodyPr>
+          <a:lstStyle/>
+          <a:p>
+            <a:r>
+              <a:rPr sz="1400" b="0" i="0">
+                <a:solidFill>
+                  <a:srgbClr val="1B2330"/>
+                </a:solidFill>
+                <a:latin typeface="Montserrat"/>
+              </a:rPr>
+              <a:t>El distribuidor</a:t>
+            </a:r>
+          </a:p>
+        </p:txBody>
+      </p:sp>
+      <p:sp>
+        <p:nvSpPr>
+          <p:cNvPr id="12" name="Rounded Rectangle 11"/>
+          <p:cNvSpPr/>
+          <p:nvPr/>
+        </p:nvSpPr>
+        <p:spPr>
+          <a:xfrm>
+            <a:off x="6355080" y="3291840"/>
+            <a:ext cx="4983480" cy="1143000"/>
+          </a:xfrm>
+          <a:prstGeom prst="roundRect">
+            <a:avLst/>
+          </a:prstGeom>
+          <a:solidFill>
+            <a:srgbClr val="F3F6FB"/>
+          </a:solidFill>
+          <a:ln w="12700">
+            <a:solidFill>
+              <a:srgbClr val="C7D2E6"/>
+            </a:solidFill>
+          </a:ln>
+          <a:effectLst/>
+        </p:spPr>
+        <p:style>
+          <a:lnRef idx="1">
+            <a:schemeClr val="accent1"/>
+          </a:lnRef>
+          <a:fillRef idx="3">
+            <a:schemeClr val="accent1"/>
+          </a:fillRef>
+          <a:effectRef idx="2">
+            <a:schemeClr val="accent1"/>
+          </a:effectRef>
+          <a:fontRef idx="minor">
+            <a:schemeClr val="lt1"/>
+          </a:fontRef>
+        </p:style>
+        <p:txBody>
+          <a:bodyPr rtlCol="0" anchor="ctr"/>
+          <a:lstStyle/>
           <a:p>
             <a:pPr algn="ctr"/>
-            <a:r>
-              <a:rPr sz="1100" b="0" i="1">
-                <a:solidFill>
-                  <a:srgbClr val="64748B"/>
-                </a:solidFill>
-                <a:latin typeface="Montserrat"/>
-              </a:rPr>
-              <a:t>gas cooktop and boiler in home</a:t>
+          </a:p>
+        </p:txBody>
+      </p:sp>
+      <p:sp>
+        <p:nvSpPr>
+          <p:cNvPr id="13" name="Rectangle 12"/>
+          <p:cNvSpPr/>
+          <p:nvPr/>
+        </p:nvSpPr>
+        <p:spPr>
+          <a:xfrm>
+            <a:off x="6355080" y="3291840"/>
+            <a:ext cx="640080" cy="1143000"/>
+          </a:xfrm>
+          <a:prstGeom prst="rect">
+            <a:avLst/>
+          </a:prstGeom>
+          <a:solidFill>
+            <a:srgbClr val="1E2761"/>
+          </a:solidFill>
+          <a:ln>
+            <a:noFill/>
+          </a:ln>
+          <a:effectLst/>
+        </p:spPr>
+        <p:style>
+          <a:lnRef idx="1">
+            <a:schemeClr val="accent1"/>
+          </a:lnRef>
+          <a:fillRef idx="3">
+            <a:schemeClr val="accent1"/>
+          </a:fillRef>
+          <a:effectRef idx="2">
+            <a:schemeClr val="accent1"/>
+          </a:effectRef>
+          <a:fontRef idx="minor">
+            <a:schemeClr val="lt1"/>
+          </a:fontRef>
+        </p:style>
+        <p:txBody>
+          <a:bodyPr rtlCol="0" anchor="ctr"/>
+          <a:lstStyle/>
+          <a:p>
+            <a:pPr algn="ctr"/>
+          </a:p>
+        </p:txBody>
+      </p:sp>
+      <p:sp>
+        <p:nvSpPr>
+          <p:cNvPr id="14" name="TextBox 13"/>
+          <p:cNvSpPr txBox="1"/>
+          <p:nvPr/>
+        </p:nvSpPr>
+        <p:spPr>
+          <a:xfrm>
+            <a:off x="6355080" y="3611880"/>
+            <a:ext cx="640080" cy="548640"/>
+          </a:xfrm>
+          <a:prstGeom prst="rect">
+            <a:avLst/>
+          </a:prstGeom>
+          <a:noFill/>
+        </p:spPr>
+        <p:txBody>
+          <a:bodyPr wrap="square">
+            <a:spAutoFit/>
+          </a:bodyPr>
+          <a:lstStyle/>
+          <a:p>
+            <a:pPr algn="ctr"/>
+            <a:r>
+              <a:rPr sz="2200" b="1" i="0">
+                <a:solidFill>
+                  <a:srgbClr val="FFFFFF"/>
+                </a:solidFill>
+                <a:latin typeface="Montserrat"/>
+              </a:rPr>
+              <a:t>B</a:t>
+            </a:r>
+          </a:p>
+        </p:txBody>
+      </p:sp>
+      <p:sp>
+        <p:nvSpPr>
+          <p:cNvPr id="15" name="TextBox 14"/>
+          <p:cNvSpPr txBox="1"/>
+          <p:nvPr/>
+        </p:nvSpPr>
+        <p:spPr>
+          <a:xfrm>
+            <a:off x="7132320" y="3474720"/>
+            <a:ext cx="4114800" cy="868680"/>
+          </a:xfrm>
+          <a:prstGeom prst="rect">
+            <a:avLst/>
+          </a:prstGeom>
+          <a:noFill/>
+        </p:spPr>
+        <p:txBody>
+          <a:bodyPr wrap="square">
+            <a:spAutoFit/>
+          </a:bodyPr>
+          <a:lstStyle/>
+          <a:p>
+            <a:r>
+              <a:rPr sz="1400" b="0" i="0">
+                <a:solidFill>
+                  <a:srgbClr val="1B2330"/>
+                </a:solidFill>
+                <a:latin typeface="Montserrat"/>
+              </a:rPr>
+              <a:t>Un organismo de control independiente</a:t>
+            </a:r>
+          </a:p>
+        </p:txBody>
+      </p:sp>
+      <p:sp>
+        <p:nvSpPr>
+          <p:cNvPr id="16" name="Rounded Rectangle 15"/>
+          <p:cNvSpPr/>
+          <p:nvPr/>
+        </p:nvSpPr>
+        <p:spPr>
+          <a:xfrm>
+            <a:off x="822960" y="4617720"/>
+            <a:ext cx="4983480" cy="1143000"/>
+          </a:xfrm>
+          <a:prstGeom prst="roundRect">
+            <a:avLst/>
+          </a:prstGeom>
+          <a:solidFill>
+            <a:srgbClr val="F3F6FB"/>
+          </a:solidFill>
+          <a:ln w="12700">
+            <a:solidFill>
+              <a:srgbClr val="C7D2E6"/>
+            </a:solidFill>
+          </a:ln>
+          <a:effectLst/>
+        </p:spPr>
+        <p:style>
+          <a:lnRef idx="1">
+            <a:schemeClr val="accent1"/>
+          </a:lnRef>
+          <a:fillRef idx="3">
+            <a:schemeClr val="accent1"/>
+          </a:fillRef>
+          <a:effectRef idx="2">
+            <a:schemeClr val="accent1"/>
+          </a:effectRef>
+          <a:fontRef idx="minor">
+            <a:schemeClr val="lt1"/>
+          </a:fontRef>
+        </p:style>
+        <p:txBody>
+          <a:bodyPr rtlCol="0" anchor="ctr"/>
+          <a:lstStyle/>
+          <a:p>
+            <a:pPr algn="ctr"/>
+          </a:p>
+        </p:txBody>
+      </p:sp>
+      <p:sp>
+        <p:nvSpPr>
+          <p:cNvPr id="17" name="Rectangle 16"/>
+          <p:cNvSpPr/>
+          <p:nvPr/>
+        </p:nvSpPr>
+        <p:spPr>
+          <a:xfrm>
+            <a:off x="822960" y="4617720"/>
+            <a:ext cx="640080" cy="1143000"/>
+          </a:xfrm>
+          <a:prstGeom prst="rect">
+            <a:avLst/>
+          </a:prstGeom>
+          <a:solidFill>
+            <a:srgbClr val="1E2761"/>
+          </a:solidFill>
+          <a:ln>
+            <a:noFill/>
+          </a:ln>
+          <a:effectLst/>
+        </p:spPr>
+        <p:style>
+          <a:lnRef idx="1">
+            <a:schemeClr val="accent1"/>
+          </a:lnRef>
+          <a:fillRef idx="3">
+            <a:schemeClr val="accent1"/>
+          </a:fillRef>
+          <a:effectRef idx="2">
+            <a:schemeClr val="accent1"/>
+          </a:effectRef>
+          <a:fontRef idx="minor">
+            <a:schemeClr val="lt1"/>
+          </a:fontRef>
+        </p:style>
+        <p:txBody>
+          <a:bodyPr rtlCol="0" anchor="ctr"/>
+          <a:lstStyle/>
+          <a:p>
+            <a:pPr algn="ctr"/>
+          </a:p>
+        </p:txBody>
+      </p:sp>
+      <p:sp>
+        <p:nvSpPr>
+          <p:cNvPr id="18" name="TextBox 17"/>
+          <p:cNvSpPr txBox="1"/>
+          <p:nvPr/>
+        </p:nvSpPr>
+        <p:spPr>
+          <a:xfrm>
+            <a:off x="822960" y="4937760"/>
+            <a:ext cx="640080" cy="548640"/>
+          </a:xfrm>
+          <a:prstGeom prst="rect">
+            <a:avLst/>
+          </a:prstGeom>
+          <a:noFill/>
+        </p:spPr>
+        <p:txBody>
+          <a:bodyPr wrap="square">
+            <a:spAutoFit/>
+          </a:bodyPr>
+          <a:lstStyle/>
+          <a:p>
+            <a:pPr algn="ctr"/>
+            <a:r>
+              <a:rPr sz="2200" b="1" i="0">
+                <a:solidFill>
+                  <a:srgbClr val="FFFFFF"/>
+                </a:solidFill>
+                <a:latin typeface="Montserrat"/>
+              </a:rPr>
+              <a:t>C</a:t>
+            </a:r>
+          </a:p>
+        </p:txBody>
+      </p:sp>
+      <p:sp>
+        <p:nvSpPr>
+          <p:cNvPr id="19" name="TextBox 18"/>
+          <p:cNvSpPr txBox="1"/>
+          <p:nvPr/>
+        </p:nvSpPr>
+        <p:spPr>
+          <a:xfrm>
+            <a:off x="1600200" y="4800600"/>
+            <a:ext cx="4114800" cy="868680"/>
+          </a:xfrm>
+          <a:prstGeom prst="rect">
+            <a:avLst/>
+          </a:prstGeom>
+          <a:noFill/>
+        </p:spPr>
+        <p:txBody>
+          <a:bodyPr wrap="square">
+            <a:spAutoFit/>
+          </a:bodyPr>
+          <a:lstStyle/>
+          <a:p>
+            <a:r>
+              <a:rPr sz="1400" b="0" i="0">
+                <a:solidFill>
+                  <a:srgbClr val="1B2330"/>
+                </a:solidFill>
+                <a:latin typeface="Montserrat"/>
+              </a:rPr>
+              <a:t>La empresa instaladora</a:t>
+            </a:r>
+          </a:p>
+        </p:txBody>
+      </p:sp>
+      <p:sp>
+        <p:nvSpPr>
+          <p:cNvPr id="20" name="Rounded Rectangle 19"/>
+          <p:cNvSpPr/>
+          <p:nvPr/>
+        </p:nvSpPr>
+        <p:spPr>
+          <a:xfrm>
+            <a:off x="6355080" y="4617720"/>
+            <a:ext cx="4983480" cy="1143000"/>
+          </a:xfrm>
+          <a:prstGeom prst="roundRect">
+            <a:avLst/>
+          </a:prstGeom>
+          <a:solidFill>
+            <a:srgbClr val="F3F6FB"/>
+          </a:solidFill>
+          <a:ln w="12700">
+            <a:solidFill>
+              <a:srgbClr val="C7D2E6"/>
+            </a:solidFill>
+          </a:ln>
+          <a:effectLst/>
+        </p:spPr>
+        <p:style>
+          <a:lnRef idx="1">
+            <a:schemeClr val="accent1"/>
+          </a:lnRef>
+          <a:fillRef idx="3">
+            <a:schemeClr val="accent1"/>
+          </a:fillRef>
+          <a:effectRef idx="2">
+            <a:schemeClr val="accent1"/>
+          </a:effectRef>
+          <a:fontRef idx="minor">
+            <a:schemeClr val="lt1"/>
+          </a:fontRef>
+        </p:style>
+        <p:txBody>
+          <a:bodyPr rtlCol="0" anchor="ctr"/>
+          <a:lstStyle/>
+          <a:p>
+            <a:pPr algn="ctr"/>
+          </a:p>
+        </p:txBody>
+      </p:sp>
+      <p:sp>
+        <p:nvSpPr>
+          <p:cNvPr id="21" name="Rectangle 20"/>
+          <p:cNvSpPr/>
+          <p:nvPr/>
+        </p:nvSpPr>
+        <p:spPr>
+          <a:xfrm>
+            <a:off x="6355080" y="4617720"/>
+            <a:ext cx="640080" cy="1143000"/>
+          </a:xfrm>
+          <a:prstGeom prst="rect">
+            <a:avLst/>
+          </a:prstGeom>
+          <a:solidFill>
+            <a:srgbClr val="1E2761"/>
+          </a:solidFill>
+          <a:ln>
+            <a:noFill/>
+          </a:ln>
+          <a:effectLst/>
+        </p:spPr>
+        <p:style>
+          <a:lnRef idx="1">
+            <a:schemeClr val="accent1"/>
+          </a:lnRef>
+          <a:fillRef idx="3">
+            <a:schemeClr val="accent1"/>
+          </a:fillRef>
+          <a:effectRef idx="2">
+            <a:schemeClr val="accent1"/>
+          </a:effectRef>
+          <a:fontRef idx="minor">
+            <a:schemeClr val="lt1"/>
+          </a:fontRef>
+        </p:style>
+        <p:txBody>
+          <a:bodyPr rtlCol="0" anchor="ctr"/>
+          <a:lstStyle/>
+          <a:p>
+            <a:pPr algn="ctr"/>
+          </a:p>
+        </p:txBody>
+      </p:sp>
+      <p:sp>
+        <p:nvSpPr>
+          <p:cNvPr id="22" name="TextBox 21"/>
+          <p:cNvSpPr txBox="1"/>
+          <p:nvPr/>
+        </p:nvSpPr>
+        <p:spPr>
+          <a:xfrm>
+            <a:off x="6355080" y="4937760"/>
+            <a:ext cx="640080" cy="548640"/>
+          </a:xfrm>
+          <a:prstGeom prst="rect">
+            <a:avLst/>
+          </a:prstGeom>
+          <a:noFill/>
+        </p:spPr>
+        <p:txBody>
+          <a:bodyPr wrap="square">
+            <a:spAutoFit/>
+          </a:bodyPr>
+          <a:lstStyle/>
+          <a:p>
+            <a:pPr algn="ctr"/>
+            <a:r>
+              <a:rPr sz="2200" b="1" i="0">
+                <a:solidFill>
+                  <a:srgbClr val="FFFFFF"/>
+                </a:solidFill>
+                <a:latin typeface="Montserrat"/>
+              </a:rPr>
+              <a:t>D</a:t>
+            </a:r>
+          </a:p>
+        </p:txBody>
+      </p:sp>
+      <p:sp>
+        <p:nvSpPr>
+          <p:cNvPr id="23" name="TextBox 22"/>
+          <p:cNvSpPr txBox="1"/>
+          <p:nvPr/>
+        </p:nvSpPr>
+        <p:spPr>
+          <a:xfrm>
+            <a:off x="7132320" y="4800600"/>
+            <a:ext cx="4114800" cy="868680"/>
+          </a:xfrm>
+          <a:prstGeom prst="rect">
+            <a:avLst/>
+          </a:prstGeom>
+          <a:noFill/>
+        </p:spPr>
+        <p:txBody>
+          <a:bodyPr wrap="square">
+            <a:spAutoFit/>
+          </a:bodyPr>
+          <a:lstStyle/>
+          <a:p>
+            <a:r>
+              <a:rPr sz="1400" b="0" i="0">
+                <a:solidFill>
+                  <a:srgbClr val="1B2330"/>
+                </a:solidFill>
+                <a:latin typeface="Montserrat"/>
+              </a:rPr>
+              <a:t>El usuario titular</a:t>
             </a:r>
           </a:p>
         </p:txBody>
@@ -6133,6 +7033,18 @@
   <p:clrMapOvr>
     <a:masterClrMapping/>
   </p:clrMapOvr>
+  <mc:AlternateContent xmlns:mc="http://schemas.openxmlformats.org/markup-compatibility/2006">
+    <mc:Choice xmlns:p14="http://schemas.microsoft.com/office/powerpoint/2010/main" Requires="p14">
+      <p:transition spd="med" p14:dur="700">
+        <p14:cube dir="l"/>
+      </p:transition>
+    </mc:Choice>
+    <mc:Fallback>
+      <p:transition spd="med">
+        <p:push dir="l"/>
+      </p:transition>
+    </mc:Fallback>
+  </mc:AlternateContent>
 </p:sld>
 </file>
 
@@ -6220,7 +7132,7 @@
                 </a:solidFill>
                 <a:latin typeface="Montserrat"/>
               </a:rPr>
-              <a:t>012 / 021</a:t>
+              <a:t>012 / 027</a:t>
             </a:r>
           </a:p>
         </p:txBody>
@@ -6261,88 +7173,20 @@
       </p:sp>
       <p:sp>
         <p:nvSpPr>
-          <p:cNvPr id="5" name="TextBox 4"/>
-          <p:cNvSpPr txBox="1"/>
-          <p:nvPr/>
-        </p:nvSpPr>
-        <p:spPr>
-          <a:xfrm>
-            <a:off x="822960" y="457200"/>
-            <a:ext cx="10058400" cy="365760"/>
-          </a:xfrm>
-          <a:prstGeom prst="rect">
-            <a:avLst/>
-          </a:prstGeom>
-          <a:noFill/>
-        </p:spPr>
-        <p:txBody>
-          <a:bodyPr wrap="square">
-            <a:spAutoFit/>
-          </a:bodyPr>
-          <a:lstStyle/>
-          <a:p>
-            <a:r>
-              <a:rPr sz="1300" b="1" i="0">
-                <a:solidFill>
-                  <a:srgbClr val="E8801A"/>
-                </a:solidFill>
-                <a:latin typeface="Montserrat"/>
-              </a:rPr>
-              <a:t>APARTADO 3.4 · CHIMENEAS</a:t>
-            </a:r>
-          </a:p>
-        </p:txBody>
-      </p:sp>
-      <p:sp>
-        <p:nvSpPr>
-          <p:cNvPr id="6" name="TextBox 5"/>
-          <p:cNvSpPr txBox="1"/>
-          <p:nvPr/>
-        </p:nvSpPr>
-        <p:spPr>
-          <a:xfrm>
-            <a:off x="822960" y="868680"/>
-            <a:ext cx="10515600" cy="914400"/>
-          </a:xfrm>
-          <a:prstGeom prst="rect">
-            <a:avLst/>
-          </a:prstGeom>
-          <a:noFill/>
-        </p:spPr>
-        <p:txBody>
-          <a:bodyPr wrap="square">
-            <a:spAutoFit/>
-          </a:bodyPr>
-          <a:lstStyle/>
-          <a:p>
-            <a:r>
-              <a:rPr sz="2800" b="1" i="0">
-                <a:solidFill>
-                  <a:srgbClr val="1E2761"/>
-                </a:solidFill>
-                <a:latin typeface="Montserrat"/>
-              </a:rPr>
-              <a:t>Chimeneas en obra nueva</a:t>
-            </a:r>
-          </a:p>
-        </p:txBody>
-      </p:sp>
-      <p:sp>
-        <p:nvSpPr>
-          <p:cNvPr id="7" name="Rounded Rectangle 6"/>
+          <p:cNvPr id="5" name="Rectangle 4"/>
           <p:cNvSpPr/>
           <p:nvPr/>
         </p:nvSpPr>
         <p:spPr>
           <a:xfrm>
-            <a:off x="868680" y="1627632"/>
-            <a:ext cx="2011680" cy="73152"/>
-          </a:xfrm>
-          <a:prstGeom prst="roundRect">
+            <a:off x="0" y="0"/>
+            <a:ext cx="12191695" cy="1143000"/>
+          </a:xfrm>
+          <a:prstGeom prst="rect">
             <a:avLst/>
           </a:prstGeom>
           <a:solidFill>
-            <a:srgbClr val="E8801A"/>
+            <a:srgbClr val="1E8E4B"/>
           </a:solidFill>
           <a:ln>
             <a:noFill/>
@@ -6373,14 +7217,14 @@
       </p:sp>
       <p:sp>
         <p:nvSpPr>
-          <p:cNvPr id="8" name="TextBox 7"/>
+          <p:cNvPr id="6" name="TextBox 5"/>
           <p:cNvSpPr txBox="1"/>
           <p:nvPr/>
         </p:nvSpPr>
         <p:spPr>
           <a:xfrm>
-            <a:off x="822960" y="1965960"/>
-            <a:ext cx="4983480" cy="4206240"/>
+            <a:off x="822960" y="274320"/>
+            <a:ext cx="10515600" cy="640080"/>
           </a:xfrm>
           <a:prstGeom prst="rect">
             <a:avLst/>
@@ -6393,102 +7237,72 @@
           </a:bodyPr>
           <a:lstStyle/>
           <a:p>
-            <a:pPr>
-              <a:spcAft>
-                <a:spcPts val="1100"/>
-              </a:spcAft>
-            </a:pPr>
-            <a:r>
-              <a:rPr sz="1600" b="1" i="0">
-                <a:solidFill>
-                  <a:srgbClr val="E8801A"/>
-                </a:solidFill>
-                <a:latin typeface="Montserrat"/>
-              </a:rPr>
-              <a:t>▸  </a:t>
-            </a:r>
-            <a:r>
-              <a:rPr sz="1600" b="0" i="0">
-                <a:solidFill>
-                  <a:srgbClr val="1B2330"/>
-                </a:solidFill>
-                <a:latin typeface="Montserrat"/>
-              </a:rPr>
-              <a:t>Edificio de nueva planta con chimeneas</a:t>
-            </a:r>
-          </a:p>
-          <a:p>
-            <a:pPr>
-              <a:spcAft>
-                <a:spcPts val="1100"/>
-              </a:spcAft>
-            </a:pPr>
-            <a:r>
-              <a:rPr sz="1600" b="1" i="0">
-                <a:solidFill>
-                  <a:srgbClr val="E8801A"/>
-                </a:solidFill>
-                <a:latin typeface="Montserrat"/>
-              </a:rPr>
-              <a:t>▸  </a:t>
-            </a:r>
-            <a:r>
-              <a:rPr sz="1600" b="0" i="0">
-                <a:solidFill>
-                  <a:srgbClr val="1B2330"/>
-                </a:solidFill>
-                <a:latin typeface="Montserrat"/>
-              </a:rPr>
-              <a:t>Certificación previa a la puesta en servicio</a:t>
-            </a:r>
-          </a:p>
-          <a:p>
-            <a:pPr>
-              <a:spcAft>
-                <a:spcPts val="1100"/>
-              </a:spcAft>
-            </a:pPr>
-            <a:r>
-              <a:rPr sz="1600" b="1" i="0">
-                <a:solidFill>
-                  <a:srgbClr val="E8801A"/>
-                </a:solidFill>
-                <a:latin typeface="Montserrat"/>
-              </a:rPr>
-              <a:t>▸  </a:t>
-            </a:r>
-            <a:r>
-              <a:rPr sz="1600" b="0" i="0">
-                <a:solidFill>
-                  <a:srgbClr val="1B2330"/>
-                </a:solidFill>
-                <a:latin typeface="Montserrat"/>
-              </a:rPr>
-              <a:t>Técnico competente u organismo de control</a:t>
-            </a:r>
-          </a:p>
-        </p:txBody>
-      </p:sp>
-      <p:sp>
-        <p:nvSpPr>
-          <p:cNvPr id="9" name="imgph" descr="IMGQ:new building rooftop with chimney flues"/>
+            <a:r>
+              <a:rPr sz="2400" b="1" i="0">
+                <a:solidFill>
+                  <a:srgbClr val="FFFFFF"/>
+                </a:solidFill>
+                <a:latin typeface="Montserrat"/>
+              </a:rPr>
+              <a:t>✔  RESPUESTA:  C</a:t>
+            </a:r>
+          </a:p>
+        </p:txBody>
+      </p:sp>
+      <p:sp>
+        <p:nvSpPr>
+          <p:cNvPr id="7" name="TextBox 6"/>
+          <p:cNvSpPr txBox="1"/>
+          <p:nvPr/>
+        </p:nvSpPr>
+        <p:spPr>
+          <a:xfrm>
+            <a:off x="822960" y="1417320"/>
+            <a:ext cx="10515600" cy="914400"/>
+          </a:xfrm>
+          <a:prstGeom prst="rect">
+            <a:avLst/>
+          </a:prstGeom>
+          <a:noFill/>
+        </p:spPr>
+        <p:txBody>
+          <a:bodyPr wrap="square">
+            <a:spAutoFit/>
+          </a:bodyPr>
+          <a:lstStyle/>
+          <a:p>
+            <a:r>
+              <a:rPr sz="1800" b="1" i="0">
+                <a:solidFill>
+                  <a:srgbClr val="64748B"/>
+                </a:solidFill>
+                <a:latin typeface="Montserrat"/>
+              </a:rPr>
+              <a:t>¿Quién realiza la prueba de estanquidad antes de entregar la instalación?</a:t>
+            </a:r>
+          </a:p>
+        </p:txBody>
+      </p:sp>
+      <p:sp>
+        <p:nvSpPr>
+          <p:cNvPr id="8" name="Rounded Rectangle 7"/>
           <p:cNvSpPr/>
           <p:nvPr/>
         </p:nvSpPr>
         <p:spPr>
           <a:xfrm>
-            <a:off x="5806440" y="1051560"/>
-            <a:ext cx="5298947" cy="4629150"/>
+            <a:off x="822960" y="2514600"/>
+            <a:ext cx="10515600" cy="914400"/>
           </a:xfrm>
           <a:prstGeom prst="roundRect">
             <a:avLst/>
           </a:prstGeom>
           <a:solidFill>
-            <a:srgbClr val="F3F6FB"/>
+            <a:srgbClr val="E9F6EE"/>
           </a:solidFill>
           <a:ln w="12700">
             <a:solidFill>
-              <a:srgbClr val="C7D2E6"/>
+              <a:srgbClr val="1E8E4B"/>
             </a:solidFill>
           </a:ln>
           <a:effectLst/>
@@ -6517,14 +7331,14 @@
       </p:sp>
       <p:sp>
         <p:nvSpPr>
-          <p:cNvPr id="10" name="TextBox 9"/>
+          <p:cNvPr id="9" name="TextBox 8"/>
           <p:cNvSpPr txBox="1"/>
           <p:nvPr/>
         </p:nvSpPr>
         <p:spPr>
           <a:xfrm>
-            <a:off x="6080760" y="2726055"/>
-            <a:ext cx="4750307" cy="1280160"/>
+            <a:off x="1097280" y="2697480"/>
+            <a:ext cx="10058400" cy="640080"/>
           </a:xfrm>
           <a:prstGeom prst="rect">
             <a:avLst/>
@@ -6537,27 +7351,66 @@
           </a:bodyPr>
           <a:lstStyle/>
           <a:p>
-            <a:pPr algn="ctr"/>
-            <a:r>
-              <a:rPr sz="1400" b="1" i="0">
-                <a:solidFill>
-                  <a:srgbClr val="64748B"/>
-                </a:solidFill>
-                <a:latin typeface="Montserrat"/>
-              </a:rPr>
-              <a:t>IMAGEN REALISTA</a:t>
-            </a:r>
-          </a:p>
-          <a:p>
-            <a:pPr algn="ctr"/>
-            <a:r>
-              <a:rPr sz="1100" b="0" i="1">
-                <a:solidFill>
-                  <a:srgbClr val="64748B"/>
-                </a:solidFill>
-                <a:latin typeface="Montserrat"/>
-              </a:rPr>
-              <a:t>new building rooftop with chimney flues</a:t>
+            <a:r>
+              <a:rPr sz="1800" b="1" i="0">
+                <a:solidFill>
+                  <a:srgbClr val="1E8E4B"/>
+                </a:solidFill>
+                <a:latin typeface="Montserrat"/>
+              </a:rPr>
+              <a:t>C.  </a:t>
+            </a:r>
+            <a:r>
+              <a:rPr sz="1800" b="1" i="0">
+                <a:solidFill>
+                  <a:srgbClr val="1E2761"/>
+                </a:solidFill>
+                <a:latin typeface="Montserrat"/>
+              </a:rPr>
+              <a:t>La empresa instaladora</a:t>
+            </a:r>
+          </a:p>
+        </p:txBody>
+      </p:sp>
+      <p:sp>
+        <p:nvSpPr>
+          <p:cNvPr id="10" name="TextBox 9"/>
+          <p:cNvSpPr txBox="1"/>
+          <p:nvPr/>
+        </p:nvSpPr>
+        <p:spPr>
+          <a:xfrm>
+            <a:off x="822960" y="3749039"/>
+            <a:ext cx="10515600" cy="2194560"/>
+          </a:xfrm>
+          <a:prstGeom prst="rect">
+            <a:avLst/>
+          </a:prstGeom>
+          <a:noFill/>
+        </p:spPr>
+        <p:txBody>
+          <a:bodyPr wrap="square">
+            <a:spAutoFit/>
+          </a:bodyPr>
+          <a:lstStyle/>
+          <a:p>
+            <a:r>
+              <a:rPr sz="1500" b="1" i="0">
+                <a:solidFill>
+                  <a:srgbClr val="E8801A"/>
+                </a:solidFill>
+                <a:latin typeface="Montserrat"/>
+              </a:rPr>
+              <a:t>Por qué:  </a:t>
+            </a:r>
+            <a:r>
+              <a:rPr sz="1500" b="0" i="0">
+                <a:solidFill>
+                  <a:srgbClr val="1B2330"/>
+                </a:solidFill>
+                <a:latin typeface="Montserrat"/>
+              </a:rPr>
+              <a:t>La prueba de entrega la hace quien monta, es decir la empresa instaladora, y el resultado queda en el certificado de instalación.</a:t>
             </a:r>
           </a:p>
         </p:txBody>
@@ -6567,6 +7420,18 @@
   <p:clrMapOvr>
     <a:masterClrMapping/>
   </p:clrMapOvr>
+  <mc:AlternateContent xmlns:mc="http://schemas.openxmlformats.org/markup-compatibility/2006">
+    <mc:Choice xmlns:p14="http://schemas.microsoft.com/office/powerpoint/2010/main" Requires="p14">
+      <p:transition spd="med" p14:dur="700">
+        <p14:cube dir="r"/>
+      </p:transition>
+    </mc:Choice>
+    <mc:Fallback>
+      <p:transition spd="med">
+        <p:push dir="r"/>
+      </p:transition>
+    </mc:Fallback>
+  </mc:AlternateContent>
 </p:sld>
 </file>
 
@@ -6654,7 +7519,7 @@
                 </a:solidFill>
                 <a:latin typeface="Montserrat"/>
               </a:rPr>
-              <a:t>013 / 021</a:t>
+              <a:t>013 / 027</a:t>
             </a:r>
           </a:p>
         </p:txBody>
@@ -6722,7 +7587,7 @@
                 </a:solidFill>
                 <a:latin typeface="Montserrat"/>
               </a:rPr>
-              <a:t>APARTADO 3.5 · PUESTA EN SERVICIO</a:t>
+              <a:t>APARTADO 3.3 · ACOMETIDA ENTERRADA</a:t>
             </a:r>
           </a:p>
         </p:txBody>
@@ -6756,14 +7621,14 @@
                 </a:solidFill>
                 <a:latin typeface="Montserrat"/>
               </a:rPr>
-              <a:t>Cerrar, bloquear, precintar, taponar</a:t>
-            </a:r>
-          </a:p>
-        </p:txBody>
-      </p:sp>
-      <p:sp>
-        <p:nvSpPr>
-          <p:cNvPr id="7" name="Rounded Rectangle 6"/>
+              <a:t>Enterrado: el certificado, antes</a:t>
+            </a:r>
+          </a:p>
+        </p:txBody>
+      </p:sp>
+      <p:sp>
+        <p:nvSpPr>
+          <p:cNvPr id="7" name="Rectangle 6"/>
           <p:cNvSpPr/>
           <p:nvPr/>
         </p:nvSpPr>
@@ -6772,7 +7637,7 @@
             <a:off x="868680" y="1627632"/>
             <a:ext cx="2011680" cy="73152"/>
           </a:xfrm>
-          <a:prstGeom prst="roundRect">
+          <a:prstGeom prst="rect">
             <a:avLst/>
           </a:prstGeom>
           <a:solidFill>
@@ -6813,8 +7678,8 @@
         </p:nvSpPr>
         <p:spPr>
           <a:xfrm>
-            <a:off x="822960" y="1965960"/>
-            <a:ext cx="4983480" cy="4206240"/>
+            <a:off x="6355080" y="1965960"/>
+            <a:ext cx="5029200" cy="4206240"/>
           </a:xfrm>
           <a:prstGeom prst="rect">
             <a:avLst/>
@@ -6848,7 +7713,7 @@
                 </a:solidFill>
                 <a:latin typeface="Montserrat"/>
               </a:rPr>
-              <a:t>Llaves de viviendas sin contrato</a:t>
+              <a:t>Acometida interior enterrada</a:t>
             </a:r>
           </a:p>
           <a:p>
@@ -6873,7 +7738,7 @@
                 </a:solidFill>
                 <a:latin typeface="Montserrat"/>
               </a:rPr>
-              <a:t>Cerradas, bloqueadas y precintadas</a:t>
+              <a:t>Certificado al distribuidor</a:t>
             </a:r>
           </a:p>
           <a:p>
@@ -6898,21 +7763,21 @@
                 </a:solidFill>
                 <a:latin typeface="Montserrat"/>
               </a:rPr>
-              <a:t>Taponadas si no hay aparato</a:t>
-            </a:r>
-          </a:p>
-        </p:txBody>
-      </p:sp>
-      <p:sp>
-        <p:nvSpPr>
-          <p:cNvPr id="9" name="imgph" descr="IMGQ:gas valve with security seal"/>
+              <a:t>Antes de la puesta en marcha</a:t>
+            </a:r>
+          </a:p>
+        </p:txBody>
+      </p:sp>
+      <p:sp>
+        <p:nvSpPr>
+          <p:cNvPr id="9" name="imgph" descr="IMGQ:buried gas pipe connection underground"/>
           <p:cNvSpPr/>
           <p:nvPr/>
         </p:nvSpPr>
         <p:spPr>
           <a:xfrm>
-            <a:off x="5806440" y="1051560"/>
-            <a:ext cx="5298947" cy="4629150"/>
+            <a:off x="822960" y="1965960"/>
+            <a:ext cx="5303520" cy="4572000"/>
           </a:xfrm>
           <a:prstGeom prst="roundRect">
             <a:avLst/>
@@ -6957,8 +7822,8 @@
         </p:nvSpPr>
         <p:spPr>
           <a:xfrm>
-            <a:off x="6080760" y="2726055"/>
-            <a:ext cx="4750307" cy="1280160"/>
+            <a:off x="1097280" y="3611880"/>
+            <a:ext cx="4754880" cy="1280160"/>
           </a:xfrm>
           <a:prstGeom prst="rect">
             <a:avLst/>
@@ -6979,7 +7844,7 @@
                 </a:solidFill>
                 <a:latin typeface="Montserrat"/>
               </a:rPr>
-              <a:t>IMAGEN REALISTA</a:t>
+              <a:t>IMAGEN</a:t>
             </a:r>
           </a:p>
           <a:p>
@@ -6991,7 +7856,7 @@
                 </a:solidFill>
                 <a:latin typeface="Montserrat"/>
               </a:rPr>
-              <a:t>gas valve with security seal</a:t>
+              <a:t>buried gas pipe connection underground</a:t>
             </a:r>
           </a:p>
         </p:txBody>
@@ -7001,6 +7866,18 @@
   <p:clrMapOvr>
     <a:masterClrMapping/>
   </p:clrMapOvr>
+  <mc:AlternateContent xmlns:mc="http://schemas.openxmlformats.org/markup-compatibility/2006">
+    <mc:Choice xmlns:p14="http://schemas.microsoft.com/office/powerpoint/2010/main" Requires="p14">
+      <p:transition spd="med" p14:dur="700">
+        <p14:cube dir="l"/>
+      </p:transition>
+    </mc:Choice>
+    <mc:Fallback>
+      <p:transition spd="med">
+        <p:push dir="l"/>
+      </p:transition>
+    </mc:Fallback>
+  </mc:AlternateContent>
 </p:sld>
 </file>
 
@@ -7088,7 +7965,7 @@
                 </a:solidFill>
                 <a:latin typeface="Montserrat"/>
               </a:rPr>
-              <a:t>014 / 021</a:t>
+              <a:t>014 / 027</a:t>
             </a:r>
           </a:p>
         </p:txBody>
@@ -7156,7 +8033,7 @@
                 </a:solidFill>
                 <a:latin typeface="Montserrat"/>
               </a:rPr>
-              <a:t>APARTADO 3.5 · PUESTA EN SERVICIO</a:t>
+              <a:t>APARTADO 3.4 · CERTIFICADOS</a:t>
             </a:r>
           </a:p>
         </p:txBody>
@@ -7190,14 +8067,14 @@
                 </a:solidFill>
                 <a:latin typeface="Montserrat"/>
               </a:rPr>
-              <a:t>Purgar: sacar el aire</a:t>
-            </a:r>
-          </a:p>
-        </p:txBody>
-      </p:sp>
-      <p:sp>
-        <p:nvSpPr>
-          <p:cNvPr id="7" name="Rounded Rectangle 6"/>
+              <a:t>Tres certificados, uno por tramo</a:t>
+            </a:r>
+          </a:p>
+        </p:txBody>
+      </p:sp>
+      <p:sp>
+        <p:nvSpPr>
+          <p:cNvPr id="7" name="Rectangle 6"/>
           <p:cNvSpPr/>
           <p:nvPr/>
         </p:nvSpPr>
@@ -7206,7 +8083,7 @@
             <a:off x="868680" y="1627632"/>
             <a:ext cx="2011680" cy="73152"/>
           </a:xfrm>
-          <a:prstGeom prst="roundRect">
+          <a:prstGeom prst="rect">
             <a:avLst/>
           </a:prstGeom>
           <a:solidFill>
@@ -7248,7 +8125,7 @@
         <p:spPr>
           <a:xfrm>
             <a:off x="822960" y="1965960"/>
-            <a:ext cx="4983480" cy="4206240"/>
+            <a:ext cx="5029200" cy="4206240"/>
           </a:xfrm>
           <a:prstGeom prst="rect">
             <a:avLst/>
@@ -7282,7 +8159,7 @@
                 </a:solidFill>
                 <a:latin typeface="Montserrat"/>
               </a:rPr>
-              <a:t>Barrer el aire de la tubería</a:t>
+              <a:t>IRG-1: acometida interior</a:t>
             </a:r>
           </a:p>
           <a:p>
@@ -7307,7 +8184,7 @@
                 </a:solidFill>
                 <a:latin typeface="Montserrat"/>
               </a:rPr>
-              <a:t>Que no quede mezcla aire-gas</a:t>
+              <a:t>IRG-2: instalación común</a:t>
             </a:r>
           </a:p>
           <a:p>
@@ -7332,21 +8209,46 @@
                 </a:solidFill>
                 <a:latin typeface="Montserrat"/>
               </a:rPr>
-              <a:t>Fuera de los límites de inflamabilidad</a:t>
-            </a:r>
-          </a:p>
-        </p:txBody>
-      </p:sp>
-      <p:sp>
-        <p:nvSpPr>
-          <p:cNvPr id="9" name="imgph" descr="IMGQ:gas technician purging pipe at valve"/>
+              <a:t>IRG-3: instalación individual</a:t>
+            </a:r>
+          </a:p>
+          <a:p>
+            <a:pPr>
+              <a:spcAft>
+                <a:spcPts val="1100"/>
+              </a:spcAft>
+            </a:pPr>
+            <a:r>
+              <a:rPr sz="1600" b="1" i="0">
+                <a:solidFill>
+                  <a:srgbClr val="E8801A"/>
+                </a:solidFill>
+                <a:latin typeface="Montserrat"/>
+              </a:rPr>
+              <a:t>▸  </a:t>
+            </a:r>
+            <a:r>
+              <a:rPr sz="1600" b="0" i="0">
+                <a:solidFill>
+                  <a:srgbClr val="1B2330"/>
+                </a:solidFill>
+                <a:latin typeface="Montserrat"/>
+              </a:rPr>
+              <a:t>Todos llevan croquis</a:t>
+            </a:r>
+          </a:p>
+        </p:txBody>
+      </p:sp>
+      <p:sp>
+        <p:nvSpPr>
+          <p:cNvPr id="9" name="imgph" descr="IMGQ:installer filling out paper certificate on clipboard"/>
           <p:cNvSpPr/>
           <p:nvPr/>
         </p:nvSpPr>
         <p:spPr>
           <a:xfrm>
-            <a:off x="5806440" y="1051560"/>
-            <a:ext cx="5298947" cy="4629150"/>
+            <a:off x="6080760" y="1965960"/>
+            <a:ext cx="5303520" cy="4572000"/>
           </a:xfrm>
           <a:prstGeom prst="roundRect">
             <a:avLst/>
@@ -7391,8 +8293,8 @@
         </p:nvSpPr>
         <p:spPr>
           <a:xfrm>
-            <a:off x="6080760" y="2726055"/>
-            <a:ext cx="4750307" cy="1280160"/>
+            <a:off x="6355080" y="3611880"/>
+            <a:ext cx="4754880" cy="1280160"/>
           </a:xfrm>
           <a:prstGeom prst="rect">
             <a:avLst/>
@@ -7413,7 +8315,7 @@
                 </a:solidFill>
                 <a:latin typeface="Montserrat"/>
               </a:rPr>
-              <a:t>IMAGEN REALISTA</a:t>
+              <a:t>IMAGEN</a:t>
             </a:r>
           </a:p>
           <a:p>
@@ -7425,7 +8327,7 @@
                 </a:solidFill>
                 <a:latin typeface="Montserrat"/>
               </a:rPr>
-              <a:t>gas technician purging pipe at valve</a:t>
+              <a:t>installer filling out paper certificate on clipboard</a:t>
             </a:r>
           </a:p>
         </p:txBody>
@@ -7435,6 +8337,18 @@
   <p:clrMapOvr>
     <a:masterClrMapping/>
   </p:clrMapOvr>
+  <mc:AlternateContent xmlns:mc="http://schemas.openxmlformats.org/markup-compatibility/2006">
+    <mc:Choice xmlns:p14="http://schemas.microsoft.com/office/powerpoint/2010/main" Requires="p14">
+      <p:transition spd="med" p14:dur="700">
+        <p14:cube dir="r"/>
+      </p:transition>
+    </mc:Choice>
+    <mc:Fallback>
+      <p:transition spd="med">
+        <p:push dir="r"/>
+      </p:transition>
+    </mc:Fallback>
+  </mc:AlternateContent>
 </p:sld>
 </file>
 
@@ -7522,7 +8436,7 @@
                 </a:solidFill>
                 <a:latin typeface="Montserrat"/>
               </a:rPr>
-              <a:t>015 / 021</a:t>
+              <a:t>015 / 027</a:t>
             </a:r>
           </a:p>
         </p:txBody>
@@ -7590,7 +8504,7 @@
                 </a:solidFill>
                 <a:latin typeface="Montserrat"/>
               </a:rPr>
-              <a:t>APARTADO 3.5.1 · CON CONTRATO</a:t>
+              <a:t>APARTADO 3.4 · CERTIFICADOS</a:t>
             </a:r>
           </a:p>
         </p:txBody>
@@ -7624,14 +8538,14 @@
                 </a:solidFill>
                 <a:latin typeface="Montserrat"/>
               </a:rPr>
-              <a:t>Con contrato de suministro</a:t>
-            </a:r>
-          </a:p>
-        </p:txBody>
-      </p:sp>
-      <p:sp>
-        <p:nvSpPr>
-          <p:cNvPr id="7" name="Rounded Rectangle 6"/>
+              <a:t>Solo el individual lista aparatos</a:t>
+            </a:r>
+          </a:p>
+        </p:txBody>
+      </p:sp>
+      <p:sp>
+        <p:nvSpPr>
+          <p:cNvPr id="7" name="Rectangle 6"/>
           <p:cNvSpPr/>
           <p:nvPr/>
         </p:nvSpPr>
@@ -7640,7 +8554,7 @@
             <a:off x="868680" y="1627632"/>
             <a:ext cx="2011680" cy="73152"/>
           </a:xfrm>
-          <a:prstGeom prst="roundRect">
+          <a:prstGeom prst="rect">
             <a:avLst/>
           </a:prstGeom>
           <a:solidFill>
@@ -7681,8 +8595,8 @@
         </p:nvSpPr>
         <p:spPr>
           <a:xfrm>
-            <a:off x="822960" y="1965960"/>
-            <a:ext cx="4983480" cy="4206240"/>
+            <a:off x="6355080" y="1965960"/>
+            <a:ext cx="5029200" cy="4206240"/>
           </a:xfrm>
           <a:prstGeom prst="rect">
             <a:avLst/>
@@ -7716,7 +8630,7 @@
                 </a:solidFill>
                 <a:latin typeface="Montserrat"/>
               </a:rPr>
-              <a:t>El usuario firma la póliza antes</a:t>
+              <a:t>IRG-3 incluye los aparatos</a:t>
             </a:r>
           </a:p>
           <a:p>
@@ -7741,7 +8655,7 @@
                 </a:solidFill>
                 <a:latin typeface="Montserrat"/>
               </a:rPr>
-              <a:t>Se solicita la puesta en servicio</a:t>
+              <a:t>con su consumo nominal</a:t>
             </a:r>
           </a:p>
           <a:p>
@@ -7766,21 +8680,21 @@
                 </a:solidFill>
                 <a:latin typeface="Montserrat"/>
               </a:rPr>
-              <a:t>La ejecuta el distribuidor</a:t>
-            </a:r>
-          </a:p>
-        </p:txBody>
-      </p:sp>
-      <p:sp>
-        <p:nvSpPr>
-          <p:cNvPr id="9" name="imgph" descr="IMGQ:person signing a contract at a desk"/>
+              <a:t>Es el que llega hasta ellos</a:t>
+            </a:r>
+          </a:p>
+        </p:txBody>
+      </p:sp>
+      <p:sp>
+        <p:nvSpPr>
+          <p:cNvPr id="9" name="imgph" descr="IMGQ:gas cooktop and boiler in home"/>
           <p:cNvSpPr/>
           <p:nvPr/>
         </p:nvSpPr>
         <p:spPr>
           <a:xfrm>
-            <a:off x="5806440" y="1051560"/>
-            <a:ext cx="5298947" cy="4629150"/>
+            <a:off x="822960" y="1965960"/>
+            <a:ext cx="5303520" cy="4572000"/>
           </a:xfrm>
           <a:prstGeom prst="roundRect">
             <a:avLst/>
@@ -7825,8 +8739,8 @@
         </p:nvSpPr>
         <p:spPr>
           <a:xfrm>
-            <a:off x="6080760" y="2726055"/>
-            <a:ext cx="4750307" cy="1280160"/>
+            <a:off x="1097280" y="3611880"/>
+            <a:ext cx="4754880" cy="1280160"/>
           </a:xfrm>
           <a:prstGeom prst="rect">
             <a:avLst/>
@@ -7847,7 +8761,7 @@
                 </a:solidFill>
                 <a:latin typeface="Montserrat"/>
               </a:rPr>
-              <a:t>IMAGEN REALISTA</a:t>
+              <a:t>IMAGEN</a:t>
             </a:r>
           </a:p>
           <a:p>
@@ -7859,7 +8773,7 @@
                 </a:solidFill>
                 <a:latin typeface="Montserrat"/>
               </a:rPr>
-              <a:t>person signing a contract at a desk</a:t>
+              <a:t>gas cooktop and boiler in home</a:t>
             </a:r>
           </a:p>
         </p:txBody>
@@ -7869,6 +8783,18 @@
   <p:clrMapOvr>
     <a:masterClrMapping/>
   </p:clrMapOvr>
+  <mc:AlternateContent xmlns:mc="http://schemas.openxmlformats.org/markup-compatibility/2006">
+    <mc:Choice xmlns:p14="http://schemas.microsoft.com/office/powerpoint/2010/main" Requires="p14">
+      <p:transition spd="med" p14:dur="700">
+        <p14:cube dir="l"/>
+      </p:transition>
+    </mc:Choice>
+    <mc:Fallback>
+      <p:transition spd="med">
+        <p:push dir="l"/>
+      </p:transition>
+    </mc:Fallback>
+  </mc:AlternateContent>
 </p:sld>
 </file>
 
@@ -7956,7 +8882,7 @@
                 </a:solidFill>
                 <a:latin typeface="Montserrat"/>
               </a:rPr>
-              <a:t>016 / 021</a:t>
+              <a:t>016 / 027</a:t>
             </a:r>
           </a:p>
         </p:txBody>
@@ -7997,84 +8923,16 @@
       </p:sp>
       <p:sp>
         <p:nvSpPr>
-          <p:cNvPr id="5" name="TextBox 4"/>
-          <p:cNvSpPr txBox="1"/>
-          <p:nvPr/>
-        </p:nvSpPr>
-        <p:spPr>
-          <a:xfrm>
-            <a:off x="822960" y="457200"/>
-            <a:ext cx="10058400" cy="365760"/>
-          </a:xfrm>
-          <a:prstGeom prst="rect">
-            <a:avLst/>
-          </a:prstGeom>
-          <a:noFill/>
-        </p:spPr>
-        <p:txBody>
-          <a:bodyPr wrap="square">
-            <a:spAutoFit/>
-          </a:bodyPr>
-          <a:lstStyle/>
-          <a:p>
-            <a:r>
-              <a:rPr sz="1300" b="1" i="0">
-                <a:solidFill>
-                  <a:srgbClr val="E8801A"/>
-                </a:solidFill>
-                <a:latin typeface="Montserrat"/>
-              </a:rPr>
-              <a:t>APARTADO 3.5.1 · LOS 9 PASOS</a:t>
-            </a:r>
-          </a:p>
-        </p:txBody>
-      </p:sp>
-      <p:sp>
-        <p:nvSpPr>
-          <p:cNvPr id="6" name="TextBox 5"/>
-          <p:cNvSpPr txBox="1"/>
-          <p:nvPr/>
-        </p:nvSpPr>
-        <p:spPr>
-          <a:xfrm>
-            <a:off x="822960" y="868680"/>
-            <a:ext cx="10515600" cy="914400"/>
-          </a:xfrm>
-          <a:prstGeom prst="rect">
-            <a:avLst/>
-          </a:prstGeom>
-          <a:noFill/>
-        </p:spPr>
-        <p:txBody>
-          <a:bodyPr wrap="square">
-            <a:spAutoFit/>
-          </a:bodyPr>
-          <a:lstStyle/>
-          <a:p>
-            <a:r>
-              <a:rPr sz="2800" b="1" i="0">
-                <a:solidFill>
-                  <a:srgbClr val="1E2761"/>
-                </a:solidFill>
-                <a:latin typeface="Montserrat"/>
-              </a:rPr>
-              <a:t>Nueve pasos, dos bloques</a:t>
-            </a:r>
-          </a:p>
-        </p:txBody>
-      </p:sp>
-      <p:sp>
-        <p:nvSpPr>
-          <p:cNvPr id="7" name="Rounded Rectangle 6"/>
+          <p:cNvPr id="5" name="Rectangle 4"/>
           <p:cNvSpPr/>
           <p:nvPr/>
         </p:nvSpPr>
         <p:spPr>
           <a:xfrm>
-            <a:off x="868680" y="1627632"/>
-            <a:ext cx="2011680" cy="73152"/>
-          </a:xfrm>
-          <a:prstGeom prst="roundRect">
+            <a:off x="0" y="0"/>
+            <a:ext cx="12191695" cy="1143000"/>
+          </a:xfrm>
+          <a:prstGeom prst="rect">
             <a:avLst/>
           </a:prstGeom>
           <a:solidFill>
@@ -8109,14 +8967,14 @@
       </p:sp>
       <p:sp>
         <p:nvSpPr>
-          <p:cNvPr id="8" name="TextBox 7"/>
+          <p:cNvPr id="6" name="TextBox 5"/>
           <p:cNvSpPr txBox="1"/>
           <p:nvPr/>
         </p:nvSpPr>
         <p:spPr>
           <a:xfrm>
-            <a:off x="822960" y="1965960"/>
-            <a:ext cx="4983480" cy="4206240"/>
+            <a:off x="822960" y="274320"/>
+            <a:ext cx="10515600" cy="640080"/>
           </a:xfrm>
           <a:prstGeom prst="rect">
             <a:avLst/>
@@ -8129,117 +8987,62 @@
           </a:bodyPr>
           <a:lstStyle/>
           <a:p>
-            <a:pPr>
-              <a:spcAft>
-                <a:spcPts val="1100"/>
-              </a:spcAft>
-            </a:pPr>
-            <a:r>
-              <a:rPr sz="1600" b="1" i="0">
-                <a:solidFill>
-                  <a:srgbClr val="E8801A"/>
-                </a:solidFill>
-                <a:latin typeface="Montserrat"/>
-              </a:rPr>
-              <a:t>▸  </a:t>
-            </a:r>
-            <a:r>
-              <a:rPr sz="1600" b="0" i="0">
-                <a:solidFill>
-                  <a:srgbClr val="1B2330"/>
-                </a:solidFill>
-                <a:latin typeface="Montserrat"/>
-              </a:rPr>
-              <a:t>1-5: comprobar todo</a:t>
-            </a:r>
-          </a:p>
-          <a:p>
-            <a:pPr>
-              <a:spcAft>
-                <a:spcPts val="1100"/>
-              </a:spcAft>
-            </a:pPr>
-            <a:r>
-              <a:rPr sz="1600" b="1" i="0">
-                <a:solidFill>
-                  <a:srgbClr val="E8801A"/>
-                </a:solidFill>
-                <a:latin typeface="Montserrat"/>
-              </a:rPr>
-              <a:t>▸  </a:t>
-            </a:r>
-            <a:r>
-              <a:rPr sz="1600" b="0" i="0">
-                <a:solidFill>
-                  <a:srgbClr val="1B2330"/>
-                </a:solidFill>
-                <a:latin typeface="Montserrat"/>
-              </a:rPr>
-              <a:t>docs, partes visibles, locales, válvulas</a:t>
-            </a:r>
-          </a:p>
-          <a:p>
-            <a:pPr>
-              <a:spcAft>
-                <a:spcPts val="1100"/>
-              </a:spcAft>
-            </a:pPr>
-            <a:r>
-              <a:rPr sz="1600" b="1" i="0">
-                <a:solidFill>
-                  <a:srgbClr val="E8801A"/>
-                </a:solidFill>
-                <a:latin typeface="Montserrat"/>
-              </a:rPr>
-              <a:t>▸  </a:t>
-            </a:r>
-            <a:r>
-              <a:rPr sz="1600" b="0" i="0">
-                <a:solidFill>
-                  <a:srgbClr val="1B2330"/>
-                </a:solidFill>
-                <a:latin typeface="Montserrat"/>
-              </a:rPr>
-              <a:t>6-9: precintar contador y estanquidad</a:t>
-            </a:r>
-          </a:p>
-          <a:p>
-            <a:pPr>
-              <a:spcAft>
-                <a:spcPts val="1100"/>
-              </a:spcAft>
-            </a:pPr>
-            <a:r>
-              <a:rPr sz="1600" b="1" i="0">
-                <a:solidFill>
-                  <a:srgbClr val="E8801A"/>
-                </a:solidFill>
-                <a:latin typeface="Montserrat"/>
-              </a:rPr>
-              <a:t>▸  </a:t>
-            </a:r>
-            <a:r>
-              <a:rPr sz="1600" b="0" i="0">
-                <a:solidFill>
-                  <a:srgbClr val="1B2330"/>
-                </a:solidFill>
-                <a:latin typeface="Montserrat"/>
-              </a:rPr>
-              <a:t>dejar en servicio y certificar</a:t>
-            </a:r>
-          </a:p>
-        </p:txBody>
-      </p:sp>
-      <p:sp>
-        <p:nvSpPr>
-          <p:cNvPr id="9" name="imgph" descr="IMGQ:gas meter and regulator being inspected"/>
+            <a:r>
+              <a:rPr sz="2400" b="1" i="0">
+                <a:solidFill>
+                  <a:srgbClr val="FFFFFF"/>
+                </a:solidFill>
+                <a:latin typeface="Montserrat"/>
+              </a:rPr>
+              <a:t>⚡  PREGUNTA RÁPIDA</a:t>
+            </a:r>
+          </a:p>
+        </p:txBody>
+      </p:sp>
+      <p:sp>
+        <p:nvSpPr>
+          <p:cNvPr id="7" name="TextBox 6"/>
+          <p:cNvSpPr txBox="1"/>
+          <p:nvPr/>
+        </p:nvSpPr>
+        <p:spPr>
+          <a:xfrm>
+            <a:off x="822960" y="1508760"/>
+            <a:ext cx="10515600" cy="1371600"/>
+          </a:xfrm>
+          <a:prstGeom prst="rect">
+            <a:avLst/>
+          </a:prstGeom>
+          <a:noFill/>
+        </p:spPr>
+        <p:txBody>
+          <a:bodyPr wrap="square">
+            <a:spAutoFit/>
+          </a:bodyPr>
+          <a:lstStyle/>
+          <a:p>
+            <a:r>
+              <a:rPr sz="2400" b="1" i="0">
+                <a:solidFill>
+                  <a:srgbClr val="1E2761"/>
+                </a:solidFill>
+                <a:latin typeface="Montserrat"/>
+              </a:rPr>
+              <a:t>¿Cuál de los certificados de instalación lista los aparatos y su consumo?</a:t>
+            </a:r>
+          </a:p>
+        </p:txBody>
+      </p:sp>
+      <p:sp>
+        <p:nvSpPr>
+          <p:cNvPr id="8" name="Rounded Rectangle 7"/>
           <p:cNvSpPr/>
           <p:nvPr/>
         </p:nvSpPr>
         <p:spPr>
           <a:xfrm>
-            <a:off x="5806440" y="1051560"/>
-            <a:ext cx="5298947" cy="4629150"/>
+            <a:off x="822960" y="3291840"/>
+            <a:ext cx="4983480" cy="1143000"/>
           </a:xfrm>
           <a:prstGeom prst="roundRect">
             <a:avLst/>
@@ -8278,14 +9081,58 @@
       </p:sp>
       <p:sp>
         <p:nvSpPr>
+          <p:cNvPr id="9" name="Rectangle 8"/>
+          <p:cNvSpPr/>
+          <p:nvPr/>
+        </p:nvSpPr>
+        <p:spPr>
+          <a:xfrm>
+            <a:off x="822960" y="3291840"/>
+            <a:ext cx="640080" cy="1143000"/>
+          </a:xfrm>
+          <a:prstGeom prst="rect">
+            <a:avLst/>
+          </a:prstGeom>
+          <a:solidFill>
+            <a:srgbClr val="1E2761"/>
+          </a:solidFill>
+          <a:ln>
+            <a:noFill/>
+          </a:ln>
+          <a:effectLst/>
+        </p:spPr>
+        <p:style>
+          <a:lnRef idx="1">
+            <a:schemeClr val="accent1"/>
+          </a:lnRef>
+          <a:fillRef idx="3">
+            <a:schemeClr val="accent1"/>
+          </a:fillRef>
+          <a:effectRef idx="2">
+            <a:schemeClr val="accent1"/>
+          </a:effectRef>
+          <a:fontRef idx="minor">
+            <a:schemeClr val="lt1"/>
+          </a:fontRef>
+        </p:style>
+        <p:txBody>
+          <a:bodyPr rtlCol="0" anchor="ctr"/>
+          <a:lstStyle/>
+          <a:p>
+            <a:pPr algn="ctr"/>
+          </a:p>
+        </p:txBody>
+      </p:sp>
+      <p:sp>
+        <p:nvSpPr>
           <p:cNvPr id="10" name="TextBox 9"/>
           <p:cNvSpPr txBox="1"/>
           <p:nvPr/>
         </p:nvSpPr>
         <p:spPr>
           <a:xfrm>
-            <a:off x="6080760" y="2726055"/>
-            <a:ext cx="4750307" cy="1280160"/>
+            <a:off x="822960" y="3611880"/>
+            <a:ext cx="640080" cy="548640"/>
           </a:xfrm>
           <a:prstGeom prst="rect">
             <a:avLst/>
@@ -8300,25 +9147,524 @@
           <a:p>
             <a:pPr algn="ctr"/>
             <a:r>
-              <a:rPr sz="1400" b="1" i="0">
-                <a:solidFill>
-                  <a:srgbClr val="64748B"/>
-                </a:solidFill>
-                <a:latin typeface="Montserrat"/>
-              </a:rPr>
-              <a:t>IMAGEN REALISTA</a:t>
-            </a:r>
-          </a:p>
+              <a:rPr sz="2200" b="1" i="0">
+                <a:solidFill>
+                  <a:srgbClr val="FFFFFF"/>
+                </a:solidFill>
+                <a:latin typeface="Montserrat"/>
+              </a:rPr>
+              <a:t>A</a:t>
+            </a:r>
+          </a:p>
+        </p:txBody>
+      </p:sp>
+      <p:sp>
+        <p:nvSpPr>
+          <p:cNvPr id="11" name="TextBox 10"/>
+          <p:cNvSpPr txBox="1"/>
+          <p:nvPr/>
+        </p:nvSpPr>
+        <p:spPr>
+          <a:xfrm>
+            <a:off x="1600200" y="3474720"/>
+            <a:ext cx="4114800" cy="868680"/>
+          </a:xfrm>
+          <a:prstGeom prst="rect">
+            <a:avLst/>
+          </a:prstGeom>
+          <a:noFill/>
+        </p:spPr>
+        <p:txBody>
+          <a:bodyPr wrap="square">
+            <a:spAutoFit/>
+          </a:bodyPr>
+          <a:lstStyle/>
+          <a:p>
+            <a:r>
+              <a:rPr sz="1400" b="0" i="0">
+                <a:solidFill>
+                  <a:srgbClr val="1B2330"/>
+                </a:solidFill>
+                <a:latin typeface="Montserrat"/>
+              </a:rPr>
+              <a:t>IRG-1, acometida interior</a:t>
+            </a:r>
+          </a:p>
+        </p:txBody>
+      </p:sp>
+      <p:sp>
+        <p:nvSpPr>
+          <p:cNvPr id="12" name="Rounded Rectangle 11"/>
+          <p:cNvSpPr/>
+          <p:nvPr/>
+        </p:nvSpPr>
+        <p:spPr>
+          <a:xfrm>
+            <a:off x="6355080" y="3291840"/>
+            <a:ext cx="4983480" cy="1143000"/>
+          </a:xfrm>
+          <a:prstGeom prst="roundRect">
+            <a:avLst/>
+          </a:prstGeom>
+          <a:solidFill>
+            <a:srgbClr val="F3F6FB"/>
+          </a:solidFill>
+          <a:ln w="12700">
+            <a:solidFill>
+              <a:srgbClr val="C7D2E6"/>
+            </a:solidFill>
+          </a:ln>
+          <a:effectLst/>
+        </p:spPr>
+        <p:style>
+          <a:lnRef idx="1">
+            <a:schemeClr val="accent1"/>
+          </a:lnRef>
+          <a:fillRef idx="3">
+            <a:schemeClr val="accent1"/>
+          </a:fillRef>
+          <a:effectRef idx="2">
+            <a:schemeClr val="accent1"/>
+          </a:effectRef>
+          <a:fontRef idx="minor">
+            <a:schemeClr val="lt1"/>
+          </a:fontRef>
+        </p:style>
+        <p:txBody>
+          <a:bodyPr rtlCol="0" anchor="ctr"/>
+          <a:lstStyle/>
           <a:p>
             <a:pPr algn="ctr"/>
-            <a:r>
-              <a:rPr sz="1100" b="0" i="1">
-                <a:solidFill>
-                  <a:srgbClr val="64748B"/>
-                </a:solidFill>
-                <a:latin typeface="Montserrat"/>
-              </a:rPr>
-              <a:t>gas meter and regulator being inspected</a:t>
+          </a:p>
+        </p:txBody>
+      </p:sp>
+      <p:sp>
+        <p:nvSpPr>
+          <p:cNvPr id="13" name="Rectangle 12"/>
+          <p:cNvSpPr/>
+          <p:nvPr/>
+        </p:nvSpPr>
+        <p:spPr>
+          <a:xfrm>
+            <a:off x="6355080" y="3291840"/>
+            <a:ext cx="640080" cy="1143000"/>
+          </a:xfrm>
+          <a:prstGeom prst="rect">
+            <a:avLst/>
+          </a:prstGeom>
+          <a:solidFill>
+            <a:srgbClr val="1E2761"/>
+          </a:solidFill>
+          <a:ln>
+            <a:noFill/>
+          </a:ln>
+          <a:effectLst/>
+        </p:spPr>
+        <p:style>
+          <a:lnRef idx="1">
+            <a:schemeClr val="accent1"/>
+          </a:lnRef>
+          <a:fillRef idx="3">
+            <a:schemeClr val="accent1"/>
+          </a:fillRef>
+          <a:effectRef idx="2">
+            <a:schemeClr val="accent1"/>
+          </a:effectRef>
+          <a:fontRef idx="minor">
+            <a:schemeClr val="lt1"/>
+          </a:fontRef>
+        </p:style>
+        <p:txBody>
+          <a:bodyPr rtlCol="0" anchor="ctr"/>
+          <a:lstStyle/>
+          <a:p>
+            <a:pPr algn="ctr"/>
+          </a:p>
+        </p:txBody>
+      </p:sp>
+      <p:sp>
+        <p:nvSpPr>
+          <p:cNvPr id="14" name="TextBox 13"/>
+          <p:cNvSpPr txBox="1"/>
+          <p:nvPr/>
+        </p:nvSpPr>
+        <p:spPr>
+          <a:xfrm>
+            <a:off x="6355080" y="3611880"/>
+            <a:ext cx="640080" cy="548640"/>
+          </a:xfrm>
+          <a:prstGeom prst="rect">
+            <a:avLst/>
+          </a:prstGeom>
+          <a:noFill/>
+        </p:spPr>
+        <p:txBody>
+          <a:bodyPr wrap="square">
+            <a:spAutoFit/>
+          </a:bodyPr>
+          <a:lstStyle/>
+          <a:p>
+            <a:pPr algn="ctr"/>
+            <a:r>
+              <a:rPr sz="2200" b="1" i="0">
+                <a:solidFill>
+                  <a:srgbClr val="FFFFFF"/>
+                </a:solidFill>
+                <a:latin typeface="Montserrat"/>
+              </a:rPr>
+              <a:t>B</a:t>
+            </a:r>
+          </a:p>
+        </p:txBody>
+      </p:sp>
+      <p:sp>
+        <p:nvSpPr>
+          <p:cNvPr id="15" name="TextBox 14"/>
+          <p:cNvSpPr txBox="1"/>
+          <p:nvPr/>
+        </p:nvSpPr>
+        <p:spPr>
+          <a:xfrm>
+            <a:off x="7132320" y="3474720"/>
+            <a:ext cx="4114800" cy="868680"/>
+          </a:xfrm>
+          <a:prstGeom prst="rect">
+            <a:avLst/>
+          </a:prstGeom>
+          <a:noFill/>
+        </p:spPr>
+        <p:txBody>
+          <a:bodyPr wrap="square">
+            <a:spAutoFit/>
+          </a:bodyPr>
+          <a:lstStyle/>
+          <a:p>
+            <a:r>
+              <a:rPr sz="1400" b="0" i="0">
+                <a:solidFill>
+                  <a:srgbClr val="1B2330"/>
+                </a:solidFill>
+                <a:latin typeface="Montserrat"/>
+              </a:rPr>
+              <a:t>IRG-2, instalación común</a:t>
+            </a:r>
+          </a:p>
+        </p:txBody>
+      </p:sp>
+      <p:sp>
+        <p:nvSpPr>
+          <p:cNvPr id="16" name="Rounded Rectangle 15"/>
+          <p:cNvSpPr/>
+          <p:nvPr/>
+        </p:nvSpPr>
+        <p:spPr>
+          <a:xfrm>
+            <a:off x="822960" y="4617720"/>
+            <a:ext cx="4983480" cy="1143000"/>
+          </a:xfrm>
+          <a:prstGeom prst="roundRect">
+            <a:avLst/>
+          </a:prstGeom>
+          <a:solidFill>
+            <a:srgbClr val="F3F6FB"/>
+          </a:solidFill>
+          <a:ln w="12700">
+            <a:solidFill>
+              <a:srgbClr val="C7D2E6"/>
+            </a:solidFill>
+          </a:ln>
+          <a:effectLst/>
+        </p:spPr>
+        <p:style>
+          <a:lnRef idx="1">
+            <a:schemeClr val="accent1"/>
+          </a:lnRef>
+          <a:fillRef idx="3">
+            <a:schemeClr val="accent1"/>
+          </a:fillRef>
+          <a:effectRef idx="2">
+            <a:schemeClr val="accent1"/>
+          </a:effectRef>
+          <a:fontRef idx="minor">
+            <a:schemeClr val="lt1"/>
+          </a:fontRef>
+        </p:style>
+        <p:txBody>
+          <a:bodyPr rtlCol="0" anchor="ctr"/>
+          <a:lstStyle/>
+          <a:p>
+            <a:pPr algn="ctr"/>
+          </a:p>
+        </p:txBody>
+      </p:sp>
+      <p:sp>
+        <p:nvSpPr>
+          <p:cNvPr id="17" name="Rectangle 16"/>
+          <p:cNvSpPr/>
+          <p:nvPr/>
+        </p:nvSpPr>
+        <p:spPr>
+          <a:xfrm>
+            <a:off x="822960" y="4617720"/>
+            <a:ext cx="640080" cy="1143000"/>
+          </a:xfrm>
+          <a:prstGeom prst="rect">
+            <a:avLst/>
+          </a:prstGeom>
+          <a:solidFill>
+            <a:srgbClr val="1E2761"/>
+          </a:solidFill>
+          <a:ln>
+            <a:noFill/>
+          </a:ln>
+          <a:effectLst/>
+        </p:spPr>
+        <p:style>
+          <a:lnRef idx="1">
+            <a:schemeClr val="accent1"/>
+          </a:lnRef>
+          <a:fillRef idx="3">
+            <a:schemeClr val="accent1"/>
+          </a:fillRef>
+          <a:effectRef idx="2">
+            <a:schemeClr val="accent1"/>
+          </a:effectRef>
+          <a:fontRef idx="minor">
+            <a:schemeClr val="lt1"/>
+          </a:fontRef>
+        </p:style>
+        <p:txBody>
+          <a:bodyPr rtlCol="0" anchor="ctr"/>
+          <a:lstStyle/>
+          <a:p>
+            <a:pPr algn="ctr"/>
+          </a:p>
+        </p:txBody>
+      </p:sp>
+      <p:sp>
+        <p:nvSpPr>
+          <p:cNvPr id="18" name="TextBox 17"/>
+          <p:cNvSpPr txBox="1"/>
+          <p:nvPr/>
+        </p:nvSpPr>
+        <p:spPr>
+          <a:xfrm>
+            <a:off x="822960" y="4937760"/>
+            <a:ext cx="640080" cy="548640"/>
+          </a:xfrm>
+          <a:prstGeom prst="rect">
+            <a:avLst/>
+          </a:prstGeom>
+          <a:noFill/>
+        </p:spPr>
+        <p:txBody>
+          <a:bodyPr wrap="square">
+            <a:spAutoFit/>
+          </a:bodyPr>
+          <a:lstStyle/>
+          <a:p>
+            <a:pPr algn="ctr"/>
+            <a:r>
+              <a:rPr sz="2200" b="1" i="0">
+                <a:solidFill>
+                  <a:srgbClr val="FFFFFF"/>
+                </a:solidFill>
+                <a:latin typeface="Montserrat"/>
+              </a:rPr>
+              <a:t>C</a:t>
+            </a:r>
+          </a:p>
+        </p:txBody>
+      </p:sp>
+      <p:sp>
+        <p:nvSpPr>
+          <p:cNvPr id="19" name="TextBox 18"/>
+          <p:cNvSpPr txBox="1"/>
+          <p:nvPr/>
+        </p:nvSpPr>
+        <p:spPr>
+          <a:xfrm>
+            <a:off x="1600200" y="4800600"/>
+            <a:ext cx="4114800" cy="868680"/>
+          </a:xfrm>
+          <a:prstGeom prst="rect">
+            <a:avLst/>
+          </a:prstGeom>
+          <a:noFill/>
+        </p:spPr>
+        <p:txBody>
+          <a:bodyPr wrap="square">
+            <a:spAutoFit/>
+          </a:bodyPr>
+          <a:lstStyle/>
+          <a:p>
+            <a:r>
+              <a:rPr sz="1400" b="0" i="0">
+                <a:solidFill>
+                  <a:srgbClr val="1B2330"/>
+                </a:solidFill>
+                <a:latin typeface="Montserrat"/>
+              </a:rPr>
+              <a:t>IRG-3, instalación individual</a:t>
+            </a:r>
+          </a:p>
+        </p:txBody>
+      </p:sp>
+      <p:sp>
+        <p:nvSpPr>
+          <p:cNvPr id="20" name="Rounded Rectangle 19"/>
+          <p:cNvSpPr/>
+          <p:nvPr/>
+        </p:nvSpPr>
+        <p:spPr>
+          <a:xfrm>
+            <a:off x="6355080" y="4617720"/>
+            <a:ext cx="4983480" cy="1143000"/>
+          </a:xfrm>
+          <a:prstGeom prst="roundRect">
+            <a:avLst/>
+          </a:prstGeom>
+          <a:solidFill>
+            <a:srgbClr val="F3F6FB"/>
+          </a:solidFill>
+          <a:ln w="12700">
+            <a:solidFill>
+              <a:srgbClr val="C7D2E6"/>
+            </a:solidFill>
+          </a:ln>
+          <a:effectLst/>
+        </p:spPr>
+        <p:style>
+          <a:lnRef idx="1">
+            <a:schemeClr val="accent1"/>
+          </a:lnRef>
+          <a:fillRef idx="3">
+            <a:schemeClr val="accent1"/>
+          </a:fillRef>
+          <a:effectRef idx="2">
+            <a:schemeClr val="accent1"/>
+          </a:effectRef>
+          <a:fontRef idx="minor">
+            <a:schemeClr val="lt1"/>
+          </a:fontRef>
+        </p:style>
+        <p:txBody>
+          <a:bodyPr rtlCol="0" anchor="ctr"/>
+          <a:lstStyle/>
+          <a:p>
+            <a:pPr algn="ctr"/>
+          </a:p>
+        </p:txBody>
+      </p:sp>
+      <p:sp>
+        <p:nvSpPr>
+          <p:cNvPr id="21" name="Rectangle 20"/>
+          <p:cNvSpPr/>
+          <p:nvPr/>
+        </p:nvSpPr>
+        <p:spPr>
+          <a:xfrm>
+            <a:off x="6355080" y="4617720"/>
+            <a:ext cx="640080" cy="1143000"/>
+          </a:xfrm>
+          <a:prstGeom prst="rect">
+            <a:avLst/>
+          </a:prstGeom>
+          <a:solidFill>
+            <a:srgbClr val="1E2761"/>
+          </a:solidFill>
+          <a:ln>
+            <a:noFill/>
+          </a:ln>
+          <a:effectLst/>
+        </p:spPr>
+        <p:style>
+          <a:lnRef idx="1">
+            <a:schemeClr val="accent1"/>
+          </a:lnRef>
+          <a:fillRef idx="3">
+            <a:schemeClr val="accent1"/>
+          </a:fillRef>
+          <a:effectRef idx="2">
+            <a:schemeClr val="accent1"/>
+          </a:effectRef>
+          <a:fontRef idx="minor">
+            <a:schemeClr val="lt1"/>
+          </a:fontRef>
+        </p:style>
+        <p:txBody>
+          <a:bodyPr rtlCol="0" anchor="ctr"/>
+          <a:lstStyle/>
+          <a:p>
+            <a:pPr algn="ctr"/>
+          </a:p>
+        </p:txBody>
+      </p:sp>
+      <p:sp>
+        <p:nvSpPr>
+          <p:cNvPr id="22" name="TextBox 21"/>
+          <p:cNvSpPr txBox="1"/>
+          <p:nvPr/>
+        </p:nvSpPr>
+        <p:spPr>
+          <a:xfrm>
+            <a:off x="6355080" y="4937760"/>
+            <a:ext cx="640080" cy="548640"/>
+          </a:xfrm>
+          <a:prstGeom prst="rect">
+            <a:avLst/>
+          </a:prstGeom>
+          <a:noFill/>
+        </p:spPr>
+        <p:txBody>
+          <a:bodyPr wrap="square">
+            <a:spAutoFit/>
+          </a:bodyPr>
+          <a:lstStyle/>
+          <a:p>
+            <a:pPr algn="ctr"/>
+            <a:r>
+              <a:rPr sz="2200" b="1" i="0">
+                <a:solidFill>
+                  <a:srgbClr val="FFFFFF"/>
+                </a:solidFill>
+                <a:latin typeface="Montserrat"/>
+              </a:rPr>
+              <a:t>D</a:t>
+            </a:r>
+          </a:p>
+        </p:txBody>
+      </p:sp>
+      <p:sp>
+        <p:nvSpPr>
+          <p:cNvPr id="23" name="TextBox 22"/>
+          <p:cNvSpPr txBox="1"/>
+          <p:nvPr/>
+        </p:nvSpPr>
+        <p:spPr>
+          <a:xfrm>
+            <a:off x="7132320" y="4800600"/>
+            <a:ext cx="4114800" cy="868680"/>
+          </a:xfrm>
+          <a:prstGeom prst="rect">
+            <a:avLst/>
+          </a:prstGeom>
+          <a:noFill/>
+        </p:spPr>
+        <p:txBody>
+          <a:bodyPr wrap="square">
+            <a:spAutoFit/>
+          </a:bodyPr>
+          <a:lstStyle/>
+          <a:p>
+            <a:r>
+              <a:rPr sz="1400" b="0" i="0">
+                <a:solidFill>
+                  <a:srgbClr val="1B2330"/>
+                </a:solidFill>
+                <a:latin typeface="Montserrat"/>
+              </a:rPr>
+              <a:t>Los tres por igual</a:t>
             </a:r>
           </a:p>
         </p:txBody>
@@ -8328,6 +9674,18 @@
   <p:clrMapOvr>
     <a:masterClrMapping/>
   </p:clrMapOvr>
+  <mc:AlternateContent xmlns:mc="http://schemas.openxmlformats.org/markup-compatibility/2006">
+    <mc:Choice xmlns:p14="http://schemas.microsoft.com/office/powerpoint/2010/main" Requires="p14">
+      <p:transition spd="med" p14:dur="700">
+        <p14:cube dir="r"/>
+      </p:transition>
+    </mc:Choice>
+    <mc:Fallback>
+      <p:transition spd="med">
+        <p:push dir="r"/>
+      </p:transition>
+    </mc:Fallback>
+  </mc:AlternateContent>
 </p:sld>
 </file>
 
@@ -8415,7 +9773,7 @@
                 </a:solidFill>
                 <a:latin typeface="Montserrat"/>
               </a:rPr>
-              <a:t>017 / 021</a:t>
+              <a:t>017 / 027</a:t>
             </a:r>
           </a:p>
         </p:txBody>
@@ -8456,88 +9814,20 @@
       </p:sp>
       <p:sp>
         <p:nvSpPr>
-          <p:cNvPr id="5" name="TextBox 4"/>
-          <p:cNvSpPr txBox="1"/>
-          <p:nvPr/>
-        </p:nvSpPr>
-        <p:spPr>
-          <a:xfrm>
-            <a:off x="822960" y="457200"/>
-            <a:ext cx="10058400" cy="365760"/>
-          </a:xfrm>
-          <a:prstGeom prst="rect">
-            <a:avLst/>
-          </a:prstGeom>
-          <a:noFill/>
-        </p:spPr>
-        <p:txBody>
-          <a:bodyPr wrap="square">
-            <a:spAutoFit/>
-          </a:bodyPr>
-          <a:lstStyle/>
-          <a:p>
-            <a:r>
-              <a:rPr sz="1300" b="1" i="0">
-                <a:solidFill>
-                  <a:srgbClr val="E8801A"/>
-                </a:solidFill>
-                <a:latin typeface="Montserrat"/>
-              </a:rPr>
-              <a:t>APARTADO 3.5.1 · QUIÉN ACTÚA</a:t>
-            </a:r>
-          </a:p>
-        </p:txBody>
-      </p:sp>
-      <p:sp>
-        <p:nvSpPr>
-          <p:cNvPr id="6" name="TextBox 5"/>
-          <p:cNvSpPr txBox="1"/>
-          <p:nvPr/>
-        </p:nvSpPr>
-        <p:spPr>
-          <a:xfrm>
-            <a:off x="822960" y="868680"/>
-            <a:ext cx="10515600" cy="914400"/>
-          </a:xfrm>
-          <a:prstGeom prst="rect">
-            <a:avLst/>
-          </a:prstGeom>
-          <a:noFill/>
-        </p:spPr>
-        <p:txBody>
-          <a:bodyPr wrap="square">
-            <a:spAutoFit/>
-          </a:bodyPr>
-          <a:lstStyle/>
-          <a:p>
-            <a:r>
-              <a:rPr sz="2800" b="1" i="0">
-                <a:solidFill>
-                  <a:srgbClr val="1E2761"/>
-                </a:solidFill>
-                <a:latin typeface="Montserrat"/>
-              </a:rPr>
-              <a:t>¿Quién da el gas?</a:t>
-            </a:r>
-          </a:p>
-        </p:txBody>
-      </p:sp>
-      <p:sp>
-        <p:nvSpPr>
-          <p:cNvPr id="7" name="Rounded Rectangle 6"/>
+          <p:cNvPr id="5" name="Rectangle 4"/>
           <p:cNvSpPr/>
           <p:nvPr/>
         </p:nvSpPr>
         <p:spPr>
           <a:xfrm>
-            <a:off x="868680" y="1627632"/>
-            <a:ext cx="2011680" cy="73152"/>
-          </a:xfrm>
-          <a:prstGeom prst="roundRect">
+            <a:off x="0" y="0"/>
+            <a:ext cx="12191695" cy="1143000"/>
+          </a:xfrm>
+          <a:prstGeom prst="rect">
             <a:avLst/>
           </a:prstGeom>
           <a:solidFill>
-            <a:srgbClr val="E8801A"/>
+            <a:srgbClr val="1E8E4B"/>
           </a:solidFill>
           <a:ln>
             <a:noFill/>
@@ -8568,14 +9858,14 @@
       </p:sp>
       <p:sp>
         <p:nvSpPr>
-          <p:cNvPr id="8" name="TextBox 7"/>
+          <p:cNvPr id="6" name="TextBox 5"/>
           <p:cNvSpPr txBox="1"/>
           <p:nvPr/>
         </p:nvSpPr>
         <p:spPr>
           <a:xfrm>
-            <a:off x="822960" y="1965960"/>
-            <a:ext cx="4983480" cy="4206240"/>
+            <a:off x="822960" y="274320"/>
+            <a:ext cx="10515600" cy="640080"/>
           </a:xfrm>
           <a:prstGeom prst="rect">
             <a:avLst/>
@@ -8588,102 +9878,72 @@
           </a:bodyPr>
           <a:lstStyle/>
           <a:p>
-            <a:pPr>
-              <a:spcAft>
-                <a:spcPts val="1100"/>
-              </a:spcAft>
-            </a:pPr>
-            <a:r>
-              <a:rPr sz="1600" b="1" i="0">
-                <a:solidFill>
-                  <a:srgbClr val="E8801A"/>
-                </a:solidFill>
-                <a:latin typeface="Montserrat"/>
-              </a:rPr>
-              <a:t>▸  </a:t>
-            </a:r>
-            <a:r>
-              <a:rPr sz="1600" b="0" i="0">
-                <a:solidFill>
-                  <a:srgbClr val="1B2330"/>
-                </a:solidFill>
-                <a:latin typeface="Montserrat"/>
-              </a:rPr>
-              <a:t>Con red: el distribuidor</a:t>
-            </a:r>
-          </a:p>
-          <a:p>
-            <a:pPr>
-              <a:spcAft>
-                <a:spcPts val="1100"/>
-              </a:spcAft>
-            </a:pPr>
-            <a:r>
-              <a:rPr sz="1600" b="1" i="0">
-                <a:solidFill>
-                  <a:srgbClr val="E8801A"/>
-                </a:solidFill>
-                <a:latin typeface="Montserrat"/>
-              </a:rPr>
-              <a:t>▸  </a:t>
-            </a:r>
-            <a:r>
-              <a:rPr sz="1600" b="0" i="0">
-                <a:solidFill>
-                  <a:srgbClr val="1B2330"/>
-                </a:solidFill>
-                <a:latin typeface="Montserrat"/>
-              </a:rPr>
-              <a:t>Sin red: el suministrador</a:t>
-            </a:r>
-          </a:p>
-          <a:p>
-            <a:pPr>
-              <a:spcAft>
-                <a:spcPts val="1100"/>
-              </a:spcAft>
-            </a:pPr>
-            <a:r>
-              <a:rPr sz="1600" b="1" i="0">
-                <a:solidFill>
-                  <a:srgbClr val="E8801A"/>
-                </a:solidFill>
-                <a:latin typeface="Montserrat"/>
-              </a:rPr>
-              <a:t>▸  </a:t>
-            </a:r>
-            <a:r>
-              <a:rPr sz="1600" b="0" i="0">
-                <a:solidFill>
-                  <a:srgbClr val="1B2330"/>
-                </a:solidFill>
-                <a:latin typeface="Montserrat"/>
-              </a:rPr>
-              <a:t>Mismas pruebas, cambia el agente</a:t>
-            </a:r>
-          </a:p>
-        </p:txBody>
-      </p:sp>
-      <p:sp>
-        <p:nvSpPr>
-          <p:cNvPr id="9" name="imgph" descr="IMGQ:gas distribution technician at meter cabinet"/>
+            <a:r>
+              <a:rPr sz="2400" b="1" i="0">
+                <a:solidFill>
+                  <a:srgbClr val="FFFFFF"/>
+                </a:solidFill>
+                <a:latin typeface="Montserrat"/>
+              </a:rPr>
+              <a:t>✔  RESPUESTA:  C</a:t>
+            </a:r>
+          </a:p>
+        </p:txBody>
+      </p:sp>
+      <p:sp>
+        <p:nvSpPr>
+          <p:cNvPr id="7" name="TextBox 6"/>
+          <p:cNvSpPr txBox="1"/>
+          <p:nvPr/>
+        </p:nvSpPr>
+        <p:spPr>
+          <a:xfrm>
+            <a:off x="822960" y="1417320"/>
+            <a:ext cx="10515600" cy="914400"/>
+          </a:xfrm>
+          <a:prstGeom prst="rect">
+            <a:avLst/>
+          </a:prstGeom>
+          <a:noFill/>
+        </p:spPr>
+        <p:txBody>
+          <a:bodyPr wrap="square">
+            <a:spAutoFit/>
+          </a:bodyPr>
+          <a:lstStyle/>
+          <a:p>
+            <a:r>
+              <a:rPr sz="1800" b="1" i="0">
+                <a:solidFill>
+                  <a:srgbClr val="64748B"/>
+                </a:solidFill>
+                <a:latin typeface="Montserrat"/>
+              </a:rPr>
+              <a:t>¿Cuál de los certificados de instalación lista los aparatos y su consumo?</a:t>
+            </a:r>
+          </a:p>
+        </p:txBody>
+      </p:sp>
+      <p:sp>
+        <p:nvSpPr>
+          <p:cNvPr id="8" name="Rounded Rectangle 7"/>
           <p:cNvSpPr/>
           <p:nvPr/>
         </p:nvSpPr>
         <p:spPr>
           <a:xfrm>
-            <a:off x="5806440" y="1051560"/>
-            <a:ext cx="5298947" cy="4629150"/>
+            <a:off x="822960" y="2514600"/>
+            <a:ext cx="10515600" cy="914400"/>
           </a:xfrm>
           <a:prstGeom prst="roundRect">
             <a:avLst/>
           </a:prstGeom>
           <a:solidFill>
-            <a:srgbClr val="F3F6FB"/>
+            <a:srgbClr val="E9F6EE"/>
           </a:solidFill>
           <a:ln w="12700">
             <a:solidFill>
-              <a:srgbClr val="C7D2E6"/>
+              <a:srgbClr val="1E8E4B"/>
             </a:solidFill>
           </a:ln>
           <a:effectLst/>
@@ -8712,14 +9972,14 @@
       </p:sp>
       <p:sp>
         <p:nvSpPr>
-          <p:cNvPr id="10" name="TextBox 9"/>
+          <p:cNvPr id="9" name="TextBox 8"/>
           <p:cNvSpPr txBox="1"/>
           <p:nvPr/>
         </p:nvSpPr>
         <p:spPr>
           <a:xfrm>
-            <a:off x="6080760" y="2726055"/>
-            <a:ext cx="4750307" cy="1280160"/>
+            <a:off x="1097280" y="2697480"/>
+            <a:ext cx="10058400" cy="640080"/>
           </a:xfrm>
           <a:prstGeom prst="rect">
             <a:avLst/>
@@ -8732,27 +9992,66 @@
           </a:bodyPr>
           <a:lstStyle/>
           <a:p>
-            <a:pPr algn="ctr"/>
-            <a:r>
-              <a:rPr sz="1400" b="1" i="0">
-                <a:solidFill>
-                  <a:srgbClr val="64748B"/>
-                </a:solidFill>
-                <a:latin typeface="Montserrat"/>
-              </a:rPr>
-              <a:t>IMAGEN REALISTA</a:t>
-            </a:r>
-          </a:p>
-          <a:p>
-            <a:pPr algn="ctr"/>
-            <a:r>
-              <a:rPr sz="1100" b="0" i="1">
-                <a:solidFill>
-                  <a:srgbClr val="64748B"/>
-                </a:solidFill>
-                <a:latin typeface="Montserrat"/>
-              </a:rPr>
-              <a:t>gas distribution technician at meter cabinet</a:t>
+            <a:r>
+              <a:rPr sz="1800" b="1" i="0">
+                <a:solidFill>
+                  <a:srgbClr val="1E8E4B"/>
+                </a:solidFill>
+                <a:latin typeface="Montserrat"/>
+              </a:rPr>
+              <a:t>C.  </a:t>
+            </a:r>
+            <a:r>
+              <a:rPr sz="1800" b="1" i="0">
+                <a:solidFill>
+                  <a:srgbClr val="1E2761"/>
+                </a:solidFill>
+                <a:latin typeface="Montserrat"/>
+              </a:rPr>
+              <a:t>IRG-3, instalación individual</a:t>
+            </a:r>
+          </a:p>
+        </p:txBody>
+      </p:sp>
+      <p:sp>
+        <p:nvSpPr>
+          <p:cNvPr id="10" name="TextBox 9"/>
+          <p:cNvSpPr txBox="1"/>
+          <p:nvPr/>
+        </p:nvSpPr>
+        <p:spPr>
+          <a:xfrm>
+            <a:off x="822960" y="3749039"/>
+            <a:ext cx="10515600" cy="2194560"/>
+          </a:xfrm>
+          <a:prstGeom prst="rect">
+            <a:avLst/>
+          </a:prstGeom>
+          <a:noFill/>
+        </p:spPr>
+        <p:txBody>
+          <a:bodyPr wrap="square">
+            <a:spAutoFit/>
+          </a:bodyPr>
+          <a:lstStyle/>
+          <a:p>
+            <a:r>
+              <a:rPr sz="1500" b="1" i="0">
+                <a:solidFill>
+                  <a:srgbClr val="E8801A"/>
+                </a:solidFill>
+                <a:latin typeface="Montserrat"/>
+              </a:rPr>
+              <a:t>Por qué:  </a:t>
+            </a:r>
+            <a:r>
+              <a:rPr sz="1500" b="0" i="0">
+                <a:solidFill>
+                  <a:srgbClr val="1B2330"/>
+                </a:solidFill>
+                <a:latin typeface="Montserrat"/>
+              </a:rPr>
+              <a:t>Solo el individual, el IRG-3, llega hasta los aparatos dentro de la vivienda, así que es el único que los lista con su consumo nominal.</a:t>
             </a:r>
           </a:p>
         </p:txBody>
@@ -8762,6 +10061,18 @@
   <p:clrMapOvr>
     <a:masterClrMapping/>
   </p:clrMapOvr>
+  <mc:AlternateContent xmlns:mc="http://schemas.openxmlformats.org/markup-compatibility/2006">
+    <mc:Choice xmlns:p14="http://schemas.microsoft.com/office/powerpoint/2010/main" Requires="p14">
+      <p:transition spd="med" p14:dur="700">
+        <p14:cube dir="l"/>
+      </p:transition>
+    </mc:Choice>
+    <mc:Fallback>
+      <p:transition spd="med">
+        <p:push dir="l"/>
+      </p:transition>
+    </mc:Fallback>
+  </mc:AlternateContent>
 </p:sld>
 </file>
 
@@ -8849,7 +10160,7 @@
                 </a:solidFill>
                 <a:latin typeface="Montserrat"/>
               </a:rPr>
-              <a:t>018 / 021</a:t>
+              <a:t>018 / 027</a:t>
             </a:r>
           </a:p>
         </p:txBody>
@@ -8917,7 +10228,7 @@
                 </a:solidFill>
                 <a:latin typeface="Montserrat"/>
               </a:rPr>
-              <a:t>APARTADO 3.5.2 · SIN CONTRATO</a:t>
+              <a:t>APARTADO 3.4 · CHIMENEAS</a:t>
             </a:r>
           </a:p>
         </p:txBody>
@@ -8951,14 +10262,14 @@
                 </a:solidFill>
                 <a:latin typeface="Montserrat"/>
               </a:rPr>
-              <a:t>Sin contrato: manda la instaladora</a:t>
-            </a:r>
-          </a:p>
-        </p:txBody>
-      </p:sp>
-      <p:sp>
-        <p:nvSpPr>
-          <p:cNvPr id="7" name="Rounded Rectangle 6"/>
+              <a:t>Chimeneas en obra nueva</a:t>
+            </a:r>
+          </a:p>
+        </p:txBody>
+      </p:sp>
+      <p:sp>
+        <p:nvSpPr>
+          <p:cNvPr id="7" name="Rectangle 6"/>
           <p:cNvSpPr/>
           <p:nvPr/>
         </p:nvSpPr>
@@ -8967,7 +10278,7 @@
             <a:off x="868680" y="1627632"/>
             <a:ext cx="2011680" cy="73152"/>
           </a:xfrm>
-          <a:prstGeom prst="roundRect">
+          <a:prstGeom prst="rect">
             <a:avLst/>
           </a:prstGeom>
           <a:solidFill>
@@ -9009,7 +10320,7 @@
         <p:spPr>
           <a:xfrm>
             <a:off x="822960" y="1965960"/>
-            <a:ext cx="4983480" cy="4206240"/>
+            <a:ext cx="5029200" cy="4206240"/>
           </a:xfrm>
           <a:prstGeom prst="rect">
             <a:avLst/>
@@ -9043,7 +10354,7 @@
                 </a:solidFill>
                 <a:latin typeface="Montserrat"/>
               </a:rPr>
-              <a:t>No interviene el distribuidor</a:t>
+              <a:t>Edificio de nueva planta con chimeneas</a:t>
             </a:r>
           </a:p>
           <a:p>
@@ -9068,7 +10379,7 @@
                 </a:solidFill>
                 <a:latin typeface="Montserrat"/>
               </a:rPr>
-              <a:t>La instaladora hace las pruebas</a:t>
+              <a:t>Certificación previa a la puesta en servicio</a:t>
             </a:r>
           </a:p>
           <a:p>
@@ -9093,21 +10404,21 @@
                 </a:solidFill>
                 <a:latin typeface="Montserrat"/>
               </a:rPr>
-              <a:t>Siempre entrega certificado al titular</a:t>
-            </a:r>
-          </a:p>
-        </p:txBody>
-      </p:sp>
-      <p:sp>
-        <p:nvSpPr>
-          <p:cNvPr id="9" name="imgph" descr="IMGQ:installer handing document to homeowner"/>
+              <a:t>Técnico competente u organismo de control</a:t>
+            </a:r>
+          </a:p>
+        </p:txBody>
+      </p:sp>
+      <p:sp>
+        <p:nvSpPr>
+          <p:cNvPr id="9" name="imgph" descr="IMGQ:new building rooftop with chimney flues"/>
           <p:cNvSpPr/>
           <p:nvPr/>
         </p:nvSpPr>
         <p:spPr>
           <a:xfrm>
-            <a:off x="5806440" y="1051560"/>
-            <a:ext cx="5298947" cy="4629150"/>
+            <a:off x="6080760" y="1965960"/>
+            <a:ext cx="5303520" cy="4572000"/>
           </a:xfrm>
           <a:prstGeom prst="roundRect">
             <a:avLst/>
@@ -9152,8 +10463,8 @@
         </p:nvSpPr>
         <p:spPr>
           <a:xfrm>
-            <a:off x="6080760" y="2726055"/>
-            <a:ext cx="4750307" cy="1280160"/>
+            <a:off x="6355080" y="3611880"/>
+            <a:ext cx="4754880" cy="1280160"/>
           </a:xfrm>
           <a:prstGeom prst="rect">
             <a:avLst/>
@@ -9174,7 +10485,7 @@
                 </a:solidFill>
                 <a:latin typeface="Montserrat"/>
               </a:rPr>
-              <a:t>IMAGEN REALISTA</a:t>
+              <a:t>IMAGEN</a:t>
             </a:r>
           </a:p>
           <a:p>
@@ -9186,7 +10497,7 @@
                 </a:solidFill>
                 <a:latin typeface="Montserrat"/>
               </a:rPr>
-              <a:t>installer handing document to homeowner</a:t>
+              <a:t>new building rooftop with chimney flues</a:t>
             </a:r>
           </a:p>
         </p:txBody>
@@ -9196,6 +10507,18 @@
   <p:clrMapOvr>
     <a:masterClrMapping/>
   </p:clrMapOvr>
+  <mc:AlternateContent xmlns:mc="http://schemas.openxmlformats.org/markup-compatibility/2006">
+    <mc:Choice xmlns:p14="http://schemas.microsoft.com/office/powerpoint/2010/main" Requires="p14">
+      <p:transition spd="med" p14:dur="700">
+        <p14:cube dir="r"/>
+      </p:transition>
+    </mc:Choice>
+    <mc:Fallback>
+      <p:transition spd="med">
+        <p:push dir="r"/>
+      </p:transition>
+    </mc:Fallback>
+  </mc:AlternateContent>
 </p:sld>
 </file>
 
@@ -9283,7 +10606,7 @@
                 </a:solidFill>
                 <a:latin typeface="Montserrat"/>
               </a:rPr>
-              <a:t>019 / 021</a:t>
+              <a:t>019 / 027</a:t>
             </a:r>
           </a:p>
         </p:txBody>
@@ -9351,7 +10674,7 @@
                 </a:solidFill>
                 <a:latin typeface="Montserrat"/>
               </a:rPr>
-              <a:t>APARTADO 3.5.1 · REAPERTURA</a:t>
+              <a:t>APARTADO 3.5 · PUESTA EN SERVICIO</a:t>
             </a:r>
           </a:p>
         </p:txBody>
@@ -9385,14 +10708,14 @@
                 </a:solidFill>
                 <a:latin typeface="Montserrat"/>
               </a:rPr>
-              <a:t>La regla del año</a:t>
-            </a:r>
-          </a:p>
-        </p:txBody>
-      </p:sp>
-      <p:sp>
-        <p:nvSpPr>
-          <p:cNvPr id="7" name="Rounded Rectangle 6"/>
+              <a:t>Cerrar, bloquear, precintar, taponar</a:t>
+            </a:r>
+          </a:p>
+        </p:txBody>
+      </p:sp>
+      <p:sp>
+        <p:nvSpPr>
+          <p:cNvPr id="7" name="Rectangle 6"/>
           <p:cNvSpPr/>
           <p:nvPr/>
         </p:nvSpPr>
@@ -9401,7 +10724,7 @@
             <a:off x="868680" y="1627632"/>
             <a:ext cx="2011680" cy="73152"/>
           </a:xfrm>
-          <a:prstGeom prst="roundRect">
+          <a:prstGeom prst="rect">
             <a:avLst/>
           </a:prstGeom>
           <a:solidFill>
@@ -9442,8 +10765,8 @@
         </p:nvSpPr>
         <p:spPr>
           <a:xfrm>
-            <a:off x="822960" y="1965960"/>
-            <a:ext cx="4983480" cy="4206240"/>
+            <a:off x="6355080" y="1965960"/>
+            <a:ext cx="5029200" cy="4206240"/>
           </a:xfrm>
           <a:prstGeom prst="rect">
             <a:avLst/>
@@ -9477,7 +10800,7 @@
                 </a:solidFill>
                 <a:latin typeface="Montserrat"/>
               </a:rPr>
-              <a:t>Más de un año sin suministro</a:t>
+              <a:t>Llaves de viviendas sin contrato</a:t>
             </a:r>
           </a:p>
           <a:p>
@@ -9502,7 +10825,7 @@
                 </a:solidFill>
                 <a:latin typeface="Montserrat"/>
               </a:rPr>
-              <a:t>tras resolver el contrato</a:t>
+              <a:t>Cerradas, bloqueadas y precintadas</a:t>
             </a:r>
           </a:p>
           <a:p>
@@ -9527,21 +10850,21 @@
                 </a:solidFill>
                 <a:latin typeface="Montserrat"/>
               </a:rPr>
-              <a:t>Se trata como instalación nueva</a:t>
-            </a:r>
-          </a:p>
-        </p:txBody>
-      </p:sp>
-      <p:sp>
-        <p:nvSpPr>
-          <p:cNvPr id="9" name="imgph" descr="IMGQ:old closed gas meter in cabinet"/>
+              <a:t>Taponadas si no hay aparato</a:t>
+            </a:r>
+          </a:p>
+        </p:txBody>
+      </p:sp>
+      <p:sp>
+        <p:nvSpPr>
+          <p:cNvPr id="9" name="imgph" descr="IMGQ:gas valve with security seal"/>
           <p:cNvSpPr/>
           <p:nvPr/>
         </p:nvSpPr>
         <p:spPr>
           <a:xfrm>
-            <a:off x="5806440" y="1051560"/>
-            <a:ext cx="5298947" cy="4629150"/>
+            <a:off x="822960" y="1965960"/>
+            <a:ext cx="5303520" cy="4572000"/>
           </a:xfrm>
           <a:prstGeom prst="roundRect">
             <a:avLst/>
@@ -9586,8 +10909,8 @@
         </p:nvSpPr>
         <p:spPr>
           <a:xfrm>
-            <a:off x="6080760" y="2726055"/>
-            <a:ext cx="4750307" cy="1280160"/>
+            <a:off x="1097280" y="3611880"/>
+            <a:ext cx="4754880" cy="1280160"/>
           </a:xfrm>
           <a:prstGeom prst="rect">
             <a:avLst/>
@@ -9608,7 +10931,7 @@
                 </a:solidFill>
                 <a:latin typeface="Montserrat"/>
               </a:rPr>
-              <a:t>IMAGEN REALISTA</a:t>
+              <a:t>IMAGEN</a:t>
             </a:r>
           </a:p>
           <a:p>
@@ -9620,7 +10943,7 @@
                 </a:solidFill>
                 <a:latin typeface="Montserrat"/>
               </a:rPr>
-              <a:t>old closed gas meter in cabinet</a:t>
+              <a:t>gas valve with security seal</a:t>
             </a:r>
           </a:p>
         </p:txBody>
@@ -9630,6 +10953,18 @@
   <p:clrMapOvr>
     <a:masterClrMapping/>
   </p:clrMapOvr>
+  <mc:AlternateContent xmlns:mc="http://schemas.openxmlformats.org/markup-compatibility/2006">
+    <mc:Choice xmlns:p14="http://schemas.microsoft.com/office/powerpoint/2010/main" Requires="p14">
+      <p:transition spd="med" p14:dur="700">
+        <p14:cube dir="l"/>
+      </p:transition>
+    </mc:Choice>
+    <mc:Fallback>
+      <p:transition spd="med">
+        <p:push dir="l"/>
+      </p:transition>
+    </mc:Fallback>
+  </mc:AlternateContent>
 </p:sld>
 </file>
 
@@ -9717,7 +11052,7 @@
                 </a:solidFill>
                 <a:latin typeface="Montserrat"/>
               </a:rPr>
-              <a:t>002 / 021</a:t>
+              <a:t>002 / 027</a:t>
             </a:r>
           </a:p>
         </p:txBody>
@@ -9792,7 +11127,7 @@
       </p:sp>
       <p:sp>
         <p:nvSpPr>
-          <p:cNvPr id="6" name="Rounded Rectangle 5"/>
+          <p:cNvPr id="6" name="Rectangle 5"/>
           <p:cNvSpPr/>
           <p:nvPr/>
         </p:nvSpPr>
@@ -9801,7 +11136,7 @@
             <a:off x="868680" y="1234440"/>
             <a:ext cx="1463040" cy="73152"/>
           </a:xfrm>
-          <a:prstGeom prst="roundRect">
+          <a:prstGeom prst="rect">
             <a:avLst/>
           </a:prstGeom>
           <a:solidFill>
@@ -9882,14 +11217,58 @@
       </p:sp>
       <p:sp>
         <p:nvSpPr>
-          <p:cNvPr id="8" name="TextBox 7"/>
+          <p:cNvPr id="8" name="Rectangle 7"/>
+          <p:cNvSpPr/>
+          <p:nvPr/>
+        </p:nvSpPr>
+        <p:spPr>
+          <a:xfrm>
+            <a:off x="822960" y="2011680"/>
+            <a:ext cx="3017520" cy="128016"/>
+          </a:xfrm>
+          <a:prstGeom prst="rect">
+            <a:avLst/>
+          </a:prstGeom>
+          <a:solidFill>
+            <a:srgbClr val="E8801A"/>
+          </a:solidFill>
+          <a:ln>
+            <a:noFill/>
+          </a:ln>
+          <a:effectLst/>
+        </p:spPr>
+        <p:style>
+          <a:lnRef idx="1">
+            <a:schemeClr val="accent1"/>
+          </a:lnRef>
+          <a:fillRef idx="3">
+            <a:schemeClr val="accent1"/>
+          </a:fillRef>
+          <a:effectRef idx="2">
+            <a:schemeClr val="accent1"/>
+          </a:effectRef>
+          <a:fontRef idx="minor">
+            <a:schemeClr val="lt1"/>
+          </a:fontRef>
+        </p:style>
+        <p:txBody>
+          <a:bodyPr rtlCol="0" anchor="ctr"/>
+          <a:lstStyle/>
+          <a:p>
+            <a:pPr algn="ctr"/>
+          </a:p>
+        </p:txBody>
+      </p:sp>
+      <p:sp>
+        <p:nvSpPr>
+          <p:cNvPr id="9" name="TextBox 8"/>
           <p:cNvSpPr txBox="1"/>
           <p:nvPr/>
         </p:nvSpPr>
         <p:spPr>
           <a:xfrm>
-            <a:off x="822960" y="2331720"/>
-            <a:ext cx="3017520" cy="1463040"/>
+            <a:off x="822960" y="2377440"/>
+            <a:ext cx="3017520" cy="1371600"/>
           </a:xfrm>
           <a:prstGeom prst="rect">
             <a:avLst/>
@@ -9904,7 +11283,7 @@
           <a:p>
             <a:pPr algn="ctr"/>
             <a:r>
-              <a:rPr sz="6000" b="1" i="0">
+              <a:rPr sz="5800" b="1" i="0">
                 <a:solidFill>
                   <a:srgbClr val="1E2761"/>
                 </a:solidFill>
@@ -9917,13 +11296,13 @@
       </p:sp>
       <p:sp>
         <p:nvSpPr>
-          <p:cNvPr id="9" name="TextBox 8"/>
+          <p:cNvPr id="10" name="TextBox 9"/>
           <p:cNvSpPr txBox="1"/>
           <p:nvPr/>
         </p:nvSpPr>
         <p:spPr>
           <a:xfrm>
-            <a:off x="1051560" y="3611880"/>
+            <a:off x="1051560" y="3657600"/>
             <a:ext cx="2560320" cy="1005840"/>
           </a:xfrm>
           <a:prstGeom prst="rect">
@@ -9952,7 +11331,7 @@
       </p:sp>
       <p:sp>
         <p:nvSpPr>
-          <p:cNvPr id="10" name="Rounded Rectangle 9"/>
+          <p:cNvPr id="11" name="Rounded Rectangle 10"/>
           <p:cNvSpPr/>
           <p:nvPr/>
         </p:nvSpPr>
@@ -9998,14 +11377,58 @@
       </p:sp>
       <p:sp>
         <p:nvSpPr>
-          <p:cNvPr id="11" name="TextBox 10"/>
+          <p:cNvPr id="12" name="Rectangle 11"/>
+          <p:cNvSpPr/>
+          <p:nvPr/>
+        </p:nvSpPr>
+        <p:spPr>
+          <a:xfrm>
+            <a:off x="4617720" y="2011680"/>
+            <a:ext cx="3017520" cy="128016"/>
+          </a:xfrm>
+          <a:prstGeom prst="rect">
+            <a:avLst/>
+          </a:prstGeom>
+          <a:solidFill>
+            <a:srgbClr val="E8801A"/>
+          </a:solidFill>
+          <a:ln>
+            <a:noFill/>
+          </a:ln>
+          <a:effectLst/>
+        </p:spPr>
+        <p:style>
+          <a:lnRef idx="1">
+            <a:schemeClr val="accent1"/>
+          </a:lnRef>
+          <a:fillRef idx="3">
+            <a:schemeClr val="accent1"/>
+          </a:fillRef>
+          <a:effectRef idx="2">
+            <a:schemeClr val="accent1"/>
+          </a:effectRef>
+          <a:fontRef idx="minor">
+            <a:schemeClr val="lt1"/>
+          </a:fontRef>
+        </p:style>
+        <p:txBody>
+          <a:bodyPr rtlCol="0" anchor="ctr"/>
+          <a:lstStyle/>
+          <a:p>
+            <a:pPr algn="ctr"/>
+          </a:p>
+        </p:txBody>
+      </p:sp>
+      <p:sp>
+        <p:nvSpPr>
+          <p:cNvPr id="13" name="TextBox 12"/>
           <p:cNvSpPr txBox="1"/>
           <p:nvPr/>
         </p:nvSpPr>
         <p:spPr>
           <a:xfrm>
-            <a:off x="4617720" y="2331720"/>
-            <a:ext cx="3017520" cy="1463040"/>
+            <a:off x="4617720" y="2377440"/>
+            <a:ext cx="3017520" cy="1371600"/>
           </a:xfrm>
           <a:prstGeom prst="rect">
             <a:avLst/>
@@ -10020,7 +11443,7 @@
           <a:p>
             <a:pPr algn="ctr"/>
             <a:r>
-              <a:rPr sz="6000" b="1" i="0">
+              <a:rPr sz="5800" b="1" i="0">
                 <a:solidFill>
                   <a:srgbClr val="1E2761"/>
                 </a:solidFill>
@@ -10033,13 +11456,13 @@
       </p:sp>
       <p:sp>
         <p:nvSpPr>
-          <p:cNvPr id="12" name="TextBox 11"/>
+          <p:cNvPr id="14" name="TextBox 13"/>
           <p:cNvSpPr txBox="1"/>
           <p:nvPr/>
         </p:nvSpPr>
         <p:spPr>
           <a:xfrm>
-            <a:off x="4846320" y="3611880"/>
+            <a:off x="4846320" y="3657600"/>
             <a:ext cx="2560320" cy="1005840"/>
           </a:xfrm>
           <a:prstGeom prst="rect">
@@ -10068,7 +11491,7 @@
       </p:sp>
       <p:sp>
         <p:nvSpPr>
-          <p:cNvPr id="13" name="Rounded Rectangle 12"/>
+          <p:cNvPr id="15" name="Rounded Rectangle 14"/>
           <p:cNvSpPr/>
           <p:nvPr/>
         </p:nvSpPr>
@@ -10114,14 +11537,58 @@
       </p:sp>
       <p:sp>
         <p:nvSpPr>
-          <p:cNvPr id="14" name="TextBox 13"/>
+          <p:cNvPr id="16" name="Rectangle 15"/>
+          <p:cNvSpPr/>
+          <p:nvPr/>
+        </p:nvSpPr>
+        <p:spPr>
+          <a:xfrm>
+            <a:off x="8412480" y="2011680"/>
+            <a:ext cx="3017520" cy="128016"/>
+          </a:xfrm>
+          <a:prstGeom prst="rect">
+            <a:avLst/>
+          </a:prstGeom>
+          <a:solidFill>
+            <a:srgbClr val="E8801A"/>
+          </a:solidFill>
+          <a:ln>
+            <a:noFill/>
+          </a:ln>
+          <a:effectLst/>
+        </p:spPr>
+        <p:style>
+          <a:lnRef idx="1">
+            <a:schemeClr val="accent1"/>
+          </a:lnRef>
+          <a:fillRef idx="3">
+            <a:schemeClr val="accent1"/>
+          </a:fillRef>
+          <a:effectRef idx="2">
+            <a:schemeClr val="accent1"/>
+          </a:effectRef>
+          <a:fontRef idx="minor">
+            <a:schemeClr val="lt1"/>
+          </a:fontRef>
+        </p:style>
+        <p:txBody>
+          <a:bodyPr rtlCol="0" anchor="ctr"/>
+          <a:lstStyle/>
+          <a:p>
+            <a:pPr algn="ctr"/>
+          </a:p>
+        </p:txBody>
+      </p:sp>
+      <p:sp>
+        <p:nvSpPr>
+          <p:cNvPr id="17" name="TextBox 16"/>
           <p:cNvSpPr txBox="1"/>
           <p:nvPr/>
         </p:nvSpPr>
         <p:spPr>
           <a:xfrm>
-            <a:off x="8412480" y="2331720"/>
-            <a:ext cx="3017520" cy="1463040"/>
+            <a:off x="8412480" y="2377440"/>
+            <a:ext cx="3017520" cy="1371600"/>
           </a:xfrm>
           <a:prstGeom prst="rect">
             <a:avLst/>
@@ -10136,7 +11603,7 @@
           <a:p>
             <a:pPr algn="ctr"/>
             <a:r>
-              <a:rPr sz="6000" b="1" i="0">
+              <a:rPr sz="5800" b="1" i="0">
                 <a:solidFill>
                   <a:srgbClr val="1E2761"/>
                 </a:solidFill>
@@ -10149,13 +11616,13 @@
       </p:sp>
       <p:sp>
         <p:nvSpPr>
-          <p:cNvPr id="15" name="TextBox 14"/>
+          <p:cNvPr id="18" name="TextBox 17"/>
           <p:cNvSpPr txBox="1"/>
           <p:nvPr/>
         </p:nvSpPr>
         <p:spPr>
           <a:xfrm>
-            <a:off x="8641080" y="3611880"/>
+            <a:off x="8641080" y="3657600"/>
             <a:ext cx="2560320" cy="1005840"/>
           </a:xfrm>
           <a:prstGeom prst="rect">
@@ -10187,6 +11654,18 @@
   <p:clrMapOvr>
     <a:masterClrMapping/>
   </p:clrMapOvr>
+  <mc:AlternateContent xmlns:mc="http://schemas.openxmlformats.org/markup-compatibility/2006">
+    <mc:Choice xmlns:p14="http://schemas.microsoft.com/office/powerpoint/2010/main" Requires="p14">
+      <p:transition spd="med" p14:dur="700">
+        <p14:cube dir="r"/>
+      </p:transition>
+    </mc:Choice>
+    <mc:Fallback>
+      <p:transition spd="med">
+        <p:push dir="r"/>
+      </p:transition>
+    </mc:Fallback>
+  </mc:AlternateContent>
 </p:sld>
 </file>
 
@@ -10274,7 +11753,7 @@
                 </a:solidFill>
                 <a:latin typeface="Montserrat"/>
               </a:rPr>
-              <a:t>020 / 021</a:t>
+              <a:t>020 / 027</a:t>
             </a:r>
           </a:p>
         </p:txBody>
@@ -10342,7 +11821,7 @@
                 </a:solidFill>
                 <a:latin typeface="Montserrat"/>
               </a:rPr>
-              <a:t>APARTADO 3.6 · COMUNICACIÓN</a:t>
+              <a:t>APARTADO 3.5 · PUESTA EN SERVICIO</a:t>
             </a:r>
           </a:p>
         </p:txBody>
@@ -10376,14 +11855,14 @@
                 </a:solidFill>
                 <a:latin typeface="Montserrat"/>
               </a:rPr>
-              <a:t>Comunicar solo si hay proyecto</a:t>
-            </a:r>
-          </a:p>
-        </p:txBody>
-      </p:sp>
-      <p:sp>
-        <p:nvSpPr>
-          <p:cNvPr id="7" name="Rounded Rectangle 6"/>
+              <a:t>Purgar: sacar el aire</a:t>
+            </a:r>
+          </a:p>
+        </p:txBody>
+      </p:sp>
+      <p:sp>
+        <p:nvSpPr>
+          <p:cNvPr id="7" name="Rectangle 6"/>
           <p:cNvSpPr/>
           <p:nvPr/>
         </p:nvSpPr>
@@ -10392,7 +11871,7 @@
             <a:off x="868680" y="1627632"/>
             <a:ext cx="2011680" cy="73152"/>
           </a:xfrm>
-          <a:prstGeom prst="roundRect">
+          <a:prstGeom prst="rect">
             <a:avLst/>
           </a:prstGeom>
           <a:solidFill>
@@ -10434,7 +11913,7 @@
         <p:spPr>
           <a:xfrm>
             <a:off x="822960" y="1965960"/>
-            <a:ext cx="4983480" cy="4206240"/>
+            <a:ext cx="5029200" cy="4206240"/>
           </a:xfrm>
           <a:prstGeom prst="rect">
             <a:avLst/>
@@ -10468,7 +11947,7 @@
                 </a:solidFill>
                 <a:latin typeface="Montserrat"/>
               </a:rPr>
-              <a:t>Con proyecto: se comunica</a:t>
+              <a:t>Barrer el aire de la tubería</a:t>
             </a:r>
           </a:p>
           <a:p>
@@ -10493,7 +11972,7 @@
                 </a:solidFill>
                 <a:latin typeface="Montserrat"/>
               </a:rPr>
-              <a:t>Sin proyecto: no hace falta</a:t>
+              <a:t>Que no quede mezcla aire-gas</a:t>
             </a:r>
           </a:p>
           <a:p>
@@ -10518,21 +11997,21 @@
                 </a:solidFill>
                 <a:latin typeface="Montserrat"/>
               </a:rPr>
-              <a:t>Pero siempre se guarda la documentación</a:t>
-            </a:r>
-          </a:p>
-        </p:txBody>
-      </p:sp>
-      <p:sp>
-        <p:nvSpPr>
-          <p:cNvPr id="9" name="imgph" descr="IMGQ:filing cabinet with documents and folders"/>
+              <a:t>Fuera de los límites de inflamabilidad</a:t>
+            </a:r>
+          </a:p>
+        </p:txBody>
+      </p:sp>
+      <p:sp>
+        <p:nvSpPr>
+          <p:cNvPr id="9" name="imgph" descr="IMGQ:gas technician purging pipe at valve"/>
           <p:cNvSpPr/>
           <p:nvPr/>
         </p:nvSpPr>
         <p:spPr>
           <a:xfrm>
-            <a:off x="5806440" y="1051560"/>
-            <a:ext cx="5298947" cy="4629150"/>
+            <a:off x="6080760" y="1965960"/>
+            <a:ext cx="5303520" cy="4572000"/>
           </a:xfrm>
           <a:prstGeom prst="roundRect">
             <a:avLst/>
@@ -10577,8 +12056,8 @@
         </p:nvSpPr>
         <p:spPr>
           <a:xfrm>
-            <a:off x="6080760" y="2726055"/>
-            <a:ext cx="4750307" cy="1280160"/>
+            <a:off x="6355080" y="3611880"/>
+            <a:ext cx="4754880" cy="1280160"/>
           </a:xfrm>
           <a:prstGeom prst="rect">
             <a:avLst/>
@@ -10599,7 +12078,7 @@
                 </a:solidFill>
                 <a:latin typeface="Montserrat"/>
               </a:rPr>
-              <a:t>IMAGEN REALISTA</a:t>
+              <a:t>IMAGEN</a:t>
             </a:r>
           </a:p>
           <a:p>
@@ -10611,7 +12090,7 @@
                 </a:solidFill>
                 <a:latin typeface="Montserrat"/>
               </a:rPr>
-              <a:t>filing cabinet with documents and folders</a:t>
+              <a:t>gas technician purging pipe at valve</a:t>
             </a:r>
           </a:p>
         </p:txBody>
@@ -10621,6 +12100,18 @@
   <p:clrMapOvr>
     <a:masterClrMapping/>
   </p:clrMapOvr>
+  <mc:AlternateContent xmlns:mc="http://schemas.openxmlformats.org/markup-compatibility/2006">
+    <mc:Choice xmlns:p14="http://schemas.microsoft.com/office/powerpoint/2010/main" Requires="p14">
+      <p:transition spd="med" p14:dur="700">
+        <p14:cube dir="r"/>
+      </p:transition>
+    </mc:Choice>
+    <mc:Fallback>
+      <p:transition spd="med">
+        <p:push dir="r"/>
+      </p:transition>
+    </mc:Fallback>
+  </mc:AlternateContent>
 </p:sld>
 </file>
 
@@ -10649,7 +12140,7 @@
             <a:avLst/>
           </a:prstGeom>
           <a:solidFill>
-            <a:srgbClr val="1E2761"/>
+            <a:srgbClr val="FFFFFF"/>
           </a:solidFill>
           <a:ln>
             <a:noFill/>
@@ -10686,8 +12177,8 @@
         </p:nvSpPr>
         <p:spPr>
           <a:xfrm>
-            <a:off x="822960" y="640080"/>
-            <a:ext cx="10515600" cy="457200"/>
+            <a:off x="10607040" y="320040"/>
+            <a:ext cx="1371600" cy="365760"/>
           </a:xfrm>
           <a:prstGeom prst="rect">
             <a:avLst/>
@@ -10700,30 +12191,133 @@
           </a:bodyPr>
           <a:lstStyle/>
           <a:p>
-            <a:r>
-              <a:rPr sz="1400" b="1" i="0">
-                <a:solidFill>
-                  <a:srgbClr val="F4A24C"/>
-                </a:solidFill>
-                <a:latin typeface="Montserrat"/>
-              </a:rPr>
-              <a:t>LO QUE YA DOMINAS</a:t>
-            </a:r>
-          </a:p>
-        </p:txBody>
-      </p:sp>
-      <p:sp>
-        <p:nvSpPr>
-          <p:cNvPr id="4" name="Rounded Rectangle 3"/>
+            <a:pPr algn="r"/>
+            <a:r>
+              <a:rPr sz="1000" b="1" i="0">
+                <a:solidFill>
+                  <a:srgbClr val="64748B"/>
+                </a:solidFill>
+                <a:latin typeface="Montserrat"/>
+              </a:rPr>
+              <a:t>021 / 027</a:t>
+            </a:r>
+          </a:p>
+        </p:txBody>
+      </p:sp>
+      <p:sp>
+        <p:nvSpPr>
+          <p:cNvPr id="4" name="TextBox 3"/>
+          <p:cNvSpPr txBox="1"/>
+          <p:nvPr/>
+        </p:nvSpPr>
+        <p:spPr>
+          <a:xfrm>
+            <a:off x="457200" y="6419088"/>
+            <a:ext cx="8229600" cy="365760"/>
+          </a:xfrm>
+          <a:prstGeom prst="rect">
+            <a:avLst/>
+          </a:prstGeom>
+          <a:noFill/>
+        </p:spPr>
+        <p:txBody>
+          <a:bodyPr wrap="square">
+            <a:spAutoFit/>
+          </a:bodyPr>
+          <a:lstStyle/>
+          <a:p>
+            <a:r>
+              <a:rPr sz="900" b="0" i="0">
+                <a:solidFill>
+                  <a:srgbClr val="64748B"/>
+                </a:solidFill>
+                <a:latin typeface="Montserrat"/>
+              </a:rPr>
+              <a:t>Curso Gas B · Tema 04 · ITC-ICG 07 · Documentación y puesta en servicio</a:t>
+            </a:r>
+          </a:p>
+        </p:txBody>
+      </p:sp>
+      <p:sp>
+        <p:nvSpPr>
+          <p:cNvPr id="5" name="TextBox 4"/>
+          <p:cNvSpPr txBox="1"/>
+          <p:nvPr/>
+        </p:nvSpPr>
+        <p:spPr>
+          <a:xfrm>
+            <a:off x="822960" y="457200"/>
+            <a:ext cx="10058400" cy="365760"/>
+          </a:xfrm>
+          <a:prstGeom prst="rect">
+            <a:avLst/>
+          </a:prstGeom>
+          <a:noFill/>
+        </p:spPr>
+        <p:txBody>
+          <a:bodyPr wrap="square">
+            <a:spAutoFit/>
+          </a:bodyPr>
+          <a:lstStyle/>
+          <a:p>
+            <a:r>
+              <a:rPr sz="1300" b="1" i="0">
+                <a:solidFill>
+                  <a:srgbClr val="E8801A"/>
+                </a:solidFill>
+                <a:latin typeface="Montserrat"/>
+              </a:rPr>
+              <a:t>APARTADO 3.5.1 · CON CONTRATO</a:t>
+            </a:r>
+          </a:p>
+        </p:txBody>
+      </p:sp>
+      <p:sp>
+        <p:nvSpPr>
+          <p:cNvPr id="6" name="TextBox 5"/>
+          <p:cNvSpPr txBox="1"/>
+          <p:nvPr/>
+        </p:nvSpPr>
+        <p:spPr>
+          <a:xfrm>
+            <a:off x="822960" y="868680"/>
+            <a:ext cx="10515600" cy="914400"/>
+          </a:xfrm>
+          <a:prstGeom prst="rect">
+            <a:avLst/>
+          </a:prstGeom>
+          <a:noFill/>
+        </p:spPr>
+        <p:txBody>
+          <a:bodyPr wrap="square">
+            <a:spAutoFit/>
+          </a:bodyPr>
+          <a:lstStyle/>
+          <a:p>
+            <a:r>
+              <a:rPr sz="2800" b="1" i="0">
+                <a:solidFill>
+                  <a:srgbClr val="1E2761"/>
+                </a:solidFill>
+                <a:latin typeface="Montserrat"/>
+              </a:rPr>
+              <a:t>Con contrato de suministro</a:t>
+            </a:r>
+          </a:p>
+        </p:txBody>
+      </p:sp>
+      <p:sp>
+        <p:nvSpPr>
+          <p:cNvPr id="7" name="Rectangle 6"/>
           <p:cNvSpPr/>
           <p:nvPr/>
         </p:nvSpPr>
         <p:spPr>
           <a:xfrm>
-            <a:off x="868680" y="1051560"/>
-            <a:ext cx="1463040" cy="82296"/>
-          </a:xfrm>
-          <a:prstGeom prst="roundRect">
+            <a:off x="868680" y="1627632"/>
+            <a:ext cx="2011680" cy="73152"/>
+          </a:xfrm>
+          <a:prstGeom prst="rect">
             <a:avLst/>
           </a:prstGeom>
           <a:solidFill>
@@ -10758,14 +12352,14 @@
       </p:sp>
       <p:sp>
         <p:nvSpPr>
-          <p:cNvPr id="5" name="TextBox 4"/>
+          <p:cNvPr id="8" name="TextBox 7"/>
           <p:cNvSpPr txBox="1"/>
           <p:nvPr/>
         </p:nvSpPr>
         <p:spPr>
           <a:xfrm>
-            <a:off x="822960" y="1234440"/>
-            <a:ext cx="10515600" cy="1097280"/>
+            <a:off x="6355080" y="1965960"/>
+            <a:ext cx="5029200" cy="4206240"/>
           </a:xfrm>
           <a:prstGeom prst="rect">
             <a:avLst/>
@@ -10778,28 +12372,138 @@
           </a:bodyPr>
           <a:lstStyle/>
           <a:p>
-            <a:r>
-              <a:rPr sz="3400" b="1" i="0">
-                <a:solidFill>
-                  <a:srgbClr val="FFFFFF"/>
-                </a:solidFill>
-                <a:latin typeface="Montserrat"/>
-              </a:rPr>
-              <a:t>Ya sabes darle papeles y gas a una instalación</a:t>
-            </a:r>
-          </a:p>
-        </p:txBody>
-      </p:sp>
-      <p:sp>
-        <p:nvSpPr>
-          <p:cNvPr id="6" name="TextBox 5"/>
+            <a:pPr>
+              <a:spcAft>
+                <a:spcPts val="1100"/>
+              </a:spcAft>
+            </a:pPr>
+            <a:r>
+              <a:rPr sz="1600" b="1" i="0">
+                <a:solidFill>
+                  <a:srgbClr val="E8801A"/>
+                </a:solidFill>
+                <a:latin typeface="Montserrat"/>
+              </a:rPr>
+              <a:t>▸  </a:t>
+            </a:r>
+            <a:r>
+              <a:rPr sz="1600" b="0" i="0">
+                <a:solidFill>
+                  <a:srgbClr val="1B2330"/>
+                </a:solidFill>
+                <a:latin typeface="Montserrat"/>
+              </a:rPr>
+              <a:t>El usuario firma la póliza antes</a:t>
+            </a:r>
+          </a:p>
+          <a:p>
+            <a:pPr>
+              <a:spcAft>
+                <a:spcPts val="1100"/>
+              </a:spcAft>
+            </a:pPr>
+            <a:r>
+              <a:rPr sz="1600" b="1" i="0">
+                <a:solidFill>
+                  <a:srgbClr val="E8801A"/>
+                </a:solidFill>
+                <a:latin typeface="Montserrat"/>
+              </a:rPr>
+              <a:t>▸  </a:t>
+            </a:r>
+            <a:r>
+              <a:rPr sz="1600" b="0" i="0">
+                <a:solidFill>
+                  <a:srgbClr val="1B2330"/>
+                </a:solidFill>
+                <a:latin typeface="Montserrat"/>
+              </a:rPr>
+              <a:t>Se solicita la puesta en servicio</a:t>
+            </a:r>
+          </a:p>
+          <a:p>
+            <a:pPr>
+              <a:spcAft>
+                <a:spcPts val="1100"/>
+              </a:spcAft>
+            </a:pPr>
+            <a:r>
+              <a:rPr sz="1600" b="1" i="0">
+                <a:solidFill>
+                  <a:srgbClr val="E8801A"/>
+                </a:solidFill>
+                <a:latin typeface="Montserrat"/>
+              </a:rPr>
+              <a:t>▸  </a:t>
+            </a:r>
+            <a:r>
+              <a:rPr sz="1600" b="0" i="0">
+                <a:solidFill>
+                  <a:srgbClr val="1B2330"/>
+                </a:solidFill>
+                <a:latin typeface="Montserrat"/>
+              </a:rPr>
+              <a:t>La ejecuta el distribuidor</a:t>
+            </a:r>
+          </a:p>
+        </p:txBody>
+      </p:sp>
+      <p:sp>
+        <p:nvSpPr>
+          <p:cNvPr id="9" name="imgph" descr="IMGQ:person signing a contract at a desk"/>
+          <p:cNvSpPr/>
+          <p:nvPr/>
+        </p:nvSpPr>
+        <p:spPr>
+          <a:xfrm>
+            <a:off x="822960" y="1965960"/>
+            <a:ext cx="5303520" cy="4572000"/>
+          </a:xfrm>
+          <a:prstGeom prst="roundRect">
+            <a:avLst/>
+          </a:prstGeom>
+          <a:solidFill>
+            <a:srgbClr val="F3F6FB"/>
+          </a:solidFill>
+          <a:ln w="12700">
+            <a:solidFill>
+              <a:srgbClr val="C7D2E6"/>
+            </a:solidFill>
+          </a:ln>
+          <a:effectLst/>
+        </p:spPr>
+        <p:style>
+          <a:lnRef idx="1">
+            <a:schemeClr val="accent1"/>
+          </a:lnRef>
+          <a:fillRef idx="3">
+            <a:schemeClr val="accent1"/>
+          </a:fillRef>
+          <a:effectRef idx="2">
+            <a:schemeClr val="accent1"/>
+          </a:effectRef>
+          <a:fontRef idx="minor">
+            <a:schemeClr val="lt1"/>
+          </a:fontRef>
+        </p:style>
+        <p:txBody>
+          <a:bodyPr rtlCol="0" anchor="ctr"/>
+          <a:lstStyle/>
+          <a:p>
+            <a:pPr algn="ctr"/>
+          </a:p>
+        </p:txBody>
+      </p:sp>
+      <p:sp>
+        <p:nvSpPr>
+          <p:cNvPr id="10" name="TextBox 9"/>
           <p:cNvSpPr txBox="1"/>
           <p:nvPr/>
         </p:nvSpPr>
         <p:spPr>
           <a:xfrm>
-            <a:off x="822960" y="2606040"/>
-            <a:ext cx="10515600" cy="2743200"/>
+            <a:off x="1097280" y="3611880"/>
+            <a:ext cx="4754880" cy="1280160"/>
           </a:xfrm>
           <a:prstGeom prst="rect">
             <a:avLst/>
@@ -10812,119 +12516,254 @@
           </a:bodyPr>
           <a:lstStyle/>
           <a:p>
-            <a:pPr>
-              <a:spcAft>
-                <a:spcPts val="1200"/>
-              </a:spcAft>
-            </a:pPr>
-            <a:r>
-              <a:rPr sz="2000" b="1" i="0">
-                <a:solidFill>
-                  <a:srgbClr val="F4A24C"/>
-                </a:solidFill>
-                <a:latin typeface="Montserrat"/>
-              </a:rPr>
-              <a:t>✓  </a:t>
-            </a:r>
-            <a:r>
-              <a:rPr sz="1900" b="0" i="0">
-                <a:solidFill>
-                  <a:srgbClr val="FFFFFF"/>
-                </a:solidFill>
-                <a:latin typeface="Montserrat"/>
-              </a:rPr>
-              <a:t>Proyecto: 70 kW, 2.000 kW y más de 5 bar</a:t>
-            </a:r>
-          </a:p>
-          <a:p>
-            <a:pPr>
-              <a:spcAft>
-                <a:spcPts val="1200"/>
-              </a:spcAft>
-            </a:pPr>
-            <a:r>
-              <a:rPr sz="2000" b="1" i="0">
-                <a:solidFill>
-                  <a:srgbClr val="F4A24C"/>
-                </a:solidFill>
-                <a:latin typeface="Montserrat"/>
-              </a:rPr>
-              <a:t>✓  </a:t>
-            </a:r>
-            <a:r>
-              <a:rPr sz="1900" b="0" i="0">
-                <a:solidFill>
-                  <a:srgbClr val="FFFFFF"/>
-                </a:solidFill>
-                <a:latin typeface="Montserrat"/>
-              </a:rPr>
-              <a:t>La estanquidad la hace quien monta</a:t>
-            </a:r>
-          </a:p>
-          <a:p>
-            <a:pPr>
-              <a:spcAft>
-                <a:spcPts val="1200"/>
-              </a:spcAft>
-            </a:pPr>
-            <a:r>
-              <a:rPr sz="2000" b="1" i="0">
-                <a:solidFill>
-                  <a:srgbClr val="F4A24C"/>
-                </a:solidFill>
-                <a:latin typeface="Montserrat"/>
-              </a:rPr>
-              <a:t>✓  </a:t>
-            </a:r>
-            <a:r>
-              <a:rPr sz="1900" b="0" i="0">
-                <a:solidFill>
-                  <a:srgbClr val="FFFFFF"/>
-                </a:solidFill>
-                <a:latin typeface="Montserrat"/>
-              </a:rPr>
-              <a:t>Puesta en servicio: comprobar y luego dar gas</a:t>
-            </a:r>
-          </a:p>
-          <a:p>
-            <a:pPr>
-              <a:spcAft>
-                <a:spcPts val="1200"/>
-              </a:spcAft>
-            </a:pPr>
-            <a:r>
-              <a:rPr sz="2000" b="1" i="0">
-                <a:solidFill>
-                  <a:srgbClr val="F4A24C"/>
-                </a:solidFill>
-                <a:latin typeface="Montserrat"/>
-              </a:rPr>
-              <a:t>✓  </a:t>
-            </a:r>
-            <a:r>
-              <a:rPr sz="1900" b="0" i="0">
-                <a:solidFill>
-                  <a:srgbClr val="FFFFFF"/>
-                </a:solidFill>
-                <a:latin typeface="Montserrat"/>
-              </a:rPr>
-              <a:t>IRG-1, IRG-2, IRG-3, uno por tramo</a:t>
-            </a:r>
-          </a:p>
-        </p:txBody>
-      </p:sp>
-      <p:sp>
-        <p:nvSpPr>
-          <p:cNvPr id="7" name="Rounded Rectangle 6"/>
+            <a:pPr algn="ctr"/>
+            <a:r>
+              <a:rPr sz="1400" b="1" i="0">
+                <a:solidFill>
+                  <a:srgbClr val="64748B"/>
+                </a:solidFill>
+                <a:latin typeface="Montserrat"/>
+              </a:rPr>
+              <a:t>IMAGEN</a:t>
+            </a:r>
+          </a:p>
+          <a:p>
+            <a:pPr algn="ctr"/>
+            <a:r>
+              <a:rPr sz="1100" b="0" i="1">
+                <a:solidFill>
+                  <a:srgbClr val="64748B"/>
+                </a:solidFill>
+                <a:latin typeface="Montserrat"/>
+              </a:rPr>
+              <a:t>person signing a contract at a desk</a:t>
+            </a:r>
+          </a:p>
+        </p:txBody>
+      </p:sp>
+    </p:spTree>
+  </p:cSld>
+  <p:clrMapOvr>
+    <a:masterClrMapping/>
+  </p:clrMapOvr>
+  <mc:AlternateContent xmlns:mc="http://schemas.openxmlformats.org/markup-compatibility/2006">
+    <mc:Choice xmlns:p14="http://schemas.microsoft.com/office/powerpoint/2010/main" Requires="p14">
+      <p:transition spd="med" p14:dur="700">
+        <p14:cube dir="l"/>
+      </p:transition>
+    </mc:Choice>
+    <mc:Fallback>
+      <p:transition spd="med">
+        <p:push dir="l"/>
+      </p:transition>
+    </mc:Fallback>
+  </mc:AlternateContent>
+</p:sld>
+</file>
+
+<file path=ppt/slides/slide22.xml><?xml version="1.0" encoding="utf-8"?>
+<p:sld xmlns:a="http://schemas.openxmlformats.org/drawingml/2006/main" xmlns:p="http://schemas.openxmlformats.org/presentationml/2006/main" xmlns:r="http://schemas.openxmlformats.org/officeDocument/2006/relationships">
+  <p:cSld>
+    <p:spTree>
+      <p:nvGrpSpPr>
+        <p:cNvPr id="1" name=""/>
+        <p:cNvGrpSpPr/>
+        <p:nvPr/>
+      </p:nvGrpSpPr>
+      <p:grpSpPr/>
+      <p:sp>
+        <p:nvSpPr>
+          <p:cNvPr id="2" name="Rectangle 1"/>
           <p:cNvSpPr/>
           <p:nvPr/>
         </p:nvSpPr>
         <p:spPr>
           <a:xfrm>
-            <a:off x="822960" y="5532120"/>
-            <a:ext cx="10515600" cy="822960"/>
-          </a:xfrm>
-          <a:prstGeom prst="roundRect">
+            <a:off x="0" y="0"/>
+            <a:ext cx="12191695" cy="6858000"/>
+          </a:xfrm>
+          <a:prstGeom prst="rect">
+            <a:avLst/>
+          </a:prstGeom>
+          <a:solidFill>
+            <a:srgbClr val="FFFFFF"/>
+          </a:solidFill>
+          <a:ln>
+            <a:noFill/>
+          </a:ln>
+          <a:effectLst/>
+        </p:spPr>
+        <p:style>
+          <a:lnRef idx="1">
+            <a:schemeClr val="accent1"/>
+          </a:lnRef>
+          <a:fillRef idx="3">
+            <a:schemeClr val="accent1"/>
+          </a:fillRef>
+          <a:effectRef idx="2">
+            <a:schemeClr val="accent1"/>
+          </a:effectRef>
+          <a:fontRef idx="minor">
+            <a:schemeClr val="lt1"/>
+          </a:fontRef>
+        </p:style>
+        <p:txBody>
+          <a:bodyPr rtlCol="0" anchor="ctr"/>
+          <a:lstStyle/>
+          <a:p>
+            <a:pPr algn="ctr"/>
+          </a:p>
+        </p:txBody>
+      </p:sp>
+      <p:sp>
+        <p:nvSpPr>
+          <p:cNvPr id="3" name="TextBox 2"/>
+          <p:cNvSpPr txBox="1"/>
+          <p:nvPr/>
+        </p:nvSpPr>
+        <p:spPr>
+          <a:xfrm>
+            <a:off x="10607040" y="320040"/>
+            <a:ext cx="1371600" cy="365760"/>
+          </a:xfrm>
+          <a:prstGeom prst="rect">
+            <a:avLst/>
+          </a:prstGeom>
+          <a:noFill/>
+        </p:spPr>
+        <p:txBody>
+          <a:bodyPr wrap="square">
+            <a:spAutoFit/>
+          </a:bodyPr>
+          <a:lstStyle/>
+          <a:p>
+            <a:pPr algn="r"/>
+            <a:r>
+              <a:rPr sz="1000" b="1" i="0">
+                <a:solidFill>
+                  <a:srgbClr val="64748B"/>
+                </a:solidFill>
+                <a:latin typeface="Montserrat"/>
+              </a:rPr>
+              <a:t>022 / 027</a:t>
+            </a:r>
+          </a:p>
+        </p:txBody>
+      </p:sp>
+      <p:sp>
+        <p:nvSpPr>
+          <p:cNvPr id="4" name="TextBox 3"/>
+          <p:cNvSpPr txBox="1"/>
+          <p:nvPr/>
+        </p:nvSpPr>
+        <p:spPr>
+          <a:xfrm>
+            <a:off x="457200" y="6419088"/>
+            <a:ext cx="8229600" cy="365760"/>
+          </a:xfrm>
+          <a:prstGeom prst="rect">
+            <a:avLst/>
+          </a:prstGeom>
+          <a:noFill/>
+        </p:spPr>
+        <p:txBody>
+          <a:bodyPr wrap="square">
+            <a:spAutoFit/>
+          </a:bodyPr>
+          <a:lstStyle/>
+          <a:p>
+            <a:r>
+              <a:rPr sz="900" b="0" i="0">
+                <a:solidFill>
+                  <a:srgbClr val="64748B"/>
+                </a:solidFill>
+                <a:latin typeface="Montserrat"/>
+              </a:rPr>
+              <a:t>Curso Gas B · Tema 04 · ITC-ICG 07 · Documentación y puesta en servicio</a:t>
+            </a:r>
+          </a:p>
+        </p:txBody>
+      </p:sp>
+      <p:sp>
+        <p:nvSpPr>
+          <p:cNvPr id="5" name="TextBox 4"/>
+          <p:cNvSpPr txBox="1"/>
+          <p:nvPr/>
+        </p:nvSpPr>
+        <p:spPr>
+          <a:xfrm>
+            <a:off x="822960" y="457200"/>
+            <a:ext cx="10058400" cy="365760"/>
+          </a:xfrm>
+          <a:prstGeom prst="rect">
+            <a:avLst/>
+          </a:prstGeom>
+          <a:noFill/>
+        </p:spPr>
+        <p:txBody>
+          <a:bodyPr wrap="square">
+            <a:spAutoFit/>
+          </a:bodyPr>
+          <a:lstStyle/>
+          <a:p>
+            <a:r>
+              <a:rPr sz="1300" b="1" i="0">
+                <a:solidFill>
+                  <a:srgbClr val="E8801A"/>
+                </a:solidFill>
+                <a:latin typeface="Montserrat"/>
+              </a:rPr>
+              <a:t>APARTADO 3.5.1 · LOS 9 PASOS</a:t>
+            </a:r>
+          </a:p>
+        </p:txBody>
+      </p:sp>
+      <p:sp>
+        <p:nvSpPr>
+          <p:cNvPr id="6" name="TextBox 5"/>
+          <p:cNvSpPr txBox="1"/>
+          <p:nvPr/>
+        </p:nvSpPr>
+        <p:spPr>
+          <a:xfrm>
+            <a:off x="822960" y="868680"/>
+            <a:ext cx="10515600" cy="914400"/>
+          </a:xfrm>
+          <a:prstGeom prst="rect">
+            <a:avLst/>
+          </a:prstGeom>
+          <a:noFill/>
+        </p:spPr>
+        <p:txBody>
+          <a:bodyPr wrap="square">
+            <a:spAutoFit/>
+          </a:bodyPr>
+          <a:lstStyle/>
+          <a:p>
+            <a:r>
+              <a:rPr sz="2800" b="1" i="0">
+                <a:solidFill>
+                  <a:srgbClr val="1E2761"/>
+                </a:solidFill>
+                <a:latin typeface="Montserrat"/>
+              </a:rPr>
+              <a:t>Nueve pasos, dos bloques</a:t>
+            </a:r>
+          </a:p>
+        </p:txBody>
+      </p:sp>
+      <p:sp>
+        <p:nvSpPr>
+          <p:cNvPr id="7" name="Rectangle 6"/>
+          <p:cNvSpPr/>
+          <p:nvPr/>
+        </p:nvSpPr>
+        <p:spPr>
+          <a:xfrm>
+            <a:off x="868680" y="1627632"/>
+            <a:ext cx="2011680" cy="73152"/>
+          </a:xfrm>
+          <a:prstGeom prst="rect">
             <a:avLst/>
           </a:prstGeom>
           <a:solidFill>
@@ -10965,8 +12804,8 @@
         </p:nvSpPr>
         <p:spPr>
           <a:xfrm>
-            <a:off x="1051560" y="5623560"/>
-            <a:ext cx="10058400" cy="640080"/>
+            <a:off x="822960" y="1965960"/>
+            <a:ext cx="5029200" cy="4206240"/>
           </a:xfrm>
           <a:prstGeom prst="rect">
             <a:avLst/>
@@ -10979,14 +12818,196 @@
           </a:bodyPr>
           <a:lstStyle/>
           <a:p>
-            <a:r>
-              <a:rPr sz="1500" b="1" i="1">
-                <a:solidFill>
-                  <a:srgbClr val="1E2761"/>
-                </a:solidFill>
-                <a:latin typeface="Montserrat"/>
-              </a:rPr>
-              <a:t>Ya dominas el arranque y el papeleo. Vamos a por el mantenimiento y las inspecciones.</a:t>
+            <a:pPr>
+              <a:spcAft>
+                <a:spcPts val="1100"/>
+              </a:spcAft>
+            </a:pPr>
+            <a:r>
+              <a:rPr sz="1600" b="1" i="0">
+                <a:solidFill>
+                  <a:srgbClr val="E8801A"/>
+                </a:solidFill>
+                <a:latin typeface="Montserrat"/>
+              </a:rPr>
+              <a:t>▸  </a:t>
+            </a:r>
+            <a:r>
+              <a:rPr sz="1600" b="0" i="0">
+                <a:solidFill>
+                  <a:srgbClr val="1B2330"/>
+                </a:solidFill>
+                <a:latin typeface="Montserrat"/>
+              </a:rPr>
+              <a:t>1-5: comprobar todo</a:t>
+            </a:r>
+          </a:p>
+          <a:p>
+            <a:pPr>
+              <a:spcAft>
+                <a:spcPts val="1100"/>
+              </a:spcAft>
+            </a:pPr>
+            <a:r>
+              <a:rPr sz="1600" b="1" i="0">
+                <a:solidFill>
+                  <a:srgbClr val="E8801A"/>
+                </a:solidFill>
+                <a:latin typeface="Montserrat"/>
+              </a:rPr>
+              <a:t>▸  </a:t>
+            </a:r>
+            <a:r>
+              <a:rPr sz="1600" b="0" i="0">
+                <a:solidFill>
+                  <a:srgbClr val="1B2330"/>
+                </a:solidFill>
+                <a:latin typeface="Montserrat"/>
+              </a:rPr>
+              <a:t>docs, partes visibles, locales, válvulas</a:t>
+            </a:r>
+          </a:p>
+          <a:p>
+            <a:pPr>
+              <a:spcAft>
+                <a:spcPts val="1100"/>
+              </a:spcAft>
+            </a:pPr>
+            <a:r>
+              <a:rPr sz="1600" b="1" i="0">
+                <a:solidFill>
+                  <a:srgbClr val="E8801A"/>
+                </a:solidFill>
+                <a:latin typeface="Montserrat"/>
+              </a:rPr>
+              <a:t>▸  </a:t>
+            </a:r>
+            <a:r>
+              <a:rPr sz="1600" b="0" i="0">
+                <a:solidFill>
+                  <a:srgbClr val="1B2330"/>
+                </a:solidFill>
+                <a:latin typeface="Montserrat"/>
+              </a:rPr>
+              <a:t>6-9: precintar contador y estanquidad</a:t>
+            </a:r>
+          </a:p>
+          <a:p>
+            <a:pPr>
+              <a:spcAft>
+                <a:spcPts val="1100"/>
+              </a:spcAft>
+            </a:pPr>
+            <a:r>
+              <a:rPr sz="1600" b="1" i="0">
+                <a:solidFill>
+                  <a:srgbClr val="E8801A"/>
+                </a:solidFill>
+                <a:latin typeface="Montserrat"/>
+              </a:rPr>
+              <a:t>▸  </a:t>
+            </a:r>
+            <a:r>
+              <a:rPr sz="1600" b="0" i="0">
+                <a:solidFill>
+                  <a:srgbClr val="1B2330"/>
+                </a:solidFill>
+                <a:latin typeface="Montserrat"/>
+              </a:rPr>
+              <a:t>dejar en servicio y certificar</a:t>
+            </a:r>
+          </a:p>
+        </p:txBody>
+      </p:sp>
+      <p:sp>
+        <p:nvSpPr>
+          <p:cNvPr id="9" name="imgph" descr="IMGQ:gas meter and regulator being inspected"/>
+          <p:cNvSpPr/>
+          <p:nvPr/>
+        </p:nvSpPr>
+        <p:spPr>
+          <a:xfrm>
+            <a:off x="6080760" y="1965960"/>
+            <a:ext cx="5303520" cy="4572000"/>
+          </a:xfrm>
+          <a:prstGeom prst="roundRect">
+            <a:avLst/>
+          </a:prstGeom>
+          <a:solidFill>
+            <a:srgbClr val="F3F6FB"/>
+          </a:solidFill>
+          <a:ln w="12700">
+            <a:solidFill>
+              <a:srgbClr val="C7D2E6"/>
+            </a:solidFill>
+          </a:ln>
+          <a:effectLst/>
+        </p:spPr>
+        <p:style>
+          <a:lnRef idx="1">
+            <a:schemeClr val="accent1"/>
+          </a:lnRef>
+          <a:fillRef idx="3">
+            <a:schemeClr val="accent1"/>
+          </a:fillRef>
+          <a:effectRef idx="2">
+            <a:schemeClr val="accent1"/>
+          </a:effectRef>
+          <a:fontRef idx="minor">
+            <a:schemeClr val="lt1"/>
+          </a:fontRef>
+        </p:style>
+        <p:txBody>
+          <a:bodyPr rtlCol="0" anchor="ctr"/>
+          <a:lstStyle/>
+          <a:p>
+            <a:pPr algn="ctr"/>
+          </a:p>
+        </p:txBody>
+      </p:sp>
+      <p:sp>
+        <p:nvSpPr>
+          <p:cNvPr id="10" name="TextBox 9"/>
+          <p:cNvSpPr txBox="1"/>
+          <p:nvPr/>
+        </p:nvSpPr>
+        <p:spPr>
+          <a:xfrm>
+            <a:off x="6355080" y="3611880"/>
+            <a:ext cx="4754880" cy="1280160"/>
+          </a:xfrm>
+          <a:prstGeom prst="rect">
+            <a:avLst/>
+          </a:prstGeom>
+          <a:noFill/>
+        </p:spPr>
+        <p:txBody>
+          <a:bodyPr wrap="square">
+            <a:spAutoFit/>
+          </a:bodyPr>
+          <a:lstStyle/>
+          <a:p>
+            <a:pPr algn="ctr"/>
+            <a:r>
+              <a:rPr sz="1400" b="1" i="0">
+                <a:solidFill>
+                  <a:srgbClr val="64748B"/>
+                </a:solidFill>
+                <a:latin typeface="Montserrat"/>
+              </a:rPr>
+              <a:t>IMAGEN</a:t>
+            </a:r>
+          </a:p>
+          <a:p>
+            <a:pPr algn="ctr"/>
+            <a:r>
+              <a:rPr sz="1100" b="0" i="1">
+                <a:solidFill>
+                  <a:srgbClr val="64748B"/>
+                </a:solidFill>
+                <a:latin typeface="Montserrat"/>
+              </a:rPr>
+              <a:t>gas meter and regulator being inspected</a:t>
             </a:r>
           </a:p>
         </p:txBody>
@@ -10996,6 +13017,2189 @@
   <p:clrMapOvr>
     <a:masterClrMapping/>
   </p:clrMapOvr>
+  <mc:AlternateContent xmlns:mc="http://schemas.openxmlformats.org/markup-compatibility/2006">
+    <mc:Choice xmlns:p14="http://schemas.microsoft.com/office/powerpoint/2010/main" Requires="p14">
+      <p:transition spd="med" p14:dur="700">
+        <p14:cube dir="r"/>
+      </p:transition>
+    </mc:Choice>
+    <mc:Fallback>
+      <p:transition spd="med">
+        <p:push dir="r"/>
+      </p:transition>
+    </mc:Fallback>
+  </mc:AlternateContent>
+</p:sld>
+</file>
+
+<file path=ppt/slides/slide23.xml><?xml version="1.0" encoding="utf-8"?>
+<p:sld xmlns:a="http://schemas.openxmlformats.org/drawingml/2006/main" xmlns:p="http://schemas.openxmlformats.org/presentationml/2006/main" xmlns:r="http://schemas.openxmlformats.org/officeDocument/2006/relationships">
+  <p:cSld>
+    <p:spTree>
+      <p:nvGrpSpPr>
+        <p:cNvPr id="1" name=""/>
+        <p:cNvGrpSpPr/>
+        <p:nvPr/>
+      </p:nvGrpSpPr>
+      <p:grpSpPr/>
+      <p:sp>
+        <p:nvSpPr>
+          <p:cNvPr id="2" name="Rectangle 1"/>
+          <p:cNvSpPr/>
+          <p:nvPr/>
+        </p:nvSpPr>
+        <p:spPr>
+          <a:xfrm>
+            <a:off x="0" y="0"/>
+            <a:ext cx="12191695" cy="6858000"/>
+          </a:xfrm>
+          <a:prstGeom prst="rect">
+            <a:avLst/>
+          </a:prstGeom>
+          <a:solidFill>
+            <a:srgbClr val="FFFFFF"/>
+          </a:solidFill>
+          <a:ln>
+            <a:noFill/>
+          </a:ln>
+          <a:effectLst/>
+        </p:spPr>
+        <p:style>
+          <a:lnRef idx="1">
+            <a:schemeClr val="accent1"/>
+          </a:lnRef>
+          <a:fillRef idx="3">
+            <a:schemeClr val="accent1"/>
+          </a:fillRef>
+          <a:effectRef idx="2">
+            <a:schemeClr val="accent1"/>
+          </a:effectRef>
+          <a:fontRef idx="minor">
+            <a:schemeClr val="lt1"/>
+          </a:fontRef>
+        </p:style>
+        <p:txBody>
+          <a:bodyPr rtlCol="0" anchor="ctr"/>
+          <a:lstStyle/>
+          <a:p>
+            <a:pPr algn="ctr"/>
+          </a:p>
+        </p:txBody>
+      </p:sp>
+      <p:sp>
+        <p:nvSpPr>
+          <p:cNvPr id="3" name="TextBox 2"/>
+          <p:cNvSpPr txBox="1"/>
+          <p:nvPr/>
+        </p:nvSpPr>
+        <p:spPr>
+          <a:xfrm>
+            <a:off x="10607040" y="320040"/>
+            <a:ext cx="1371600" cy="365760"/>
+          </a:xfrm>
+          <a:prstGeom prst="rect">
+            <a:avLst/>
+          </a:prstGeom>
+          <a:noFill/>
+        </p:spPr>
+        <p:txBody>
+          <a:bodyPr wrap="square">
+            <a:spAutoFit/>
+          </a:bodyPr>
+          <a:lstStyle/>
+          <a:p>
+            <a:pPr algn="r"/>
+            <a:r>
+              <a:rPr sz="1000" b="1" i="0">
+                <a:solidFill>
+                  <a:srgbClr val="64748B"/>
+                </a:solidFill>
+                <a:latin typeface="Montserrat"/>
+              </a:rPr>
+              <a:t>023 / 027</a:t>
+            </a:r>
+          </a:p>
+        </p:txBody>
+      </p:sp>
+      <p:sp>
+        <p:nvSpPr>
+          <p:cNvPr id="4" name="TextBox 3"/>
+          <p:cNvSpPr txBox="1"/>
+          <p:nvPr/>
+        </p:nvSpPr>
+        <p:spPr>
+          <a:xfrm>
+            <a:off x="457200" y="6419088"/>
+            <a:ext cx="8229600" cy="365760"/>
+          </a:xfrm>
+          <a:prstGeom prst="rect">
+            <a:avLst/>
+          </a:prstGeom>
+          <a:noFill/>
+        </p:spPr>
+        <p:txBody>
+          <a:bodyPr wrap="square">
+            <a:spAutoFit/>
+          </a:bodyPr>
+          <a:lstStyle/>
+          <a:p>
+            <a:r>
+              <a:rPr sz="900" b="0" i="0">
+                <a:solidFill>
+                  <a:srgbClr val="64748B"/>
+                </a:solidFill>
+                <a:latin typeface="Montserrat"/>
+              </a:rPr>
+              <a:t>Curso Gas B · Tema 04 · ITC-ICG 07 · Documentación y puesta en servicio</a:t>
+            </a:r>
+          </a:p>
+        </p:txBody>
+      </p:sp>
+      <p:sp>
+        <p:nvSpPr>
+          <p:cNvPr id="5" name="TextBox 4"/>
+          <p:cNvSpPr txBox="1"/>
+          <p:nvPr/>
+        </p:nvSpPr>
+        <p:spPr>
+          <a:xfrm>
+            <a:off x="822960" y="457200"/>
+            <a:ext cx="10058400" cy="365760"/>
+          </a:xfrm>
+          <a:prstGeom prst="rect">
+            <a:avLst/>
+          </a:prstGeom>
+          <a:noFill/>
+        </p:spPr>
+        <p:txBody>
+          <a:bodyPr wrap="square">
+            <a:spAutoFit/>
+          </a:bodyPr>
+          <a:lstStyle/>
+          <a:p>
+            <a:r>
+              <a:rPr sz="1300" b="1" i="0">
+                <a:solidFill>
+                  <a:srgbClr val="E8801A"/>
+                </a:solidFill>
+                <a:latin typeface="Montserrat"/>
+              </a:rPr>
+              <a:t>APARTADO 3.5.1 · QUIÉN ACTÚA</a:t>
+            </a:r>
+          </a:p>
+        </p:txBody>
+      </p:sp>
+      <p:sp>
+        <p:nvSpPr>
+          <p:cNvPr id="6" name="TextBox 5"/>
+          <p:cNvSpPr txBox="1"/>
+          <p:nvPr/>
+        </p:nvSpPr>
+        <p:spPr>
+          <a:xfrm>
+            <a:off x="822960" y="868680"/>
+            <a:ext cx="10515600" cy="914400"/>
+          </a:xfrm>
+          <a:prstGeom prst="rect">
+            <a:avLst/>
+          </a:prstGeom>
+          <a:noFill/>
+        </p:spPr>
+        <p:txBody>
+          <a:bodyPr wrap="square">
+            <a:spAutoFit/>
+          </a:bodyPr>
+          <a:lstStyle/>
+          <a:p>
+            <a:r>
+              <a:rPr sz="2800" b="1" i="0">
+                <a:solidFill>
+                  <a:srgbClr val="1E2761"/>
+                </a:solidFill>
+                <a:latin typeface="Montserrat"/>
+              </a:rPr>
+              <a:t>¿Quién da el gas?</a:t>
+            </a:r>
+          </a:p>
+        </p:txBody>
+      </p:sp>
+      <p:sp>
+        <p:nvSpPr>
+          <p:cNvPr id="7" name="Rectangle 6"/>
+          <p:cNvSpPr/>
+          <p:nvPr/>
+        </p:nvSpPr>
+        <p:spPr>
+          <a:xfrm>
+            <a:off x="868680" y="1627632"/>
+            <a:ext cx="2011680" cy="73152"/>
+          </a:xfrm>
+          <a:prstGeom prst="rect">
+            <a:avLst/>
+          </a:prstGeom>
+          <a:solidFill>
+            <a:srgbClr val="E8801A"/>
+          </a:solidFill>
+          <a:ln>
+            <a:noFill/>
+          </a:ln>
+          <a:effectLst/>
+        </p:spPr>
+        <p:style>
+          <a:lnRef idx="1">
+            <a:schemeClr val="accent1"/>
+          </a:lnRef>
+          <a:fillRef idx="3">
+            <a:schemeClr val="accent1"/>
+          </a:fillRef>
+          <a:effectRef idx="2">
+            <a:schemeClr val="accent1"/>
+          </a:effectRef>
+          <a:fontRef idx="minor">
+            <a:schemeClr val="lt1"/>
+          </a:fontRef>
+        </p:style>
+        <p:txBody>
+          <a:bodyPr rtlCol="0" anchor="ctr"/>
+          <a:lstStyle/>
+          <a:p>
+            <a:pPr algn="ctr"/>
+          </a:p>
+        </p:txBody>
+      </p:sp>
+      <p:sp>
+        <p:nvSpPr>
+          <p:cNvPr id="8" name="TextBox 7"/>
+          <p:cNvSpPr txBox="1"/>
+          <p:nvPr/>
+        </p:nvSpPr>
+        <p:spPr>
+          <a:xfrm>
+            <a:off x="6355080" y="1965960"/>
+            <a:ext cx="5029200" cy="4206240"/>
+          </a:xfrm>
+          <a:prstGeom prst="rect">
+            <a:avLst/>
+          </a:prstGeom>
+          <a:noFill/>
+        </p:spPr>
+        <p:txBody>
+          <a:bodyPr wrap="square">
+            <a:spAutoFit/>
+          </a:bodyPr>
+          <a:lstStyle/>
+          <a:p>
+            <a:pPr>
+              <a:spcAft>
+                <a:spcPts val="1100"/>
+              </a:spcAft>
+            </a:pPr>
+            <a:r>
+              <a:rPr sz="1600" b="1" i="0">
+                <a:solidFill>
+                  <a:srgbClr val="E8801A"/>
+                </a:solidFill>
+                <a:latin typeface="Montserrat"/>
+              </a:rPr>
+              <a:t>▸  </a:t>
+            </a:r>
+            <a:r>
+              <a:rPr sz="1600" b="0" i="0">
+                <a:solidFill>
+                  <a:srgbClr val="1B2330"/>
+                </a:solidFill>
+                <a:latin typeface="Montserrat"/>
+              </a:rPr>
+              <a:t>Con red: el distribuidor</a:t>
+            </a:r>
+          </a:p>
+          <a:p>
+            <a:pPr>
+              <a:spcAft>
+                <a:spcPts val="1100"/>
+              </a:spcAft>
+            </a:pPr>
+            <a:r>
+              <a:rPr sz="1600" b="1" i="0">
+                <a:solidFill>
+                  <a:srgbClr val="E8801A"/>
+                </a:solidFill>
+                <a:latin typeface="Montserrat"/>
+              </a:rPr>
+              <a:t>▸  </a:t>
+            </a:r>
+            <a:r>
+              <a:rPr sz="1600" b="0" i="0">
+                <a:solidFill>
+                  <a:srgbClr val="1B2330"/>
+                </a:solidFill>
+                <a:latin typeface="Montserrat"/>
+              </a:rPr>
+              <a:t>Sin red: el suministrador</a:t>
+            </a:r>
+          </a:p>
+          <a:p>
+            <a:pPr>
+              <a:spcAft>
+                <a:spcPts val="1100"/>
+              </a:spcAft>
+            </a:pPr>
+            <a:r>
+              <a:rPr sz="1600" b="1" i="0">
+                <a:solidFill>
+                  <a:srgbClr val="E8801A"/>
+                </a:solidFill>
+                <a:latin typeface="Montserrat"/>
+              </a:rPr>
+              <a:t>▸  </a:t>
+            </a:r>
+            <a:r>
+              <a:rPr sz="1600" b="0" i="0">
+                <a:solidFill>
+                  <a:srgbClr val="1B2330"/>
+                </a:solidFill>
+                <a:latin typeface="Montserrat"/>
+              </a:rPr>
+              <a:t>Mismas pruebas, cambia el agente</a:t>
+            </a:r>
+          </a:p>
+        </p:txBody>
+      </p:sp>
+      <p:sp>
+        <p:nvSpPr>
+          <p:cNvPr id="9" name="imgph" descr="IMGQ:gas distribution technician at meter cabinet"/>
+          <p:cNvSpPr/>
+          <p:nvPr/>
+        </p:nvSpPr>
+        <p:spPr>
+          <a:xfrm>
+            <a:off x="822960" y="1965960"/>
+            <a:ext cx="5303520" cy="4572000"/>
+          </a:xfrm>
+          <a:prstGeom prst="roundRect">
+            <a:avLst/>
+          </a:prstGeom>
+          <a:solidFill>
+            <a:srgbClr val="F3F6FB"/>
+          </a:solidFill>
+          <a:ln w="12700">
+            <a:solidFill>
+              <a:srgbClr val="C7D2E6"/>
+            </a:solidFill>
+          </a:ln>
+          <a:effectLst/>
+        </p:spPr>
+        <p:style>
+          <a:lnRef idx="1">
+            <a:schemeClr val="accent1"/>
+          </a:lnRef>
+          <a:fillRef idx="3">
+            <a:schemeClr val="accent1"/>
+          </a:fillRef>
+          <a:effectRef idx="2">
+            <a:schemeClr val="accent1"/>
+          </a:effectRef>
+          <a:fontRef idx="minor">
+            <a:schemeClr val="lt1"/>
+          </a:fontRef>
+        </p:style>
+        <p:txBody>
+          <a:bodyPr rtlCol="0" anchor="ctr"/>
+          <a:lstStyle/>
+          <a:p>
+            <a:pPr algn="ctr"/>
+          </a:p>
+        </p:txBody>
+      </p:sp>
+      <p:sp>
+        <p:nvSpPr>
+          <p:cNvPr id="10" name="TextBox 9"/>
+          <p:cNvSpPr txBox="1"/>
+          <p:nvPr/>
+        </p:nvSpPr>
+        <p:spPr>
+          <a:xfrm>
+            <a:off x="1097280" y="3611880"/>
+            <a:ext cx="4754880" cy="1280160"/>
+          </a:xfrm>
+          <a:prstGeom prst="rect">
+            <a:avLst/>
+          </a:prstGeom>
+          <a:noFill/>
+        </p:spPr>
+        <p:txBody>
+          <a:bodyPr wrap="square">
+            <a:spAutoFit/>
+          </a:bodyPr>
+          <a:lstStyle/>
+          <a:p>
+            <a:pPr algn="ctr"/>
+            <a:r>
+              <a:rPr sz="1400" b="1" i="0">
+                <a:solidFill>
+                  <a:srgbClr val="64748B"/>
+                </a:solidFill>
+                <a:latin typeface="Montserrat"/>
+              </a:rPr>
+              <a:t>IMAGEN</a:t>
+            </a:r>
+          </a:p>
+          <a:p>
+            <a:pPr algn="ctr"/>
+            <a:r>
+              <a:rPr sz="1100" b="0" i="1">
+                <a:solidFill>
+                  <a:srgbClr val="64748B"/>
+                </a:solidFill>
+                <a:latin typeface="Montserrat"/>
+              </a:rPr>
+              <a:t>gas distribution technician at meter cabinet</a:t>
+            </a:r>
+          </a:p>
+        </p:txBody>
+      </p:sp>
+    </p:spTree>
+  </p:cSld>
+  <p:clrMapOvr>
+    <a:masterClrMapping/>
+  </p:clrMapOvr>
+  <mc:AlternateContent xmlns:mc="http://schemas.openxmlformats.org/markup-compatibility/2006">
+    <mc:Choice xmlns:p14="http://schemas.microsoft.com/office/powerpoint/2010/main" Requires="p14">
+      <p:transition spd="med" p14:dur="700">
+        <p14:cube dir="l"/>
+      </p:transition>
+    </mc:Choice>
+    <mc:Fallback>
+      <p:transition spd="med">
+        <p:push dir="l"/>
+      </p:transition>
+    </mc:Fallback>
+  </mc:AlternateContent>
+</p:sld>
+</file>
+
+<file path=ppt/slides/slide24.xml><?xml version="1.0" encoding="utf-8"?>
+<p:sld xmlns:a="http://schemas.openxmlformats.org/drawingml/2006/main" xmlns:p="http://schemas.openxmlformats.org/presentationml/2006/main" xmlns:r="http://schemas.openxmlformats.org/officeDocument/2006/relationships">
+  <p:cSld>
+    <p:spTree>
+      <p:nvGrpSpPr>
+        <p:cNvPr id="1" name=""/>
+        <p:cNvGrpSpPr/>
+        <p:nvPr/>
+      </p:nvGrpSpPr>
+      <p:grpSpPr/>
+      <p:sp>
+        <p:nvSpPr>
+          <p:cNvPr id="2" name="Rectangle 1"/>
+          <p:cNvSpPr/>
+          <p:nvPr/>
+        </p:nvSpPr>
+        <p:spPr>
+          <a:xfrm>
+            <a:off x="0" y="0"/>
+            <a:ext cx="12191695" cy="6858000"/>
+          </a:xfrm>
+          <a:prstGeom prst="rect">
+            <a:avLst/>
+          </a:prstGeom>
+          <a:solidFill>
+            <a:srgbClr val="FFFFFF"/>
+          </a:solidFill>
+          <a:ln>
+            <a:noFill/>
+          </a:ln>
+          <a:effectLst/>
+        </p:spPr>
+        <p:style>
+          <a:lnRef idx="1">
+            <a:schemeClr val="accent1"/>
+          </a:lnRef>
+          <a:fillRef idx="3">
+            <a:schemeClr val="accent1"/>
+          </a:fillRef>
+          <a:effectRef idx="2">
+            <a:schemeClr val="accent1"/>
+          </a:effectRef>
+          <a:fontRef idx="minor">
+            <a:schemeClr val="lt1"/>
+          </a:fontRef>
+        </p:style>
+        <p:txBody>
+          <a:bodyPr rtlCol="0" anchor="ctr"/>
+          <a:lstStyle/>
+          <a:p>
+            <a:pPr algn="ctr"/>
+          </a:p>
+        </p:txBody>
+      </p:sp>
+      <p:sp>
+        <p:nvSpPr>
+          <p:cNvPr id="3" name="TextBox 2"/>
+          <p:cNvSpPr txBox="1"/>
+          <p:nvPr/>
+        </p:nvSpPr>
+        <p:spPr>
+          <a:xfrm>
+            <a:off x="10607040" y="320040"/>
+            <a:ext cx="1371600" cy="365760"/>
+          </a:xfrm>
+          <a:prstGeom prst="rect">
+            <a:avLst/>
+          </a:prstGeom>
+          <a:noFill/>
+        </p:spPr>
+        <p:txBody>
+          <a:bodyPr wrap="square">
+            <a:spAutoFit/>
+          </a:bodyPr>
+          <a:lstStyle/>
+          <a:p>
+            <a:pPr algn="r"/>
+            <a:r>
+              <a:rPr sz="1000" b="1" i="0">
+                <a:solidFill>
+                  <a:srgbClr val="64748B"/>
+                </a:solidFill>
+                <a:latin typeface="Montserrat"/>
+              </a:rPr>
+              <a:t>024 / 027</a:t>
+            </a:r>
+          </a:p>
+        </p:txBody>
+      </p:sp>
+      <p:sp>
+        <p:nvSpPr>
+          <p:cNvPr id="4" name="TextBox 3"/>
+          <p:cNvSpPr txBox="1"/>
+          <p:nvPr/>
+        </p:nvSpPr>
+        <p:spPr>
+          <a:xfrm>
+            <a:off x="457200" y="6419088"/>
+            <a:ext cx="8229600" cy="365760"/>
+          </a:xfrm>
+          <a:prstGeom prst="rect">
+            <a:avLst/>
+          </a:prstGeom>
+          <a:noFill/>
+        </p:spPr>
+        <p:txBody>
+          <a:bodyPr wrap="square">
+            <a:spAutoFit/>
+          </a:bodyPr>
+          <a:lstStyle/>
+          <a:p>
+            <a:r>
+              <a:rPr sz="900" b="0" i="0">
+                <a:solidFill>
+                  <a:srgbClr val="64748B"/>
+                </a:solidFill>
+                <a:latin typeface="Montserrat"/>
+              </a:rPr>
+              <a:t>Curso Gas B · Tema 04 · ITC-ICG 07 · Documentación y puesta en servicio</a:t>
+            </a:r>
+          </a:p>
+        </p:txBody>
+      </p:sp>
+      <p:sp>
+        <p:nvSpPr>
+          <p:cNvPr id="5" name="TextBox 4"/>
+          <p:cNvSpPr txBox="1"/>
+          <p:nvPr/>
+        </p:nvSpPr>
+        <p:spPr>
+          <a:xfrm>
+            <a:off x="822960" y="457200"/>
+            <a:ext cx="10058400" cy="365760"/>
+          </a:xfrm>
+          <a:prstGeom prst="rect">
+            <a:avLst/>
+          </a:prstGeom>
+          <a:noFill/>
+        </p:spPr>
+        <p:txBody>
+          <a:bodyPr wrap="square">
+            <a:spAutoFit/>
+          </a:bodyPr>
+          <a:lstStyle/>
+          <a:p>
+            <a:r>
+              <a:rPr sz="1300" b="1" i="0">
+                <a:solidFill>
+                  <a:srgbClr val="E8801A"/>
+                </a:solidFill>
+                <a:latin typeface="Montserrat"/>
+              </a:rPr>
+              <a:t>APARTADO 3.5.2 · SIN CONTRATO</a:t>
+            </a:r>
+          </a:p>
+        </p:txBody>
+      </p:sp>
+      <p:sp>
+        <p:nvSpPr>
+          <p:cNvPr id="6" name="TextBox 5"/>
+          <p:cNvSpPr txBox="1"/>
+          <p:nvPr/>
+        </p:nvSpPr>
+        <p:spPr>
+          <a:xfrm>
+            <a:off x="822960" y="868680"/>
+            <a:ext cx="10515600" cy="914400"/>
+          </a:xfrm>
+          <a:prstGeom prst="rect">
+            <a:avLst/>
+          </a:prstGeom>
+          <a:noFill/>
+        </p:spPr>
+        <p:txBody>
+          <a:bodyPr wrap="square">
+            <a:spAutoFit/>
+          </a:bodyPr>
+          <a:lstStyle/>
+          <a:p>
+            <a:r>
+              <a:rPr sz="2800" b="1" i="0">
+                <a:solidFill>
+                  <a:srgbClr val="1E2761"/>
+                </a:solidFill>
+                <a:latin typeface="Montserrat"/>
+              </a:rPr>
+              <a:t>Sin contrato: manda la instaladora</a:t>
+            </a:r>
+          </a:p>
+        </p:txBody>
+      </p:sp>
+      <p:sp>
+        <p:nvSpPr>
+          <p:cNvPr id="7" name="Rectangle 6"/>
+          <p:cNvSpPr/>
+          <p:nvPr/>
+        </p:nvSpPr>
+        <p:spPr>
+          <a:xfrm>
+            <a:off x="868680" y="1627632"/>
+            <a:ext cx="2011680" cy="73152"/>
+          </a:xfrm>
+          <a:prstGeom prst="rect">
+            <a:avLst/>
+          </a:prstGeom>
+          <a:solidFill>
+            <a:srgbClr val="E8801A"/>
+          </a:solidFill>
+          <a:ln>
+            <a:noFill/>
+          </a:ln>
+          <a:effectLst/>
+        </p:spPr>
+        <p:style>
+          <a:lnRef idx="1">
+            <a:schemeClr val="accent1"/>
+          </a:lnRef>
+          <a:fillRef idx="3">
+            <a:schemeClr val="accent1"/>
+          </a:fillRef>
+          <a:effectRef idx="2">
+            <a:schemeClr val="accent1"/>
+          </a:effectRef>
+          <a:fontRef idx="minor">
+            <a:schemeClr val="lt1"/>
+          </a:fontRef>
+        </p:style>
+        <p:txBody>
+          <a:bodyPr rtlCol="0" anchor="ctr"/>
+          <a:lstStyle/>
+          <a:p>
+            <a:pPr algn="ctr"/>
+          </a:p>
+        </p:txBody>
+      </p:sp>
+      <p:sp>
+        <p:nvSpPr>
+          <p:cNvPr id="8" name="TextBox 7"/>
+          <p:cNvSpPr txBox="1"/>
+          <p:nvPr/>
+        </p:nvSpPr>
+        <p:spPr>
+          <a:xfrm>
+            <a:off x="822960" y="1965960"/>
+            <a:ext cx="5029200" cy="4206240"/>
+          </a:xfrm>
+          <a:prstGeom prst="rect">
+            <a:avLst/>
+          </a:prstGeom>
+          <a:noFill/>
+        </p:spPr>
+        <p:txBody>
+          <a:bodyPr wrap="square">
+            <a:spAutoFit/>
+          </a:bodyPr>
+          <a:lstStyle/>
+          <a:p>
+            <a:pPr>
+              <a:spcAft>
+                <a:spcPts val="1100"/>
+              </a:spcAft>
+            </a:pPr>
+            <a:r>
+              <a:rPr sz="1600" b="1" i="0">
+                <a:solidFill>
+                  <a:srgbClr val="E8801A"/>
+                </a:solidFill>
+                <a:latin typeface="Montserrat"/>
+              </a:rPr>
+              <a:t>▸  </a:t>
+            </a:r>
+            <a:r>
+              <a:rPr sz="1600" b="0" i="0">
+                <a:solidFill>
+                  <a:srgbClr val="1B2330"/>
+                </a:solidFill>
+                <a:latin typeface="Montserrat"/>
+              </a:rPr>
+              <a:t>No interviene el distribuidor</a:t>
+            </a:r>
+          </a:p>
+          <a:p>
+            <a:pPr>
+              <a:spcAft>
+                <a:spcPts val="1100"/>
+              </a:spcAft>
+            </a:pPr>
+            <a:r>
+              <a:rPr sz="1600" b="1" i="0">
+                <a:solidFill>
+                  <a:srgbClr val="E8801A"/>
+                </a:solidFill>
+                <a:latin typeface="Montserrat"/>
+              </a:rPr>
+              <a:t>▸  </a:t>
+            </a:r>
+            <a:r>
+              <a:rPr sz="1600" b="0" i="0">
+                <a:solidFill>
+                  <a:srgbClr val="1B2330"/>
+                </a:solidFill>
+                <a:latin typeface="Montserrat"/>
+              </a:rPr>
+              <a:t>La instaladora hace las pruebas</a:t>
+            </a:r>
+          </a:p>
+          <a:p>
+            <a:pPr>
+              <a:spcAft>
+                <a:spcPts val="1100"/>
+              </a:spcAft>
+            </a:pPr>
+            <a:r>
+              <a:rPr sz="1600" b="1" i="0">
+                <a:solidFill>
+                  <a:srgbClr val="E8801A"/>
+                </a:solidFill>
+                <a:latin typeface="Montserrat"/>
+              </a:rPr>
+              <a:t>▸  </a:t>
+            </a:r>
+            <a:r>
+              <a:rPr sz="1600" b="0" i="0">
+                <a:solidFill>
+                  <a:srgbClr val="1B2330"/>
+                </a:solidFill>
+                <a:latin typeface="Montserrat"/>
+              </a:rPr>
+              <a:t>Siempre entrega certificado al titular</a:t>
+            </a:r>
+          </a:p>
+        </p:txBody>
+      </p:sp>
+      <p:sp>
+        <p:nvSpPr>
+          <p:cNvPr id="9" name="imgph" descr="IMGQ:installer handing document to homeowner"/>
+          <p:cNvSpPr/>
+          <p:nvPr/>
+        </p:nvSpPr>
+        <p:spPr>
+          <a:xfrm>
+            <a:off x="6080760" y="1965960"/>
+            <a:ext cx="5303520" cy="4572000"/>
+          </a:xfrm>
+          <a:prstGeom prst="roundRect">
+            <a:avLst/>
+          </a:prstGeom>
+          <a:solidFill>
+            <a:srgbClr val="F3F6FB"/>
+          </a:solidFill>
+          <a:ln w="12700">
+            <a:solidFill>
+              <a:srgbClr val="C7D2E6"/>
+            </a:solidFill>
+          </a:ln>
+          <a:effectLst/>
+        </p:spPr>
+        <p:style>
+          <a:lnRef idx="1">
+            <a:schemeClr val="accent1"/>
+          </a:lnRef>
+          <a:fillRef idx="3">
+            <a:schemeClr val="accent1"/>
+          </a:fillRef>
+          <a:effectRef idx="2">
+            <a:schemeClr val="accent1"/>
+          </a:effectRef>
+          <a:fontRef idx="minor">
+            <a:schemeClr val="lt1"/>
+          </a:fontRef>
+        </p:style>
+        <p:txBody>
+          <a:bodyPr rtlCol="0" anchor="ctr"/>
+          <a:lstStyle/>
+          <a:p>
+            <a:pPr algn="ctr"/>
+          </a:p>
+        </p:txBody>
+      </p:sp>
+      <p:sp>
+        <p:nvSpPr>
+          <p:cNvPr id="10" name="TextBox 9"/>
+          <p:cNvSpPr txBox="1"/>
+          <p:nvPr/>
+        </p:nvSpPr>
+        <p:spPr>
+          <a:xfrm>
+            <a:off x="6355080" y="3611880"/>
+            <a:ext cx="4754880" cy="1280160"/>
+          </a:xfrm>
+          <a:prstGeom prst="rect">
+            <a:avLst/>
+          </a:prstGeom>
+          <a:noFill/>
+        </p:spPr>
+        <p:txBody>
+          <a:bodyPr wrap="square">
+            <a:spAutoFit/>
+          </a:bodyPr>
+          <a:lstStyle/>
+          <a:p>
+            <a:pPr algn="ctr"/>
+            <a:r>
+              <a:rPr sz="1400" b="1" i="0">
+                <a:solidFill>
+                  <a:srgbClr val="64748B"/>
+                </a:solidFill>
+                <a:latin typeface="Montserrat"/>
+              </a:rPr>
+              <a:t>IMAGEN</a:t>
+            </a:r>
+          </a:p>
+          <a:p>
+            <a:pPr algn="ctr"/>
+            <a:r>
+              <a:rPr sz="1100" b="0" i="1">
+                <a:solidFill>
+                  <a:srgbClr val="64748B"/>
+                </a:solidFill>
+                <a:latin typeface="Montserrat"/>
+              </a:rPr>
+              <a:t>installer handing document to homeowner</a:t>
+            </a:r>
+          </a:p>
+        </p:txBody>
+      </p:sp>
+    </p:spTree>
+  </p:cSld>
+  <p:clrMapOvr>
+    <a:masterClrMapping/>
+  </p:clrMapOvr>
+  <mc:AlternateContent xmlns:mc="http://schemas.openxmlformats.org/markup-compatibility/2006">
+    <mc:Choice xmlns:p14="http://schemas.microsoft.com/office/powerpoint/2010/main" Requires="p14">
+      <p:transition spd="med" p14:dur="700">
+        <p14:cube dir="r"/>
+      </p:transition>
+    </mc:Choice>
+    <mc:Fallback>
+      <p:transition spd="med">
+        <p:push dir="r"/>
+      </p:transition>
+    </mc:Fallback>
+  </mc:AlternateContent>
+</p:sld>
+</file>
+
+<file path=ppt/slides/slide25.xml><?xml version="1.0" encoding="utf-8"?>
+<p:sld xmlns:a="http://schemas.openxmlformats.org/drawingml/2006/main" xmlns:p="http://schemas.openxmlformats.org/presentationml/2006/main" xmlns:r="http://schemas.openxmlformats.org/officeDocument/2006/relationships">
+  <p:cSld>
+    <p:spTree>
+      <p:nvGrpSpPr>
+        <p:cNvPr id="1" name=""/>
+        <p:cNvGrpSpPr/>
+        <p:nvPr/>
+      </p:nvGrpSpPr>
+      <p:grpSpPr/>
+      <p:sp>
+        <p:nvSpPr>
+          <p:cNvPr id="2" name="Rectangle 1"/>
+          <p:cNvSpPr/>
+          <p:nvPr/>
+        </p:nvSpPr>
+        <p:spPr>
+          <a:xfrm>
+            <a:off x="0" y="0"/>
+            <a:ext cx="12191695" cy="6858000"/>
+          </a:xfrm>
+          <a:prstGeom prst="rect">
+            <a:avLst/>
+          </a:prstGeom>
+          <a:solidFill>
+            <a:srgbClr val="FFFFFF"/>
+          </a:solidFill>
+          <a:ln>
+            <a:noFill/>
+          </a:ln>
+          <a:effectLst/>
+        </p:spPr>
+        <p:style>
+          <a:lnRef idx="1">
+            <a:schemeClr val="accent1"/>
+          </a:lnRef>
+          <a:fillRef idx="3">
+            <a:schemeClr val="accent1"/>
+          </a:fillRef>
+          <a:effectRef idx="2">
+            <a:schemeClr val="accent1"/>
+          </a:effectRef>
+          <a:fontRef idx="minor">
+            <a:schemeClr val="lt1"/>
+          </a:fontRef>
+        </p:style>
+        <p:txBody>
+          <a:bodyPr rtlCol="0" anchor="ctr"/>
+          <a:lstStyle/>
+          <a:p>
+            <a:pPr algn="ctr"/>
+          </a:p>
+        </p:txBody>
+      </p:sp>
+      <p:sp>
+        <p:nvSpPr>
+          <p:cNvPr id="3" name="TextBox 2"/>
+          <p:cNvSpPr txBox="1"/>
+          <p:nvPr/>
+        </p:nvSpPr>
+        <p:spPr>
+          <a:xfrm>
+            <a:off x="10607040" y="320040"/>
+            <a:ext cx="1371600" cy="365760"/>
+          </a:xfrm>
+          <a:prstGeom prst="rect">
+            <a:avLst/>
+          </a:prstGeom>
+          <a:noFill/>
+        </p:spPr>
+        <p:txBody>
+          <a:bodyPr wrap="square">
+            <a:spAutoFit/>
+          </a:bodyPr>
+          <a:lstStyle/>
+          <a:p>
+            <a:pPr algn="r"/>
+            <a:r>
+              <a:rPr sz="1000" b="1" i="0">
+                <a:solidFill>
+                  <a:srgbClr val="64748B"/>
+                </a:solidFill>
+                <a:latin typeface="Montserrat"/>
+              </a:rPr>
+              <a:t>025 / 027</a:t>
+            </a:r>
+          </a:p>
+        </p:txBody>
+      </p:sp>
+      <p:sp>
+        <p:nvSpPr>
+          <p:cNvPr id="4" name="TextBox 3"/>
+          <p:cNvSpPr txBox="1"/>
+          <p:nvPr/>
+        </p:nvSpPr>
+        <p:spPr>
+          <a:xfrm>
+            <a:off x="457200" y="6419088"/>
+            <a:ext cx="8229600" cy="365760"/>
+          </a:xfrm>
+          <a:prstGeom prst="rect">
+            <a:avLst/>
+          </a:prstGeom>
+          <a:noFill/>
+        </p:spPr>
+        <p:txBody>
+          <a:bodyPr wrap="square">
+            <a:spAutoFit/>
+          </a:bodyPr>
+          <a:lstStyle/>
+          <a:p>
+            <a:r>
+              <a:rPr sz="900" b="0" i="0">
+                <a:solidFill>
+                  <a:srgbClr val="64748B"/>
+                </a:solidFill>
+                <a:latin typeface="Montserrat"/>
+              </a:rPr>
+              <a:t>Curso Gas B · Tema 04 · ITC-ICG 07 · Documentación y puesta en servicio</a:t>
+            </a:r>
+          </a:p>
+        </p:txBody>
+      </p:sp>
+      <p:sp>
+        <p:nvSpPr>
+          <p:cNvPr id="5" name="TextBox 4"/>
+          <p:cNvSpPr txBox="1"/>
+          <p:nvPr/>
+        </p:nvSpPr>
+        <p:spPr>
+          <a:xfrm>
+            <a:off x="822960" y="457200"/>
+            <a:ext cx="10058400" cy="365760"/>
+          </a:xfrm>
+          <a:prstGeom prst="rect">
+            <a:avLst/>
+          </a:prstGeom>
+          <a:noFill/>
+        </p:spPr>
+        <p:txBody>
+          <a:bodyPr wrap="square">
+            <a:spAutoFit/>
+          </a:bodyPr>
+          <a:lstStyle/>
+          <a:p>
+            <a:r>
+              <a:rPr sz="1300" b="1" i="0">
+                <a:solidFill>
+                  <a:srgbClr val="E8801A"/>
+                </a:solidFill>
+                <a:latin typeface="Montserrat"/>
+              </a:rPr>
+              <a:t>APARTADO 3.5.1 · REAPERTURA</a:t>
+            </a:r>
+          </a:p>
+        </p:txBody>
+      </p:sp>
+      <p:sp>
+        <p:nvSpPr>
+          <p:cNvPr id="6" name="TextBox 5"/>
+          <p:cNvSpPr txBox="1"/>
+          <p:nvPr/>
+        </p:nvSpPr>
+        <p:spPr>
+          <a:xfrm>
+            <a:off x="822960" y="868680"/>
+            <a:ext cx="10515600" cy="914400"/>
+          </a:xfrm>
+          <a:prstGeom prst="rect">
+            <a:avLst/>
+          </a:prstGeom>
+          <a:noFill/>
+        </p:spPr>
+        <p:txBody>
+          <a:bodyPr wrap="square">
+            <a:spAutoFit/>
+          </a:bodyPr>
+          <a:lstStyle/>
+          <a:p>
+            <a:r>
+              <a:rPr sz="2800" b="1" i="0">
+                <a:solidFill>
+                  <a:srgbClr val="1E2761"/>
+                </a:solidFill>
+                <a:latin typeface="Montserrat"/>
+              </a:rPr>
+              <a:t>La regla del año</a:t>
+            </a:r>
+          </a:p>
+        </p:txBody>
+      </p:sp>
+      <p:sp>
+        <p:nvSpPr>
+          <p:cNvPr id="7" name="Rectangle 6"/>
+          <p:cNvSpPr/>
+          <p:nvPr/>
+        </p:nvSpPr>
+        <p:spPr>
+          <a:xfrm>
+            <a:off x="868680" y="1627632"/>
+            <a:ext cx="2011680" cy="73152"/>
+          </a:xfrm>
+          <a:prstGeom prst="rect">
+            <a:avLst/>
+          </a:prstGeom>
+          <a:solidFill>
+            <a:srgbClr val="E8801A"/>
+          </a:solidFill>
+          <a:ln>
+            <a:noFill/>
+          </a:ln>
+          <a:effectLst/>
+        </p:spPr>
+        <p:style>
+          <a:lnRef idx="1">
+            <a:schemeClr val="accent1"/>
+          </a:lnRef>
+          <a:fillRef idx="3">
+            <a:schemeClr val="accent1"/>
+          </a:fillRef>
+          <a:effectRef idx="2">
+            <a:schemeClr val="accent1"/>
+          </a:effectRef>
+          <a:fontRef idx="minor">
+            <a:schemeClr val="lt1"/>
+          </a:fontRef>
+        </p:style>
+        <p:txBody>
+          <a:bodyPr rtlCol="0" anchor="ctr"/>
+          <a:lstStyle/>
+          <a:p>
+            <a:pPr algn="ctr"/>
+          </a:p>
+        </p:txBody>
+      </p:sp>
+      <p:sp>
+        <p:nvSpPr>
+          <p:cNvPr id="8" name="TextBox 7"/>
+          <p:cNvSpPr txBox="1"/>
+          <p:nvPr/>
+        </p:nvSpPr>
+        <p:spPr>
+          <a:xfrm>
+            <a:off x="6355080" y="1965960"/>
+            <a:ext cx="5029200" cy="4206240"/>
+          </a:xfrm>
+          <a:prstGeom prst="rect">
+            <a:avLst/>
+          </a:prstGeom>
+          <a:noFill/>
+        </p:spPr>
+        <p:txBody>
+          <a:bodyPr wrap="square">
+            <a:spAutoFit/>
+          </a:bodyPr>
+          <a:lstStyle/>
+          <a:p>
+            <a:pPr>
+              <a:spcAft>
+                <a:spcPts val="1100"/>
+              </a:spcAft>
+            </a:pPr>
+            <a:r>
+              <a:rPr sz="1600" b="1" i="0">
+                <a:solidFill>
+                  <a:srgbClr val="E8801A"/>
+                </a:solidFill>
+                <a:latin typeface="Montserrat"/>
+              </a:rPr>
+              <a:t>▸  </a:t>
+            </a:r>
+            <a:r>
+              <a:rPr sz="1600" b="0" i="0">
+                <a:solidFill>
+                  <a:srgbClr val="1B2330"/>
+                </a:solidFill>
+                <a:latin typeface="Montserrat"/>
+              </a:rPr>
+              <a:t>Más de un año sin suministro</a:t>
+            </a:r>
+          </a:p>
+          <a:p>
+            <a:pPr>
+              <a:spcAft>
+                <a:spcPts val="1100"/>
+              </a:spcAft>
+            </a:pPr>
+            <a:r>
+              <a:rPr sz="1600" b="1" i="0">
+                <a:solidFill>
+                  <a:srgbClr val="E8801A"/>
+                </a:solidFill>
+                <a:latin typeface="Montserrat"/>
+              </a:rPr>
+              <a:t>▸  </a:t>
+            </a:r>
+            <a:r>
+              <a:rPr sz="1600" b="0" i="0">
+                <a:solidFill>
+                  <a:srgbClr val="1B2330"/>
+                </a:solidFill>
+                <a:latin typeface="Montserrat"/>
+              </a:rPr>
+              <a:t>tras resolver el contrato</a:t>
+            </a:r>
+          </a:p>
+          <a:p>
+            <a:pPr>
+              <a:spcAft>
+                <a:spcPts val="1100"/>
+              </a:spcAft>
+            </a:pPr>
+            <a:r>
+              <a:rPr sz="1600" b="1" i="0">
+                <a:solidFill>
+                  <a:srgbClr val="E8801A"/>
+                </a:solidFill>
+                <a:latin typeface="Montserrat"/>
+              </a:rPr>
+              <a:t>▸  </a:t>
+            </a:r>
+            <a:r>
+              <a:rPr sz="1600" b="0" i="0">
+                <a:solidFill>
+                  <a:srgbClr val="1B2330"/>
+                </a:solidFill>
+                <a:latin typeface="Montserrat"/>
+              </a:rPr>
+              <a:t>Se trata como instalación nueva</a:t>
+            </a:r>
+          </a:p>
+        </p:txBody>
+      </p:sp>
+      <p:sp>
+        <p:nvSpPr>
+          <p:cNvPr id="9" name="imgph" descr="IMGQ:old closed gas meter in cabinet"/>
+          <p:cNvSpPr/>
+          <p:nvPr/>
+        </p:nvSpPr>
+        <p:spPr>
+          <a:xfrm>
+            <a:off x="822960" y="1965960"/>
+            <a:ext cx="5303520" cy="4572000"/>
+          </a:xfrm>
+          <a:prstGeom prst="roundRect">
+            <a:avLst/>
+          </a:prstGeom>
+          <a:solidFill>
+            <a:srgbClr val="F3F6FB"/>
+          </a:solidFill>
+          <a:ln w="12700">
+            <a:solidFill>
+              <a:srgbClr val="C7D2E6"/>
+            </a:solidFill>
+          </a:ln>
+          <a:effectLst/>
+        </p:spPr>
+        <p:style>
+          <a:lnRef idx="1">
+            <a:schemeClr val="accent1"/>
+          </a:lnRef>
+          <a:fillRef idx="3">
+            <a:schemeClr val="accent1"/>
+          </a:fillRef>
+          <a:effectRef idx="2">
+            <a:schemeClr val="accent1"/>
+          </a:effectRef>
+          <a:fontRef idx="minor">
+            <a:schemeClr val="lt1"/>
+          </a:fontRef>
+        </p:style>
+        <p:txBody>
+          <a:bodyPr rtlCol="0" anchor="ctr"/>
+          <a:lstStyle/>
+          <a:p>
+            <a:pPr algn="ctr"/>
+          </a:p>
+        </p:txBody>
+      </p:sp>
+      <p:sp>
+        <p:nvSpPr>
+          <p:cNvPr id="10" name="TextBox 9"/>
+          <p:cNvSpPr txBox="1"/>
+          <p:nvPr/>
+        </p:nvSpPr>
+        <p:spPr>
+          <a:xfrm>
+            <a:off x="1097280" y="3611880"/>
+            <a:ext cx="4754880" cy="1280160"/>
+          </a:xfrm>
+          <a:prstGeom prst="rect">
+            <a:avLst/>
+          </a:prstGeom>
+          <a:noFill/>
+        </p:spPr>
+        <p:txBody>
+          <a:bodyPr wrap="square">
+            <a:spAutoFit/>
+          </a:bodyPr>
+          <a:lstStyle/>
+          <a:p>
+            <a:pPr algn="ctr"/>
+            <a:r>
+              <a:rPr sz="1400" b="1" i="0">
+                <a:solidFill>
+                  <a:srgbClr val="64748B"/>
+                </a:solidFill>
+                <a:latin typeface="Montserrat"/>
+              </a:rPr>
+              <a:t>IMAGEN</a:t>
+            </a:r>
+          </a:p>
+          <a:p>
+            <a:pPr algn="ctr"/>
+            <a:r>
+              <a:rPr sz="1100" b="0" i="1">
+                <a:solidFill>
+                  <a:srgbClr val="64748B"/>
+                </a:solidFill>
+                <a:latin typeface="Montserrat"/>
+              </a:rPr>
+              <a:t>old closed gas meter in cabinet</a:t>
+            </a:r>
+          </a:p>
+        </p:txBody>
+      </p:sp>
+    </p:spTree>
+  </p:cSld>
+  <p:clrMapOvr>
+    <a:masterClrMapping/>
+  </p:clrMapOvr>
+  <mc:AlternateContent xmlns:mc="http://schemas.openxmlformats.org/markup-compatibility/2006">
+    <mc:Choice xmlns:p14="http://schemas.microsoft.com/office/powerpoint/2010/main" Requires="p14">
+      <p:transition spd="med" p14:dur="700">
+        <p14:cube dir="l"/>
+      </p:transition>
+    </mc:Choice>
+    <mc:Fallback>
+      <p:transition spd="med">
+        <p:push dir="l"/>
+      </p:transition>
+    </mc:Fallback>
+  </mc:AlternateContent>
+</p:sld>
+</file>
+
+<file path=ppt/slides/slide26.xml><?xml version="1.0" encoding="utf-8"?>
+<p:sld xmlns:a="http://schemas.openxmlformats.org/drawingml/2006/main" xmlns:p="http://schemas.openxmlformats.org/presentationml/2006/main" xmlns:r="http://schemas.openxmlformats.org/officeDocument/2006/relationships">
+  <p:cSld>
+    <p:spTree>
+      <p:nvGrpSpPr>
+        <p:cNvPr id="1" name=""/>
+        <p:cNvGrpSpPr/>
+        <p:nvPr/>
+      </p:nvGrpSpPr>
+      <p:grpSpPr/>
+      <p:sp>
+        <p:nvSpPr>
+          <p:cNvPr id="2" name="Rectangle 1"/>
+          <p:cNvSpPr/>
+          <p:nvPr/>
+        </p:nvSpPr>
+        <p:spPr>
+          <a:xfrm>
+            <a:off x="0" y="0"/>
+            <a:ext cx="12191695" cy="6858000"/>
+          </a:xfrm>
+          <a:prstGeom prst="rect">
+            <a:avLst/>
+          </a:prstGeom>
+          <a:solidFill>
+            <a:srgbClr val="FFFFFF"/>
+          </a:solidFill>
+          <a:ln>
+            <a:noFill/>
+          </a:ln>
+          <a:effectLst/>
+        </p:spPr>
+        <p:style>
+          <a:lnRef idx="1">
+            <a:schemeClr val="accent1"/>
+          </a:lnRef>
+          <a:fillRef idx="3">
+            <a:schemeClr val="accent1"/>
+          </a:fillRef>
+          <a:effectRef idx="2">
+            <a:schemeClr val="accent1"/>
+          </a:effectRef>
+          <a:fontRef idx="minor">
+            <a:schemeClr val="lt1"/>
+          </a:fontRef>
+        </p:style>
+        <p:txBody>
+          <a:bodyPr rtlCol="0" anchor="ctr"/>
+          <a:lstStyle/>
+          <a:p>
+            <a:pPr algn="ctr"/>
+          </a:p>
+        </p:txBody>
+      </p:sp>
+      <p:sp>
+        <p:nvSpPr>
+          <p:cNvPr id="3" name="TextBox 2"/>
+          <p:cNvSpPr txBox="1"/>
+          <p:nvPr/>
+        </p:nvSpPr>
+        <p:spPr>
+          <a:xfrm>
+            <a:off x="10607040" y="320040"/>
+            <a:ext cx="1371600" cy="365760"/>
+          </a:xfrm>
+          <a:prstGeom prst="rect">
+            <a:avLst/>
+          </a:prstGeom>
+          <a:noFill/>
+        </p:spPr>
+        <p:txBody>
+          <a:bodyPr wrap="square">
+            <a:spAutoFit/>
+          </a:bodyPr>
+          <a:lstStyle/>
+          <a:p>
+            <a:pPr algn="r"/>
+            <a:r>
+              <a:rPr sz="1000" b="1" i="0">
+                <a:solidFill>
+                  <a:srgbClr val="64748B"/>
+                </a:solidFill>
+                <a:latin typeface="Montserrat"/>
+              </a:rPr>
+              <a:t>026 / 027</a:t>
+            </a:r>
+          </a:p>
+        </p:txBody>
+      </p:sp>
+      <p:sp>
+        <p:nvSpPr>
+          <p:cNvPr id="4" name="TextBox 3"/>
+          <p:cNvSpPr txBox="1"/>
+          <p:nvPr/>
+        </p:nvSpPr>
+        <p:spPr>
+          <a:xfrm>
+            <a:off x="457200" y="6419088"/>
+            <a:ext cx="8229600" cy="365760"/>
+          </a:xfrm>
+          <a:prstGeom prst="rect">
+            <a:avLst/>
+          </a:prstGeom>
+          <a:noFill/>
+        </p:spPr>
+        <p:txBody>
+          <a:bodyPr wrap="square">
+            <a:spAutoFit/>
+          </a:bodyPr>
+          <a:lstStyle/>
+          <a:p>
+            <a:r>
+              <a:rPr sz="900" b="0" i="0">
+                <a:solidFill>
+                  <a:srgbClr val="64748B"/>
+                </a:solidFill>
+                <a:latin typeface="Montserrat"/>
+              </a:rPr>
+              <a:t>Curso Gas B · Tema 04 · ITC-ICG 07 · Documentación y puesta en servicio</a:t>
+            </a:r>
+          </a:p>
+        </p:txBody>
+      </p:sp>
+      <p:sp>
+        <p:nvSpPr>
+          <p:cNvPr id="5" name="TextBox 4"/>
+          <p:cNvSpPr txBox="1"/>
+          <p:nvPr/>
+        </p:nvSpPr>
+        <p:spPr>
+          <a:xfrm>
+            <a:off x="822960" y="457200"/>
+            <a:ext cx="10058400" cy="365760"/>
+          </a:xfrm>
+          <a:prstGeom prst="rect">
+            <a:avLst/>
+          </a:prstGeom>
+          <a:noFill/>
+        </p:spPr>
+        <p:txBody>
+          <a:bodyPr wrap="square">
+            <a:spAutoFit/>
+          </a:bodyPr>
+          <a:lstStyle/>
+          <a:p>
+            <a:r>
+              <a:rPr sz="1300" b="1" i="0">
+                <a:solidFill>
+                  <a:srgbClr val="E8801A"/>
+                </a:solidFill>
+                <a:latin typeface="Montserrat"/>
+              </a:rPr>
+              <a:t>APARTADO 3.6 · COMUNICACIÓN</a:t>
+            </a:r>
+          </a:p>
+        </p:txBody>
+      </p:sp>
+      <p:sp>
+        <p:nvSpPr>
+          <p:cNvPr id="6" name="TextBox 5"/>
+          <p:cNvSpPr txBox="1"/>
+          <p:nvPr/>
+        </p:nvSpPr>
+        <p:spPr>
+          <a:xfrm>
+            <a:off x="822960" y="868680"/>
+            <a:ext cx="10515600" cy="914400"/>
+          </a:xfrm>
+          <a:prstGeom prst="rect">
+            <a:avLst/>
+          </a:prstGeom>
+          <a:noFill/>
+        </p:spPr>
+        <p:txBody>
+          <a:bodyPr wrap="square">
+            <a:spAutoFit/>
+          </a:bodyPr>
+          <a:lstStyle/>
+          <a:p>
+            <a:r>
+              <a:rPr sz="2800" b="1" i="0">
+                <a:solidFill>
+                  <a:srgbClr val="1E2761"/>
+                </a:solidFill>
+                <a:latin typeface="Montserrat"/>
+              </a:rPr>
+              <a:t>Comunicar solo si hay proyecto</a:t>
+            </a:r>
+          </a:p>
+        </p:txBody>
+      </p:sp>
+      <p:sp>
+        <p:nvSpPr>
+          <p:cNvPr id="7" name="Rectangle 6"/>
+          <p:cNvSpPr/>
+          <p:nvPr/>
+        </p:nvSpPr>
+        <p:spPr>
+          <a:xfrm>
+            <a:off x="868680" y="1627632"/>
+            <a:ext cx="2011680" cy="73152"/>
+          </a:xfrm>
+          <a:prstGeom prst="rect">
+            <a:avLst/>
+          </a:prstGeom>
+          <a:solidFill>
+            <a:srgbClr val="E8801A"/>
+          </a:solidFill>
+          <a:ln>
+            <a:noFill/>
+          </a:ln>
+          <a:effectLst/>
+        </p:spPr>
+        <p:style>
+          <a:lnRef idx="1">
+            <a:schemeClr val="accent1"/>
+          </a:lnRef>
+          <a:fillRef idx="3">
+            <a:schemeClr val="accent1"/>
+          </a:fillRef>
+          <a:effectRef idx="2">
+            <a:schemeClr val="accent1"/>
+          </a:effectRef>
+          <a:fontRef idx="minor">
+            <a:schemeClr val="lt1"/>
+          </a:fontRef>
+        </p:style>
+        <p:txBody>
+          <a:bodyPr rtlCol="0" anchor="ctr"/>
+          <a:lstStyle/>
+          <a:p>
+            <a:pPr algn="ctr"/>
+          </a:p>
+        </p:txBody>
+      </p:sp>
+      <p:sp>
+        <p:nvSpPr>
+          <p:cNvPr id="8" name="TextBox 7"/>
+          <p:cNvSpPr txBox="1"/>
+          <p:nvPr/>
+        </p:nvSpPr>
+        <p:spPr>
+          <a:xfrm>
+            <a:off x="822960" y="1965960"/>
+            <a:ext cx="5029200" cy="4206240"/>
+          </a:xfrm>
+          <a:prstGeom prst="rect">
+            <a:avLst/>
+          </a:prstGeom>
+          <a:noFill/>
+        </p:spPr>
+        <p:txBody>
+          <a:bodyPr wrap="square">
+            <a:spAutoFit/>
+          </a:bodyPr>
+          <a:lstStyle/>
+          <a:p>
+            <a:pPr>
+              <a:spcAft>
+                <a:spcPts val="1100"/>
+              </a:spcAft>
+            </a:pPr>
+            <a:r>
+              <a:rPr sz="1600" b="1" i="0">
+                <a:solidFill>
+                  <a:srgbClr val="E8801A"/>
+                </a:solidFill>
+                <a:latin typeface="Montserrat"/>
+              </a:rPr>
+              <a:t>▸  </a:t>
+            </a:r>
+            <a:r>
+              <a:rPr sz="1600" b="0" i="0">
+                <a:solidFill>
+                  <a:srgbClr val="1B2330"/>
+                </a:solidFill>
+                <a:latin typeface="Montserrat"/>
+              </a:rPr>
+              <a:t>Con proyecto: se comunica</a:t>
+            </a:r>
+          </a:p>
+          <a:p>
+            <a:pPr>
+              <a:spcAft>
+                <a:spcPts val="1100"/>
+              </a:spcAft>
+            </a:pPr>
+            <a:r>
+              <a:rPr sz="1600" b="1" i="0">
+                <a:solidFill>
+                  <a:srgbClr val="E8801A"/>
+                </a:solidFill>
+                <a:latin typeface="Montserrat"/>
+              </a:rPr>
+              <a:t>▸  </a:t>
+            </a:r>
+            <a:r>
+              <a:rPr sz="1600" b="0" i="0">
+                <a:solidFill>
+                  <a:srgbClr val="1B2330"/>
+                </a:solidFill>
+                <a:latin typeface="Montserrat"/>
+              </a:rPr>
+              <a:t>Sin proyecto: no hace falta</a:t>
+            </a:r>
+          </a:p>
+          <a:p>
+            <a:pPr>
+              <a:spcAft>
+                <a:spcPts val="1100"/>
+              </a:spcAft>
+            </a:pPr>
+            <a:r>
+              <a:rPr sz="1600" b="1" i="0">
+                <a:solidFill>
+                  <a:srgbClr val="E8801A"/>
+                </a:solidFill>
+                <a:latin typeface="Montserrat"/>
+              </a:rPr>
+              <a:t>▸  </a:t>
+            </a:r>
+            <a:r>
+              <a:rPr sz="1600" b="0" i="0">
+                <a:solidFill>
+                  <a:srgbClr val="1B2330"/>
+                </a:solidFill>
+                <a:latin typeface="Montserrat"/>
+              </a:rPr>
+              <a:t>Pero siempre se guarda la documentación</a:t>
+            </a:r>
+          </a:p>
+        </p:txBody>
+      </p:sp>
+      <p:sp>
+        <p:nvSpPr>
+          <p:cNvPr id="9" name="imgph" descr="IMGQ:filing cabinet with documents and folders"/>
+          <p:cNvSpPr/>
+          <p:nvPr/>
+        </p:nvSpPr>
+        <p:spPr>
+          <a:xfrm>
+            <a:off x="6080760" y="1965960"/>
+            <a:ext cx="5303520" cy="4572000"/>
+          </a:xfrm>
+          <a:prstGeom prst="roundRect">
+            <a:avLst/>
+          </a:prstGeom>
+          <a:solidFill>
+            <a:srgbClr val="F3F6FB"/>
+          </a:solidFill>
+          <a:ln w="12700">
+            <a:solidFill>
+              <a:srgbClr val="C7D2E6"/>
+            </a:solidFill>
+          </a:ln>
+          <a:effectLst/>
+        </p:spPr>
+        <p:style>
+          <a:lnRef idx="1">
+            <a:schemeClr val="accent1"/>
+          </a:lnRef>
+          <a:fillRef idx="3">
+            <a:schemeClr val="accent1"/>
+          </a:fillRef>
+          <a:effectRef idx="2">
+            <a:schemeClr val="accent1"/>
+          </a:effectRef>
+          <a:fontRef idx="minor">
+            <a:schemeClr val="lt1"/>
+          </a:fontRef>
+        </p:style>
+        <p:txBody>
+          <a:bodyPr rtlCol="0" anchor="ctr"/>
+          <a:lstStyle/>
+          <a:p>
+            <a:pPr algn="ctr"/>
+          </a:p>
+        </p:txBody>
+      </p:sp>
+      <p:sp>
+        <p:nvSpPr>
+          <p:cNvPr id="10" name="TextBox 9"/>
+          <p:cNvSpPr txBox="1"/>
+          <p:nvPr/>
+        </p:nvSpPr>
+        <p:spPr>
+          <a:xfrm>
+            <a:off x="6355080" y="3611880"/>
+            <a:ext cx="4754880" cy="1280160"/>
+          </a:xfrm>
+          <a:prstGeom prst="rect">
+            <a:avLst/>
+          </a:prstGeom>
+          <a:noFill/>
+        </p:spPr>
+        <p:txBody>
+          <a:bodyPr wrap="square">
+            <a:spAutoFit/>
+          </a:bodyPr>
+          <a:lstStyle/>
+          <a:p>
+            <a:pPr algn="ctr"/>
+            <a:r>
+              <a:rPr sz="1400" b="1" i="0">
+                <a:solidFill>
+                  <a:srgbClr val="64748B"/>
+                </a:solidFill>
+                <a:latin typeface="Montserrat"/>
+              </a:rPr>
+              <a:t>IMAGEN</a:t>
+            </a:r>
+          </a:p>
+          <a:p>
+            <a:pPr algn="ctr"/>
+            <a:r>
+              <a:rPr sz="1100" b="0" i="1">
+                <a:solidFill>
+                  <a:srgbClr val="64748B"/>
+                </a:solidFill>
+                <a:latin typeface="Montserrat"/>
+              </a:rPr>
+              <a:t>filing cabinet with documents and folders</a:t>
+            </a:r>
+          </a:p>
+        </p:txBody>
+      </p:sp>
+    </p:spTree>
+  </p:cSld>
+  <p:clrMapOvr>
+    <a:masterClrMapping/>
+  </p:clrMapOvr>
+  <mc:AlternateContent xmlns:mc="http://schemas.openxmlformats.org/markup-compatibility/2006">
+    <mc:Choice xmlns:p14="http://schemas.microsoft.com/office/powerpoint/2010/main" Requires="p14">
+      <p:transition spd="med" p14:dur="700">
+        <p14:cube dir="r"/>
+      </p:transition>
+    </mc:Choice>
+    <mc:Fallback>
+      <p:transition spd="med">
+        <p:push dir="r"/>
+      </p:transition>
+    </mc:Fallback>
+  </mc:AlternateContent>
+</p:sld>
+</file>
+
+<file path=ppt/slides/slide27.xml><?xml version="1.0" encoding="utf-8"?>
+<p:sld xmlns:a="http://schemas.openxmlformats.org/drawingml/2006/main" xmlns:p="http://schemas.openxmlformats.org/presentationml/2006/main" xmlns:r="http://schemas.openxmlformats.org/officeDocument/2006/relationships">
+  <p:cSld>
+    <p:spTree>
+      <p:nvGrpSpPr>
+        <p:cNvPr id="1" name=""/>
+        <p:cNvGrpSpPr/>
+        <p:nvPr/>
+      </p:nvGrpSpPr>
+      <p:grpSpPr/>
+      <p:sp>
+        <p:nvSpPr>
+          <p:cNvPr id="2" name="Rectangle 1"/>
+          <p:cNvSpPr/>
+          <p:nvPr/>
+        </p:nvSpPr>
+        <p:spPr>
+          <a:xfrm>
+            <a:off x="0" y="0"/>
+            <a:ext cx="12191695" cy="6858000"/>
+          </a:xfrm>
+          <a:prstGeom prst="rect">
+            <a:avLst/>
+          </a:prstGeom>
+          <a:solidFill>
+            <a:srgbClr val="1E2761"/>
+          </a:solidFill>
+          <a:ln>
+            <a:noFill/>
+          </a:ln>
+          <a:effectLst/>
+        </p:spPr>
+        <p:style>
+          <a:lnRef idx="1">
+            <a:schemeClr val="accent1"/>
+          </a:lnRef>
+          <a:fillRef idx="3">
+            <a:schemeClr val="accent1"/>
+          </a:fillRef>
+          <a:effectRef idx="2">
+            <a:schemeClr val="accent1"/>
+          </a:effectRef>
+          <a:fontRef idx="minor">
+            <a:schemeClr val="lt1"/>
+          </a:fontRef>
+        </p:style>
+        <p:txBody>
+          <a:bodyPr rtlCol="0" anchor="ctr"/>
+          <a:lstStyle/>
+          <a:p>
+            <a:pPr algn="ctr"/>
+          </a:p>
+        </p:txBody>
+      </p:sp>
+      <p:sp>
+        <p:nvSpPr>
+          <p:cNvPr id="3" name="TextBox 2"/>
+          <p:cNvSpPr txBox="1"/>
+          <p:nvPr/>
+        </p:nvSpPr>
+        <p:spPr>
+          <a:xfrm>
+            <a:off x="822960" y="640080"/>
+            <a:ext cx="10515600" cy="457200"/>
+          </a:xfrm>
+          <a:prstGeom prst="rect">
+            <a:avLst/>
+          </a:prstGeom>
+          <a:noFill/>
+        </p:spPr>
+        <p:txBody>
+          <a:bodyPr wrap="square">
+            <a:spAutoFit/>
+          </a:bodyPr>
+          <a:lstStyle/>
+          <a:p>
+            <a:r>
+              <a:rPr sz="1400" b="1" i="0">
+                <a:solidFill>
+                  <a:srgbClr val="F4A24C"/>
+                </a:solidFill>
+                <a:latin typeface="Montserrat"/>
+              </a:rPr>
+              <a:t>LO QUE YA DOMINAS</a:t>
+            </a:r>
+          </a:p>
+        </p:txBody>
+      </p:sp>
+      <p:sp>
+        <p:nvSpPr>
+          <p:cNvPr id="4" name="Rectangle 3"/>
+          <p:cNvSpPr/>
+          <p:nvPr/>
+        </p:nvSpPr>
+        <p:spPr>
+          <a:xfrm>
+            <a:off x="868680" y="1051560"/>
+            <a:ext cx="1463040" cy="82296"/>
+          </a:xfrm>
+          <a:prstGeom prst="rect">
+            <a:avLst/>
+          </a:prstGeom>
+          <a:solidFill>
+            <a:srgbClr val="E8801A"/>
+          </a:solidFill>
+          <a:ln>
+            <a:noFill/>
+          </a:ln>
+          <a:effectLst/>
+        </p:spPr>
+        <p:style>
+          <a:lnRef idx="1">
+            <a:schemeClr val="accent1"/>
+          </a:lnRef>
+          <a:fillRef idx="3">
+            <a:schemeClr val="accent1"/>
+          </a:fillRef>
+          <a:effectRef idx="2">
+            <a:schemeClr val="accent1"/>
+          </a:effectRef>
+          <a:fontRef idx="minor">
+            <a:schemeClr val="lt1"/>
+          </a:fontRef>
+        </p:style>
+        <p:txBody>
+          <a:bodyPr rtlCol="0" anchor="ctr"/>
+          <a:lstStyle/>
+          <a:p>
+            <a:pPr algn="ctr"/>
+          </a:p>
+        </p:txBody>
+      </p:sp>
+      <p:sp>
+        <p:nvSpPr>
+          <p:cNvPr id="5" name="TextBox 4"/>
+          <p:cNvSpPr txBox="1"/>
+          <p:nvPr/>
+        </p:nvSpPr>
+        <p:spPr>
+          <a:xfrm>
+            <a:off x="822960" y="1234440"/>
+            <a:ext cx="10515600" cy="1097280"/>
+          </a:xfrm>
+          <a:prstGeom prst="rect">
+            <a:avLst/>
+          </a:prstGeom>
+          <a:noFill/>
+        </p:spPr>
+        <p:txBody>
+          <a:bodyPr wrap="square">
+            <a:spAutoFit/>
+          </a:bodyPr>
+          <a:lstStyle/>
+          <a:p>
+            <a:r>
+              <a:rPr sz="3400" b="1" i="0">
+                <a:solidFill>
+                  <a:srgbClr val="FFFFFF"/>
+                </a:solidFill>
+                <a:latin typeface="Montserrat"/>
+              </a:rPr>
+              <a:t>Ya sabes darle papeles y gas a una instalación</a:t>
+            </a:r>
+          </a:p>
+        </p:txBody>
+      </p:sp>
+      <p:sp>
+        <p:nvSpPr>
+          <p:cNvPr id="6" name="TextBox 5"/>
+          <p:cNvSpPr txBox="1"/>
+          <p:nvPr/>
+        </p:nvSpPr>
+        <p:spPr>
+          <a:xfrm>
+            <a:off x="822960" y="2606040"/>
+            <a:ext cx="10515600" cy="2743200"/>
+          </a:xfrm>
+          <a:prstGeom prst="rect">
+            <a:avLst/>
+          </a:prstGeom>
+          <a:noFill/>
+        </p:spPr>
+        <p:txBody>
+          <a:bodyPr wrap="square">
+            <a:spAutoFit/>
+          </a:bodyPr>
+          <a:lstStyle/>
+          <a:p>
+            <a:pPr>
+              <a:spcAft>
+                <a:spcPts val="1200"/>
+              </a:spcAft>
+            </a:pPr>
+            <a:r>
+              <a:rPr sz="2000" b="1" i="0">
+                <a:solidFill>
+                  <a:srgbClr val="F4A24C"/>
+                </a:solidFill>
+                <a:latin typeface="Montserrat"/>
+              </a:rPr>
+              <a:t>✓  </a:t>
+            </a:r>
+            <a:r>
+              <a:rPr sz="1900" b="0" i="0">
+                <a:solidFill>
+                  <a:srgbClr val="FFFFFF"/>
+                </a:solidFill>
+                <a:latin typeface="Montserrat"/>
+              </a:rPr>
+              <a:t>Proyecto: 70 kW, 2.000 kW y más de 5 bar</a:t>
+            </a:r>
+          </a:p>
+          <a:p>
+            <a:pPr>
+              <a:spcAft>
+                <a:spcPts val="1200"/>
+              </a:spcAft>
+            </a:pPr>
+            <a:r>
+              <a:rPr sz="2000" b="1" i="0">
+                <a:solidFill>
+                  <a:srgbClr val="F4A24C"/>
+                </a:solidFill>
+                <a:latin typeface="Montserrat"/>
+              </a:rPr>
+              <a:t>✓  </a:t>
+            </a:r>
+            <a:r>
+              <a:rPr sz="1900" b="0" i="0">
+                <a:solidFill>
+                  <a:srgbClr val="FFFFFF"/>
+                </a:solidFill>
+                <a:latin typeface="Montserrat"/>
+              </a:rPr>
+              <a:t>La estanquidad la hace quien monta</a:t>
+            </a:r>
+          </a:p>
+          <a:p>
+            <a:pPr>
+              <a:spcAft>
+                <a:spcPts val="1200"/>
+              </a:spcAft>
+            </a:pPr>
+            <a:r>
+              <a:rPr sz="2000" b="1" i="0">
+                <a:solidFill>
+                  <a:srgbClr val="F4A24C"/>
+                </a:solidFill>
+                <a:latin typeface="Montserrat"/>
+              </a:rPr>
+              <a:t>✓  </a:t>
+            </a:r>
+            <a:r>
+              <a:rPr sz="1900" b="0" i="0">
+                <a:solidFill>
+                  <a:srgbClr val="FFFFFF"/>
+                </a:solidFill>
+                <a:latin typeface="Montserrat"/>
+              </a:rPr>
+              <a:t>Puesta en servicio: comprobar y luego dar gas</a:t>
+            </a:r>
+          </a:p>
+          <a:p>
+            <a:pPr>
+              <a:spcAft>
+                <a:spcPts val="1200"/>
+              </a:spcAft>
+            </a:pPr>
+            <a:r>
+              <a:rPr sz="2000" b="1" i="0">
+                <a:solidFill>
+                  <a:srgbClr val="F4A24C"/>
+                </a:solidFill>
+                <a:latin typeface="Montserrat"/>
+              </a:rPr>
+              <a:t>✓  </a:t>
+            </a:r>
+            <a:r>
+              <a:rPr sz="1900" b="0" i="0">
+                <a:solidFill>
+                  <a:srgbClr val="FFFFFF"/>
+                </a:solidFill>
+                <a:latin typeface="Montserrat"/>
+              </a:rPr>
+              <a:t>IRG-1, IRG-2, IRG-3, uno por tramo</a:t>
+            </a:r>
+          </a:p>
+        </p:txBody>
+      </p:sp>
+      <p:sp>
+        <p:nvSpPr>
+          <p:cNvPr id="7" name="Rounded Rectangle 6"/>
+          <p:cNvSpPr/>
+          <p:nvPr/>
+        </p:nvSpPr>
+        <p:spPr>
+          <a:xfrm>
+            <a:off x="822960" y="5532120"/>
+            <a:ext cx="10515600" cy="822960"/>
+          </a:xfrm>
+          <a:prstGeom prst="roundRect">
+            <a:avLst/>
+          </a:prstGeom>
+          <a:solidFill>
+            <a:srgbClr val="E8801A"/>
+          </a:solidFill>
+          <a:ln>
+            <a:noFill/>
+          </a:ln>
+          <a:effectLst/>
+        </p:spPr>
+        <p:style>
+          <a:lnRef idx="1">
+            <a:schemeClr val="accent1"/>
+          </a:lnRef>
+          <a:fillRef idx="3">
+            <a:schemeClr val="accent1"/>
+          </a:fillRef>
+          <a:effectRef idx="2">
+            <a:schemeClr val="accent1"/>
+          </a:effectRef>
+          <a:fontRef idx="minor">
+            <a:schemeClr val="lt1"/>
+          </a:fontRef>
+        </p:style>
+        <p:txBody>
+          <a:bodyPr rtlCol="0" anchor="ctr"/>
+          <a:lstStyle/>
+          <a:p>
+            <a:pPr algn="ctr"/>
+          </a:p>
+        </p:txBody>
+      </p:sp>
+      <p:sp>
+        <p:nvSpPr>
+          <p:cNvPr id="8" name="TextBox 7"/>
+          <p:cNvSpPr txBox="1"/>
+          <p:nvPr/>
+        </p:nvSpPr>
+        <p:spPr>
+          <a:xfrm>
+            <a:off x="1051560" y="5623560"/>
+            <a:ext cx="10058400" cy="640080"/>
+          </a:xfrm>
+          <a:prstGeom prst="rect">
+            <a:avLst/>
+          </a:prstGeom>
+          <a:noFill/>
+        </p:spPr>
+        <p:txBody>
+          <a:bodyPr wrap="square">
+            <a:spAutoFit/>
+          </a:bodyPr>
+          <a:lstStyle/>
+          <a:p>
+            <a:r>
+              <a:rPr sz="1500" b="1" i="1">
+                <a:solidFill>
+                  <a:srgbClr val="1E2761"/>
+                </a:solidFill>
+                <a:latin typeface="Montserrat"/>
+              </a:rPr>
+              <a:t>Ya dominas el arranque y el papeleo. Vamos a por el mantenimiento y las inspecciones.</a:t>
+            </a:r>
+          </a:p>
+        </p:txBody>
+      </p:sp>
+    </p:spTree>
+  </p:cSld>
+  <p:clrMapOvr>
+    <a:masterClrMapping/>
+  </p:clrMapOvr>
+  <mc:AlternateContent xmlns:mc="http://schemas.openxmlformats.org/markup-compatibility/2006">
+    <mc:Choice xmlns:p14="http://schemas.microsoft.com/office/powerpoint/2010/main" Requires="p14">
+      <p:transition spd="med" p14:dur="700">
+        <p14:cube dir="l"/>
+      </p:transition>
+    </mc:Choice>
+    <mc:Fallback>
+      <p:transition spd="med">
+        <p:push dir="l"/>
+      </p:transition>
+    </mc:Fallback>
+  </mc:AlternateContent>
 </p:sld>
 </file>
 
@@ -11083,7 +15287,7 @@
                 </a:solidFill>
                 <a:latin typeface="Montserrat"/>
               </a:rPr>
-              <a:t>003 / 021</a:t>
+              <a:t>003 / 027</a:t>
             </a:r>
           </a:p>
         </p:txBody>
@@ -11192,7 +15396,7 @@
       </p:sp>
       <p:sp>
         <p:nvSpPr>
-          <p:cNvPr id="7" name="Rounded Rectangle 6"/>
+          <p:cNvPr id="7" name="Rectangle 6"/>
           <p:cNvSpPr/>
           <p:nvPr/>
         </p:nvSpPr>
@@ -11201,7 +15405,7 @@
             <a:off x="868680" y="1673352"/>
             <a:ext cx="2011680" cy="73152"/>
           </a:xfrm>
-          <a:prstGeom prst="roundRect">
+          <a:prstGeom prst="rect">
             <a:avLst/>
           </a:prstGeom>
           <a:solidFill>
@@ -11462,6 +15666,18 @@
   <p:clrMapOvr>
     <a:masterClrMapping/>
   </p:clrMapOvr>
+  <mc:AlternateContent xmlns:mc="http://schemas.openxmlformats.org/markup-compatibility/2006">
+    <mc:Choice xmlns:p14="http://schemas.microsoft.com/office/powerpoint/2010/main" Requires="p14">
+      <p:transition spd="med" p14:dur="700">
+        <p14:cube dir="l"/>
+      </p:transition>
+    </mc:Choice>
+    <mc:Fallback>
+      <p:transition spd="med">
+        <p:push dir="l"/>
+      </p:transition>
+    </mc:Fallback>
+  </mc:AlternateContent>
 </p:sld>
 </file>
 
@@ -11549,7 +15765,7 @@
                 </a:solidFill>
                 <a:latin typeface="Montserrat"/>
               </a:rPr>
-              <a:t>004 / 021</a:t>
+              <a:t>004 / 027</a:t>
             </a:r>
           </a:p>
         </p:txBody>
@@ -11658,7 +15874,7 @@
       </p:sp>
       <p:sp>
         <p:nvSpPr>
-          <p:cNvPr id="7" name="Rounded Rectangle 6"/>
+          <p:cNvPr id="7" name="Rectangle 6"/>
           <p:cNvSpPr/>
           <p:nvPr/>
         </p:nvSpPr>
@@ -11667,7 +15883,7 @@
             <a:off x="868680" y="1627632"/>
             <a:ext cx="2011680" cy="73152"/>
           </a:xfrm>
-          <a:prstGeom prst="roundRect">
+          <a:prstGeom prst="rect">
             <a:avLst/>
           </a:prstGeom>
           <a:solidFill>
@@ -11709,7 +15925,7 @@
         <p:spPr>
           <a:xfrm>
             <a:off x="822960" y="1965960"/>
-            <a:ext cx="4983480" cy="4206240"/>
+            <a:ext cx="5029200" cy="4206240"/>
           </a:xfrm>
           <a:prstGeom prst="rect">
             <a:avLst/>
@@ -11806,8 +16022,8 @@
         </p:nvSpPr>
         <p:spPr>
           <a:xfrm>
-            <a:off x="5806440" y="1051560"/>
-            <a:ext cx="5298947" cy="4629150"/>
+            <a:off x="6080760" y="1965960"/>
+            <a:ext cx="5303520" cy="4572000"/>
           </a:xfrm>
           <a:prstGeom prst="roundRect">
             <a:avLst/>
@@ -11852,8 +16068,8 @@
         </p:nvSpPr>
         <p:spPr>
           <a:xfrm>
-            <a:off x="6080760" y="2726055"/>
-            <a:ext cx="4750307" cy="1280160"/>
+            <a:off x="6355080" y="3611880"/>
+            <a:ext cx="4754880" cy="1280160"/>
           </a:xfrm>
           <a:prstGeom prst="rect">
             <a:avLst/>
@@ -11874,7 +16090,7 @@
                 </a:solidFill>
                 <a:latin typeface="Montserrat"/>
               </a:rPr>
-              <a:t>IMAGEN REALISTA</a:t>
+              <a:t>IMAGEN</a:t>
             </a:r>
           </a:p>
           <a:p>
@@ -11896,6 +16112,18 @@
   <p:clrMapOvr>
     <a:masterClrMapping/>
   </p:clrMapOvr>
+  <mc:AlternateContent xmlns:mc="http://schemas.openxmlformats.org/markup-compatibility/2006">
+    <mc:Choice xmlns:p14="http://schemas.microsoft.com/office/powerpoint/2010/main" Requires="p14">
+      <p:transition spd="med" p14:dur="700">
+        <p14:cube dir="r"/>
+      </p:transition>
+    </mc:Choice>
+    <mc:Fallback>
+      <p:transition spd="med">
+        <p:push dir="r"/>
+      </p:transition>
+    </mc:Fallback>
+  </mc:AlternateContent>
 </p:sld>
 </file>
 
@@ -11983,7 +16211,7 @@
                 </a:solidFill>
                 <a:latin typeface="Montserrat"/>
               </a:rPr>
-              <a:t>005 / 021</a:t>
+              <a:t>005 / 027</a:t>
             </a:r>
           </a:p>
         </p:txBody>
@@ -12092,7 +16320,7 @@
       </p:sp>
       <p:sp>
         <p:nvSpPr>
-          <p:cNvPr id="7" name="Rounded Rectangle 6"/>
+          <p:cNvPr id="7" name="Rectangle 6"/>
           <p:cNvSpPr/>
           <p:nvPr/>
         </p:nvSpPr>
@@ -12101,7 +16329,7 @@
             <a:off x="868680" y="1627632"/>
             <a:ext cx="2011680" cy="73152"/>
           </a:xfrm>
-          <a:prstGeom prst="roundRect">
+          <a:prstGeom prst="rect">
             <a:avLst/>
           </a:prstGeom>
           <a:solidFill>
@@ -12142,8 +16370,8 @@
         </p:nvSpPr>
         <p:spPr>
           <a:xfrm>
-            <a:off x="822960" y="1965960"/>
-            <a:ext cx="4983480" cy="4206240"/>
+            <a:off x="6355080" y="1965960"/>
+            <a:ext cx="5029200" cy="4206240"/>
           </a:xfrm>
           <a:prstGeom prst="rect">
             <a:avLst/>
@@ -12265,8 +16493,8 @@
         </p:nvSpPr>
         <p:spPr>
           <a:xfrm>
-            <a:off x="5806440" y="1051560"/>
-            <a:ext cx="5298947" cy="4629150"/>
+            <a:off x="822960" y="1965960"/>
+            <a:ext cx="5303520" cy="4572000"/>
           </a:xfrm>
           <a:prstGeom prst="roundRect">
             <a:avLst/>
@@ -12311,8 +16539,8 @@
         </p:nvSpPr>
         <p:spPr>
           <a:xfrm>
-            <a:off x="6080760" y="2726055"/>
-            <a:ext cx="4750307" cy="1280160"/>
+            <a:off x="1097280" y="3611880"/>
+            <a:ext cx="4754880" cy="1280160"/>
           </a:xfrm>
           <a:prstGeom prst="rect">
             <a:avLst/>
@@ -12333,7 +16561,7 @@
                 </a:solidFill>
                 <a:latin typeface="Montserrat"/>
               </a:rPr>
-              <a:t>IMAGEN REALISTA</a:t>
+              <a:t>IMAGEN</a:t>
             </a:r>
           </a:p>
           <a:p>
@@ -12355,6 +16583,18 @@
   <p:clrMapOvr>
     <a:masterClrMapping/>
   </p:clrMapOvr>
+  <mc:AlternateContent xmlns:mc="http://schemas.openxmlformats.org/markup-compatibility/2006">
+    <mc:Choice xmlns:p14="http://schemas.microsoft.com/office/powerpoint/2010/main" Requires="p14">
+      <p:transition spd="med" p14:dur="700">
+        <p14:cube dir="l"/>
+      </p:transition>
+    </mc:Choice>
+    <mc:Fallback>
+      <p:transition spd="med">
+        <p:push dir="l"/>
+      </p:transition>
+    </mc:Fallback>
+  </mc:AlternateContent>
 </p:sld>
 </file>
 
@@ -12442,7 +16682,7 @@
                 </a:solidFill>
                 <a:latin typeface="Montserrat"/>
               </a:rPr>
-              <a:t>006 / 021</a:t>
+              <a:t>006 / 027</a:t>
             </a:r>
           </a:p>
         </p:txBody>
@@ -12483,84 +16723,16 @@
       </p:sp>
       <p:sp>
         <p:nvSpPr>
-          <p:cNvPr id="5" name="TextBox 4"/>
-          <p:cNvSpPr txBox="1"/>
-          <p:nvPr/>
-        </p:nvSpPr>
-        <p:spPr>
-          <a:xfrm>
-            <a:off x="822960" y="457200"/>
-            <a:ext cx="10058400" cy="365760"/>
-          </a:xfrm>
-          <a:prstGeom prst="rect">
-            <a:avLst/>
-          </a:prstGeom>
-          <a:noFill/>
-        </p:spPr>
-        <p:txBody>
-          <a:bodyPr wrap="square">
-            <a:spAutoFit/>
-          </a:bodyPr>
-          <a:lstStyle/>
-          <a:p>
-            <a:r>
-              <a:rPr sz="1300" b="1" i="0">
-                <a:solidFill>
-                  <a:srgbClr val="E8801A"/>
-                </a:solidFill>
-                <a:latin typeface="Montserrat"/>
-              </a:rPr>
-              <a:t>APARTADO 3.2 · AMPLIACIONES</a:t>
-            </a:r>
-          </a:p>
-        </p:txBody>
-      </p:sp>
-      <p:sp>
-        <p:nvSpPr>
-          <p:cNvPr id="6" name="TextBox 5"/>
-          <p:cNvSpPr txBox="1"/>
-          <p:nvPr/>
-        </p:nvSpPr>
-        <p:spPr>
-          <a:xfrm>
-            <a:off x="822960" y="868680"/>
-            <a:ext cx="10515600" cy="914400"/>
-          </a:xfrm>
-          <a:prstGeom prst="rect">
-            <a:avLst/>
-          </a:prstGeom>
-          <a:noFill/>
-        </p:spPr>
-        <p:txBody>
-          <a:bodyPr wrap="square">
-            <a:spAutoFit/>
-          </a:bodyPr>
-          <a:lstStyle/>
-          <a:p>
-            <a:r>
-              <a:rPr sz="2800" b="1" i="0">
-                <a:solidFill>
-                  <a:srgbClr val="1E2761"/>
-                </a:solidFill>
-                <a:latin typeface="Montserrat"/>
-              </a:rPr>
-              <a:t>La regla del 30 %</a:t>
-            </a:r>
-          </a:p>
-        </p:txBody>
-      </p:sp>
-      <p:sp>
-        <p:nvSpPr>
-          <p:cNvPr id="7" name="Rounded Rectangle 6"/>
+          <p:cNvPr id="5" name="Rectangle 4"/>
           <p:cNvSpPr/>
           <p:nvPr/>
         </p:nvSpPr>
         <p:spPr>
           <a:xfrm>
-            <a:off x="868680" y="1627632"/>
-            <a:ext cx="2011680" cy="73152"/>
-          </a:xfrm>
-          <a:prstGeom prst="roundRect">
+            <a:off x="0" y="0"/>
+            <a:ext cx="12191695" cy="1143000"/>
+          </a:xfrm>
+          <a:prstGeom prst="rect">
             <a:avLst/>
           </a:prstGeom>
           <a:solidFill>
@@ -12595,14 +16767,14 @@
       </p:sp>
       <p:sp>
         <p:nvSpPr>
-          <p:cNvPr id="8" name="TextBox 7"/>
+          <p:cNvPr id="6" name="TextBox 5"/>
           <p:cNvSpPr txBox="1"/>
           <p:nvPr/>
         </p:nvSpPr>
         <p:spPr>
           <a:xfrm>
-            <a:off x="822960" y="1965960"/>
-            <a:ext cx="4983480" cy="4206240"/>
+            <a:off x="822960" y="274320"/>
+            <a:ext cx="10515600" cy="640080"/>
           </a:xfrm>
           <a:prstGeom prst="rect">
             <a:avLst/>
@@ -12615,92 +16787,62 @@
           </a:bodyPr>
           <a:lstStyle/>
           <a:p>
-            <a:pPr>
-              <a:spcAft>
-                <a:spcPts val="1100"/>
-              </a:spcAft>
-            </a:pPr>
-            <a:r>
-              <a:rPr sz="1600" b="1" i="0">
-                <a:solidFill>
-                  <a:srgbClr val="E8801A"/>
-                </a:solidFill>
-                <a:latin typeface="Montserrat"/>
-              </a:rPr>
-              <a:t>▸  </a:t>
-            </a:r>
-            <a:r>
-              <a:rPr sz="1600" b="0" i="0">
-                <a:solidFill>
-                  <a:srgbClr val="1B2330"/>
-                </a:solidFill>
-                <a:latin typeface="Montserrat"/>
-              </a:rPr>
-              <a:t>Ampliar y superar el 30 %</a:t>
-            </a:r>
-          </a:p>
-          <a:p>
-            <a:pPr>
-              <a:spcAft>
-                <a:spcPts val="1100"/>
-              </a:spcAft>
-            </a:pPr>
-            <a:r>
-              <a:rPr sz="1600" b="1" i="0">
-                <a:solidFill>
-                  <a:srgbClr val="E8801A"/>
-                </a:solidFill>
-                <a:latin typeface="Montserrat"/>
-              </a:rPr>
-              <a:t>▸  </a:t>
-            </a:r>
-            <a:r>
-              <a:rPr sz="1600" b="0" i="0">
-                <a:solidFill>
-                  <a:srgbClr val="1B2330"/>
-                </a:solidFill>
-                <a:latin typeface="Montserrat"/>
-              </a:rPr>
-              <a:t>de la potencia de diseño inicial</a:t>
-            </a:r>
-          </a:p>
-          <a:p>
-            <a:pPr>
-              <a:spcAft>
-                <a:spcPts val="1100"/>
-              </a:spcAft>
-            </a:pPr>
-            <a:r>
-              <a:rPr sz="1600" b="1" i="0">
-                <a:solidFill>
-                  <a:srgbClr val="E8801A"/>
-                </a:solidFill>
-                <a:latin typeface="Montserrat"/>
-              </a:rPr>
-              <a:t>▸  </a:t>
-            </a:r>
-            <a:r>
-              <a:rPr sz="1600" b="0" i="0">
-                <a:solidFill>
-                  <a:srgbClr val="1B2330"/>
-                </a:solidFill>
-                <a:latin typeface="Montserrat"/>
-              </a:rPr>
-              <a:t>O entrar en los otros supuestos</a:t>
-            </a:r>
-          </a:p>
-        </p:txBody>
-      </p:sp>
-      <p:sp>
-        <p:nvSpPr>
-          <p:cNvPr id="9" name="imgph" descr="IMGQ:gas pipe network with branches on wall"/>
+            <a:r>
+              <a:rPr sz="2400" b="1" i="0">
+                <a:solidFill>
+                  <a:srgbClr val="FFFFFF"/>
+                </a:solidFill>
+                <a:latin typeface="Montserrat"/>
+              </a:rPr>
+              <a:t>⚡  PREGUNTA RÁPIDA</a:t>
+            </a:r>
+          </a:p>
+        </p:txBody>
+      </p:sp>
+      <p:sp>
+        <p:nvSpPr>
+          <p:cNvPr id="7" name="TextBox 6"/>
+          <p:cNvSpPr txBox="1"/>
+          <p:nvPr/>
+        </p:nvSpPr>
+        <p:spPr>
+          <a:xfrm>
+            <a:off x="822960" y="1508760"/>
+            <a:ext cx="10515600" cy="1371600"/>
+          </a:xfrm>
+          <a:prstGeom prst="rect">
+            <a:avLst/>
+          </a:prstGeom>
+          <a:noFill/>
+        </p:spPr>
+        <p:txBody>
+          <a:bodyPr wrap="square">
+            <a:spAutoFit/>
+          </a:bodyPr>
+          <a:lstStyle/>
+          <a:p>
+            <a:r>
+              <a:rPr sz="2400" b="1" i="0">
+                <a:solidFill>
+                  <a:srgbClr val="1E2761"/>
+                </a:solidFill>
+                <a:latin typeface="Montserrat"/>
+              </a:rPr>
+              <a:t>¿A partir de qué potencia necesita proyecto una instalación individual?</a:t>
+            </a:r>
+          </a:p>
+        </p:txBody>
+      </p:sp>
+      <p:sp>
+        <p:nvSpPr>
+          <p:cNvPr id="8" name="Rounded Rectangle 7"/>
           <p:cNvSpPr/>
           <p:nvPr/>
         </p:nvSpPr>
         <p:spPr>
           <a:xfrm>
-            <a:off x="5806440" y="1051560"/>
-            <a:ext cx="5298947" cy="4629150"/>
+            <a:off x="822960" y="3291840"/>
+            <a:ext cx="4983480" cy="1143000"/>
           </a:xfrm>
           <a:prstGeom prst="roundRect">
             <a:avLst/>
@@ -12739,14 +16881,58 @@
       </p:sp>
       <p:sp>
         <p:nvSpPr>
+          <p:cNvPr id="9" name="Rectangle 8"/>
+          <p:cNvSpPr/>
+          <p:nvPr/>
+        </p:nvSpPr>
+        <p:spPr>
+          <a:xfrm>
+            <a:off x="822960" y="3291840"/>
+            <a:ext cx="640080" cy="1143000"/>
+          </a:xfrm>
+          <a:prstGeom prst="rect">
+            <a:avLst/>
+          </a:prstGeom>
+          <a:solidFill>
+            <a:srgbClr val="1E2761"/>
+          </a:solidFill>
+          <a:ln>
+            <a:noFill/>
+          </a:ln>
+          <a:effectLst/>
+        </p:spPr>
+        <p:style>
+          <a:lnRef idx="1">
+            <a:schemeClr val="accent1"/>
+          </a:lnRef>
+          <a:fillRef idx="3">
+            <a:schemeClr val="accent1"/>
+          </a:fillRef>
+          <a:effectRef idx="2">
+            <a:schemeClr val="accent1"/>
+          </a:effectRef>
+          <a:fontRef idx="minor">
+            <a:schemeClr val="lt1"/>
+          </a:fontRef>
+        </p:style>
+        <p:txBody>
+          <a:bodyPr rtlCol="0" anchor="ctr"/>
+          <a:lstStyle/>
+          <a:p>
+            <a:pPr algn="ctr"/>
+          </a:p>
+        </p:txBody>
+      </p:sp>
+      <p:sp>
+        <p:nvSpPr>
           <p:cNvPr id="10" name="TextBox 9"/>
           <p:cNvSpPr txBox="1"/>
           <p:nvPr/>
         </p:nvSpPr>
         <p:spPr>
           <a:xfrm>
-            <a:off x="6080760" y="2726055"/>
-            <a:ext cx="4750307" cy="1280160"/>
+            <a:off x="822960" y="3611880"/>
+            <a:ext cx="640080" cy="548640"/>
           </a:xfrm>
           <a:prstGeom prst="rect">
             <a:avLst/>
@@ -12761,25 +16947,524 @@
           <a:p>
             <a:pPr algn="ctr"/>
             <a:r>
-              <a:rPr sz="1400" b="1" i="0">
-                <a:solidFill>
-                  <a:srgbClr val="64748B"/>
-                </a:solidFill>
-                <a:latin typeface="Montserrat"/>
-              </a:rPr>
-              <a:t>IMAGEN REALISTA</a:t>
-            </a:r>
-          </a:p>
+              <a:rPr sz="2200" b="1" i="0">
+                <a:solidFill>
+                  <a:srgbClr val="FFFFFF"/>
+                </a:solidFill>
+                <a:latin typeface="Montserrat"/>
+              </a:rPr>
+              <a:t>A</a:t>
+            </a:r>
+          </a:p>
+        </p:txBody>
+      </p:sp>
+      <p:sp>
+        <p:nvSpPr>
+          <p:cNvPr id="11" name="TextBox 10"/>
+          <p:cNvSpPr txBox="1"/>
+          <p:nvPr/>
+        </p:nvSpPr>
+        <p:spPr>
+          <a:xfrm>
+            <a:off x="1600200" y="3474720"/>
+            <a:ext cx="4114800" cy="868680"/>
+          </a:xfrm>
+          <a:prstGeom prst="rect">
+            <a:avLst/>
+          </a:prstGeom>
+          <a:noFill/>
+        </p:spPr>
+        <p:txBody>
+          <a:bodyPr wrap="square">
+            <a:spAutoFit/>
+          </a:bodyPr>
+          <a:lstStyle/>
+          <a:p>
+            <a:r>
+              <a:rPr sz="1400" b="0" i="0">
+                <a:solidFill>
+                  <a:srgbClr val="1B2330"/>
+                </a:solidFill>
+                <a:latin typeface="Montserrat"/>
+              </a:rPr>
+              <a:t>2.000 kW</a:t>
+            </a:r>
+          </a:p>
+        </p:txBody>
+      </p:sp>
+      <p:sp>
+        <p:nvSpPr>
+          <p:cNvPr id="12" name="Rounded Rectangle 11"/>
+          <p:cNvSpPr/>
+          <p:nvPr/>
+        </p:nvSpPr>
+        <p:spPr>
+          <a:xfrm>
+            <a:off x="6355080" y="3291840"/>
+            <a:ext cx="4983480" cy="1143000"/>
+          </a:xfrm>
+          <a:prstGeom prst="roundRect">
+            <a:avLst/>
+          </a:prstGeom>
+          <a:solidFill>
+            <a:srgbClr val="F3F6FB"/>
+          </a:solidFill>
+          <a:ln w="12700">
+            <a:solidFill>
+              <a:srgbClr val="C7D2E6"/>
+            </a:solidFill>
+          </a:ln>
+          <a:effectLst/>
+        </p:spPr>
+        <p:style>
+          <a:lnRef idx="1">
+            <a:schemeClr val="accent1"/>
+          </a:lnRef>
+          <a:fillRef idx="3">
+            <a:schemeClr val="accent1"/>
+          </a:fillRef>
+          <a:effectRef idx="2">
+            <a:schemeClr val="accent1"/>
+          </a:effectRef>
+          <a:fontRef idx="minor">
+            <a:schemeClr val="lt1"/>
+          </a:fontRef>
+        </p:style>
+        <p:txBody>
+          <a:bodyPr rtlCol="0" anchor="ctr"/>
+          <a:lstStyle/>
           <a:p>
             <a:pPr algn="ctr"/>
-            <a:r>
-              <a:rPr sz="1100" b="0" i="1">
-                <a:solidFill>
-                  <a:srgbClr val="64748B"/>
-                </a:solidFill>
-                <a:latin typeface="Montserrat"/>
-              </a:rPr>
-              <a:t>gas pipe network with branches on wall</a:t>
+          </a:p>
+        </p:txBody>
+      </p:sp>
+      <p:sp>
+        <p:nvSpPr>
+          <p:cNvPr id="13" name="Rectangle 12"/>
+          <p:cNvSpPr/>
+          <p:nvPr/>
+        </p:nvSpPr>
+        <p:spPr>
+          <a:xfrm>
+            <a:off x="6355080" y="3291840"/>
+            <a:ext cx="640080" cy="1143000"/>
+          </a:xfrm>
+          <a:prstGeom prst="rect">
+            <a:avLst/>
+          </a:prstGeom>
+          <a:solidFill>
+            <a:srgbClr val="1E2761"/>
+          </a:solidFill>
+          <a:ln>
+            <a:noFill/>
+          </a:ln>
+          <a:effectLst/>
+        </p:spPr>
+        <p:style>
+          <a:lnRef idx="1">
+            <a:schemeClr val="accent1"/>
+          </a:lnRef>
+          <a:fillRef idx="3">
+            <a:schemeClr val="accent1"/>
+          </a:fillRef>
+          <a:effectRef idx="2">
+            <a:schemeClr val="accent1"/>
+          </a:effectRef>
+          <a:fontRef idx="minor">
+            <a:schemeClr val="lt1"/>
+          </a:fontRef>
+        </p:style>
+        <p:txBody>
+          <a:bodyPr rtlCol="0" anchor="ctr"/>
+          <a:lstStyle/>
+          <a:p>
+            <a:pPr algn="ctr"/>
+          </a:p>
+        </p:txBody>
+      </p:sp>
+      <p:sp>
+        <p:nvSpPr>
+          <p:cNvPr id="14" name="TextBox 13"/>
+          <p:cNvSpPr txBox="1"/>
+          <p:nvPr/>
+        </p:nvSpPr>
+        <p:spPr>
+          <a:xfrm>
+            <a:off x="6355080" y="3611880"/>
+            <a:ext cx="640080" cy="548640"/>
+          </a:xfrm>
+          <a:prstGeom prst="rect">
+            <a:avLst/>
+          </a:prstGeom>
+          <a:noFill/>
+        </p:spPr>
+        <p:txBody>
+          <a:bodyPr wrap="square">
+            <a:spAutoFit/>
+          </a:bodyPr>
+          <a:lstStyle/>
+          <a:p>
+            <a:pPr algn="ctr"/>
+            <a:r>
+              <a:rPr sz="2200" b="1" i="0">
+                <a:solidFill>
+                  <a:srgbClr val="FFFFFF"/>
+                </a:solidFill>
+                <a:latin typeface="Montserrat"/>
+              </a:rPr>
+              <a:t>B</a:t>
+            </a:r>
+          </a:p>
+        </p:txBody>
+      </p:sp>
+      <p:sp>
+        <p:nvSpPr>
+          <p:cNvPr id="15" name="TextBox 14"/>
+          <p:cNvSpPr txBox="1"/>
+          <p:nvPr/>
+        </p:nvSpPr>
+        <p:spPr>
+          <a:xfrm>
+            <a:off x="7132320" y="3474720"/>
+            <a:ext cx="4114800" cy="868680"/>
+          </a:xfrm>
+          <a:prstGeom prst="rect">
+            <a:avLst/>
+          </a:prstGeom>
+          <a:noFill/>
+        </p:spPr>
+        <p:txBody>
+          <a:bodyPr wrap="square">
+            <a:spAutoFit/>
+          </a:bodyPr>
+          <a:lstStyle/>
+          <a:p>
+            <a:r>
+              <a:rPr sz="1400" b="0" i="0">
+                <a:solidFill>
+                  <a:srgbClr val="1B2330"/>
+                </a:solidFill>
+                <a:latin typeface="Montserrat"/>
+              </a:rPr>
+              <a:t>70 kW</a:t>
+            </a:r>
+          </a:p>
+        </p:txBody>
+      </p:sp>
+      <p:sp>
+        <p:nvSpPr>
+          <p:cNvPr id="16" name="Rounded Rectangle 15"/>
+          <p:cNvSpPr/>
+          <p:nvPr/>
+        </p:nvSpPr>
+        <p:spPr>
+          <a:xfrm>
+            <a:off x="822960" y="4617720"/>
+            <a:ext cx="4983480" cy="1143000"/>
+          </a:xfrm>
+          <a:prstGeom prst="roundRect">
+            <a:avLst/>
+          </a:prstGeom>
+          <a:solidFill>
+            <a:srgbClr val="F3F6FB"/>
+          </a:solidFill>
+          <a:ln w="12700">
+            <a:solidFill>
+              <a:srgbClr val="C7D2E6"/>
+            </a:solidFill>
+          </a:ln>
+          <a:effectLst/>
+        </p:spPr>
+        <p:style>
+          <a:lnRef idx="1">
+            <a:schemeClr val="accent1"/>
+          </a:lnRef>
+          <a:fillRef idx="3">
+            <a:schemeClr val="accent1"/>
+          </a:fillRef>
+          <a:effectRef idx="2">
+            <a:schemeClr val="accent1"/>
+          </a:effectRef>
+          <a:fontRef idx="minor">
+            <a:schemeClr val="lt1"/>
+          </a:fontRef>
+        </p:style>
+        <p:txBody>
+          <a:bodyPr rtlCol="0" anchor="ctr"/>
+          <a:lstStyle/>
+          <a:p>
+            <a:pPr algn="ctr"/>
+          </a:p>
+        </p:txBody>
+      </p:sp>
+      <p:sp>
+        <p:nvSpPr>
+          <p:cNvPr id="17" name="Rectangle 16"/>
+          <p:cNvSpPr/>
+          <p:nvPr/>
+        </p:nvSpPr>
+        <p:spPr>
+          <a:xfrm>
+            <a:off x="822960" y="4617720"/>
+            <a:ext cx="640080" cy="1143000"/>
+          </a:xfrm>
+          <a:prstGeom prst="rect">
+            <a:avLst/>
+          </a:prstGeom>
+          <a:solidFill>
+            <a:srgbClr val="1E2761"/>
+          </a:solidFill>
+          <a:ln>
+            <a:noFill/>
+          </a:ln>
+          <a:effectLst/>
+        </p:spPr>
+        <p:style>
+          <a:lnRef idx="1">
+            <a:schemeClr val="accent1"/>
+          </a:lnRef>
+          <a:fillRef idx="3">
+            <a:schemeClr val="accent1"/>
+          </a:fillRef>
+          <a:effectRef idx="2">
+            <a:schemeClr val="accent1"/>
+          </a:effectRef>
+          <a:fontRef idx="minor">
+            <a:schemeClr val="lt1"/>
+          </a:fontRef>
+        </p:style>
+        <p:txBody>
+          <a:bodyPr rtlCol="0" anchor="ctr"/>
+          <a:lstStyle/>
+          <a:p>
+            <a:pPr algn="ctr"/>
+          </a:p>
+        </p:txBody>
+      </p:sp>
+      <p:sp>
+        <p:nvSpPr>
+          <p:cNvPr id="18" name="TextBox 17"/>
+          <p:cNvSpPr txBox="1"/>
+          <p:nvPr/>
+        </p:nvSpPr>
+        <p:spPr>
+          <a:xfrm>
+            <a:off x="822960" y="4937760"/>
+            <a:ext cx="640080" cy="548640"/>
+          </a:xfrm>
+          <a:prstGeom prst="rect">
+            <a:avLst/>
+          </a:prstGeom>
+          <a:noFill/>
+        </p:spPr>
+        <p:txBody>
+          <a:bodyPr wrap="square">
+            <a:spAutoFit/>
+          </a:bodyPr>
+          <a:lstStyle/>
+          <a:p>
+            <a:pPr algn="ctr"/>
+            <a:r>
+              <a:rPr sz="2200" b="1" i="0">
+                <a:solidFill>
+                  <a:srgbClr val="FFFFFF"/>
+                </a:solidFill>
+                <a:latin typeface="Montserrat"/>
+              </a:rPr>
+              <a:t>C</a:t>
+            </a:r>
+          </a:p>
+        </p:txBody>
+      </p:sp>
+      <p:sp>
+        <p:nvSpPr>
+          <p:cNvPr id="19" name="TextBox 18"/>
+          <p:cNvSpPr txBox="1"/>
+          <p:nvPr/>
+        </p:nvSpPr>
+        <p:spPr>
+          <a:xfrm>
+            <a:off x="1600200" y="4800600"/>
+            <a:ext cx="4114800" cy="868680"/>
+          </a:xfrm>
+          <a:prstGeom prst="rect">
+            <a:avLst/>
+          </a:prstGeom>
+          <a:noFill/>
+        </p:spPr>
+        <p:txBody>
+          <a:bodyPr wrap="square">
+            <a:spAutoFit/>
+          </a:bodyPr>
+          <a:lstStyle/>
+          <a:p>
+            <a:r>
+              <a:rPr sz="1400" b="0" i="0">
+                <a:solidFill>
+                  <a:srgbClr val="1B2330"/>
+                </a:solidFill>
+                <a:latin typeface="Montserrat"/>
+              </a:rPr>
+              <a:t>30 kW</a:t>
+            </a:r>
+          </a:p>
+        </p:txBody>
+      </p:sp>
+      <p:sp>
+        <p:nvSpPr>
+          <p:cNvPr id="20" name="Rounded Rectangle 19"/>
+          <p:cNvSpPr/>
+          <p:nvPr/>
+        </p:nvSpPr>
+        <p:spPr>
+          <a:xfrm>
+            <a:off x="6355080" y="4617720"/>
+            <a:ext cx="4983480" cy="1143000"/>
+          </a:xfrm>
+          <a:prstGeom prst="roundRect">
+            <a:avLst/>
+          </a:prstGeom>
+          <a:solidFill>
+            <a:srgbClr val="F3F6FB"/>
+          </a:solidFill>
+          <a:ln w="12700">
+            <a:solidFill>
+              <a:srgbClr val="C7D2E6"/>
+            </a:solidFill>
+          </a:ln>
+          <a:effectLst/>
+        </p:spPr>
+        <p:style>
+          <a:lnRef idx="1">
+            <a:schemeClr val="accent1"/>
+          </a:lnRef>
+          <a:fillRef idx="3">
+            <a:schemeClr val="accent1"/>
+          </a:fillRef>
+          <a:effectRef idx="2">
+            <a:schemeClr val="accent1"/>
+          </a:effectRef>
+          <a:fontRef idx="minor">
+            <a:schemeClr val="lt1"/>
+          </a:fontRef>
+        </p:style>
+        <p:txBody>
+          <a:bodyPr rtlCol="0" anchor="ctr"/>
+          <a:lstStyle/>
+          <a:p>
+            <a:pPr algn="ctr"/>
+          </a:p>
+        </p:txBody>
+      </p:sp>
+      <p:sp>
+        <p:nvSpPr>
+          <p:cNvPr id="21" name="Rectangle 20"/>
+          <p:cNvSpPr/>
+          <p:nvPr/>
+        </p:nvSpPr>
+        <p:spPr>
+          <a:xfrm>
+            <a:off x="6355080" y="4617720"/>
+            <a:ext cx="640080" cy="1143000"/>
+          </a:xfrm>
+          <a:prstGeom prst="rect">
+            <a:avLst/>
+          </a:prstGeom>
+          <a:solidFill>
+            <a:srgbClr val="1E2761"/>
+          </a:solidFill>
+          <a:ln>
+            <a:noFill/>
+          </a:ln>
+          <a:effectLst/>
+        </p:spPr>
+        <p:style>
+          <a:lnRef idx="1">
+            <a:schemeClr val="accent1"/>
+          </a:lnRef>
+          <a:fillRef idx="3">
+            <a:schemeClr val="accent1"/>
+          </a:fillRef>
+          <a:effectRef idx="2">
+            <a:schemeClr val="accent1"/>
+          </a:effectRef>
+          <a:fontRef idx="minor">
+            <a:schemeClr val="lt1"/>
+          </a:fontRef>
+        </p:style>
+        <p:txBody>
+          <a:bodyPr rtlCol="0" anchor="ctr"/>
+          <a:lstStyle/>
+          <a:p>
+            <a:pPr algn="ctr"/>
+          </a:p>
+        </p:txBody>
+      </p:sp>
+      <p:sp>
+        <p:nvSpPr>
+          <p:cNvPr id="22" name="TextBox 21"/>
+          <p:cNvSpPr txBox="1"/>
+          <p:nvPr/>
+        </p:nvSpPr>
+        <p:spPr>
+          <a:xfrm>
+            <a:off x="6355080" y="4937760"/>
+            <a:ext cx="640080" cy="548640"/>
+          </a:xfrm>
+          <a:prstGeom prst="rect">
+            <a:avLst/>
+          </a:prstGeom>
+          <a:noFill/>
+        </p:spPr>
+        <p:txBody>
+          <a:bodyPr wrap="square">
+            <a:spAutoFit/>
+          </a:bodyPr>
+          <a:lstStyle/>
+          <a:p>
+            <a:pPr algn="ctr"/>
+            <a:r>
+              <a:rPr sz="2200" b="1" i="0">
+                <a:solidFill>
+                  <a:srgbClr val="FFFFFF"/>
+                </a:solidFill>
+                <a:latin typeface="Montserrat"/>
+              </a:rPr>
+              <a:t>D</a:t>
+            </a:r>
+          </a:p>
+        </p:txBody>
+      </p:sp>
+      <p:sp>
+        <p:nvSpPr>
+          <p:cNvPr id="23" name="TextBox 22"/>
+          <p:cNvSpPr txBox="1"/>
+          <p:nvPr/>
+        </p:nvSpPr>
+        <p:spPr>
+          <a:xfrm>
+            <a:off x="7132320" y="4800600"/>
+            <a:ext cx="4114800" cy="868680"/>
+          </a:xfrm>
+          <a:prstGeom prst="rect">
+            <a:avLst/>
+          </a:prstGeom>
+          <a:noFill/>
+        </p:spPr>
+        <p:txBody>
+          <a:bodyPr wrap="square">
+            <a:spAutoFit/>
+          </a:bodyPr>
+          <a:lstStyle/>
+          <a:p>
+            <a:r>
+              <a:rPr sz="1400" b="0" i="0">
+                <a:solidFill>
+                  <a:srgbClr val="1B2330"/>
+                </a:solidFill>
+                <a:latin typeface="Montserrat"/>
+              </a:rPr>
+              <a:t>24,4 kW</a:t>
             </a:r>
           </a:p>
         </p:txBody>
@@ -12789,6 +17474,18 @@
   <p:clrMapOvr>
     <a:masterClrMapping/>
   </p:clrMapOvr>
+  <mc:AlternateContent xmlns:mc="http://schemas.openxmlformats.org/markup-compatibility/2006">
+    <mc:Choice xmlns:p14="http://schemas.microsoft.com/office/powerpoint/2010/main" Requires="p14">
+      <p:transition spd="med" p14:dur="700">
+        <p14:cube dir="r"/>
+      </p:transition>
+    </mc:Choice>
+    <mc:Fallback>
+      <p:transition spd="med">
+        <p:push dir="r"/>
+      </p:transition>
+    </mc:Fallback>
+  </mc:AlternateContent>
 </p:sld>
 </file>
 
@@ -12876,7 +17573,7 @@
                 </a:solidFill>
                 <a:latin typeface="Montserrat"/>
               </a:rPr>
-              <a:t>007 / 021</a:t>
+              <a:t>007 / 027</a:t>
             </a:r>
           </a:p>
         </p:txBody>
@@ -12917,88 +17614,20 @@
       </p:sp>
       <p:sp>
         <p:nvSpPr>
-          <p:cNvPr id="5" name="TextBox 4"/>
-          <p:cNvSpPr txBox="1"/>
-          <p:nvPr/>
-        </p:nvSpPr>
-        <p:spPr>
-          <a:xfrm>
-            <a:off x="822960" y="457200"/>
-            <a:ext cx="10058400" cy="365760"/>
-          </a:xfrm>
-          <a:prstGeom prst="rect">
-            <a:avLst/>
-          </a:prstGeom>
-          <a:noFill/>
-        </p:spPr>
-        <p:txBody>
-          <a:bodyPr wrap="square">
-            <a:spAutoFit/>
-          </a:bodyPr>
-          <a:lstStyle/>
-          <a:p>
-            <a:r>
-              <a:rPr sz="1300" b="1" i="0">
-                <a:solidFill>
-                  <a:srgbClr val="E8801A"/>
-                </a:solidFill>
-                <a:latin typeface="Montserrat"/>
-              </a:rPr>
-              <a:t>APARTADO 3.2 · DIRECCIÓN DE OBRA</a:t>
-            </a:r>
-          </a:p>
-        </p:txBody>
-      </p:sp>
-      <p:sp>
-        <p:nvSpPr>
-          <p:cNvPr id="6" name="TextBox 5"/>
-          <p:cNvSpPr txBox="1"/>
-          <p:nvPr/>
-        </p:nvSpPr>
-        <p:spPr>
-          <a:xfrm>
-            <a:off x="822960" y="868680"/>
-            <a:ext cx="10515600" cy="914400"/>
-          </a:xfrm>
-          <a:prstGeom prst="rect">
-            <a:avLst/>
-          </a:prstGeom>
-          <a:noFill/>
-        </p:spPr>
-        <p:txBody>
-          <a:bodyPr wrap="square">
-            <a:spAutoFit/>
-          </a:bodyPr>
-          <a:lstStyle/>
-          <a:p>
-            <a:r>
-              <a:rPr sz="2800" b="1" i="0">
-                <a:solidFill>
-                  <a:srgbClr val="1E2761"/>
-                </a:solidFill>
-                <a:latin typeface="Montserrat"/>
-              </a:rPr>
-              <a:t>Proyecto = dirección de obra</a:t>
-            </a:r>
-          </a:p>
-        </p:txBody>
-      </p:sp>
-      <p:sp>
-        <p:nvSpPr>
-          <p:cNvPr id="7" name="Rounded Rectangle 6"/>
+          <p:cNvPr id="5" name="Rectangle 4"/>
           <p:cNvSpPr/>
           <p:nvPr/>
         </p:nvSpPr>
         <p:spPr>
           <a:xfrm>
-            <a:off x="868680" y="1627632"/>
-            <a:ext cx="2011680" cy="73152"/>
-          </a:xfrm>
-          <a:prstGeom prst="roundRect">
+            <a:off x="0" y="0"/>
+            <a:ext cx="12191695" cy="1143000"/>
+          </a:xfrm>
+          <a:prstGeom prst="rect">
             <a:avLst/>
           </a:prstGeom>
           <a:solidFill>
-            <a:srgbClr val="E8801A"/>
+            <a:srgbClr val="1E8E4B"/>
           </a:solidFill>
           <a:ln>
             <a:noFill/>
@@ -13029,14 +17658,14 @@
       </p:sp>
       <p:sp>
         <p:nvSpPr>
-          <p:cNvPr id="8" name="TextBox 7"/>
+          <p:cNvPr id="6" name="TextBox 5"/>
           <p:cNvSpPr txBox="1"/>
           <p:nvPr/>
         </p:nvSpPr>
         <p:spPr>
           <a:xfrm>
-            <a:off x="822960" y="1965960"/>
-            <a:ext cx="4983480" cy="4206240"/>
+            <a:off x="822960" y="274320"/>
+            <a:ext cx="10515600" cy="640080"/>
           </a:xfrm>
           <a:prstGeom prst="rect">
             <a:avLst/>
@@ -13049,102 +17678,72 @@
           </a:bodyPr>
           <a:lstStyle/>
           <a:p>
-            <a:pPr>
-              <a:spcAft>
-                <a:spcPts val="1100"/>
-              </a:spcAft>
-            </a:pPr>
-            <a:r>
-              <a:rPr sz="1600" b="1" i="0">
-                <a:solidFill>
-                  <a:srgbClr val="E8801A"/>
-                </a:solidFill>
-                <a:latin typeface="Montserrat"/>
-              </a:rPr>
-              <a:t>▸  </a:t>
-            </a:r>
-            <a:r>
-              <a:rPr sz="1600" b="0" i="0">
-                <a:solidFill>
-                  <a:srgbClr val="1B2330"/>
-                </a:solidFill>
-                <a:latin typeface="Montserrat"/>
-              </a:rPr>
-              <a:t>Si hay proyecto, hay técnico</a:t>
-            </a:r>
-          </a:p>
-          <a:p>
-            <a:pPr>
-              <a:spcAft>
-                <a:spcPts val="1100"/>
-              </a:spcAft>
-            </a:pPr>
-            <a:r>
-              <a:rPr sz="1600" b="1" i="0">
-                <a:solidFill>
-                  <a:srgbClr val="E8801A"/>
-                </a:solidFill>
-                <a:latin typeface="Montserrat"/>
-              </a:rPr>
-              <a:t>▸  </a:t>
-            </a:r>
-            <a:r>
-              <a:rPr sz="1600" b="0" i="0">
-                <a:solidFill>
-                  <a:srgbClr val="1B2330"/>
-                </a:solidFill>
-                <a:latin typeface="Montserrat"/>
-              </a:rPr>
-              <a:t>Emite certificado de dirección de obra</a:t>
-            </a:r>
-          </a:p>
-          <a:p>
-            <a:pPr>
-              <a:spcAft>
-                <a:spcPts val="1100"/>
-              </a:spcAft>
-            </a:pPr>
-            <a:r>
-              <a:rPr sz="1600" b="1" i="0">
-                <a:solidFill>
-                  <a:srgbClr val="E8801A"/>
-                </a:solidFill>
-                <a:latin typeface="Montserrat"/>
-              </a:rPr>
-              <a:t>▸  </a:t>
-            </a:r>
-            <a:r>
-              <a:rPr sz="1600" b="0" i="0">
-                <a:solidFill>
-                  <a:srgbClr val="1B2330"/>
-                </a:solidFill>
-                <a:latin typeface="Montserrat"/>
-              </a:rPr>
-              <a:t>Sin proyecto, no hay dirección</a:t>
-            </a:r>
-          </a:p>
-        </p:txBody>
-      </p:sp>
-      <p:sp>
-        <p:nvSpPr>
-          <p:cNvPr id="9" name="imgph" descr="IMGQ:technical engineer with hard hat on construction site"/>
+            <a:r>
+              <a:rPr sz="2400" b="1" i="0">
+                <a:solidFill>
+                  <a:srgbClr val="FFFFFF"/>
+                </a:solidFill>
+                <a:latin typeface="Montserrat"/>
+              </a:rPr>
+              <a:t>✔  RESPUESTA:  B</a:t>
+            </a:r>
+          </a:p>
+        </p:txBody>
+      </p:sp>
+      <p:sp>
+        <p:nvSpPr>
+          <p:cNvPr id="7" name="TextBox 6"/>
+          <p:cNvSpPr txBox="1"/>
+          <p:nvPr/>
+        </p:nvSpPr>
+        <p:spPr>
+          <a:xfrm>
+            <a:off x="822960" y="1417320"/>
+            <a:ext cx="10515600" cy="914400"/>
+          </a:xfrm>
+          <a:prstGeom prst="rect">
+            <a:avLst/>
+          </a:prstGeom>
+          <a:noFill/>
+        </p:spPr>
+        <p:txBody>
+          <a:bodyPr wrap="square">
+            <a:spAutoFit/>
+          </a:bodyPr>
+          <a:lstStyle/>
+          <a:p>
+            <a:r>
+              <a:rPr sz="1800" b="1" i="0">
+                <a:solidFill>
+                  <a:srgbClr val="64748B"/>
+                </a:solidFill>
+                <a:latin typeface="Montserrat"/>
+              </a:rPr>
+              <a:t>¿A partir de qué potencia necesita proyecto una instalación individual?</a:t>
+            </a:r>
+          </a:p>
+        </p:txBody>
+      </p:sp>
+      <p:sp>
+        <p:nvSpPr>
+          <p:cNvPr id="8" name="Rounded Rectangle 7"/>
           <p:cNvSpPr/>
           <p:nvPr/>
         </p:nvSpPr>
         <p:spPr>
           <a:xfrm>
-            <a:off x="5806440" y="1051560"/>
-            <a:ext cx="5298947" cy="4629150"/>
+            <a:off x="822960" y="2514600"/>
+            <a:ext cx="10515600" cy="914400"/>
           </a:xfrm>
           <a:prstGeom prst="roundRect">
             <a:avLst/>
           </a:prstGeom>
           <a:solidFill>
-            <a:srgbClr val="F3F6FB"/>
+            <a:srgbClr val="E9F6EE"/>
           </a:solidFill>
           <a:ln w="12700">
             <a:solidFill>
-              <a:srgbClr val="C7D2E6"/>
+              <a:srgbClr val="1E8E4B"/>
             </a:solidFill>
           </a:ln>
           <a:effectLst/>
@@ -13173,14 +17772,14 @@
       </p:sp>
       <p:sp>
         <p:nvSpPr>
-          <p:cNvPr id="10" name="TextBox 9"/>
+          <p:cNvPr id="9" name="TextBox 8"/>
           <p:cNvSpPr txBox="1"/>
           <p:nvPr/>
         </p:nvSpPr>
         <p:spPr>
           <a:xfrm>
-            <a:off x="6080760" y="2726055"/>
-            <a:ext cx="4750307" cy="1280160"/>
+            <a:off x="1097280" y="2697480"/>
+            <a:ext cx="10058400" cy="640080"/>
           </a:xfrm>
           <a:prstGeom prst="rect">
             <a:avLst/>
@@ -13193,27 +17792,66 @@
           </a:bodyPr>
           <a:lstStyle/>
           <a:p>
-            <a:pPr algn="ctr"/>
-            <a:r>
-              <a:rPr sz="1400" b="1" i="0">
-                <a:solidFill>
-                  <a:srgbClr val="64748B"/>
-                </a:solidFill>
-                <a:latin typeface="Montserrat"/>
-              </a:rPr>
-              <a:t>IMAGEN REALISTA</a:t>
-            </a:r>
-          </a:p>
-          <a:p>
-            <a:pPr algn="ctr"/>
-            <a:r>
-              <a:rPr sz="1100" b="0" i="1">
-                <a:solidFill>
-                  <a:srgbClr val="64748B"/>
-                </a:solidFill>
-                <a:latin typeface="Montserrat"/>
-              </a:rPr>
-              <a:t>technical engineer with hard hat on construction site</a:t>
+            <a:r>
+              <a:rPr sz="1800" b="1" i="0">
+                <a:solidFill>
+                  <a:srgbClr val="1E8E4B"/>
+                </a:solidFill>
+                <a:latin typeface="Montserrat"/>
+              </a:rPr>
+              <a:t>B.  </a:t>
+            </a:r>
+            <a:r>
+              <a:rPr sz="1800" b="1" i="0">
+                <a:solidFill>
+                  <a:srgbClr val="1E2761"/>
+                </a:solidFill>
+                <a:latin typeface="Montserrat"/>
+              </a:rPr>
+              <a:t>70 kW</a:t>
+            </a:r>
+          </a:p>
+        </p:txBody>
+      </p:sp>
+      <p:sp>
+        <p:nvSpPr>
+          <p:cNvPr id="10" name="TextBox 9"/>
+          <p:cNvSpPr txBox="1"/>
+          <p:nvPr/>
+        </p:nvSpPr>
+        <p:spPr>
+          <a:xfrm>
+            <a:off x="822960" y="3749039"/>
+            <a:ext cx="10515600" cy="2194560"/>
+          </a:xfrm>
+          <a:prstGeom prst="rect">
+            <a:avLst/>
+          </a:prstGeom>
+          <a:noFill/>
+        </p:spPr>
+        <p:txBody>
+          <a:bodyPr wrap="square">
+            <a:spAutoFit/>
+          </a:bodyPr>
+          <a:lstStyle/>
+          <a:p>
+            <a:r>
+              <a:rPr sz="1500" b="1" i="0">
+                <a:solidFill>
+                  <a:srgbClr val="E8801A"/>
+                </a:solidFill>
+                <a:latin typeface="Montserrat"/>
+              </a:rPr>
+              <a:t>Por qué:  </a:t>
+            </a:r>
+            <a:r>
+              <a:rPr sz="1500" b="0" i="0">
+                <a:solidFill>
+                  <a:srgbClr val="1B2330"/>
+                </a:solidFill>
+                <a:latin typeface="Montserrat"/>
+              </a:rPr>
+              <a:t>La individual, por ser la pequeña, salta con setenta kilovatios; la común y la acometida aguantan hasta dos mil.</a:t>
             </a:r>
           </a:p>
         </p:txBody>
@@ -13223,6 +17861,18 @@
   <p:clrMapOvr>
     <a:masterClrMapping/>
   </p:clrMapOvr>
+  <mc:AlternateContent xmlns:mc="http://schemas.openxmlformats.org/markup-compatibility/2006">
+    <mc:Choice xmlns:p14="http://schemas.microsoft.com/office/powerpoint/2010/main" Requires="p14">
+      <p:transition spd="med" p14:dur="700">
+        <p14:cube dir="l"/>
+      </p:transition>
+    </mc:Choice>
+    <mc:Fallback>
+      <p:transition spd="med">
+        <p:push dir="l"/>
+      </p:transition>
+    </mc:Fallback>
+  </mc:AlternateContent>
 </p:sld>
 </file>
 
@@ -13310,7 +17960,7 @@
                 </a:solidFill>
                 <a:latin typeface="Montserrat"/>
               </a:rPr>
-              <a:t>008 / 021</a:t>
+              <a:t>008 / 027</a:t>
             </a:r>
           </a:p>
         </p:txBody>
@@ -13378,7 +18028,7 @@
                 </a:solidFill>
                 <a:latin typeface="Montserrat"/>
               </a:rPr>
-              <a:t>APARTADO 3.3 · PRUEBAS DE ENTREGA</a:t>
+              <a:t>APARTADO 3.2 · AMPLIACIONES</a:t>
             </a:r>
           </a:p>
         </p:txBody>
@@ -13412,14 +18062,14 @@
                 </a:solidFill>
                 <a:latin typeface="Montserrat"/>
               </a:rPr>
-              <a:t>La prueba estrella: estanquidad</a:t>
-            </a:r>
-          </a:p>
-        </p:txBody>
-      </p:sp>
-      <p:sp>
-        <p:nvSpPr>
-          <p:cNvPr id="7" name="Rounded Rectangle 6"/>
+              <a:t>La regla del 30 %</a:t>
+            </a:r>
+          </a:p>
+        </p:txBody>
+      </p:sp>
+      <p:sp>
+        <p:nvSpPr>
+          <p:cNvPr id="7" name="Rectangle 6"/>
           <p:cNvSpPr/>
           <p:nvPr/>
         </p:nvSpPr>
@@ -13428,7 +18078,7 @@
             <a:off x="868680" y="1627632"/>
             <a:ext cx="2011680" cy="73152"/>
           </a:xfrm>
-          <a:prstGeom prst="roundRect">
+          <a:prstGeom prst="rect">
             <a:avLst/>
           </a:prstGeom>
           <a:solidFill>
@@ -13470,7 +18120,7 @@
         <p:spPr>
           <a:xfrm>
             <a:off x="822960" y="1965960"/>
-            <a:ext cx="4983480" cy="4206240"/>
+            <a:ext cx="5029200" cy="4206240"/>
           </a:xfrm>
           <a:prstGeom prst="rect">
             <a:avLst/>
@@ -13504,7 +18154,7 @@
                 </a:solidFill>
                 <a:latin typeface="Montserrat"/>
               </a:rPr>
-              <a:t>La hace la empresa instaladora</a:t>
+              <a:t>Ampliar y superar el 30 %</a:t>
             </a:r>
           </a:p>
           <a:p>
@@ -13529,7 +18179,7 @@
                 </a:solidFill>
                 <a:latin typeface="Montserrat"/>
               </a:rPr>
-              <a:t>UNE 60670-8 (baja) o 60620 (alta)</a:t>
+              <a:t>de la potencia de diseño inicial</a:t>
             </a:r>
           </a:p>
           <a:p>
@@ -13554,21 +18204,21 @@
                 </a:solidFill>
                 <a:latin typeface="Montserrat"/>
               </a:rPr>
-              <a:t>Resultado positivo en el certificado</a:t>
-            </a:r>
-          </a:p>
-        </p:txBody>
-      </p:sp>
-      <p:sp>
-        <p:nvSpPr>
-          <p:cNvPr id="9" name="imgph" descr="IMGQ:pressure gauge manometer on gas pipe test"/>
+              <a:t>O entrar en los otros supuestos</a:t>
+            </a:r>
+          </a:p>
+        </p:txBody>
+      </p:sp>
+      <p:sp>
+        <p:nvSpPr>
+          <p:cNvPr id="9" name="imgph" descr="IMGQ:gas pipe network with branches on wall"/>
           <p:cNvSpPr/>
           <p:nvPr/>
         </p:nvSpPr>
         <p:spPr>
           <a:xfrm>
-            <a:off x="5806440" y="1051560"/>
-            <a:ext cx="5298947" cy="4629150"/>
+            <a:off x="6080760" y="1965960"/>
+            <a:ext cx="5303520" cy="4572000"/>
           </a:xfrm>
           <a:prstGeom prst="roundRect">
             <a:avLst/>
@@ -13613,8 +18263,8 @@
         </p:nvSpPr>
         <p:spPr>
           <a:xfrm>
-            <a:off x="6080760" y="2726055"/>
-            <a:ext cx="4750307" cy="1280160"/>
+            <a:off x="6355080" y="3611880"/>
+            <a:ext cx="4754880" cy="1280160"/>
           </a:xfrm>
           <a:prstGeom prst="rect">
             <a:avLst/>
@@ -13635,7 +18285,7 @@
                 </a:solidFill>
                 <a:latin typeface="Montserrat"/>
               </a:rPr>
-              <a:t>IMAGEN REALISTA</a:t>
+              <a:t>IMAGEN</a:t>
             </a:r>
           </a:p>
           <a:p>
@@ -13647,7 +18297,7 @@
                 </a:solidFill>
                 <a:latin typeface="Montserrat"/>
               </a:rPr>
-              <a:t>pressure gauge manometer on gas pipe test</a:t>
+              <a:t>gas pipe network with branches on wall</a:t>
             </a:r>
           </a:p>
         </p:txBody>
@@ -13657,6 +18307,18 @@
   <p:clrMapOvr>
     <a:masterClrMapping/>
   </p:clrMapOvr>
+  <mc:AlternateContent xmlns:mc="http://schemas.openxmlformats.org/markup-compatibility/2006">
+    <mc:Choice xmlns:p14="http://schemas.microsoft.com/office/powerpoint/2010/main" Requires="p14">
+      <p:transition spd="med" p14:dur="700">
+        <p14:cube dir="r"/>
+      </p:transition>
+    </mc:Choice>
+    <mc:Fallback>
+      <p:transition spd="med">
+        <p:push dir="r"/>
+      </p:transition>
+    </mc:Fallback>
+  </mc:AlternateContent>
 </p:sld>
 </file>
 
@@ -13744,7 +18406,7 @@
                 </a:solidFill>
                 <a:latin typeface="Montserrat"/>
               </a:rPr>
-              <a:t>009 / 021</a:t>
+              <a:t>009 / 027</a:t>
             </a:r>
           </a:p>
         </p:txBody>
@@ -13812,7 +18474,7 @@
                 </a:solidFill>
                 <a:latin typeface="Montserrat"/>
               </a:rPr>
-              <a:t>APARTADO 3.3 · ACOMETIDA ENTERRADA</a:t>
+              <a:t>APARTADO 3.2 · DIRECCIÓN DE OBRA</a:t>
             </a:r>
           </a:p>
         </p:txBody>
@@ -13846,14 +18508,14 @@
                 </a:solidFill>
                 <a:latin typeface="Montserrat"/>
               </a:rPr>
-              <a:t>Enterrado: el certificado, antes</a:t>
-            </a:r>
-          </a:p>
-        </p:txBody>
-      </p:sp>
-      <p:sp>
-        <p:nvSpPr>
-          <p:cNvPr id="7" name="Rounded Rectangle 6"/>
+              <a:t>Proyecto = dirección de obra</a:t>
+            </a:r>
+          </a:p>
+        </p:txBody>
+      </p:sp>
+      <p:sp>
+        <p:nvSpPr>
+          <p:cNvPr id="7" name="Rectangle 6"/>
           <p:cNvSpPr/>
           <p:nvPr/>
         </p:nvSpPr>
@@ -13862,7 +18524,7 @@
             <a:off x="868680" y="1627632"/>
             <a:ext cx="2011680" cy="73152"/>
           </a:xfrm>
-          <a:prstGeom prst="roundRect">
+          <a:prstGeom prst="rect">
             <a:avLst/>
           </a:prstGeom>
           <a:solidFill>
@@ -13903,8 +18565,8 @@
         </p:nvSpPr>
         <p:spPr>
           <a:xfrm>
-            <a:off x="822960" y="1965960"/>
-            <a:ext cx="4983480" cy="4206240"/>
+            <a:off x="6355080" y="1965960"/>
+            <a:ext cx="5029200" cy="4206240"/>
           </a:xfrm>
           <a:prstGeom prst="rect">
             <a:avLst/>
@@ -13938,7 +18600,7 @@
                 </a:solidFill>
                 <a:latin typeface="Montserrat"/>
               </a:rPr>
-              <a:t>Acometida interior enterrada</a:t>
+              <a:t>Si hay proyecto, hay técnico</a:t>
             </a:r>
           </a:p>
           <a:p>
@@ -13963,7 +18625,7 @@
                 </a:solidFill>
                 <a:latin typeface="Montserrat"/>
               </a:rPr>
-              <a:t>Certificado al distribuidor</a:t>
+              <a:t>Emite certificado de dirección de obra</a:t>
             </a:r>
           </a:p>
           <a:p>
@@ -13988,21 +18650,21 @@
                 </a:solidFill>
                 <a:latin typeface="Montserrat"/>
               </a:rPr>
-              <a:t>Antes de la puesta en marcha</a:t>
-            </a:r>
-          </a:p>
-        </p:txBody>
-      </p:sp>
-      <p:sp>
-        <p:nvSpPr>
-          <p:cNvPr id="9" name="imgph" descr="IMGQ:buried gas pipe connection underground"/>
+              <a:t>Sin proyecto, no hay dirección</a:t>
+            </a:r>
+          </a:p>
+        </p:txBody>
+      </p:sp>
+      <p:sp>
+        <p:nvSpPr>
+          <p:cNvPr id="9" name="imgph" descr="IMGQ:technical engineer with hard hat on construction site"/>
           <p:cNvSpPr/>
           <p:nvPr/>
         </p:nvSpPr>
         <p:spPr>
           <a:xfrm>
-            <a:off x="5806440" y="1051560"/>
-            <a:ext cx="5298947" cy="4629150"/>
+            <a:off x="822960" y="1965960"/>
+            <a:ext cx="5303520" cy="4572000"/>
           </a:xfrm>
           <a:prstGeom prst="roundRect">
             <a:avLst/>
@@ -14047,8 +18709,8 @@
         </p:nvSpPr>
         <p:spPr>
           <a:xfrm>
-            <a:off x="6080760" y="2726055"/>
-            <a:ext cx="4750307" cy="1280160"/>
+            <a:off x="1097280" y="3611880"/>
+            <a:ext cx="4754880" cy="1280160"/>
           </a:xfrm>
           <a:prstGeom prst="rect">
             <a:avLst/>
@@ -14069,7 +18731,7 @@
                 </a:solidFill>
                 <a:latin typeface="Montserrat"/>
               </a:rPr>
-              <a:t>IMAGEN REALISTA</a:t>
+              <a:t>IMAGEN</a:t>
             </a:r>
           </a:p>
           <a:p>
@@ -14081,7 +18743,7 @@
                 </a:solidFill>
                 <a:latin typeface="Montserrat"/>
               </a:rPr>
-              <a:t>buried gas pipe connection underground</a:t>
+              <a:t>technical engineer with hard hat on construction site</a:t>
             </a:r>
           </a:p>
         </p:txBody>
@@ -14091,6 +18753,18 @@
   <p:clrMapOvr>
     <a:masterClrMapping/>
   </p:clrMapOvr>
+  <mc:AlternateContent xmlns:mc="http://schemas.openxmlformats.org/markup-compatibility/2006">
+    <mc:Choice xmlns:p14="http://schemas.microsoft.com/office/powerpoint/2010/main" Requires="p14">
+      <p:transition spd="med" p14:dur="700">
+        <p14:cube dir="l"/>
+      </p:transition>
+    </mc:Choice>
+    <mc:Fallback>
+      <p:transition spd="med">
+        <p:push dir="l"/>
+      </p:transition>
+    </mc:Fallback>
+  </mc:AlternateContent>
 </p:sld>
 </file>
 

--- a/Curso Gas B/04 - ITC-ICG 07 - Instalaciones receptoras de combustibles gaseosos/04 - ITC-ICG 07 - Instalaciones receptoras de combustibles gaseosos - Vídeo 2.pptx
+++ b/Curso Gas B/04 - ITC-ICG 07 - Instalaciones receptoras de combustibles gaseosos/04 - ITC-ICG 07 - Instalaciones receptoras de combustibles gaseosos - Vídeo 2.pptx
@@ -678,7 +678,7 @@
           <a:lstStyle/>
           <a:p>
             <a:r>
-              <a:t>N1: Antes de entregar la instalación hay que probar que no tiene fugas. ¿Quién hace esa prueba de estanquidad?</a:t>
+              <a:t>N1: Pregunta de quién hace qué. La cuestión: ¿quién realiza la prueba de estanquidad antes de entregar la instalación? Escucha las opciones. Opción A, el distribuidor. Opción B, un organismo de control independiente. Opción C, la empresa instaladora. Opción D, el usuario titular. Tómate un segundo.</a:t>
             </a:r>
           </a:p>
           <a:p>
@@ -753,12 +753,17 @@
           <a:lstStyle/>
           <a:p>
             <a:r>
-              <a:t>N1: ¿Por qué la instaladora?</a:t>
-            </a:r>
-          </a:p>
-          <a:p>
-            <a:r>
-              <a:t>N2: Porque la prueba de estanquidad de entrega la realiza la propia empresa instaladora, la que ha montado, siguiendo la UNE sesenta mil seiscientos setenta guion ocho en baja o la seiscientos veinte en alta, y el resultado favorable se hace constar en el certificado de instalación. El distribuidor aparece después, en la puesta en servicio; no lo confundas con la prueba de entrega. Truco: quien monta, prueba.</a:t>
+              <a:t>N1: ¿Ya lo has decidido?</a:t>
+            </a:r>
+          </a:p>
+          <a:p>
+            <a:r>
+              <a:t>N2: La respuesta correcta es la opción C: la empresa instaladora. La prueba de estanquidad de entrega la hace la propia empresa que ha montado, siguiendo la UNE sesenta mil seiscientos setenta guion ocho en baja o la seiscientos veinte en alta, y el resultado favorable se hace constar en el certificado de instalación. La opción A, el distribuidor, es la trampa: ese aparece después, en la puesta en servicio, no en la prueba de entrega. Y ni el organismo de control ni el usuario pintan aquí. Truco: quien monta, prueba.</a:t>
+            </a:r>
+          </a:p>
+          <a:p>
+            <a:r>
+              <a:t>N1: La instaladora prueba; el distribuidor llega luego.</a:t>
             </a:r>
           </a:p>
         </p:txBody>
@@ -1053,12 +1058,12 @@
           <a:lstStyle/>
           <a:p>
             <a:r>
-              <a:t>N1: Tres certificados, uno por tramo. ¿Cuál es el que tiene que listar los aparatos de consumo con sus kilovatios?</a:t>
-            </a:r>
-          </a:p>
-          <a:p>
-            <a:r>
-              <a:t>N2: Piensa en cuál de los tres tramos llega de verdad hasta los aparatos dentro de la casa. Los otros dos se quedan por el camino, en la entrada y en el montante.</a:t>
+              <a:t>N1: Pregunta de certificados. Escucha bien: ¿cuál de los certificados de instalación lista los aparatos y su consumo? Las opciones. Opción A, el uno erre ge guion uno, el de la acometida interior. Opción B, el uno erre ge guion dos, el de la instalación común. Opción C, el uno erre ge guion tres, el de la instalación individual. Opción D, los tres por igual. Piénsalo.</a:t>
+            </a:r>
+          </a:p>
+          <a:p>
+            <a:r>
+              <a:t>N2: Pista: ¿cuál de los tres tramos llega de verdad hasta los aparatos dentro de la casa? Los otros dos se quedan por el camino, en la entrada y en el montante.</a:t>
             </a:r>
           </a:p>
         </p:txBody>
@@ -1128,12 +1133,17 @@
           <a:lstStyle/>
           <a:p>
             <a:r>
-              <a:t>N1: ¿Por qué el individual?</a:t>
-            </a:r>
-          </a:p>
-          <a:p>
-            <a:r>
-              <a:t>N2: Porque el uno erre ge guion tres, el de la instalación individual, es el único tramo que llega hasta los aparatos dentro de la vivienda; por eso es el único que los lista con su consumo calorífico nominal. El de la acometida y el de la común se quedan en la entrada y en el montante, sin aparatos que anotar. Truco: si la pregunta habla de listar aparatos y potencias, piensa siempre en el individual.</a:t>
+              <a:t>N1: ¿Lo tienes?</a:t>
+            </a:r>
+          </a:p>
+          <a:p>
+            <a:r>
+              <a:t>N2: La respuesta correcta es la opción C: el uno erre ge guion tres, el de la instalación individual. Es el único tramo que llega hasta los aparatos dentro de la vivienda, así que es el único que los lista con su consumo calorífico nominal. El uno erre ge guion uno y el guion dos se quedan en la entrada y en el montante, sin aparatos que anotar; por eso la opción de los tres por igual es falsa. Truco: si la pregunta habla de listar aparatos y potencias, piensa siempre en el individual.</a:t>
+            </a:r>
+          </a:p>
+          <a:p>
+            <a:r>
+              <a:t>N1: Aparatos con su consumo, el tres.</a:t>
             </a:r>
           </a:p>
         </p:txBody>
@@ -2254,12 +2264,12 @@
           <a:lstStyle/>
           <a:p>
             <a:r>
-              <a:t>N1: Instalación individual. ¿Cuántos kilovatios tiene que superar para obligarte a hacer proyecto?</a:t>
-            </a:r>
-          </a:p>
-          <a:p>
-            <a:r>
-              <a:t>N2: Recuerda que la individual es la pequeña de la familia, así que salta antes que la común y la acometida. Una de las opciones es justo el listón de esas dos grandes, no las confundas.</a:t>
+              <a:t>N1: Pregunta de proyecto. Escucha: ¿a partir de qué potencia necesita proyecto una instalación individual? Cuatro opciones. Opción A, dos mil kilovatios. Opción B, setenta kilovatios. Opción C, treinta kilovatios. Opción D, veinticuatro con cuatro kilovatios. Piénsalo un momento.</a:t>
+            </a:r>
+          </a:p>
+          <a:p>
+            <a:r>
+              <a:t>N2: Recuerda que la individual es la pequeña de la familia, así que salta antes que la común y la acometida. Una de las opciones es justo el listón de esas dos grandes; no las confundas.</a:t>
             </a:r>
           </a:p>
         </p:txBody>
@@ -2329,12 +2339,17 @@
           <a:lstStyle/>
           <a:p>
             <a:r>
-              <a:t>N1: ¿Por qué setenta?</a:t>
-            </a:r>
-          </a:p>
-          <a:p>
-            <a:r>
-              <a:t>N2: Porque una instalación individual necesita proyecto en cuanto pasa de setenta kilovatios. Los dos mil son el listón de la común y de la acometida interior, que son mayores. La lógica: la pequeña salta antes. Y por encima de todo, si la red da más de cinco bar, siempre hay proyecto, sea cual sea la potencia.</a:t>
+              <a:t>N1: ¿Lo tienes claro?</a:t>
+            </a:r>
+          </a:p>
+          <a:p>
+            <a:r>
+              <a:t>N2: La respuesta correcta es la opción B: setenta kilovatios. Una instalación individual necesita proyecto en cuanto pasa de setenta kilovatios. La opción A, los dos mil, es el listón de la común y de la acometida interior, que son mayores; la lógica es que la pequeña salta antes. Las de treinta y veinticuatro con cuatro son cifras de otros apartados que se cuelan para despistar. Y no lo olvides: si la red da más de cinco bar, siempre hay proyecto, sea cual sea la potencia.</a:t>
+            </a:r>
+          </a:p>
+          <a:p>
+            <a:r>
+              <a:t>N1: Individual, setenta; común y acometida, dos mil.</a:t>
             </a:r>
           </a:p>
         </p:txBody>
